--- a/Präsentation/Kettenfahrzeug.pptx
+++ b/Präsentation/Kettenfahrzeug.pptx
@@ -5,19 +5,23 @@
     <p:sldMasterId id="2147483648" r:id="rId1"/>
   </p:sldMasterIdLst>
   <p:notesMasterIdLst>
-    <p:notesMasterId r:id="rId12"/>
+    <p:notesMasterId r:id="rId16"/>
   </p:notesMasterIdLst>
   <p:sldIdLst>
     <p:sldId id="256" r:id="rId2"/>
     <p:sldId id="257" r:id="rId3"/>
     <p:sldId id="261" r:id="rId4"/>
     <p:sldId id="258" r:id="rId5"/>
-    <p:sldId id="262" r:id="rId6"/>
-    <p:sldId id="259" r:id="rId7"/>
-    <p:sldId id="260" r:id="rId8"/>
-    <p:sldId id="263" r:id="rId9"/>
-    <p:sldId id="264" r:id="rId10"/>
-    <p:sldId id="265" r:id="rId11"/>
+    <p:sldId id="266" r:id="rId6"/>
+    <p:sldId id="268" r:id="rId7"/>
+    <p:sldId id="269" r:id="rId8"/>
+    <p:sldId id="267" r:id="rId9"/>
+    <p:sldId id="262" r:id="rId10"/>
+    <p:sldId id="259" r:id="rId11"/>
+    <p:sldId id="260" r:id="rId12"/>
+    <p:sldId id="263" r:id="rId13"/>
+    <p:sldId id="264" r:id="rId14"/>
+    <p:sldId id="265" r:id="rId15"/>
   </p:sldIdLst>
   <p:sldSz cx="12192000" cy="6858000"/>
   <p:notesSz cx="6858000" cy="9144000"/>
@@ -116,6 +120,22 @@
       </a:defRPr>
     </a:lvl9pPr>
   </p:defaultTextStyle>
+  <p:extLst>
+    <p:ext uri="{EFAFB233-063F-42B5-8137-9DF3F51BA10A}">
+      <p15:sldGuideLst xmlns:p15="http://schemas.microsoft.com/office/powerpoint/2012/main">
+        <p15:guide id="1" orient="horz" pos="2160" userDrawn="1">
+          <p15:clr>
+            <a:srgbClr val="A4A3A4"/>
+          </p15:clr>
+        </p15:guide>
+        <p15:guide id="2" pos="3840" userDrawn="1">
+          <p15:clr>
+            <a:srgbClr val="A4A3A4"/>
+          </p15:clr>
+        </p15:guide>
+      </p15:sldGuideLst>
+    </p:ext>
+  </p:extLst>
 </p:presentation>
 </file>
 
@@ -201,7 +221,7 @@
           <a:p>
             <a:fld id="{C2F6FDA6-0D6A-4597-A732-5CBC71724CDA}" type="datetimeFigureOut">
               <a:rPr lang="de-DE" smtClean="0"/>
-              <a:t>20.03.2026</a:t>
+              <a:t>21.03.2026</a:t>
             </a:fld>
             <a:endParaRPr lang="de-DE"/>
           </a:p>
@@ -615,7 +635,7 @@
           <a:p>
             <a:fld id="{229CC8E3-8B86-4C26-9958-4FB51168DB07}" type="datetimeFigureOut">
               <a:rPr lang="de-DE" smtClean="0"/>
-              <a:t>20.03.2026</a:t>
+              <a:t>21.03.2026</a:t>
             </a:fld>
             <a:endParaRPr lang="de-DE"/>
           </a:p>
@@ -813,7 +833,7 @@
           <a:p>
             <a:fld id="{229CC8E3-8B86-4C26-9958-4FB51168DB07}" type="datetimeFigureOut">
               <a:rPr lang="de-DE" smtClean="0"/>
-              <a:t>20.03.2026</a:t>
+              <a:t>21.03.2026</a:t>
             </a:fld>
             <a:endParaRPr lang="de-DE"/>
           </a:p>
@@ -1021,7 +1041,7 @@
           <a:p>
             <a:fld id="{229CC8E3-8B86-4C26-9958-4FB51168DB07}" type="datetimeFigureOut">
               <a:rPr lang="de-DE" smtClean="0"/>
-              <a:t>20.03.2026</a:t>
+              <a:t>21.03.2026</a:t>
             </a:fld>
             <a:endParaRPr lang="de-DE"/>
           </a:p>
@@ -1219,7 +1239,7 @@
           <a:p>
             <a:fld id="{229CC8E3-8B86-4C26-9958-4FB51168DB07}" type="datetimeFigureOut">
               <a:rPr lang="de-DE" smtClean="0"/>
-              <a:t>20.03.2026</a:t>
+              <a:t>21.03.2026</a:t>
             </a:fld>
             <a:endParaRPr lang="de-DE"/>
           </a:p>
@@ -1494,7 +1514,7 @@
           <a:p>
             <a:fld id="{229CC8E3-8B86-4C26-9958-4FB51168DB07}" type="datetimeFigureOut">
               <a:rPr lang="de-DE" smtClean="0"/>
-              <a:t>20.03.2026</a:t>
+              <a:t>21.03.2026</a:t>
             </a:fld>
             <a:endParaRPr lang="de-DE"/>
           </a:p>
@@ -1759,7 +1779,7 @@
           <a:p>
             <a:fld id="{229CC8E3-8B86-4C26-9958-4FB51168DB07}" type="datetimeFigureOut">
               <a:rPr lang="de-DE" smtClean="0"/>
-              <a:t>20.03.2026</a:t>
+              <a:t>21.03.2026</a:t>
             </a:fld>
             <a:endParaRPr lang="de-DE"/>
           </a:p>
@@ -2171,7 +2191,7 @@
           <a:p>
             <a:fld id="{229CC8E3-8B86-4C26-9958-4FB51168DB07}" type="datetimeFigureOut">
               <a:rPr lang="de-DE" smtClean="0"/>
-              <a:t>20.03.2026</a:t>
+              <a:t>21.03.2026</a:t>
             </a:fld>
             <a:endParaRPr lang="de-DE"/>
           </a:p>
@@ -2312,7 +2332,7 @@
           <a:p>
             <a:fld id="{229CC8E3-8B86-4C26-9958-4FB51168DB07}" type="datetimeFigureOut">
               <a:rPr lang="de-DE" smtClean="0"/>
-              <a:t>20.03.2026</a:t>
+              <a:t>21.03.2026</a:t>
             </a:fld>
             <a:endParaRPr lang="de-DE"/>
           </a:p>
@@ -2425,7 +2445,7 @@
           <a:p>
             <a:fld id="{229CC8E3-8B86-4C26-9958-4FB51168DB07}" type="datetimeFigureOut">
               <a:rPr lang="de-DE" smtClean="0"/>
-              <a:t>20.03.2026</a:t>
+              <a:t>21.03.2026</a:t>
             </a:fld>
             <a:endParaRPr lang="de-DE"/>
           </a:p>
@@ -2736,7 +2756,7 @@
           <a:p>
             <a:fld id="{229CC8E3-8B86-4C26-9958-4FB51168DB07}" type="datetimeFigureOut">
               <a:rPr lang="de-DE" smtClean="0"/>
-              <a:t>20.03.2026</a:t>
+              <a:t>21.03.2026</a:t>
             </a:fld>
             <a:endParaRPr lang="de-DE"/>
           </a:p>
@@ -3024,7 +3044,7 @@
           <a:p>
             <a:fld id="{229CC8E3-8B86-4C26-9958-4FB51168DB07}" type="datetimeFigureOut">
               <a:rPr lang="de-DE" smtClean="0"/>
-              <a:t>20.03.2026</a:t>
+              <a:t>21.03.2026</a:t>
             </a:fld>
             <a:endParaRPr lang="de-DE"/>
           </a:p>
@@ -3265,7 +3285,7 @@
           <a:p>
             <a:fld id="{229CC8E3-8B86-4C26-9958-4FB51168DB07}" type="datetimeFigureOut">
               <a:rPr lang="de-DE" smtClean="0"/>
-              <a:t>20.03.2026</a:t>
+              <a:t>21.03.2026</a:t>
             </a:fld>
             <a:endParaRPr lang="de-DE"/>
           </a:p>
@@ -3848,8 +3868,8 @@
         </p:nvSpPr>
         <p:spPr>
           <a:xfrm>
-            <a:off x="1524000" y="-689850"/>
-            <a:ext cx="9144000" cy="2387600"/>
+            <a:off x="4430485" y="39054"/>
+            <a:ext cx="3331029" cy="1019204"/>
           </a:xfrm>
         </p:spPr>
         <p:txBody>
@@ -3859,7 +3879,887 @@
           <a:lstStyle/>
           <a:p>
             <a:r>
+              <a:rPr lang="de-DE" dirty="0">
+                <a:latin typeface="Impact" panose="020B0806030902050204" pitchFamily="34" charset="0"/>
+              </a:rPr>
+              <a:t>Elektronik</a:t>
+            </a:r>
+          </a:p>
+        </p:txBody>
+      </p:sp>
+      <p:sp>
+        <p:nvSpPr>
+          <p:cNvPr id="3" name="Untertitel 2">
+            <a:extLst>
+              <a:ext uri="{FF2B5EF4-FFF2-40B4-BE49-F238E27FC236}">
+                <a16:creationId xmlns:a16="http://schemas.microsoft.com/office/drawing/2014/main" id="{93304FBE-99DF-EE64-5EB2-94852307E71F}"/>
+              </a:ext>
+            </a:extLst>
+          </p:cNvPr>
+          <p:cNvSpPr>
+            <a:spLocks noGrp="1"/>
+          </p:cNvSpPr>
+          <p:nvPr>
+            <p:ph type="subTitle" idx="1"/>
+          </p:nvPr>
+        </p:nvSpPr>
+        <p:spPr>
+          <a:xfrm>
+            <a:off x="898849" y="2533471"/>
+            <a:ext cx="9144000" cy="3848665"/>
+          </a:xfrm>
+        </p:spPr>
+        <p:txBody>
+          <a:bodyPr>
+            <a:noAutofit/>
+          </a:bodyPr>
+          <a:lstStyle/>
+          <a:p>
+            <a:pPr marL="342900" indent="-342900" algn="l">
+              <a:buFont typeface="Wingdings" panose="05000000000000000000" pitchFamily="2" charset="2"/>
+              <a:buChar char="v"/>
+            </a:pPr>
+            <a:r>
+              <a:rPr lang="de-DE" sz="2000" dirty="0">
+                <a:latin typeface="Liberation Sans" panose="020B0604020202020204" pitchFamily="34" charset="0"/>
+                <a:ea typeface="Liberation Sans" panose="020B0604020202020204" pitchFamily="34" charset="0"/>
+                <a:cs typeface="Liberation Sans" panose="020B0604020202020204" pitchFamily="34" charset="0"/>
+              </a:rPr>
+              <a:t>11.1V 3500mAh - Akku</a:t>
+            </a:r>
+          </a:p>
+          <a:p>
+            <a:pPr marL="342900" indent="-342900" algn="l">
+              <a:buFont typeface="Wingdings" panose="05000000000000000000" pitchFamily="2" charset="2"/>
+              <a:buChar char="v"/>
+            </a:pPr>
+            <a:endParaRPr lang="de-DE" sz="2000" dirty="0">
+              <a:latin typeface="Liberation Sans" panose="020B0604020202020204" pitchFamily="34" charset="0"/>
+              <a:ea typeface="Liberation Sans" panose="020B0604020202020204" pitchFamily="34" charset="0"/>
+              <a:cs typeface="Liberation Sans" panose="020B0604020202020204" pitchFamily="34" charset="0"/>
+            </a:endParaRPr>
+          </a:p>
+          <a:p>
+            <a:pPr marL="342900" indent="-342900" algn="l">
+              <a:buFont typeface="Wingdings" panose="05000000000000000000" pitchFamily="2" charset="2"/>
+              <a:buChar char="v"/>
+            </a:pPr>
+            <a:r>
+              <a:rPr lang="de-DE" sz="2000" dirty="0">
+                <a:latin typeface="Liberation Sans" panose="020B0604020202020204" pitchFamily="34" charset="0"/>
+                <a:ea typeface="Liberation Sans" panose="020B0604020202020204" pitchFamily="34" charset="0"/>
+                <a:cs typeface="Liberation Sans" panose="020B0604020202020204" pitchFamily="34" charset="0"/>
+              </a:rPr>
+              <a:t>2x BTS7960 43A – H-Brücke</a:t>
+            </a:r>
+          </a:p>
+          <a:p>
+            <a:pPr marL="342900" indent="-342900" algn="l">
+              <a:buFont typeface="Wingdings" panose="05000000000000000000" pitchFamily="2" charset="2"/>
+              <a:buChar char="v"/>
+            </a:pPr>
+            <a:endParaRPr lang="de-DE" sz="2000" dirty="0">
+              <a:latin typeface="Liberation Sans" panose="020B0604020202020204" pitchFamily="34" charset="0"/>
+              <a:ea typeface="Liberation Sans" panose="020B0604020202020204" pitchFamily="34" charset="0"/>
+              <a:cs typeface="Liberation Sans" panose="020B0604020202020204" pitchFamily="34" charset="0"/>
+            </a:endParaRPr>
+          </a:p>
+          <a:p>
+            <a:pPr marL="342900" indent="-342900" algn="l">
+              <a:buFont typeface="Wingdings" panose="05000000000000000000" pitchFamily="2" charset="2"/>
+              <a:buChar char="v"/>
+            </a:pPr>
+            <a:r>
+              <a:rPr lang="de-DE" sz="2000" dirty="0">
+                <a:latin typeface="Liberation Sans" panose="020B0604020202020204" pitchFamily="34" charset="0"/>
+                <a:ea typeface="Liberation Sans" panose="020B0604020202020204" pitchFamily="34" charset="0"/>
+                <a:cs typeface="Liberation Sans" panose="020B0604020202020204" pitchFamily="34" charset="0"/>
+              </a:rPr>
+              <a:t>2x JGB37-520 12V Motor</a:t>
+            </a:r>
+          </a:p>
+          <a:p>
+            <a:pPr marL="342900" indent="-342900" algn="l">
+              <a:buFont typeface="Wingdings" panose="05000000000000000000" pitchFamily="2" charset="2"/>
+              <a:buChar char="v"/>
+            </a:pPr>
+            <a:endParaRPr lang="de-DE" sz="2000" dirty="0">
+              <a:latin typeface="Liberation Sans" panose="020B0604020202020204" pitchFamily="34" charset="0"/>
+              <a:ea typeface="Liberation Sans" panose="020B0604020202020204" pitchFamily="34" charset="0"/>
+              <a:cs typeface="Liberation Sans" panose="020B0604020202020204" pitchFamily="34" charset="0"/>
+            </a:endParaRPr>
+          </a:p>
+          <a:p>
+            <a:pPr marL="342900" indent="-342900" algn="l">
+              <a:buFont typeface="Wingdings" panose="05000000000000000000" pitchFamily="2" charset="2"/>
+              <a:buChar char="v"/>
+            </a:pPr>
+            <a:r>
+              <a:rPr lang="de-DE" sz="2000" dirty="0">
+                <a:latin typeface="Liberation Sans" panose="020B0604020202020204" pitchFamily="34" charset="0"/>
+                <a:ea typeface="Liberation Sans" panose="020B0604020202020204" pitchFamily="34" charset="0"/>
+                <a:cs typeface="Liberation Sans" panose="020B0604020202020204" pitchFamily="34" charset="0"/>
+              </a:rPr>
+              <a:t>LM2596 – Buck-Converter</a:t>
+            </a:r>
+          </a:p>
+          <a:p>
+            <a:pPr marL="342900" indent="-342900" algn="l">
+              <a:buFont typeface="Wingdings" panose="05000000000000000000" pitchFamily="2" charset="2"/>
+              <a:buChar char="v"/>
+            </a:pPr>
+            <a:endParaRPr lang="de-DE" sz="2000" dirty="0">
+              <a:latin typeface="Liberation Sans" panose="020B0604020202020204" pitchFamily="34" charset="0"/>
+              <a:ea typeface="Liberation Sans" panose="020B0604020202020204" pitchFamily="34" charset="0"/>
+              <a:cs typeface="Liberation Sans" panose="020B0604020202020204" pitchFamily="34" charset="0"/>
+            </a:endParaRPr>
+          </a:p>
+          <a:p>
+            <a:pPr marL="342900" indent="-342900" algn="l">
+              <a:buFont typeface="Wingdings" panose="05000000000000000000" pitchFamily="2" charset="2"/>
+              <a:buChar char="v"/>
+            </a:pPr>
+            <a:r>
+              <a:rPr lang="de-DE" sz="2000" dirty="0">
+                <a:latin typeface="Liberation Sans" panose="020B0604020202020204" pitchFamily="34" charset="0"/>
+                <a:ea typeface="Liberation Sans" panose="020B0604020202020204" pitchFamily="34" charset="0"/>
+                <a:cs typeface="Liberation Sans" panose="020B0604020202020204" pitchFamily="34" charset="0"/>
+              </a:rPr>
+              <a:t>ESP32 Dev-Module (38 Pins)</a:t>
+            </a:r>
+          </a:p>
+        </p:txBody>
+      </p:sp>
+      <p:cxnSp>
+        <p:nvCxnSpPr>
+          <p:cNvPr id="5" name="Gerader Verbinder 4">
+            <a:extLst>
+              <a:ext uri="{FF2B5EF4-FFF2-40B4-BE49-F238E27FC236}">
+                <a16:creationId xmlns:a16="http://schemas.microsoft.com/office/drawing/2014/main" id="{2B753068-DCEB-B788-AD32-F324BF9F36F0}"/>
+              </a:ext>
+            </a:extLst>
+          </p:cNvPr>
+          <p:cNvCxnSpPr/>
+          <p:nvPr/>
+        </p:nvCxnSpPr>
+        <p:spPr>
+          <a:xfrm>
+            <a:off x="1576168" y="1118956"/>
+            <a:ext cx="8714792" cy="0"/>
+          </a:xfrm>
+          <a:prstGeom prst="line">
+            <a:avLst/>
+          </a:prstGeom>
+        </p:spPr>
+        <p:style>
+          <a:lnRef idx="2">
+            <a:schemeClr val="dk1"/>
+          </a:lnRef>
+          <a:fillRef idx="0">
+            <a:schemeClr val="dk1"/>
+          </a:fillRef>
+          <a:effectRef idx="1">
+            <a:schemeClr val="dk1"/>
+          </a:effectRef>
+          <a:fontRef idx="minor">
+            <a:schemeClr val="tx1"/>
+          </a:fontRef>
+        </p:style>
+      </p:cxnSp>
+      <p:pic>
+        <p:nvPicPr>
+          <p:cNvPr id="6" name="Grafik 5" descr="Ein Bild, das Text, Allgemeine Versorgung, Büroausstattung, Etikett enthält.&#10;&#10;KI-generierte Inhalte können fehlerhaft sein.">
+            <a:extLst>
+              <a:ext uri="{FF2B5EF4-FFF2-40B4-BE49-F238E27FC236}">
+                <a16:creationId xmlns:a16="http://schemas.microsoft.com/office/drawing/2014/main" id="{B109BC79-F612-DA75-4651-5C4278F2E95A}"/>
+              </a:ext>
+            </a:extLst>
+          </p:cNvPr>
+          <p:cNvPicPr>
+            <a:picLocks noChangeAspect="1"/>
+          </p:cNvPicPr>
+          <p:nvPr/>
+        </p:nvPicPr>
+        <p:blipFill>
+          <a:blip r:embed="rId2">
+            <a:extLst>
+              <a:ext uri="{28A0092B-C50C-407E-A947-70E740481C1C}">
+                <a14:useLocalDpi xmlns:a14="http://schemas.microsoft.com/office/drawing/2010/main" val="0"/>
+              </a:ext>
+            </a:extLst>
+          </a:blip>
+          <a:stretch>
+            <a:fillRect/>
+          </a:stretch>
+        </p:blipFill>
+        <p:spPr>
+          <a:xfrm>
+            <a:off x="4850372" y="1986084"/>
+            <a:ext cx="2232463" cy="1777916"/>
+          </a:xfrm>
+          <a:prstGeom prst="rect">
+            <a:avLst/>
+          </a:prstGeom>
+        </p:spPr>
+      </p:pic>
+      <p:pic>
+        <p:nvPicPr>
+          <p:cNvPr id="8" name="Grafik 7" descr="Ein Bild, das Elektronik, Elektronisches Bauteil, Elektrisches Bauelement, Schaltung enthält.&#10;&#10;KI-generierte Inhalte können fehlerhaft sein.">
+            <a:extLst>
+              <a:ext uri="{FF2B5EF4-FFF2-40B4-BE49-F238E27FC236}">
+                <a16:creationId xmlns:a16="http://schemas.microsoft.com/office/drawing/2014/main" id="{AF376ADC-B7DD-2D3B-0180-9FCFD057D9AE}"/>
+              </a:ext>
+            </a:extLst>
+          </p:cNvPr>
+          <p:cNvPicPr>
+            <a:picLocks noChangeAspect="1"/>
+          </p:cNvPicPr>
+          <p:nvPr/>
+        </p:nvPicPr>
+        <p:blipFill>
+          <a:blip r:embed="rId3">
+            <a:extLst>
+              <a:ext uri="{28A0092B-C50C-407E-A947-70E740481C1C}">
+                <a14:useLocalDpi xmlns:a14="http://schemas.microsoft.com/office/drawing/2010/main" val="0"/>
+              </a:ext>
+            </a:extLst>
+          </a:blip>
+          <a:stretch>
+            <a:fillRect/>
+          </a:stretch>
+        </p:blipFill>
+        <p:spPr>
+          <a:xfrm>
+            <a:off x="9517044" y="4279431"/>
+            <a:ext cx="1776107" cy="1535419"/>
+          </a:xfrm>
+          <a:prstGeom prst="rect">
+            <a:avLst/>
+          </a:prstGeom>
+        </p:spPr>
+      </p:pic>
+      <p:pic>
+        <p:nvPicPr>
+          <p:cNvPr id="10" name="Grafik 9" descr="Ein Bild, das Elektronik, Elektrisches Bauelement, Elektronisches Bauteil, Schaltung enthält.&#10;&#10;KI-generierte Inhalte können fehlerhaft sein.">
+            <a:extLst>
+              <a:ext uri="{FF2B5EF4-FFF2-40B4-BE49-F238E27FC236}">
+                <a16:creationId xmlns:a16="http://schemas.microsoft.com/office/drawing/2014/main" id="{2C6DB4DF-7CAC-76B2-14FF-CF0AFF5F5D60}"/>
+              </a:ext>
+            </a:extLst>
+          </p:cNvPr>
+          <p:cNvPicPr>
+            <a:picLocks noChangeAspect="1"/>
+          </p:cNvPicPr>
+          <p:nvPr/>
+        </p:nvPicPr>
+        <p:blipFill>
+          <a:blip r:embed="rId4">
+            <a:extLst>
+              <a:ext uri="{28A0092B-C50C-407E-A947-70E740481C1C}">
+                <a14:useLocalDpi xmlns:a14="http://schemas.microsoft.com/office/drawing/2010/main" val="0"/>
+              </a:ext>
+            </a:extLst>
+          </a:blip>
+          <a:stretch>
+            <a:fillRect/>
+          </a:stretch>
+        </p:blipFill>
+        <p:spPr>
+          <a:xfrm>
+            <a:off x="8172633" y="2043827"/>
+            <a:ext cx="2232464" cy="2050686"/>
+          </a:xfrm>
+          <a:prstGeom prst="rect">
+            <a:avLst/>
+          </a:prstGeom>
+        </p:spPr>
+      </p:pic>
+      <p:pic>
+        <p:nvPicPr>
+          <p:cNvPr id="12" name="Grafik 11" descr="Ein Bild, das Röhre enthält.&#10;&#10;KI-generierte Inhalte können fehlerhaft sein.">
+            <a:extLst>
+              <a:ext uri="{FF2B5EF4-FFF2-40B4-BE49-F238E27FC236}">
+                <a16:creationId xmlns:a16="http://schemas.microsoft.com/office/drawing/2014/main" id="{5D354501-3BFF-6440-5702-C64F04BF6ED4}"/>
+              </a:ext>
+            </a:extLst>
+          </p:cNvPr>
+          <p:cNvPicPr>
+            <a:picLocks noChangeAspect="1"/>
+          </p:cNvPicPr>
+          <p:nvPr/>
+        </p:nvPicPr>
+        <p:blipFill>
+          <a:blip r:embed="rId5">
+            <a:extLst>
+              <a:ext uri="{28A0092B-C50C-407E-A947-70E740481C1C}">
+                <a14:useLocalDpi xmlns:a14="http://schemas.microsoft.com/office/drawing/2010/main" val="0"/>
+              </a:ext>
+            </a:extLst>
+          </a:blip>
+          <a:stretch>
+            <a:fillRect/>
+          </a:stretch>
+        </p:blipFill>
+        <p:spPr>
+          <a:xfrm>
+            <a:off x="6719297" y="3307658"/>
+            <a:ext cx="1228602" cy="2233822"/>
+          </a:xfrm>
+          <a:prstGeom prst="rect">
+            <a:avLst/>
+          </a:prstGeom>
+        </p:spPr>
+      </p:pic>
+      <p:pic>
+        <p:nvPicPr>
+          <p:cNvPr id="14" name="Grafik 13" descr="Ein Bild, das Elektronik, Computerkomponenten, Elektronisches Bauteil, Elektrisches Bauelement enthält.&#10;&#10;KI-generierte Inhalte können fehlerhaft sein.">
+            <a:extLst>
+              <a:ext uri="{FF2B5EF4-FFF2-40B4-BE49-F238E27FC236}">
+                <a16:creationId xmlns:a16="http://schemas.microsoft.com/office/drawing/2014/main" id="{6B30D8AC-25CB-8DC9-7B69-C7A7727C16F1}"/>
+              </a:ext>
+            </a:extLst>
+          </p:cNvPr>
+          <p:cNvPicPr>
+            <a:picLocks noChangeAspect="1"/>
+          </p:cNvPicPr>
+          <p:nvPr/>
+        </p:nvPicPr>
+        <p:blipFill>
+          <a:blip r:embed="rId6">
+            <a:extLst>
+              <a:ext uri="{28A0092B-C50C-407E-A947-70E740481C1C}">
+                <a14:useLocalDpi xmlns:a14="http://schemas.microsoft.com/office/drawing/2010/main" val="0"/>
+              </a:ext>
+            </a:extLst>
+          </a:blip>
+          <a:stretch>
+            <a:fillRect/>
+          </a:stretch>
+        </p:blipFill>
+        <p:spPr>
+          <a:xfrm>
+            <a:off x="7709513" y="5087251"/>
+            <a:ext cx="1619317" cy="1455197"/>
+          </a:xfrm>
+          <a:prstGeom prst="rect">
+            <a:avLst/>
+          </a:prstGeom>
+        </p:spPr>
+      </p:pic>
+      <p:sp>
+        <p:nvSpPr>
+          <p:cNvPr id="15" name="Textfeld 14">
+            <a:extLst>
+              <a:ext uri="{FF2B5EF4-FFF2-40B4-BE49-F238E27FC236}">
+                <a16:creationId xmlns:a16="http://schemas.microsoft.com/office/drawing/2014/main" id="{D3227EC0-6C59-6CD2-5D53-172A65B2C243}"/>
+              </a:ext>
+            </a:extLst>
+          </p:cNvPr>
+          <p:cNvSpPr txBox="1"/>
+          <p:nvPr/>
+        </p:nvSpPr>
+        <p:spPr>
+          <a:xfrm>
+            <a:off x="233265" y="6456784"/>
+            <a:ext cx="5299788" cy="369332"/>
+          </a:xfrm>
+          <a:prstGeom prst="rect">
+            <a:avLst/>
+          </a:prstGeom>
+          <a:noFill/>
+        </p:spPr>
+        <p:txBody>
+          <a:bodyPr wrap="square" rtlCol="0">
+            <a:spAutoFit/>
+          </a:bodyPr>
+          <a:lstStyle/>
+          <a:p>
+            <a:r>
+              <a:rPr lang="de-DE" dirty="0"/>
+              <a:t>*Alle aufgeführten Bauteile stammen von Aliexpress</a:t>
+            </a:r>
+          </a:p>
+        </p:txBody>
+      </p:sp>
+    </p:spTree>
+    <p:extLst>
+      <p:ext uri="{BB962C8B-B14F-4D97-AF65-F5344CB8AC3E}">
+        <p14:creationId xmlns:p14="http://schemas.microsoft.com/office/powerpoint/2010/main" val="1379536395"/>
+      </p:ext>
+    </p:extLst>
+  </p:cSld>
+  <p:clrMapOvr>
+    <a:masterClrMapping/>
+  </p:clrMapOvr>
+</p:sld>
+</file>
+
+<file path=ppt/slides/slide11.xml><?xml version="1.0" encoding="utf-8"?>
+<p:sld xmlns:a="http://schemas.openxmlformats.org/drawingml/2006/main" xmlns:r="http://schemas.openxmlformats.org/officeDocument/2006/relationships" xmlns:p="http://schemas.openxmlformats.org/presentationml/2006/main">
+  <p:cSld>
+    <p:spTree>
+      <p:nvGrpSpPr>
+        <p:cNvPr id="1" name=""/>
+        <p:cNvGrpSpPr/>
+        <p:nvPr/>
+      </p:nvGrpSpPr>
+      <p:grpSpPr>
+        <a:xfrm>
+          <a:off x="0" y="0"/>
+          <a:ext cx="0" cy="0"/>
+          <a:chOff x="0" y="0"/>
+          <a:chExt cx="0" cy="0"/>
+        </a:xfrm>
+      </p:grpSpPr>
+      <p:pic>
+        <p:nvPicPr>
+          <p:cNvPr id="5" name="Inhaltsplatzhalter 4" descr="Ein Bild, das Text, Diagramm, Plan, technische Zeichnung enthält.&#10;&#10;KI-generierte Inhalte können fehlerhaft sein.">
+            <a:extLst>
+              <a:ext uri="{FF2B5EF4-FFF2-40B4-BE49-F238E27FC236}">
+                <a16:creationId xmlns:a16="http://schemas.microsoft.com/office/drawing/2014/main" id="{7B82A2CC-6A98-31A3-AE4C-FB7D82868BDA}"/>
+              </a:ext>
+            </a:extLst>
+          </p:cNvPr>
+          <p:cNvPicPr>
+            <a:picLocks noGrp="1" noChangeAspect="1"/>
+          </p:cNvPicPr>
+          <p:nvPr>
+            <p:ph idx="1"/>
+          </p:nvPr>
+        </p:nvPicPr>
+        <p:blipFill>
+          <a:blip r:embed="rId2">
+            <a:extLst>
+              <a:ext uri="{28A0092B-C50C-407E-A947-70E740481C1C}">
+                <a14:useLocalDpi xmlns:a14="http://schemas.microsoft.com/office/drawing/2010/main" val="0"/>
+              </a:ext>
+            </a:extLst>
+          </a:blip>
+          <a:srcRect l="18112" t="12063" r="21627" b="12230"/>
+          <a:stretch/>
+        </p:blipFill>
+        <p:spPr>
+          <a:xfrm>
+            <a:off x="2166061" y="-136062"/>
+            <a:ext cx="7859877" cy="6994062"/>
+          </a:xfrm>
+        </p:spPr>
+      </p:pic>
+      <p:sp>
+        <p:nvSpPr>
+          <p:cNvPr id="7" name="Textfeld 6">
+            <a:extLst>
+              <a:ext uri="{FF2B5EF4-FFF2-40B4-BE49-F238E27FC236}">
+                <a16:creationId xmlns:a16="http://schemas.microsoft.com/office/drawing/2014/main" id="{84DDF3DC-E437-73A9-3E48-A989147B64CA}"/>
+              </a:ext>
+            </a:extLst>
+          </p:cNvPr>
+          <p:cNvSpPr txBox="1"/>
+          <p:nvPr/>
+        </p:nvSpPr>
+        <p:spPr>
+          <a:xfrm>
+            <a:off x="165619" y="6412077"/>
+            <a:ext cx="6097554" cy="369332"/>
+          </a:xfrm>
+          <a:prstGeom prst="rect">
+            <a:avLst/>
+          </a:prstGeom>
+          <a:noFill/>
+        </p:spPr>
+        <p:txBody>
+          <a:bodyPr wrap="square">
+            <a:spAutoFit/>
+          </a:bodyPr>
+          <a:lstStyle/>
+          <a:p>
+            <a:r>
+              <a:rPr lang="de-DE" dirty="0"/>
+              <a:t>https://easyeda.com</a:t>
+            </a:r>
+          </a:p>
+        </p:txBody>
+      </p:sp>
+    </p:spTree>
+    <p:extLst>
+      <p:ext uri="{BB962C8B-B14F-4D97-AF65-F5344CB8AC3E}">
+        <p14:creationId xmlns:p14="http://schemas.microsoft.com/office/powerpoint/2010/main" val="4040044785"/>
+      </p:ext>
+    </p:extLst>
+  </p:cSld>
+  <p:clrMapOvr>
+    <a:masterClrMapping/>
+  </p:clrMapOvr>
+</p:sld>
+</file>
+
+<file path=ppt/slides/slide12.xml><?xml version="1.0" encoding="utf-8"?>
+<p:sld xmlns:a="http://schemas.openxmlformats.org/drawingml/2006/main" xmlns:r="http://schemas.openxmlformats.org/officeDocument/2006/relationships" xmlns:p="http://schemas.openxmlformats.org/presentationml/2006/main">
+  <p:cSld>
+    <p:spTree>
+      <p:nvGrpSpPr>
+        <p:cNvPr id="1" name=""/>
+        <p:cNvGrpSpPr/>
+        <p:nvPr/>
+      </p:nvGrpSpPr>
+      <p:grpSpPr>
+        <a:xfrm>
+          <a:off x="0" y="0"/>
+          <a:ext cx="0" cy="0"/>
+          <a:chOff x="0" y="0"/>
+          <a:chExt cx="0" cy="0"/>
+        </a:xfrm>
+      </p:grpSpPr>
+      <p:sp>
+        <p:nvSpPr>
+          <p:cNvPr id="2" name="Titel 1">
+            <a:extLst>
+              <a:ext uri="{FF2B5EF4-FFF2-40B4-BE49-F238E27FC236}">
+                <a16:creationId xmlns:a16="http://schemas.microsoft.com/office/drawing/2014/main" id="{413D0774-18A2-673D-283B-1C04DB36353E}"/>
+              </a:ext>
+            </a:extLst>
+          </p:cNvPr>
+          <p:cNvSpPr>
+            <a:spLocks noGrp="1"/>
+          </p:cNvSpPr>
+          <p:nvPr>
+            <p:ph type="ctrTitle"/>
+          </p:nvPr>
+        </p:nvSpPr>
+        <p:spPr>
+          <a:xfrm>
+            <a:off x="1524000" y="1269579"/>
+            <a:ext cx="9144000" cy="2387600"/>
+          </a:xfrm>
+        </p:spPr>
+        <p:txBody>
+          <a:bodyPr>
+            <a:normAutofit fontScale="90000"/>
+          </a:bodyPr>
+          <a:lstStyle/>
+          <a:p>
+            <a:br>
               <a:rPr lang="de-DE" sz="10000" dirty="0">
+                <a:latin typeface="Impact" panose="020B0806030902050204" pitchFamily="34" charset="0"/>
+              </a:rPr>
+            </a:br>
+            <a:r>
+              <a:rPr lang="de-DE" sz="10000" dirty="0">
+                <a:latin typeface="Impact" panose="020B0806030902050204" pitchFamily="34" charset="0"/>
+              </a:rPr>
+              <a:t>Programmierung</a:t>
+            </a:r>
+          </a:p>
+        </p:txBody>
+      </p:sp>
+      <p:sp>
+        <p:nvSpPr>
+          <p:cNvPr id="3" name="Untertitel 2">
+            <a:extLst>
+              <a:ext uri="{FF2B5EF4-FFF2-40B4-BE49-F238E27FC236}">
+                <a16:creationId xmlns:a16="http://schemas.microsoft.com/office/drawing/2014/main" id="{93304FBE-99DF-EE64-5EB2-94852307E71F}"/>
+              </a:ext>
+            </a:extLst>
+          </p:cNvPr>
+          <p:cNvSpPr>
+            <a:spLocks noGrp="1"/>
+          </p:cNvSpPr>
+          <p:nvPr>
+            <p:ph type="subTitle" idx="1"/>
+          </p:nvPr>
+        </p:nvSpPr>
+        <p:spPr>
+          <a:xfrm>
+            <a:off x="1524000" y="4259635"/>
+            <a:ext cx="9144000" cy="1791056"/>
+          </a:xfrm>
+        </p:spPr>
+        <p:txBody>
+          <a:bodyPr>
+            <a:noAutofit/>
+          </a:bodyPr>
+          <a:lstStyle/>
+          <a:p>
+            <a:r>
+              <a:rPr lang="de-DE" sz="3000" dirty="0">
+                <a:latin typeface="Liberation Sans" panose="020B0604020202020204" pitchFamily="34" charset="0"/>
+                <a:ea typeface="Liberation Sans" panose="020B0604020202020204" pitchFamily="34" charset="0"/>
+                <a:cs typeface="Liberation Sans" panose="020B0604020202020204" pitchFamily="34" charset="0"/>
+              </a:rPr>
+              <a:t>Hossein</a:t>
+            </a:r>
+          </a:p>
+        </p:txBody>
+      </p:sp>
+      <p:cxnSp>
+        <p:nvCxnSpPr>
+          <p:cNvPr id="5" name="Gerader Verbinder 4">
+            <a:extLst>
+              <a:ext uri="{FF2B5EF4-FFF2-40B4-BE49-F238E27FC236}">
+                <a16:creationId xmlns:a16="http://schemas.microsoft.com/office/drawing/2014/main" id="{2B753068-DCEB-B788-AD32-F324BF9F36F0}"/>
+              </a:ext>
+            </a:extLst>
+          </p:cNvPr>
+          <p:cNvCxnSpPr/>
+          <p:nvPr/>
+        </p:nvCxnSpPr>
+        <p:spPr>
+          <a:xfrm>
+            <a:off x="1698171" y="3830217"/>
+            <a:ext cx="8714792" cy="0"/>
+          </a:xfrm>
+          <a:prstGeom prst="line">
+            <a:avLst/>
+          </a:prstGeom>
+        </p:spPr>
+        <p:style>
+          <a:lnRef idx="2">
+            <a:schemeClr val="dk1"/>
+          </a:lnRef>
+          <a:fillRef idx="0">
+            <a:schemeClr val="dk1"/>
+          </a:fillRef>
+          <a:effectRef idx="1">
+            <a:schemeClr val="dk1"/>
+          </a:effectRef>
+          <a:fontRef idx="minor">
+            <a:schemeClr val="tx1"/>
+          </a:fontRef>
+        </p:style>
+      </p:cxnSp>
+    </p:spTree>
+    <p:extLst>
+      <p:ext uri="{BB962C8B-B14F-4D97-AF65-F5344CB8AC3E}">
+        <p14:creationId xmlns:p14="http://schemas.microsoft.com/office/powerpoint/2010/main" val="3934917728"/>
+      </p:ext>
+    </p:extLst>
+  </p:cSld>
+  <p:clrMapOvr>
+    <a:masterClrMapping/>
+  </p:clrMapOvr>
+</p:sld>
+</file>
+
+<file path=ppt/slides/slide13.xml><?xml version="1.0" encoding="utf-8"?>
+<p:sld xmlns:a="http://schemas.openxmlformats.org/drawingml/2006/main" xmlns:r="http://schemas.openxmlformats.org/officeDocument/2006/relationships" xmlns:p="http://schemas.openxmlformats.org/presentationml/2006/main">
+  <p:cSld>
+    <p:spTree>
+      <p:nvGrpSpPr>
+        <p:cNvPr id="1" name=""/>
+        <p:cNvGrpSpPr/>
+        <p:nvPr/>
+      </p:nvGrpSpPr>
+      <p:grpSpPr>
+        <a:xfrm>
+          <a:off x="0" y="0"/>
+          <a:ext cx="0" cy="0"/>
+          <a:chOff x="0" y="0"/>
+          <a:chExt cx="0" cy="0"/>
+        </a:xfrm>
+      </p:grpSpPr>
+      <p:sp>
+        <p:nvSpPr>
+          <p:cNvPr id="2" name="Titel 1">
+            <a:extLst>
+              <a:ext uri="{FF2B5EF4-FFF2-40B4-BE49-F238E27FC236}">
+                <a16:creationId xmlns:a16="http://schemas.microsoft.com/office/drawing/2014/main" id="{413D0774-18A2-673D-283B-1C04DB36353E}"/>
+              </a:ext>
+            </a:extLst>
+          </p:cNvPr>
+          <p:cNvSpPr>
+            <a:spLocks noGrp="1"/>
+          </p:cNvSpPr>
+          <p:nvPr>
+            <p:ph type="ctrTitle"/>
+          </p:nvPr>
+        </p:nvSpPr>
+        <p:spPr>
+          <a:xfrm>
+            <a:off x="1524000" y="38100"/>
+            <a:ext cx="9144000" cy="926225"/>
+          </a:xfrm>
+        </p:spPr>
+        <p:txBody>
+          <a:bodyPr>
+            <a:normAutofit/>
+          </a:bodyPr>
+          <a:lstStyle/>
+          <a:p>
+            <a:r>
+              <a:rPr lang="de-DE" dirty="0">
+                <a:latin typeface="Impact" panose="020B0806030902050204" pitchFamily="34" charset="0"/>
+              </a:rPr>
+              <a:t>Programmierung</a:t>
+            </a:r>
+          </a:p>
+        </p:txBody>
+      </p:sp>
+      <p:sp>
+        <p:nvSpPr>
+          <p:cNvPr id="3" name="Untertitel 2">
+            <a:extLst>
+              <a:ext uri="{FF2B5EF4-FFF2-40B4-BE49-F238E27FC236}">
+                <a16:creationId xmlns:a16="http://schemas.microsoft.com/office/drawing/2014/main" id="{93304FBE-99DF-EE64-5EB2-94852307E71F}"/>
+              </a:ext>
+            </a:extLst>
+          </p:cNvPr>
+          <p:cNvSpPr>
+            <a:spLocks noGrp="1"/>
+          </p:cNvSpPr>
+          <p:nvPr>
+            <p:ph type="subTitle" idx="1"/>
+          </p:nvPr>
+        </p:nvSpPr>
+        <p:spPr>
+          <a:xfrm>
+            <a:off x="898849" y="2533472"/>
+            <a:ext cx="9144000" cy="1791056"/>
+          </a:xfrm>
+        </p:spPr>
+        <p:txBody>
+          <a:bodyPr>
+            <a:noAutofit/>
+          </a:bodyPr>
+          <a:lstStyle/>
+          <a:p>
+            <a:pPr algn="l"/>
+            <a:r>
+              <a:rPr lang="de-DE" sz="3000" dirty="0">
+                <a:latin typeface="Liberation Sans" panose="020B0604020202020204" pitchFamily="34" charset="0"/>
+                <a:ea typeface="Liberation Sans" panose="020B0604020202020204" pitchFamily="34" charset="0"/>
+                <a:cs typeface="Liberation Sans" panose="020B0604020202020204" pitchFamily="34" charset="0"/>
+              </a:rPr>
+              <a:t>Hossein Stichpunkte</a:t>
+            </a:r>
+          </a:p>
+          <a:p>
+            <a:pPr algn="l"/>
+            <a:endParaRPr lang="de-DE" sz="3000" dirty="0">
+              <a:latin typeface="Liberation Sans" panose="020B0604020202020204" pitchFamily="34" charset="0"/>
+              <a:ea typeface="Liberation Sans" panose="020B0604020202020204" pitchFamily="34" charset="0"/>
+              <a:cs typeface="Liberation Sans" panose="020B0604020202020204" pitchFamily="34" charset="0"/>
+            </a:endParaRPr>
+          </a:p>
+          <a:p>
+            <a:pPr algn="l"/>
+            <a:r>
+              <a:rPr lang="de-DE" sz="3000" dirty="0">
+                <a:latin typeface="Liberation Sans" panose="020B0604020202020204" pitchFamily="34" charset="0"/>
+                <a:ea typeface="Liberation Sans" panose="020B0604020202020204" pitchFamily="34" charset="0"/>
+                <a:cs typeface="Liberation Sans" panose="020B0604020202020204" pitchFamily="34" charset="0"/>
+              </a:rPr>
+              <a:t>Code!</a:t>
+            </a:r>
+          </a:p>
+          <a:p>
+            <a:pPr algn="l"/>
+            <a:r>
+              <a:rPr lang="de-DE" sz="3000" dirty="0">
+                <a:latin typeface="Liberation Sans" panose="020B0604020202020204" pitchFamily="34" charset="0"/>
+                <a:ea typeface="Liberation Sans" panose="020B0604020202020204" pitchFamily="34" charset="0"/>
+                <a:cs typeface="Liberation Sans" panose="020B0604020202020204" pitchFamily="34" charset="0"/>
+              </a:rPr>
+              <a:t>-&gt; Entwicklung</a:t>
+            </a:r>
+          </a:p>
+        </p:txBody>
+      </p:sp>
+      <p:cxnSp>
+        <p:nvCxnSpPr>
+          <p:cNvPr id="5" name="Gerader Verbinder 4">
+            <a:extLst>
+              <a:ext uri="{FF2B5EF4-FFF2-40B4-BE49-F238E27FC236}">
+                <a16:creationId xmlns:a16="http://schemas.microsoft.com/office/drawing/2014/main" id="{2B753068-DCEB-B788-AD32-F324BF9F36F0}"/>
+              </a:ext>
+            </a:extLst>
+          </p:cNvPr>
+          <p:cNvCxnSpPr/>
+          <p:nvPr/>
+        </p:nvCxnSpPr>
+        <p:spPr>
+          <a:xfrm>
+            <a:off x="1738604" y="987263"/>
+            <a:ext cx="8714792" cy="0"/>
+          </a:xfrm>
+          <a:prstGeom prst="line">
+            <a:avLst/>
+          </a:prstGeom>
+        </p:spPr>
+        <p:style>
+          <a:lnRef idx="2">
+            <a:schemeClr val="dk1"/>
+          </a:lnRef>
+          <a:fillRef idx="0">
+            <a:schemeClr val="dk1"/>
+          </a:fillRef>
+          <a:effectRef idx="1">
+            <a:schemeClr val="dk1"/>
+          </a:effectRef>
+          <a:fontRef idx="minor">
+            <a:schemeClr val="tx1"/>
+          </a:fontRef>
+        </p:style>
+      </p:cxnSp>
+    </p:spTree>
+    <p:extLst>
+      <p:ext uri="{BB962C8B-B14F-4D97-AF65-F5344CB8AC3E}">
+        <p14:creationId xmlns:p14="http://schemas.microsoft.com/office/powerpoint/2010/main" val="2258326793"/>
+      </p:ext>
+    </p:extLst>
+  </p:cSld>
+  <p:clrMapOvr>
+    <a:masterClrMapping/>
+  </p:clrMapOvr>
+</p:sld>
+</file>
+
+<file path=ppt/slides/slide14.xml><?xml version="1.0" encoding="utf-8"?>
+<p:sld xmlns:a="http://schemas.openxmlformats.org/drawingml/2006/main" xmlns:r="http://schemas.openxmlformats.org/officeDocument/2006/relationships" xmlns:p="http://schemas.openxmlformats.org/presentationml/2006/main">
+  <p:cSld>
+    <p:spTree>
+      <p:nvGrpSpPr>
+        <p:cNvPr id="1" name=""/>
+        <p:cNvGrpSpPr/>
+        <p:nvPr/>
+      </p:nvGrpSpPr>
+      <p:grpSpPr>
+        <a:xfrm>
+          <a:off x="0" y="0"/>
+          <a:ext cx="0" cy="0"/>
+          <a:chOff x="0" y="0"/>
+          <a:chExt cx="0" cy="0"/>
+        </a:xfrm>
+      </p:grpSpPr>
+      <p:sp>
+        <p:nvSpPr>
+          <p:cNvPr id="2" name="Titel 1">
+            <a:extLst>
+              <a:ext uri="{FF2B5EF4-FFF2-40B4-BE49-F238E27FC236}">
+                <a16:creationId xmlns:a16="http://schemas.microsoft.com/office/drawing/2014/main" id="{413D0774-18A2-673D-283B-1C04DB36353E}"/>
+              </a:ext>
+            </a:extLst>
+          </p:cNvPr>
+          <p:cNvSpPr>
+            <a:spLocks noGrp="1"/>
+          </p:cNvSpPr>
+          <p:nvPr>
+            <p:ph type="ctrTitle"/>
+          </p:nvPr>
+        </p:nvSpPr>
+        <p:spPr>
+          <a:xfrm>
+            <a:off x="1524000" y="19053"/>
+            <a:ext cx="9144000" cy="945272"/>
+          </a:xfrm>
+        </p:spPr>
+        <p:txBody>
+          <a:bodyPr>
+            <a:normAutofit/>
+          </a:bodyPr>
+          <a:lstStyle/>
+          <a:p>
+            <a:r>
+              <a:rPr lang="de-DE" dirty="0">
                 <a:latin typeface="Impact" panose="020B0806030902050204" pitchFamily="34" charset="0"/>
               </a:rPr>
               <a:t>Quellen</a:t>
@@ -3942,7 +4842,7 @@
         </p:nvCxnSpPr>
         <p:spPr>
           <a:xfrm>
-            <a:off x="1698171" y="1870788"/>
+            <a:off x="1602921" y="1034888"/>
             <a:ext cx="8714792" cy="0"/>
           </a:xfrm>
           <a:prstGeom prst="line">
@@ -4312,43 +5212,6 @@
       </p:grpSpPr>
       <p:sp>
         <p:nvSpPr>
-          <p:cNvPr id="2" name="Titel 1">
-            <a:extLst>
-              <a:ext uri="{FF2B5EF4-FFF2-40B4-BE49-F238E27FC236}">
-                <a16:creationId xmlns:a16="http://schemas.microsoft.com/office/drawing/2014/main" id="{413D0774-18A2-673D-283B-1C04DB36353E}"/>
-              </a:ext>
-            </a:extLst>
-          </p:cNvPr>
-          <p:cNvSpPr>
-            <a:spLocks noGrp="1"/>
-          </p:cNvSpPr>
-          <p:nvPr>
-            <p:ph type="ctrTitle"/>
-          </p:nvPr>
-        </p:nvSpPr>
-        <p:spPr>
-          <a:xfrm>
-            <a:off x="1524000" y="-689850"/>
-            <a:ext cx="9144000" cy="2387600"/>
-          </a:xfrm>
-        </p:spPr>
-        <p:txBody>
-          <a:bodyPr>
-            <a:normAutofit/>
-          </a:bodyPr>
-          <a:lstStyle/>
-          <a:p>
-            <a:r>
-              <a:rPr lang="de-DE" sz="10000" dirty="0">
-                <a:latin typeface="Impact" panose="020B0806030902050204" pitchFamily="34" charset="0"/>
-              </a:rPr>
-              <a:t>Konstruktion</a:t>
-            </a:r>
-          </a:p>
-        </p:txBody>
-      </p:sp>
-      <p:sp>
-        <p:nvSpPr>
           <p:cNvPr id="3" name="Untertitel 2">
             <a:extLst>
               <a:ext uri="{FF2B5EF4-FFF2-40B4-BE49-F238E27FC236}">
@@ -4365,8 +5228,8 @@
         </p:nvSpPr>
         <p:spPr>
           <a:xfrm>
-            <a:off x="898849" y="2533472"/>
-            <a:ext cx="9144000" cy="1791056"/>
+            <a:off x="1576168" y="2095322"/>
+            <a:ext cx="8714792" cy="1791056"/>
           </a:xfrm>
         </p:spPr>
         <p:txBody>
@@ -4375,54 +5238,111 @@
           </a:bodyPr>
           <a:lstStyle/>
           <a:p>
-            <a:pPr algn="l"/>
-            <a:r>
-              <a:rPr lang="de-DE" sz="3000" dirty="0">
+            <a:pPr marL="457200" indent="-457200" algn="l">
+              <a:buFont typeface="Wingdings" panose="05000000000000000000" pitchFamily="2" charset="2"/>
+              <a:buChar char="v"/>
+            </a:pPr>
+            <a:r>
+              <a:rPr lang="de-DE" sz="2000" dirty="0">
                 <a:latin typeface="Liberation Sans" panose="020B0604020202020204" pitchFamily="34" charset="0"/>
                 <a:ea typeface="Liberation Sans" panose="020B0604020202020204" pitchFamily="34" charset="0"/>
                 <a:cs typeface="Liberation Sans" panose="020B0604020202020204" pitchFamily="34" charset="0"/>
               </a:rPr>
-              <a:t>Lasse Stichpunkte</a:t>
-            </a:r>
-          </a:p>
-          <a:p>
-            <a:pPr algn="l"/>
-            <a:endParaRPr lang="de-DE" sz="3000" dirty="0">
-              <a:latin typeface="Liberation Sans" panose="020B0604020202020204" pitchFamily="34" charset="0"/>
-              <a:ea typeface="Liberation Sans" panose="020B0604020202020204" pitchFamily="34" charset="0"/>
-              <a:cs typeface="Liberation Sans" panose="020B0604020202020204" pitchFamily="34" charset="0"/>
-            </a:endParaRPr>
-          </a:p>
-          <a:p>
-            <a:pPr algn="l"/>
-            <a:r>
-              <a:rPr lang="de-DE" sz="3000" dirty="0">
+              <a:t>Frühe durchdachte Planung lohnt sich</a:t>
+            </a:r>
+          </a:p>
+          <a:p>
+            <a:pPr marL="457200" indent="-457200" algn="l">
+              <a:buFont typeface="Wingdings" panose="05000000000000000000" pitchFamily="2" charset="2"/>
+              <a:buChar char="v"/>
+            </a:pPr>
+            <a:r>
+              <a:rPr lang="de-DE" sz="2000" dirty="0">
                 <a:latin typeface="Liberation Sans" panose="020B0604020202020204" pitchFamily="34" charset="0"/>
                 <a:ea typeface="Liberation Sans" panose="020B0604020202020204" pitchFamily="34" charset="0"/>
                 <a:cs typeface="Liberation Sans" panose="020B0604020202020204" pitchFamily="34" charset="0"/>
               </a:rPr>
-              <a:t>Evtl. Bilder</a:t>
-            </a:r>
-          </a:p>
-          <a:p>
-            <a:pPr algn="l"/>
-            <a:r>
-              <a:rPr lang="de-DE" sz="3000" dirty="0">
+              <a:t>Man muss etwaige 3D-Druck-Ungenauigkeiten antizipieren (und kreativ lösen) können</a:t>
+            </a:r>
+          </a:p>
+          <a:p>
+            <a:pPr marL="457200" indent="-457200" algn="l">
+              <a:buFont typeface="Wingdings" panose="05000000000000000000" pitchFamily="2" charset="2"/>
+              <a:buChar char="v"/>
+            </a:pPr>
+            <a:r>
+              <a:rPr lang="de-DE" sz="2000" dirty="0">
                 <a:latin typeface="Liberation Sans" panose="020B0604020202020204" pitchFamily="34" charset="0"/>
                 <a:ea typeface="Liberation Sans" panose="020B0604020202020204" pitchFamily="34" charset="0"/>
                 <a:cs typeface="Liberation Sans" panose="020B0604020202020204" pitchFamily="34" charset="0"/>
               </a:rPr>
-              <a:t>-&gt; Fortschritt (frühere Modelle)</a:t>
+              <a:t>Improvisation ist oft notwendig</a:t>
+            </a:r>
+          </a:p>
+        </p:txBody>
+      </p:sp>
+      <p:sp>
+        <p:nvSpPr>
+          <p:cNvPr id="4" name="Titel 1">
+            <a:extLst>
+              <a:ext uri="{FF2B5EF4-FFF2-40B4-BE49-F238E27FC236}">
+                <a16:creationId xmlns:a16="http://schemas.microsoft.com/office/drawing/2014/main" id="{BE92422F-6CFB-6703-F428-2208AF7C4F27}"/>
+              </a:ext>
+            </a:extLst>
+          </p:cNvPr>
+          <p:cNvSpPr txBox="1">
+            <a:spLocks/>
+          </p:cNvSpPr>
+          <p:nvPr/>
+        </p:nvSpPr>
+        <p:spPr>
+          <a:xfrm>
+            <a:off x="3405187" y="0"/>
+            <a:ext cx="5381625" cy="1019204"/>
+          </a:xfrm>
+          <a:prstGeom prst="rect">
+            <a:avLst/>
+          </a:prstGeom>
+        </p:spPr>
+        <p:txBody>
+          <a:bodyPr vert="horz" lIns="91440" tIns="45720" rIns="91440" bIns="45720" rtlCol="0" anchor="b">
+            <a:normAutofit/>
+          </a:bodyPr>
+          <a:lstStyle>
+            <a:lvl1pPr algn="ctr" defTabSz="914400" rtl="0" eaLnBrk="1" latinLnBrk="0" hangingPunct="1">
+              <a:lnSpc>
+                <a:spcPct val="90000"/>
+              </a:lnSpc>
+              <a:spcBef>
+                <a:spcPct val="0"/>
+              </a:spcBef>
+              <a:buNone/>
+              <a:defRPr sz="6000" kern="1200">
+                <a:solidFill>
+                  <a:schemeClr val="tx1"/>
+                </a:solidFill>
+                <a:latin typeface="+mj-lt"/>
+                <a:ea typeface="+mj-ea"/>
+                <a:cs typeface="+mj-cs"/>
+              </a:defRPr>
+            </a:lvl1pPr>
+          </a:lstStyle>
+          <a:p>
+            <a:r>
+              <a:rPr lang="de-DE" dirty="0">
+                <a:latin typeface="Impact" panose="020B0806030902050204" pitchFamily="34" charset="0"/>
+              </a:rPr>
+              <a:t>Konstruktion</a:t>
             </a:r>
           </a:p>
         </p:txBody>
       </p:sp>
       <p:cxnSp>
         <p:nvCxnSpPr>
-          <p:cNvPr id="5" name="Gerader Verbinder 4">
-            <a:extLst>
-              <a:ext uri="{FF2B5EF4-FFF2-40B4-BE49-F238E27FC236}">
-                <a16:creationId xmlns:a16="http://schemas.microsoft.com/office/drawing/2014/main" id="{2B753068-DCEB-B788-AD32-F324BF9F36F0}"/>
+          <p:cNvPr id="6" name="Gerader Verbinder 5">
+            <a:extLst>
+              <a:ext uri="{FF2B5EF4-FFF2-40B4-BE49-F238E27FC236}">
+                <a16:creationId xmlns:a16="http://schemas.microsoft.com/office/drawing/2014/main" id="{86D8AB01-C043-70CC-51BD-6A6967F3BAD5}"/>
               </a:ext>
             </a:extLst>
           </p:cNvPr>
@@ -4431,7 +5351,7 @@
         </p:nvCxnSpPr>
         <p:spPr>
           <a:xfrm>
-            <a:off x="1698171" y="1870788"/>
+            <a:off x="1576168" y="1118956"/>
             <a:ext cx="8714792" cy="0"/>
           </a:xfrm>
           <a:prstGeom prst="line">
@@ -4485,86 +5405,66 @@
       </p:grpSpPr>
       <p:sp>
         <p:nvSpPr>
-          <p:cNvPr id="2" name="Titel 1">
-            <a:extLst>
-              <a:ext uri="{FF2B5EF4-FFF2-40B4-BE49-F238E27FC236}">
-                <a16:creationId xmlns:a16="http://schemas.microsoft.com/office/drawing/2014/main" id="{413D0774-18A2-673D-283B-1C04DB36353E}"/>
-              </a:ext>
-            </a:extLst>
-          </p:cNvPr>
-          <p:cNvSpPr>
-            <a:spLocks noGrp="1"/>
-          </p:cNvSpPr>
-          <p:nvPr>
-            <p:ph type="ctrTitle"/>
-          </p:nvPr>
-        </p:nvSpPr>
-        <p:spPr>
-          <a:xfrm>
-            <a:off x="1524000" y="1269579"/>
-            <a:ext cx="9144000" cy="2387600"/>
-          </a:xfrm>
-        </p:spPr>
-        <p:txBody>
-          <a:bodyPr>
+          <p:cNvPr id="4" name="Titel 1">
+            <a:extLst>
+              <a:ext uri="{FF2B5EF4-FFF2-40B4-BE49-F238E27FC236}">
+                <a16:creationId xmlns:a16="http://schemas.microsoft.com/office/drawing/2014/main" id="{BE92422F-6CFB-6703-F428-2208AF7C4F27}"/>
+              </a:ext>
+            </a:extLst>
+          </p:cNvPr>
+          <p:cNvSpPr txBox="1">
+            <a:spLocks/>
+          </p:cNvSpPr>
+          <p:nvPr/>
+        </p:nvSpPr>
+        <p:spPr>
+          <a:xfrm>
+            <a:off x="3405187" y="0"/>
+            <a:ext cx="5381625" cy="1019204"/>
+          </a:xfrm>
+          <a:prstGeom prst="rect">
+            <a:avLst/>
+          </a:prstGeom>
+        </p:spPr>
+        <p:txBody>
+          <a:bodyPr vert="horz" lIns="91440" tIns="45720" rIns="91440" bIns="45720" rtlCol="0" anchor="b">
             <a:normAutofit/>
           </a:bodyPr>
-          <a:lstStyle/>
-          <a:p>
-            <a:r>
-              <a:rPr lang="de-DE" sz="10000" dirty="0">
+          <a:lstStyle>
+            <a:lvl1pPr algn="ctr" defTabSz="914400" rtl="0" eaLnBrk="1" latinLnBrk="0" hangingPunct="1">
+              <a:lnSpc>
+                <a:spcPct val="90000"/>
+              </a:lnSpc>
+              <a:spcBef>
+                <a:spcPct val="0"/>
+              </a:spcBef>
+              <a:buNone/>
+              <a:defRPr sz="6000" kern="1200">
+                <a:solidFill>
+                  <a:schemeClr val="tx1"/>
+                </a:solidFill>
+                <a:latin typeface="+mj-lt"/>
+                <a:ea typeface="+mj-ea"/>
+                <a:cs typeface="+mj-cs"/>
+              </a:defRPr>
+            </a:lvl1pPr>
+          </a:lstStyle>
+          <a:p>
+            <a:r>
+              <a:rPr lang="de-DE" dirty="0">
                 <a:latin typeface="Impact" panose="020B0806030902050204" pitchFamily="34" charset="0"/>
               </a:rPr>
-              <a:t>Elektronik</a:t>
-            </a:r>
-          </a:p>
-        </p:txBody>
-      </p:sp>
-      <p:sp>
-        <p:nvSpPr>
-          <p:cNvPr id="3" name="Untertitel 2">
-            <a:extLst>
-              <a:ext uri="{FF2B5EF4-FFF2-40B4-BE49-F238E27FC236}">
-                <a16:creationId xmlns:a16="http://schemas.microsoft.com/office/drawing/2014/main" id="{93304FBE-99DF-EE64-5EB2-94852307E71F}"/>
-              </a:ext>
-            </a:extLst>
-          </p:cNvPr>
-          <p:cNvSpPr>
-            <a:spLocks noGrp="1"/>
-          </p:cNvSpPr>
-          <p:nvPr>
-            <p:ph type="subTitle" idx="1"/>
-          </p:nvPr>
-        </p:nvSpPr>
-        <p:spPr>
-          <a:xfrm>
-            <a:off x="1524000" y="4259635"/>
-            <a:ext cx="9144000" cy="1791056"/>
-          </a:xfrm>
-        </p:spPr>
-        <p:txBody>
-          <a:bodyPr>
-            <a:noAutofit/>
-          </a:bodyPr>
-          <a:lstStyle/>
-          <a:p>
-            <a:r>
-              <a:rPr lang="de-DE" sz="3000" dirty="0">
-                <a:latin typeface="Liberation Sans" panose="020B0604020202020204" pitchFamily="34" charset="0"/>
-                <a:ea typeface="Liberation Sans" panose="020B0604020202020204" pitchFamily="34" charset="0"/>
-                <a:cs typeface="Liberation Sans" panose="020B0604020202020204" pitchFamily="34" charset="0"/>
-              </a:rPr>
-              <a:t>Julian</a:t>
+              <a:t>Rahmen</a:t>
             </a:r>
           </a:p>
         </p:txBody>
       </p:sp>
       <p:cxnSp>
         <p:nvCxnSpPr>
-          <p:cNvPr id="5" name="Gerader Verbinder 4">
-            <a:extLst>
-              <a:ext uri="{FF2B5EF4-FFF2-40B4-BE49-F238E27FC236}">
-                <a16:creationId xmlns:a16="http://schemas.microsoft.com/office/drawing/2014/main" id="{2B753068-DCEB-B788-AD32-F324BF9F36F0}"/>
+          <p:cNvPr id="6" name="Gerader Verbinder 5">
+            <a:extLst>
+              <a:ext uri="{FF2B5EF4-FFF2-40B4-BE49-F238E27FC236}">
+                <a16:creationId xmlns:a16="http://schemas.microsoft.com/office/drawing/2014/main" id="{86D8AB01-C043-70CC-51BD-6A6967F3BAD5}"/>
               </a:ext>
             </a:extLst>
           </p:cNvPr>
@@ -4573,7 +5473,7 @@
         </p:nvCxnSpPr>
         <p:spPr>
           <a:xfrm>
-            <a:off x="1698171" y="3830217"/>
+            <a:off x="1576168" y="1118956"/>
             <a:ext cx="8714792" cy="0"/>
           </a:xfrm>
           <a:prstGeom prst="line">
@@ -4595,10 +5495,40 @@
           </a:fontRef>
         </p:style>
       </p:cxnSp>
+      <p:pic>
+        <p:nvPicPr>
+          <p:cNvPr id="5" name="Grafik 4">
+            <a:extLst>
+              <a:ext uri="{FF2B5EF4-FFF2-40B4-BE49-F238E27FC236}">
+                <a16:creationId xmlns:a16="http://schemas.microsoft.com/office/drawing/2014/main" id="{F7506FDB-45FA-1744-3418-9C5A4750199B}"/>
+              </a:ext>
+            </a:extLst>
+          </p:cNvPr>
+          <p:cNvPicPr>
+            <a:picLocks noChangeAspect="1"/>
+          </p:cNvPicPr>
+          <p:nvPr/>
+        </p:nvPicPr>
+        <p:blipFill>
+          <a:blip r:embed="rId2"/>
+          <a:stretch>
+            <a:fillRect/>
+          </a:stretch>
+        </p:blipFill>
+        <p:spPr>
+          <a:xfrm>
+            <a:off x="1576165" y="1508851"/>
+            <a:ext cx="8714793" cy="4872787"/>
+          </a:xfrm>
+          <a:prstGeom prst="rect">
+            <a:avLst/>
+          </a:prstGeom>
+        </p:spPr>
+      </p:pic>
     </p:spTree>
     <p:extLst>
       <p:ext uri="{BB962C8B-B14F-4D97-AF65-F5344CB8AC3E}">
-        <p14:creationId xmlns:p14="http://schemas.microsoft.com/office/powerpoint/2010/main" val="383897644"/>
+        <p14:creationId xmlns:p14="http://schemas.microsoft.com/office/powerpoint/2010/main" val="3219921335"/>
       </p:ext>
     </p:extLst>
   </p:cSld>
@@ -4627,190 +5557,66 @@
       </p:grpSpPr>
       <p:sp>
         <p:nvSpPr>
-          <p:cNvPr id="2" name="Titel 1">
-            <a:extLst>
-              <a:ext uri="{FF2B5EF4-FFF2-40B4-BE49-F238E27FC236}">
-                <a16:creationId xmlns:a16="http://schemas.microsoft.com/office/drawing/2014/main" id="{413D0774-18A2-673D-283B-1C04DB36353E}"/>
-              </a:ext>
-            </a:extLst>
-          </p:cNvPr>
-          <p:cNvSpPr>
-            <a:spLocks noGrp="1"/>
-          </p:cNvSpPr>
-          <p:nvPr>
-            <p:ph type="ctrTitle"/>
-          </p:nvPr>
-        </p:nvSpPr>
-        <p:spPr>
-          <a:xfrm>
-            <a:off x="1524000" y="-689850"/>
-            <a:ext cx="9144000" cy="2387600"/>
-          </a:xfrm>
-        </p:spPr>
-        <p:txBody>
-          <a:bodyPr>
+          <p:cNvPr id="4" name="Titel 1">
+            <a:extLst>
+              <a:ext uri="{FF2B5EF4-FFF2-40B4-BE49-F238E27FC236}">
+                <a16:creationId xmlns:a16="http://schemas.microsoft.com/office/drawing/2014/main" id="{BE92422F-6CFB-6703-F428-2208AF7C4F27}"/>
+              </a:ext>
+            </a:extLst>
+          </p:cNvPr>
+          <p:cNvSpPr txBox="1">
+            <a:spLocks/>
+          </p:cNvSpPr>
+          <p:nvPr/>
+        </p:nvSpPr>
+        <p:spPr>
+          <a:xfrm>
+            <a:off x="3405187" y="0"/>
+            <a:ext cx="5381625" cy="1019204"/>
+          </a:xfrm>
+          <a:prstGeom prst="rect">
+            <a:avLst/>
+          </a:prstGeom>
+        </p:spPr>
+        <p:txBody>
+          <a:bodyPr vert="horz" lIns="91440" tIns="45720" rIns="91440" bIns="45720" rtlCol="0" anchor="b">
             <a:normAutofit/>
           </a:bodyPr>
-          <a:lstStyle/>
-          <a:p>
-            <a:r>
-              <a:rPr lang="de-DE" sz="10000" dirty="0">
+          <a:lstStyle>
+            <a:lvl1pPr algn="ctr" defTabSz="914400" rtl="0" eaLnBrk="1" latinLnBrk="0" hangingPunct="1">
+              <a:lnSpc>
+                <a:spcPct val="90000"/>
+              </a:lnSpc>
+              <a:spcBef>
+                <a:spcPct val="0"/>
+              </a:spcBef>
+              <a:buNone/>
+              <a:defRPr sz="6000" kern="1200">
+                <a:solidFill>
+                  <a:schemeClr val="tx1"/>
+                </a:solidFill>
+                <a:latin typeface="+mj-lt"/>
+                <a:ea typeface="+mj-ea"/>
+                <a:cs typeface="+mj-cs"/>
+              </a:defRPr>
+            </a:lvl1pPr>
+          </a:lstStyle>
+          <a:p>
+            <a:r>
+              <a:rPr lang="de-DE" dirty="0">
                 <a:latin typeface="Impact" panose="020B0806030902050204" pitchFamily="34" charset="0"/>
               </a:rPr>
-              <a:t>Elektronik</a:t>
-            </a:r>
-          </a:p>
-        </p:txBody>
-      </p:sp>
-      <p:sp>
-        <p:nvSpPr>
-          <p:cNvPr id="3" name="Untertitel 2">
-            <a:extLst>
-              <a:ext uri="{FF2B5EF4-FFF2-40B4-BE49-F238E27FC236}">
-                <a16:creationId xmlns:a16="http://schemas.microsoft.com/office/drawing/2014/main" id="{93304FBE-99DF-EE64-5EB2-94852307E71F}"/>
-              </a:ext>
-            </a:extLst>
-          </p:cNvPr>
-          <p:cNvSpPr>
-            <a:spLocks noGrp="1"/>
-          </p:cNvSpPr>
-          <p:nvPr>
-            <p:ph type="subTitle" idx="1"/>
-          </p:nvPr>
-        </p:nvSpPr>
-        <p:spPr>
-          <a:xfrm>
-            <a:off x="898849" y="2533471"/>
-            <a:ext cx="9144000" cy="3848665"/>
-          </a:xfrm>
-        </p:spPr>
-        <p:txBody>
-          <a:bodyPr>
-            <a:noAutofit/>
-          </a:bodyPr>
-          <a:lstStyle/>
-          <a:p>
-            <a:pPr marL="342900" indent="-342900" algn="l">
-              <a:buFont typeface="Wingdings" panose="05000000000000000000" pitchFamily="2" charset="2"/>
-              <a:buChar char="v"/>
-            </a:pPr>
-            <a:r>
-              <a:rPr lang="de-DE" sz="2000" dirty="0">
-                <a:latin typeface="Liberation Sans" panose="020B0604020202020204" pitchFamily="34" charset="0"/>
-                <a:ea typeface="Liberation Sans" panose="020B0604020202020204" pitchFamily="34" charset="0"/>
-                <a:cs typeface="Liberation Sans" panose="020B0604020202020204" pitchFamily="34" charset="0"/>
-              </a:rPr>
-              <a:t>11.1V 3500mAh - Akku</a:t>
-            </a:r>
-          </a:p>
-          <a:p>
-            <a:pPr marL="342900" indent="-342900" algn="l">
-              <a:buFont typeface="Wingdings" panose="05000000000000000000" pitchFamily="2" charset="2"/>
-              <a:buChar char="v"/>
-            </a:pPr>
-            <a:endParaRPr lang="de-DE" sz="2000" dirty="0">
-              <a:latin typeface="Liberation Sans" panose="020B0604020202020204" pitchFamily="34" charset="0"/>
-              <a:ea typeface="Liberation Sans" panose="020B0604020202020204" pitchFamily="34" charset="0"/>
-              <a:cs typeface="Liberation Sans" panose="020B0604020202020204" pitchFamily="34" charset="0"/>
-            </a:endParaRPr>
-          </a:p>
-          <a:p>
-            <a:pPr marL="342900" indent="-342900" algn="l">
-              <a:buFont typeface="Wingdings" panose="05000000000000000000" pitchFamily="2" charset="2"/>
-              <a:buChar char="v"/>
-            </a:pPr>
-            <a:r>
-              <a:rPr lang="de-DE" sz="2000" dirty="0">
-                <a:latin typeface="Liberation Sans" panose="020B0604020202020204" pitchFamily="34" charset="0"/>
-                <a:ea typeface="Liberation Sans" panose="020B0604020202020204" pitchFamily="34" charset="0"/>
-                <a:cs typeface="Liberation Sans" panose="020B0604020202020204" pitchFamily="34" charset="0"/>
-              </a:rPr>
-              <a:t>2x BTS7960 43A – H-Brücke</a:t>
-            </a:r>
-          </a:p>
-          <a:p>
-            <a:pPr marL="342900" indent="-342900" algn="l">
-              <a:buFont typeface="Wingdings" panose="05000000000000000000" pitchFamily="2" charset="2"/>
-              <a:buChar char="v"/>
-            </a:pPr>
-            <a:endParaRPr lang="de-DE" sz="2000" dirty="0">
-              <a:latin typeface="Liberation Sans" panose="020B0604020202020204" pitchFamily="34" charset="0"/>
-              <a:ea typeface="Liberation Sans" panose="020B0604020202020204" pitchFamily="34" charset="0"/>
-              <a:cs typeface="Liberation Sans" panose="020B0604020202020204" pitchFamily="34" charset="0"/>
-            </a:endParaRPr>
-          </a:p>
-          <a:p>
-            <a:pPr marL="342900" indent="-342900" algn="l">
-              <a:buFont typeface="Wingdings" panose="05000000000000000000" pitchFamily="2" charset="2"/>
-              <a:buChar char="v"/>
-            </a:pPr>
-            <a:r>
-              <a:rPr lang="de-DE" sz="2000" dirty="0">
-                <a:latin typeface="Liberation Sans" panose="020B0604020202020204" pitchFamily="34" charset="0"/>
-                <a:ea typeface="Liberation Sans" panose="020B0604020202020204" pitchFamily="34" charset="0"/>
-                <a:cs typeface="Liberation Sans" panose="020B0604020202020204" pitchFamily="34" charset="0"/>
-              </a:rPr>
-              <a:t>2x JGB37-520 12V Motor</a:t>
-            </a:r>
-          </a:p>
-          <a:p>
-            <a:pPr marL="342900" indent="-342900" algn="l">
-              <a:buFont typeface="Wingdings" panose="05000000000000000000" pitchFamily="2" charset="2"/>
-              <a:buChar char="v"/>
-            </a:pPr>
-            <a:endParaRPr lang="de-DE" sz="2000" dirty="0">
-              <a:latin typeface="Liberation Sans" panose="020B0604020202020204" pitchFamily="34" charset="0"/>
-              <a:ea typeface="Liberation Sans" panose="020B0604020202020204" pitchFamily="34" charset="0"/>
-              <a:cs typeface="Liberation Sans" panose="020B0604020202020204" pitchFamily="34" charset="0"/>
-            </a:endParaRPr>
-          </a:p>
-          <a:p>
-            <a:pPr marL="342900" indent="-342900" algn="l">
-              <a:buFont typeface="Wingdings" panose="05000000000000000000" pitchFamily="2" charset="2"/>
-              <a:buChar char="v"/>
-            </a:pPr>
-            <a:r>
-              <a:rPr lang="de-DE" sz="2000" dirty="0">
-                <a:latin typeface="Liberation Sans" panose="020B0604020202020204" pitchFamily="34" charset="0"/>
-                <a:ea typeface="Liberation Sans" panose="020B0604020202020204" pitchFamily="34" charset="0"/>
-                <a:cs typeface="Liberation Sans" panose="020B0604020202020204" pitchFamily="34" charset="0"/>
-              </a:rPr>
-              <a:t>LM2596 – Buck-Converter</a:t>
-            </a:r>
-          </a:p>
-          <a:p>
-            <a:pPr marL="342900" indent="-342900" algn="l">
-              <a:buFont typeface="Wingdings" panose="05000000000000000000" pitchFamily="2" charset="2"/>
-              <a:buChar char="v"/>
-            </a:pPr>
-            <a:endParaRPr lang="de-DE" sz="2000" dirty="0">
-              <a:latin typeface="Liberation Sans" panose="020B0604020202020204" pitchFamily="34" charset="0"/>
-              <a:ea typeface="Liberation Sans" panose="020B0604020202020204" pitchFamily="34" charset="0"/>
-              <a:cs typeface="Liberation Sans" panose="020B0604020202020204" pitchFamily="34" charset="0"/>
-            </a:endParaRPr>
-          </a:p>
-          <a:p>
-            <a:pPr marL="342900" indent="-342900" algn="l">
-              <a:buFont typeface="Wingdings" panose="05000000000000000000" pitchFamily="2" charset="2"/>
-              <a:buChar char="v"/>
-            </a:pPr>
-            <a:r>
-              <a:rPr lang="de-DE" sz="2000" dirty="0">
-                <a:latin typeface="Liberation Sans" panose="020B0604020202020204" pitchFamily="34" charset="0"/>
-                <a:ea typeface="Liberation Sans" panose="020B0604020202020204" pitchFamily="34" charset="0"/>
-                <a:cs typeface="Liberation Sans" panose="020B0604020202020204" pitchFamily="34" charset="0"/>
-              </a:rPr>
-              <a:t>ESP32 Dev-Module (38 Pins)</a:t>
+              <a:t>Weitere Teile</a:t>
             </a:r>
           </a:p>
         </p:txBody>
       </p:sp>
       <p:cxnSp>
         <p:nvCxnSpPr>
-          <p:cNvPr id="5" name="Gerader Verbinder 4">
-            <a:extLst>
-              <a:ext uri="{FF2B5EF4-FFF2-40B4-BE49-F238E27FC236}">
-                <a16:creationId xmlns:a16="http://schemas.microsoft.com/office/drawing/2014/main" id="{2B753068-DCEB-B788-AD32-F324BF9F36F0}"/>
+          <p:cNvPr id="6" name="Gerader Verbinder 5">
+            <a:extLst>
+              <a:ext uri="{FF2B5EF4-FFF2-40B4-BE49-F238E27FC236}">
+                <a16:creationId xmlns:a16="http://schemas.microsoft.com/office/drawing/2014/main" id="{86D8AB01-C043-70CC-51BD-6A6967F3BAD5}"/>
               </a:ext>
             </a:extLst>
           </p:cNvPr>
@@ -4819,7 +5625,7 @@
         </p:nvCxnSpPr>
         <p:spPr>
           <a:xfrm>
-            <a:off x="1698171" y="1870788"/>
+            <a:off x="1576168" y="1118956"/>
             <a:ext cx="8714792" cy="0"/>
           </a:xfrm>
           <a:prstGeom prst="line">
@@ -4843,10 +5649,10 @@
       </p:cxnSp>
       <p:pic>
         <p:nvPicPr>
-          <p:cNvPr id="6" name="Grafik 5" descr="Ein Bild, das Text, Allgemeine Versorgung, Büroausstattung, Etikett enthält.&#10;&#10;KI-generierte Inhalte können fehlerhaft sein.">
-            <a:extLst>
-              <a:ext uri="{FF2B5EF4-FFF2-40B4-BE49-F238E27FC236}">
-                <a16:creationId xmlns:a16="http://schemas.microsoft.com/office/drawing/2014/main" id="{B109BC79-F612-DA75-4651-5C4278F2E95A}"/>
+          <p:cNvPr id="3" name="Grafik 2">
+            <a:extLst>
+              <a:ext uri="{FF2B5EF4-FFF2-40B4-BE49-F238E27FC236}">
+                <a16:creationId xmlns:a16="http://schemas.microsoft.com/office/drawing/2014/main" id="{EA13F5A4-757A-5D19-E1BF-CE2BF15D55FB}"/>
               </a:ext>
             </a:extLst>
           </p:cNvPr>
@@ -4856,21 +5662,14 @@
           <p:nvPr/>
         </p:nvPicPr>
         <p:blipFill>
-          <a:blip r:embed="rId2">
-            <a:extLst>
-              <a:ext uri="{28A0092B-C50C-407E-A947-70E740481C1C}">
-                <a14:useLocalDpi xmlns:a14="http://schemas.microsoft.com/office/drawing/2010/main" val="0"/>
-              </a:ext>
-            </a:extLst>
-          </a:blip>
-          <a:stretch>
-            <a:fillRect/>
-          </a:stretch>
+          <a:blip r:embed="rId2"/>
+          <a:srcRect r="10317"/>
+          <a:stretch/>
         </p:blipFill>
         <p:spPr>
           <a:xfrm>
-            <a:off x="4979768" y="1955711"/>
-            <a:ext cx="2232463" cy="1777916"/>
+            <a:off x="1576168" y="1780971"/>
+            <a:ext cx="2650106" cy="3958073"/>
           </a:xfrm>
           <a:prstGeom prst="rect">
             <a:avLst/>
@@ -4879,10 +5678,10 @@
       </p:pic>
       <p:pic>
         <p:nvPicPr>
-          <p:cNvPr id="8" name="Grafik 7" descr="Ein Bild, das Elektronik, Elektronisches Bauteil, Elektrisches Bauelement, Schaltung enthält.&#10;&#10;KI-generierte Inhalte können fehlerhaft sein.">
-            <a:extLst>
-              <a:ext uri="{FF2B5EF4-FFF2-40B4-BE49-F238E27FC236}">
-                <a16:creationId xmlns:a16="http://schemas.microsoft.com/office/drawing/2014/main" id="{AF376ADC-B7DD-2D3B-0180-9FCFD057D9AE}"/>
+          <p:cNvPr id="8" name="Grafik 7">
+            <a:extLst>
+              <a:ext uri="{FF2B5EF4-FFF2-40B4-BE49-F238E27FC236}">
+                <a16:creationId xmlns:a16="http://schemas.microsoft.com/office/drawing/2014/main" id="{A3B4D3C1-839B-CE86-0FA3-E04E8B52245C}"/>
               </a:ext>
             </a:extLst>
           </p:cNvPr>
@@ -4892,21 +5691,14 @@
           <p:nvPr/>
         </p:nvPicPr>
         <p:blipFill>
-          <a:blip r:embed="rId3">
-            <a:extLst>
-              <a:ext uri="{28A0092B-C50C-407E-A947-70E740481C1C}">
-                <a14:useLocalDpi xmlns:a14="http://schemas.microsoft.com/office/drawing/2010/main" val="0"/>
-              </a:ext>
-            </a:extLst>
-          </a:blip>
-          <a:stretch>
-            <a:fillRect/>
-          </a:stretch>
+          <a:blip r:embed="rId3"/>
+          <a:srcRect r="19006"/>
+          <a:stretch/>
         </p:blipFill>
         <p:spPr>
           <a:xfrm>
-            <a:off x="9517044" y="4279431"/>
-            <a:ext cx="1776107" cy="1535419"/>
+            <a:off x="4770947" y="1780972"/>
+            <a:ext cx="2650106" cy="3958072"/>
           </a:xfrm>
           <a:prstGeom prst="rect">
             <a:avLst/>
@@ -4915,10 +5707,10 @@
       </p:pic>
       <p:pic>
         <p:nvPicPr>
-          <p:cNvPr id="10" name="Grafik 9" descr="Ein Bild, das Elektronik, Elektrisches Bauelement, Elektronisches Bauteil, Schaltung enthält.&#10;&#10;KI-generierte Inhalte können fehlerhaft sein.">
-            <a:extLst>
-              <a:ext uri="{FF2B5EF4-FFF2-40B4-BE49-F238E27FC236}">
-                <a16:creationId xmlns:a16="http://schemas.microsoft.com/office/drawing/2014/main" id="{2C6DB4DF-7CAC-76B2-14FF-CF0AFF5F5D60}"/>
+          <p:cNvPr id="10" name="Grafik 9">
+            <a:extLst>
+              <a:ext uri="{FF2B5EF4-FFF2-40B4-BE49-F238E27FC236}">
+                <a16:creationId xmlns:a16="http://schemas.microsoft.com/office/drawing/2014/main" id="{1C5CCE42-FBEE-5BF3-B4C4-86B7174B0B4F}"/>
               </a:ext>
             </a:extLst>
           </p:cNvPr>
@@ -4928,138 +5720,24 @@
           <p:nvPr/>
         </p:nvPicPr>
         <p:blipFill>
-          <a:blip r:embed="rId4">
-            <a:extLst>
-              <a:ext uri="{28A0092B-C50C-407E-A947-70E740481C1C}">
-                <a14:useLocalDpi xmlns:a14="http://schemas.microsoft.com/office/drawing/2010/main" val="0"/>
-              </a:ext>
-            </a:extLst>
-          </a:blip>
-          <a:stretch>
-            <a:fillRect/>
-          </a:stretch>
+          <a:blip r:embed="rId4"/>
+          <a:srcRect r="25958"/>
+          <a:stretch/>
         </p:blipFill>
         <p:spPr>
           <a:xfrm>
-            <a:off x="8172633" y="2043827"/>
-            <a:ext cx="2232464" cy="2050686"/>
+            <a:off x="7965727" y="1780972"/>
+            <a:ext cx="2325233" cy="3956934"/>
           </a:xfrm>
           <a:prstGeom prst="rect">
             <a:avLst/>
           </a:prstGeom>
         </p:spPr>
       </p:pic>
-      <p:pic>
-        <p:nvPicPr>
-          <p:cNvPr id="12" name="Grafik 11" descr="Ein Bild, das Röhre enthält.&#10;&#10;KI-generierte Inhalte können fehlerhaft sein.">
-            <a:extLst>
-              <a:ext uri="{FF2B5EF4-FFF2-40B4-BE49-F238E27FC236}">
-                <a16:creationId xmlns:a16="http://schemas.microsoft.com/office/drawing/2014/main" id="{5D354501-3BFF-6440-5702-C64F04BF6ED4}"/>
-              </a:ext>
-            </a:extLst>
-          </p:cNvPr>
-          <p:cNvPicPr>
-            <a:picLocks noChangeAspect="1"/>
-          </p:cNvPicPr>
-          <p:nvPr/>
-        </p:nvPicPr>
-        <p:blipFill>
-          <a:blip r:embed="rId5">
-            <a:extLst>
-              <a:ext uri="{28A0092B-C50C-407E-A947-70E740481C1C}">
-                <a14:useLocalDpi xmlns:a14="http://schemas.microsoft.com/office/drawing/2010/main" val="0"/>
-              </a:ext>
-            </a:extLst>
-          </a:blip>
-          <a:stretch>
-            <a:fillRect/>
-          </a:stretch>
-        </p:blipFill>
-        <p:spPr>
-          <a:xfrm>
-            <a:off x="6719297" y="3307658"/>
-            <a:ext cx="1228602" cy="2233822"/>
-          </a:xfrm>
-          <a:prstGeom prst="rect">
-            <a:avLst/>
-          </a:prstGeom>
-        </p:spPr>
-      </p:pic>
-      <p:pic>
-        <p:nvPicPr>
-          <p:cNvPr id="14" name="Grafik 13" descr="Ein Bild, das Elektronik, Computerkomponenten, Elektronisches Bauteil, Elektrisches Bauelement enthält.&#10;&#10;KI-generierte Inhalte können fehlerhaft sein.">
-            <a:extLst>
-              <a:ext uri="{FF2B5EF4-FFF2-40B4-BE49-F238E27FC236}">
-                <a16:creationId xmlns:a16="http://schemas.microsoft.com/office/drawing/2014/main" id="{6B30D8AC-25CB-8DC9-7B69-C7A7727C16F1}"/>
-              </a:ext>
-            </a:extLst>
-          </p:cNvPr>
-          <p:cNvPicPr>
-            <a:picLocks noChangeAspect="1"/>
-          </p:cNvPicPr>
-          <p:nvPr/>
-        </p:nvPicPr>
-        <p:blipFill>
-          <a:blip r:embed="rId6">
-            <a:extLst>
-              <a:ext uri="{28A0092B-C50C-407E-A947-70E740481C1C}">
-                <a14:useLocalDpi xmlns:a14="http://schemas.microsoft.com/office/drawing/2010/main" val="0"/>
-              </a:ext>
-            </a:extLst>
-          </a:blip>
-          <a:stretch>
-            <a:fillRect/>
-          </a:stretch>
-        </p:blipFill>
-        <p:spPr>
-          <a:xfrm>
-            <a:off x="7709513" y="5087251"/>
-            <a:ext cx="1619317" cy="1455197"/>
-          </a:xfrm>
-          <a:prstGeom prst="rect">
-            <a:avLst/>
-          </a:prstGeom>
-        </p:spPr>
-      </p:pic>
-      <p:sp>
-        <p:nvSpPr>
-          <p:cNvPr id="15" name="Textfeld 14">
-            <a:extLst>
-              <a:ext uri="{FF2B5EF4-FFF2-40B4-BE49-F238E27FC236}">
-                <a16:creationId xmlns:a16="http://schemas.microsoft.com/office/drawing/2014/main" id="{D3227EC0-6C59-6CD2-5D53-172A65B2C243}"/>
-              </a:ext>
-            </a:extLst>
-          </p:cNvPr>
-          <p:cNvSpPr txBox="1"/>
-          <p:nvPr/>
-        </p:nvSpPr>
-        <p:spPr>
-          <a:xfrm>
-            <a:off x="233265" y="6456784"/>
-            <a:ext cx="5299788" cy="369332"/>
-          </a:xfrm>
-          <a:prstGeom prst="rect">
-            <a:avLst/>
-          </a:prstGeom>
-          <a:noFill/>
-        </p:spPr>
-        <p:txBody>
-          <a:bodyPr wrap="square" rtlCol="0">
-            <a:spAutoFit/>
-          </a:bodyPr>
-          <a:lstStyle/>
-          <a:p>
-            <a:r>
-              <a:rPr lang="de-DE" dirty="0"/>
-              <a:t>*Alle aufgeführten Bauteile stammen von Aliexpress</a:t>
-            </a:r>
-          </a:p>
-        </p:txBody>
-      </p:sp>
     </p:spTree>
     <p:extLst>
       <p:ext uri="{BB962C8B-B14F-4D97-AF65-F5344CB8AC3E}">
-        <p14:creationId xmlns:p14="http://schemas.microsoft.com/office/powerpoint/2010/main" val="1379536395"/>
+        <p14:creationId xmlns:p14="http://schemas.microsoft.com/office/powerpoint/2010/main" val="1652724053"/>
       </p:ext>
     </p:extLst>
   </p:cSld>
@@ -5086,71 +5764,134 @@
           <a:chExt cx="0" cy="0"/>
         </a:xfrm>
       </p:grpSpPr>
-      <p:pic>
-        <p:nvPicPr>
-          <p:cNvPr id="5" name="Inhaltsplatzhalter 4" descr="Ein Bild, das Text, Diagramm, Plan, technische Zeichnung enthält.&#10;&#10;KI-generierte Inhalte können fehlerhaft sein.">
-            <a:extLst>
-              <a:ext uri="{FF2B5EF4-FFF2-40B4-BE49-F238E27FC236}">
-                <a16:creationId xmlns:a16="http://schemas.microsoft.com/office/drawing/2014/main" id="{7B82A2CC-6A98-31A3-AE4C-FB7D82868BDA}"/>
-              </a:ext>
-            </a:extLst>
-          </p:cNvPr>
-          <p:cNvPicPr>
-            <a:picLocks noGrp="1" noChangeAspect="1"/>
-          </p:cNvPicPr>
-          <p:nvPr>
-            <p:ph idx="1"/>
-          </p:nvPr>
-        </p:nvPicPr>
-        <p:blipFill>
-          <a:blip r:embed="rId2">
-            <a:extLst>
-              <a:ext uri="{28A0092B-C50C-407E-A947-70E740481C1C}">
-                <a14:useLocalDpi xmlns:a14="http://schemas.microsoft.com/office/drawing/2010/main" val="0"/>
-              </a:ext>
-            </a:extLst>
-          </a:blip>
-          <a:srcRect l="18112" t="12063" r="21627" b="12230"/>
-          <a:stretch/>
-        </p:blipFill>
-        <p:spPr>
-          <a:xfrm>
-            <a:off x="2166061" y="-136062"/>
-            <a:ext cx="7859877" cy="6994062"/>
-          </a:xfrm>
-        </p:spPr>
-      </p:pic>
-      <p:sp>
-        <p:nvSpPr>
-          <p:cNvPr id="7" name="Textfeld 6">
-            <a:extLst>
-              <a:ext uri="{FF2B5EF4-FFF2-40B4-BE49-F238E27FC236}">
-                <a16:creationId xmlns:a16="http://schemas.microsoft.com/office/drawing/2014/main" id="{84DDF3DC-E437-73A9-3E48-A989147B64CA}"/>
-              </a:ext>
-            </a:extLst>
-          </p:cNvPr>
-          <p:cNvSpPr txBox="1"/>
+      <p:sp>
+        <p:nvSpPr>
+          <p:cNvPr id="4" name="Titel 1">
+            <a:extLst>
+              <a:ext uri="{FF2B5EF4-FFF2-40B4-BE49-F238E27FC236}">
+                <a16:creationId xmlns:a16="http://schemas.microsoft.com/office/drawing/2014/main" id="{BE92422F-6CFB-6703-F428-2208AF7C4F27}"/>
+              </a:ext>
+            </a:extLst>
+          </p:cNvPr>
+          <p:cNvSpPr txBox="1">
+            <a:spLocks/>
+          </p:cNvSpPr>
           <p:nvPr/>
         </p:nvSpPr>
         <p:spPr>
           <a:xfrm>
-            <a:off x="165619" y="6412077"/>
-            <a:ext cx="6097554" cy="369332"/>
+            <a:off x="3405187" y="16437"/>
+            <a:ext cx="5381625" cy="1019204"/>
           </a:xfrm>
           <a:prstGeom prst="rect">
             <a:avLst/>
           </a:prstGeom>
-          <a:noFill/>
-        </p:spPr>
-        <p:txBody>
-          <a:bodyPr wrap="square">
-            <a:spAutoFit/>
+        </p:spPr>
+        <p:txBody>
+          <a:bodyPr vert="horz" lIns="91440" tIns="45720" rIns="91440" bIns="45720" rtlCol="0" anchor="b">
+            <a:normAutofit/>
           </a:bodyPr>
-          <a:lstStyle/>
-          <a:p>
-            <a:r>
-              <a:rPr lang="de-DE" dirty="0"/>
-              <a:t>https://easyeda.com</a:t>
+          <a:lstStyle>
+            <a:lvl1pPr algn="ctr" defTabSz="914400" rtl="0" eaLnBrk="1" latinLnBrk="0" hangingPunct="1">
+              <a:lnSpc>
+                <a:spcPct val="90000"/>
+              </a:lnSpc>
+              <a:spcBef>
+                <a:spcPct val="0"/>
+              </a:spcBef>
+              <a:buNone/>
+              <a:defRPr sz="6000" kern="1200">
+                <a:solidFill>
+                  <a:schemeClr val="tx1"/>
+                </a:solidFill>
+                <a:latin typeface="+mj-lt"/>
+                <a:ea typeface="+mj-ea"/>
+                <a:cs typeface="+mj-cs"/>
+              </a:defRPr>
+            </a:lvl1pPr>
+          </a:lstStyle>
+          <a:p>
+            <a:r>
+              <a:rPr lang="de-DE" dirty="0">
+                <a:latin typeface="Impact" panose="020B0806030902050204" pitchFamily="34" charset="0"/>
+              </a:rPr>
+              <a:t>Fahrgestell</a:t>
+            </a:r>
+          </a:p>
+        </p:txBody>
+      </p:sp>
+      <p:cxnSp>
+        <p:nvCxnSpPr>
+          <p:cNvPr id="6" name="Gerader Verbinder 5">
+            <a:extLst>
+              <a:ext uri="{FF2B5EF4-FFF2-40B4-BE49-F238E27FC236}">
+                <a16:creationId xmlns:a16="http://schemas.microsoft.com/office/drawing/2014/main" id="{86D8AB01-C043-70CC-51BD-6A6967F3BAD5}"/>
+              </a:ext>
+            </a:extLst>
+          </p:cNvPr>
+          <p:cNvCxnSpPr/>
+          <p:nvPr/>
+        </p:nvCxnSpPr>
+        <p:spPr>
+          <a:xfrm>
+            <a:off x="1576168" y="1118956"/>
+            <a:ext cx="8714792" cy="0"/>
+          </a:xfrm>
+          <a:prstGeom prst="line">
+            <a:avLst/>
+          </a:prstGeom>
+        </p:spPr>
+        <p:style>
+          <a:lnRef idx="2">
+            <a:schemeClr val="dk1"/>
+          </a:lnRef>
+          <a:fillRef idx="0">
+            <a:schemeClr val="dk1"/>
+          </a:fillRef>
+          <a:effectRef idx="1">
+            <a:schemeClr val="dk1"/>
+          </a:effectRef>
+          <a:fontRef idx="minor">
+            <a:schemeClr val="tx1"/>
+          </a:fontRef>
+        </p:style>
+      </p:cxnSp>
+      <p:sp>
+        <p:nvSpPr>
+          <p:cNvPr id="2" name="Untertitel 2">
+            <a:extLst>
+              <a:ext uri="{FF2B5EF4-FFF2-40B4-BE49-F238E27FC236}">
+                <a16:creationId xmlns:a16="http://schemas.microsoft.com/office/drawing/2014/main" id="{07F31804-9B98-71F0-8A3E-BDECDDA49AE0}"/>
+              </a:ext>
+            </a:extLst>
+          </p:cNvPr>
+          <p:cNvSpPr>
+            <a:spLocks noGrp="1"/>
+          </p:cNvSpPr>
+          <p:nvPr>
+            <p:ph type="subTitle" idx="1"/>
+          </p:nvPr>
+        </p:nvSpPr>
+        <p:spPr>
+          <a:xfrm>
+            <a:off x="1576168" y="2095322"/>
+            <a:ext cx="8714792" cy="1791056"/>
+          </a:xfrm>
+        </p:spPr>
+        <p:txBody>
+          <a:bodyPr>
+            <a:noAutofit/>
+          </a:bodyPr>
+          <a:lstStyle/>
+          <a:p>
+            <a:pPr algn="l"/>
+            <a:r>
+              <a:rPr lang="de-DE" sz="2000" dirty="0">
+                <a:latin typeface="Liberation Sans" panose="020B0604020202020204" pitchFamily="34" charset="0"/>
+                <a:ea typeface="Liberation Sans" panose="020B0604020202020204" pitchFamily="34" charset="0"/>
+                <a:cs typeface="Liberation Sans" panose="020B0604020202020204" pitchFamily="34" charset="0"/>
+              </a:rPr>
+              <a:t>(Foto des Fahrgestells mit Kugellager etc.)</a:t>
             </a:r>
           </a:p>
         </p:txBody>
@@ -5158,7 +5899,7 @@
     </p:spTree>
     <p:extLst>
       <p:ext uri="{BB962C8B-B14F-4D97-AF65-F5344CB8AC3E}">
-        <p14:creationId xmlns:p14="http://schemas.microsoft.com/office/powerpoint/2010/main" val="4040044785"/>
+        <p14:creationId xmlns:p14="http://schemas.microsoft.com/office/powerpoint/2010/main" val="995308410"/>
       </p:ext>
     </p:extLst>
   </p:cSld>
@@ -5187,48 +5928,6 @@
       </p:grpSpPr>
       <p:sp>
         <p:nvSpPr>
-          <p:cNvPr id="2" name="Titel 1">
-            <a:extLst>
-              <a:ext uri="{FF2B5EF4-FFF2-40B4-BE49-F238E27FC236}">
-                <a16:creationId xmlns:a16="http://schemas.microsoft.com/office/drawing/2014/main" id="{413D0774-18A2-673D-283B-1C04DB36353E}"/>
-              </a:ext>
-            </a:extLst>
-          </p:cNvPr>
-          <p:cNvSpPr>
-            <a:spLocks noGrp="1"/>
-          </p:cNvSpPr>
-          <p:nvPr>
-            <p:ph type="ctrTitle"/>
-          </p:nvPr>
-        </p:nvSpPr>
-        <p:spPr>
-          <a:xfrm>
-            <a:off x="1524000" y="1269579"/>
-            <a:ext cx="9144000" cy="2387600"/>
-          </a:xfrm>
-        </p:spPr>
-        <p:txBody>
-          <a:bodyPr>
-            <a:normAutofit fontScale="90000"/>
-          </a:bodyPr>
-          <a:lstStyle/>
-          <a:p>
-            <a:br>
-              <a:rPr lang="de-DE" sz="10000" dirty="0">
-                <a:latin typeface="Impact" panose="020B0806030902050204" pitchFamily="34" charset="0"/>
-              </a:rPr>
-            </a:br>
-            <a:r>
-              <a:rPr lang="de-DE" sz="10000" dirty="0">
-                <a:latin typeface="Impact" panose="020B0806030902050204" pitchFamily="34" charset="0"/>
-              </a:rPr>
-              <a:t>Programmierung</a:t>
-            </a:r>
-          </a:p>
-        </p:txBody>
-      </p:sp>
-      <p:sp>
-        <p:nvSpPr>
           <p:cNvPr id="3" name="Untertitel 2">
             <a:extLst>
               <a:ext uri="{FF2B5EF4-FFF2-40B4-BE49-F238E27FC236}">
@@ -5245,8 +5944,8 @@
         </p:nvSpPr>
         <p:spPr>
           <a:xfrm>
-            <a:off x="1524000" y="4259635"/>
-            <a:ext cx="9144000" cy="1791056"/>
+            <a:off x="1576168" y="2095322"/>
+            <a:ext cx="8714792" cy="1791056"/>
           </a:xfrm>
         </p:spPr>
         <p:txBody>
@@ -5255,23 +5954,172 @@
           </a:bodyPr>
           <a:lstStyle/>
           <a:p>
-            <a:r>
-              <a:rPr lang="de-DE" sz="3000" dirty="0">
+            <a:pPr algn="l"/>
+            <a:r>
+              <a:rPr lang="de-DE" sz="2000" b="1" dirty="0">
                 <a:latin typeface="Liberation Sans" panose="020B0604020202020204" pitchFamily="34" charset="0"/>
                 <a:ea typeface="Liberation Sans" panose="020B0604020202020204" pitchFamily="34" charset="0"/>
                 <a:cs typeface="Liberation Sans" panose="020B0604020202020204" pitchFamily="34" charset="0"/>
               </a:rPr>
-              <a:t>Hossein</a:t>
+              <a:t>Positiv</a:t>
+            </a:r>
+          </a:p>
+          <a:p>
+            <a:pPr marL="457200" indent="-457200" algn="l">
+              <a:buFont typeface="Wingdings" panose="05000000000000000000" pitchFamily="2" charset="2"/>
+              <a:buChar char="v"/>
+            </a:pPr>
+            <a:r>
+              <a:rPr lang="de-DE" sz="2000" dirty="0">
+                <a:latin typeface="Liberation Sans" panose="020B0604020202020204" pitchFamily="34" charset="0"/>
+                <a:ea typeface="Liberation Sans" panose="020B0604020202020204" pitchFamily="34" charset="0"/>
+                <a:cs typeface="Liberation Sans" panose="020B0604020202020204" pitchFamily="34" charset="0"/>
+              </a:rPr>
+              <a:t>Doppeltes Fahrgestell</a:t>
+            </a:r>
+          </a:p>
+          <a:p>
+            <a:pPr marL="457200" indent="-457200" algn="l">
+              <a:buFont typeface="Wingdings" panose="05000000000000000000" pitchFamily="2" charset="2"/>
+              <a:buChar char="v"/>
+            </a:pPr>
+            <a:r>
+              <a:rPr lang="de-DE" sz="2000" dirty="0">
+                <a:latin typeface="Liberation Sans" panose="020B0604020202020204" pitchFamily="34" charset="0"/>
+                <a:ea typeface="Liberation Sans" panose="020B0604020202020204" pitchFamily="34" charset="0"/>
+                <a:cs typeface="Liberation Sans" panose="020B0604020202020204" pitchFamily="34" charset="0"/>
+              </a:rPr>
+              <a:t>Modulares System mit vielen externen Teilen</a:t>
+            </a:r>
+          </a:p>
+          <a:p>
+            <a:pPr marL="457200" indent="-457200" algn="l">
+              <a:buFont typeface="Wingdings" panose="05000000000000000000" pitchFamily="2" charset="2"/>
+              <a:buChar char="v"/>
+            </a:pPr>
+            <a:r>
+              <a:rPr lang="de-DE" sz="2000" dirty="0">
+                <a:latin typeface="Liberation Sans" panose="020B0604020202020204" pitchFamily="34" charset="0"/>
+                <a:ea typeface="Liberation Sans" panose="020B0604020202020204" pitchFamily="34" charset="0"/>
+                <a:cs typeface="Liberation Sans" panose="020B0604020202020204" pitchFamily="34" charset="0"/>
+              </a:rPr>
+              <a:t>Flexibilität des Materials ist ein Vorteil</a:t>
+            </a:r>
+          </a:p>
+          <a:p>
+            <a:pPr marL="457200" indent="-457200" algn="l">
+              <a:buFont typeface="Wingdings" panose="05000000000000000000" pitchFamily="2" charset="2"/>
+              <a:buChar char="v"/>
+            </a:pPr>
+            <a:endParaRPr lang="de-DE" sz="2000" dirty="0">
+              <a:latin typeface="Liberation Sans" panose="020B0604020202020204" pitchFamily="34" charset="0"/>
+              <a:ea typeface="Liberation Sans" panose="020B0604020202020204" pitchFamily="34" charset="0"/>
+              <a:cs typeface="Liberation Sans" panose="020B0604020202020204" pitchFamily="34" charset="0"/>
+            </a:endParaRPr>
+          </a:p>
+          <a:p>
+            <a:pPr algn="l"/>
+            <a:r>
+              <a:rPr lang="de-DE" sz="2000" b="1" dirty="0">
+                <a:latin typeface="Liberation Sans" panose="020B0604020202020204" pitchFamily="34" charset="0"/>
+                <a:ea typeface="Liberation Sans" panose="020B0604020202020204" pitchFamily="34" charset="0"/>
+                <a:cs typeface="Liberation Sans" panose="020B0604020202020204" pitchFamily="34" charset="0"/>
+              </a:rPr>
+              <a:t>Negativ</a:t>
+            </a:r>
+          </a:p>
+          <a:p>
+            <a:pPr marL="457200" indent="-457200" algn="l">
+              <a:buFont typeface="Wingdings" panose="05000000000000000000" pitchFamily="2" charset="2"/>
+              <a:buChar char="v"/>
+            </a:pPr>
+            <a:r>
+              <a:rPr lang="de-DE" sz="2000" dirty="0">
+                <a:latin typeface="Liberation Sans" panose="020B0604020202020204" pitchFamily="34" charset="0"/>
+                <a:ea typeface="Liberation Sans" panose="020B0604020202020204" pitchFamily="34" charset="0"/>
+                <a:cs typeface="Liberation Sans" panose="020B0604020202020204" pitchFamily="34" charset="0"/>
+              </a:rPr>
+              <a:t>Viele Testdrucke notwendig (Material- und Zeitaufwand)</a:t>
+            </a:r>
+          </a:p>
+          <a:p>
+            <a:pPr marL="457200" indent="-457200" algn="l">
+              <a:buFont typeface="Wingdings" panose="05000000000000000000" pitchFamily="2" charset="2"/>
+              <a:buChar char="v"/>
+            </a:pPr>
+            <a:r>
+              <a:rPr lang="de-DE" sz="2000" dirty="0">
+                <a:latin typeface="Liberation Sans" panose="020B0604020202020204" pitchFamily="34" charset="0"/>
+                <a:ea typeface="Liberation Sans" panose="020B0604020202020204" pitchFamily="34" charset="0"/>
+                <a:cs typeface="Liberation Sans" panose="020B0604020202020204" pitchFamily="34" charset="0"/>
+              </a:rPr>
+              <a:t>Millimeter können ein Modell unbrauchbar machen</a:t>
+            </a:r>
+          </a:p>
+        </p:txBody>
+      </p:sp>
+      <p:sp>
+        <p:nvSpPr>
+          <p:cNvPr id="4" name="Titel 1">
+            <a:extLst>
+              <a:ext uri="{FF2B5EF4-FFF2-40B4-BE49-F238E27FC236}">
+                <a16:creationId xmlns:a16="http://schemas.microsoft.com/office/drawing/2014/main" id="{BE92422F-6CFB-6703-F428-2208AF7C4F27}"/>
+              </a:ext>
+            </a:extLst>
+          </p:cNvPr>
+          <p:cNvSpPr txBox="1">
+            <a:spLocks/>
+          </p:cNvSpPr>
+          <p:nvPr/>
+        </p:nvSpPr>
+        <p:spPr>
+          <a:xfrm>
+            <a:off x="3405187" y="0"/>
+            <a:ext cx="5381625" cy="1019204"/>
+          </a:xfrm>
+          <a:prstGeom prst="rect">
+            <a:avLst/>
+          </a:prstGeom>
+        </p:spPr>
+        <p:txBody>
+          <a:bodyPr vert="horz" lIns="91440" tIns="45720" rIns="91440" bIns="45720" rtlCol="0" anchor="b">
+            <a:normAutofit/>
+          </a:bodyPr>
+          <a:lstStyle>
+            <a:lvl1pPr algn="ctr" defTabSz="914400" rtl="0" eaLnBrk="1" latinLnBrk="0" hangingPunct="1">
+              <a:lnSpc>
+                <a:spcPct val="90000"/>
+              </a:lnSpc>
+              <a:spcBef>
+                <a:spcPct val="0"/>
+              </a:spcBef>
+              <a:buNone/>
+              <a:defRPr sz="6000" kern="1200">
+                <a:solidFill>
+                  <a:schemeClr val="tx1"/>
+                </a:solidFill>
+                <a:latin typeface="+mj-lt"/>
+                <a:ea typeface="+mj-ea"/>
+                <a:cs typeface="+mj-cs"/>
+              </a:defRPr>
+            </a:lvl1pPr>
+          </a:lstStyle>
+          <a:p>
+            <a:r>
+              <a:rPr lang="de-DE" dirty="0">
+                <a:latin typeface="Impact" panose="020B0806030902050204" pitchFamily="34" charset="0"/>
+              </a:rPr>
+              <a:t>Zwischenfazit</a:t>
             </a:r>
           </a:p>
         </p:txBody>
       </p:sp>
       <p:cxnSp>
         <p:nvCxnSpPr>
-          <p:cNvPr id="5" name="Gerader Verbinder 4">
-            <a:extLst>
-              <a:ext uri="{FF2B5EF4-FFF2-40B4-BE49-F238E27FC236}">
-                <a16:creationId xmlns:a16="http://schemas.microsoft.com/office/drawing/2014/main" id="{2B753068-DCEB-B788-AD32-F324BF9F36F0}"/>
+          <p:cNvPr id="6" name="Gerader Verbinder 5">
+            <a:extLst>
+              <a:ext uri="{FF2B5EF4-FFF2-40B4-BE49-F238E27FC236}">
+                <a16:creationId xmlns:a16="http://schemas.microsoft.com/office/drawing/2014/main" id="{86D8AB01-C043-70CC-51BD-6A6967F3BAD5}"/>
               </a:ext>
             </a:extLst>
           </p:cNvPr>
@@ -5280,7 +6128,7 @@
         </p:nvCxnSpPr>
         <p:spPr>
           <a:xfrm>
-            <a:off x="1698171" y="3830217"/>
+            <a:off x="1576168" y="1118956"/>
             <a:ext cx="8714792" cy="0"/>
           </a:xfrm>
           <a:prstGeom prst="line">
@@ -5305,7 +6153,7 @@
     </p:spTree>
     <p:extLst>
       <p:ext uri="{BB962C8B-B14F-4D97-AF65-F5344CB8AC3E}">
-        <p14:creationId xmlns:p14="http://schemas.microsoft.com/office/powerpoint/2010/main" val="3934917728"/>
+        <p14:creationId xmlns:p14="http://schemas.microsoft.com/office/powerpoint/2010/main" val="1779069297"/>
       </p:ext>
     </p:extLst>
   </p:cSld>
@@ -5350,7 +6198,7 @@
         </p:nvSpPr>
         <p:spPr>
           <a:xfrm>
-            <a:off x="1524000" y="-689850"/>
+            <a:off x="1524000" y="1269579"/>
             <a:ext cx="9144000" cy="2387600"/>
           </a:xfrm>
         </p:spPr>
@@ -5364,7 +6212,7 @@
               <a:rPr lang="de-DE" sz="10000" dirty="0">
                 <a:latin typeface="Impact" panose="020B0806030902050204" pitchFamily="34" charset="0"/>
               </a:rPr>
-              <a:t>Programmierung</a:t>
+              <a:t>Elektronik</a:t>
             </a:r>
           </a:p>
         </p:txBody>
@@ -5387,7 +6235,7 @@
         </p:nvSpPr>
         <p:spPr>
           <a:xfrm>
-            <a:off x="898849" y="2533472"/>
+            <a:off x="1524000" y="4259635"/>
             <a:ext cx="9144000" cy="1791056"/>
           </a:xfrm>
         </p:spPr>
@@ -5397,44 +6245,13 @@
           </a:bodyPr>
           <a:lstStyle/>
           <a:p>
-            <a:pPr algn="l"/>
             <a:r>
               <a:rPr lang="de-DE" sz="3000" dirty="0">
                 <a:latin typeface="Liberation Sans" panose="020B0604020202020204" pitchFamily="34" charset="0"/>
                 <a:ea typeface="Liberation Sans" panose="020B0604020202020204" pitchFamily="34" charset="0"/>
                 <a:cs typeface="Liberation Sans" panose="020B0604020202020204" pitchFamily="34" charset="0"/>
               </a:rPr>
-              <a:t>Hossein Stichpunkte</a:t>
-            </a:r>
-          </a:p>
-          <a:p>
-            <a:pPr algn="l"/>
-            <a:endParaRPr lang="de-DE" sz="3000" dirty="0">
-              <a:latin typeface="Liberation Sans" panose="020B0604020202020204" pitchFamily="34" charset="0"/>
-              <a:ea typeface="Liberation Sans" panose="020B0604020202020204" pitchFamily="34" charset="0"/>
-              <a:cs typeface="Liberation Sans" panose="020B0604020202020204" pitchFamily="34" charset="0"/>
-            </a:endParaRPr>
-          </a:p>
-          <a:p>
-            <a:pPr algn="l"/>
-            <a:r>
-              <a:rPr lang="de-DE" sz="3000" dirty="0">
-                <a:latin typeface="Liberation Sans" panose="020B0604020202020204" pitchFamily="34" charset="0"/>
-                <a:ea typeface="Liberation Sans" panose="020B0604020202020204" pitchFamily="34" charset="0"/>
-                <a:cs typeface="Liberation Sans" panose="020B0604020202020204" pitchFamily="34" charset="0"/>
-              </a:rPr>
-              <a:t>Code!</a:t>
-            </a:r>
-          </a:p>
-          <a:p>
-            <a:pPr algn="l"/>
-            <a:r>
-              <a:rPr lang="de-DE" sz="3000" dirty="0">
-                <a:latin typeface="Liberation Sans" panose="020B0604020202020204" pitchFamily="34" charset="0"/>
-                <a:ea typeface="Liberation Sans" panose="020B0604020202020204" pitchFamily="34" charset="0"/>
-                <a:cs typeface="Liberation Sans" panose="020B0604020202020204" pitchFamily="34" charset="0"/>
-              </a:rPr>
-              <a:t>-&gt; Entwicklung</a:t>
+              <a:t>Julian</a:t>
             </a:r>
           </a:p>
         </p:txBody>
@@ -5453,7 +6270,7 @@
         </p:nvCxnSpPr>
         <p:spPr>
           <a:xfrm>
-            <a:off x="1698171" y="1870788"/>
+            <a:off x="1698171" y="3830217"/>
             <a:ext cx="8714792" cy="0"/>
           </a:xfrm>
           <a:prstGeom prst="line">
@@ -5478,7 +6295,7 @@
     </p:spTree>
     <p:extLst>
       <p:ext uri="{BB962C8B-B14F-4D97-AF65-F5344CB8AC3E}">
-        <p14:creationId xmlns:p14="http://schemas.microsoft.com/office/powerpoint/2010/main" val="2258326793"/>
+        <p14:creationId xmlns:p14="http://schemas.microsoft.com/office/powerpoint/2010/main" val="383897644"/>
       </p:ext>
     </p:extLst>
   </p:cSld>

--- a/Präsentation/Kettenfahrzeug.pptx
+++ b/Präsentation/Kettenfahrzeug.pptx
@@ -5,15 +5,15 @@
     <p:sldMasterId id="2147483648" r:id="rId1"/>
   </p:sldMasterIdLst>
   <p:notesMasterIdLst>
-    <p:notesMasterId r:id="rId16"/>
+    <p:notesMasterId r:id="rId18"/>
   </p:notesMasterIdLst>
   <p:sldIdLst>
     <p:sldId id="256" r:id="rId2"/>
     <p:sldId id="257" r:id="rId3"/>
     <p:sldId id="261" r:id="rId4"/>
-    <p:sldId id="258" r:id="rId5"/>
-    <p:sldId id="266" r:id="rId6"/>
-    <p:sldId id="268" r:id="rId7"/>
+    <p:sldId id="266" r:id="rId5"/>
+    <p:sldId id="268" r:id="rId6"/>
+    <p:sldId id="270" r:id="rId7"/>
     <p:sldId id="269" r:id="rId8"/>
     <p:sldId id="267" r:id="rId9"/>
     <p:sldId id="262" r:id="rId10"/>
@@ -21,7 +21,9 @@
     <p:sldId id="260" r:id="rId12"/>
     <p:sldId id="263" r:id="rId13"/>
     <p:sldId id="264" r:id="rId14"/>
-    <p:sldId id="265" r:id="rId15"/>
+    <p:sldId id="271" r:id="rId15"/>
+    <p:sldId id="272" r:id="rId16"/>
+    <p:sldId id="265" r:id="rId17"/>
   </p:sldIdLst>
   <p:sldSz cx="12192000" cy="6858000"/>
   <p:notesSz cx="6858000" cy="9144000"/>
@@ -221,7 +223,7 @@
           <a:p>
             <a:fld id="{C2F6FDA6-0D6A-4597-A732-5CBC71724CDA}" type="datetimeFigureOut">
               <a:rPr lang="de-DE" smtClean="0"/>
-              <a:t>21.03.2026</a:t>
+              <a:t>22.03.2026</a:t>
             </a:fld>
             <a:endParaRPr lang="de-DE"/>
           </a:p>
@@ -635,7 +637,7 @@
           <a:p>
             <a:fld id="{229CC8E3-8B86-4C26-9958-4FB51168DB07}" type="datetimeFigureOut">
               <a:rPr lang="de-DE" smtClean="0"/>
-              <a:t>21.03.2026</a:t>
+              <a:t>22.03.2026</a:t>
             </a:fld>
             <a:endParaRPr lang="de-DE"/>
           </a:p>
@@ -833,7 +835,7 @@
           <a:p>
             <a:fld id="{229CC8E3-8B86-4C26-9958-4FB51168DB07}" type="datetimeFigureOut">
               <a:rPr lang="de-DE" smtClean="0"/>
-              <a:t>21.03.2026</a:t>
+              <a:t>22.03.2026</a:t>
             </a:fld>
             <a:endParaRPr lang="de-DE"/>
           </a:p>
@@ -1041,7 +1043,7 @@
           <a:p>
             <a:fld id="{229CC8E3-8B86-4C26-9958-4FB51168DB07}" type="datetimeFigureOut">
               <a:rPr lang="de-DE" smtClean="0"/>
-              <a:t>21.03.2026</a:t>
+              <a:t>22.03.2026</a:t>
             </a:fld>
             <a:endParaRPr lang="de-DE"/>
           </a:p>
@@ -1239,7 +1241,7 @@
           <a:p>
             <a:fld id="{229CC8E3-8B86-4C26-9958-4FB51168DB07}" type="datetimeFigureOut">
               <a:rPr lang="de-DE" smtClean="0"/>
-              <a:t>21.03.2026</a:t>
+              <a:t>22.03.2026</a:t>
             </a:fld>
             <a:endParaRPr lang="de-DE"/>
           </a:p>
@@ -1514,7 +1516,7 @@
           <a:p>
             <a:fld id="{229CC8E3-8B86-4C26-9958-4FB51168DB07}" type="datetimeFigureOut">
               <a:rPr lang="de-DE" smtClean="0"/>
-              <a:t>21.03.2026</a:t>
+              <a:t>22.03.2026</a:t>
             </a:fld>
             <a:endParaRPr lang="de-DE"/>
           </a:p>
@@ -1779,7 +1781,7 @@
           <a:p>
             <a:fld id="{229CC8E3-8B86-4C26-9958-4FB51168DB07}" type="datetimeFigureOut">
               <a:rPr lang="de-DE" smtClean="0"/>
-              <a:t>21.03.2026</a:t>
+              <a:t>22.03.2026</a:t>
             </a:fld>
             <a:endParaRPr lang="de-DE"/>
           </a:p>
@@ -2191,7 +2193,7 @@
           <a:p>
             <a:fld id="{229CC8E3-8B86-4C26-9958-4FB51168DB07}" type="datetimeFigureOut">
               <a:rPr lang="de-DE" smtClean="0"/>
-              <a:t>21.03.2026</a:t>
+              <a:t>22.03.2026</a:t>
             </a:fld>
             <a:endParaRPr lang="de-DE"/>
           </a:p>
@@ -2332,7 +2334,7 @@
           <a:p>
             <a:fld id="{229CC8E3-8B86-4C26-9958-4FB51168DB07}" type="datetimeFigureOut">
               <a:rPr lang="de-DE" smtClean="0"/>
-              <a:t>21.03.2026</a:t>
+              <a:t>22.03.2026</a:t>
             </a:fld>
             <a:endParaRPr lang="de-DE"/>
           </a:p>
@@ -2445,7 +2447,7 @@
           <a:p>
             <a:fld id="{229CC8E3-8B86-4C26-9958-4FB51168DB07}" type="datetimeFigureOut">
               <a:rPr lang="de-DE" smtClean="0"/>
-              <a:t>21.03.2026</a:t>
+              <a:t>22.03.2026</a:t>
             </a:fld>
             <a:endParaRPr lang="de-DE"/>
           </a:p>
@@ -2756,7 +2758,7 @@
           <a:p>
             <a:fld id="{229CC8E3-8B86-4C26-9958-4FB51168DB07}" type="datetimeFigureOut">
               <a:rPr lang="de-DE" smtClean="0"/>
-              <a:t>21.03.2026</a:t>
+              <a:t>22.03.2026</a:t>
             </a:fld>
             <a:endParaRPr lang="de-DE"/>
           </a:p>
@@ -3044,7 +3046,7 @@
           <a:p>
             <a:fld id="{229CC8E3-8B86-4C26-9958-4FB51168DB07}" type="datetimeFigureOut">
               <a:rPr lang="de-DE" smtClean="0"/>
-              <a:t>21.03.2026</a:t>
+              <a:t>22.03.2026</a:t>
             </a:fld>
             <a:endParaRPr lang="de-DE"/>
           </a:p>
@@ -3285,7 +3287,7 @@
           <a:p>
             <a:fld id="{229CC8E3-8B86-4C26-9958-4FB51168DB07}" type="datetimeFigureOut">
               <a:rPr lang="de-DE" smtClean="0"/>
-              <a:t>21.03.2026</a:t>
+              <a:t>22.03.2026</a:t>
             </a:fld>
             <a:endParaRPr lang="de-DE"/>
           </a:p>
@@ -4748,6 +4750,256 @@
         </p:nvSpPr>
         <p:spPr>
           <a:xfrm>
+            <a:off x="1524000" y="1269579"/>
+            <a:ext cx="9144000" cy="2387600"/>
+          </a:xfrm>
+        </p:spPr>
+        <p:txBody>
+          <a:bodyPr>
+            <a:normAutofit fontScale="90000"/>
+          </a:bodyPr>
+          <a:lstStyle/>
+          <a:p>
+            <a:br>
+              <a:rPr lang="de-DE" sz="10000" dirty="0">
+                <a:latin typeface="Impact" panose="020B0806030902050204" pitchFamily="34" charset="0"/>
+              </a:rPr>
+            </a:br>
+            <a:r>
+              <a:rPr lang="de-DE" sz="10000" dirty="0">
+                <a:latin typeface="Impact" panose="020B0806030902050204" pitchFamily="34" charset="0"/>
+              </a:rPr>
+              <a:t>Allgemeines</a:t>
+            </a:r>
+          </a:p>
+        </p:txBody>
+      </p:sp>
+      <p:sp>
+        <p:nvSpPr>
+          <p:cNvPr id="3" name="Untertitel 2">
+            <a:extLst>
+              <a:ext uri="{FF2B5EF4-FFF2-40B4-BE49-F238E27FC236}">
+                <a16:creationId xmlns:a16="http://schemas.microsoft.com/office/drawing/2014/main" id="{93304FBE-99DF-EE64-5EB2-94852307E71F}"/>
+              </a:ext>
+            </a:extLst>
+          </p:cNvPr>
+          <p:cNvSpPr>
+            <a:spLocks noGrp="1"/>
+          </p:cNvSpPr>
+          <p:nvPr>
+            <p:ph type="subTitle" idx="1"/>
+          </p:nvPr>
+        </p:nvSpPr>
+        <p:spPr>
+          <a:xfrm>
+            <a:off x="1524000" y="4259635"/>
+            <a:ext cx="9144000" cy="1791056"/>
+          </a:xfrm>
+        </p:spPr>
+        <p:txBody>
+          <a:bodyPr>
+            <a:noAutofit/>
+          </a:bodyPr>
+          <a:lstStyle/>
+          <a:p>
+            <a:r>
+              <a:rPr lang="de-DE" sz="3000" dirty="0">
+                <a:latin typeface="Liberation Sans" panose="020B0604020202020204" pitchFamily="34" charset="0"/>
+                <a:ea typeface="Liberation Sans" panose="020B0604020202020204" pitchFamily="34" charset="0"/>
+                <a:cs typeface="Liberation Sans" panose="020B0604020202020204" pitchFamily="34" charset="0"/>
+              </a:rPr>
+              <a:t>Hossein</a:t>
+            </a:r>
+          </a:p>
+        </p:txBody>
+      </p:sp>
+      <p:cxnSp>
+        <p:nvCxnSpPr>
+          <p:cNvPr id="5" name="Gerader Verbinder 4">
+            <a:extLst>
+              <a:ext uri="{FF2B5EF4-FFF2-40B4-BE49-F238E27FC236}">
+                <a16:creationId xmlns:a16="http://schemas.microsoft.com/office/drawing/2014/main" id="{2B753068-DCEB-B788-AD32-F324BF9F36F0}"/>
+              </a:ext>
+            </a:extLst>
+          </p:cNvPr>
+          <p:cNvCxnSpPr/>
+          <p:nvPr/>
+        </p:nvCxnSpPr>
+        <p:spPr>
+          <a:xfrm>
+            <a:off x="1698171" y="3830217"/>
+            <a:ext cx="8714792" cy="0"/>
+          </a:xfrm>
+          <a:prstGeom prst="line">
+            <a:avLst/>
+          </a:prstGeom>
+        </p:spPr>
+        <p:style>
+          <a:lnRef idx="2">
+            <a:schemeClr val="dk1"/>
+          </a:lnRef>
+          <a:fillRef idx="0">
+            <a:schemeClr val="dk1"/>
+          </a:fillRef>
+          <a:effectRef idx="1">
+            <a:schemeClr val="dk1"/>
+          </a:effectRef>
+          <a:fontRef idx="minor">
+            <a:schemeClr val="tx1"/>
+          </a:fontRef>
+        </p:style>
+      </p:cxnSp>
+    </p:spTree>
+    <p:extLst>
+      <p:ext uri="{BB962C8B-B14F-4D97-AF65-F5344CB8AC3E}">
+        <p14:creationId xmlns:p14="http://schemas.microsoft.com/office/powerpoint/2010/main" val="3495136108"/>
+      </p:ext>
+    </p:extLst>
+  </p:cSld>
+  <p:clrMapOvr>
+    <a:masterClrMapping/>
+  </p:clrMapOvr>
+</p:sld>
+</file>
+
+<file path=ppt/slides/slide15.xml><?xml version="1.0" encoding="utf-8"?>
+<p:sld xmlns:a="http://schemas.openxmlformats.org/drawingml/2006/main" xmlns:r="http://schemas.openxmlformats.org/officeDocument/2006/relationships" xmlns:p="http://schemas.openxmlformats.org/presentationml/2006/main">
+  <p:cSld>
+    <p:spTree>
+      <p:nvGrpSpPr>
+        <p:cNvPr id="1" name=""/>
+        <p:cNvGrpSpPr/>
+        <p:nvPr/>
+      </p:nvGrpSpPr>
+      <p:grpSpPr>
+        <a:xfrm>
+          <a:off x="0" y="0"/>
+          <a:ext cx="0" cy="0"/>
+          <a:chOff x="0" y="0"/>
+          <a:chExt cx="0" cy="0"/>
+        </a:xfrm>
+      </p:grpSpPr>
+      <p:sp>
+        <p:nvSpPr>
+          <p:cNvPr id="2" name="Titel 1">
+            <a:extLst>
+              <a:ext uri="{FF2B5EF4-FFF2-40B4-BE49-F238E27FC236}">
+                <a16:creationId xmlns:a16="http://schemas.microsoft.com/office/drawing/2014/main" id="{413D0774-18A2-673D-283B-1C04DB36353E}"/>
+              </a:ext>
+            </a:extLst>
+          </p:cNvPr>
+          <p:cNvSpPr>
+            <a:spLocks noGrp="1"/>
+          </p:cNvSpPr>
+          <p:nvPr>
+            <p:ph type="ctrTitle"/>
+          </p:nvPr>
+        </p:nvSpPr>
+        <p:spPr>
+          <a:xfrm>
+            <a:off x="1524000" y="38100"/>
+            <a:ext cx="9144000" cy="926225"/>
+          </a:xfrm>
+        </p:spPr>
+        <p:txBody>
+          <a:bodyPr>
+            <a:normAutofit/>
+          </a:bodyPr>
+          <a:lstStyle/>
+          <a:p>
+            <a:r>
+              <a:rPr lang="de-DE" dirty="0">
+                <a:latin typeface="Impact" panose="020B0806030902050204" pitchFamily="34" charset="0"/>
+              </a:rPr>
+              <a:t>Allgemeines</a:t>
+            </a:r>
+          </a:p>
+        </p:txBody>
+      </p:sp>
+      <p:cxnSp>
+        <p:nvCxnSpPr>
+          <p:cNvPr id="5" name="Gerader Verbinder 4">
+            <a:extLst>
+              <a:ext uri="{FF2B5EF4-FFF2-40B4-BE49-F238E27FC236}">
+                <a16:creationId xmlns:a16="http://schemas.microsoft.com/office/drawing/2014/main" id="{2B753068-DCEB-B788-AD32-F324BF9F36F0}"/>
+              </a:ext>
+            </a:extLst>
+          </p:cNvPr>
+          <p:cNvCxnSpPr/>
+          <p:nvPr/>
+        </p:nvCxnSpPr>
+        <p:spPr>
+          <a:xfrm>
+            <a:off x="1738604" y="987263"/>
+            <a:ext cx="8714792" cy="0"/>
+          </a:xfrm>
+          <a:prstGeom prst="line">
+            <a:avLst/>
+          </a:prstGeom>
+        </p:spPr>
+        <p:style>
+          <a:lnRef idx="2">
+            <a:schemeClr val="dk1"/>
+          </a:lnRef>
+          <a:fillRef idx="0">
+            <a:schemeClr val="dk1"/>
+          </a:fillRef>
+          <a:effectRef idx="1">
+            <a:schemeClr val="dk1"/>
+          </a:effectRef>
+          <a:fontRef idx="minor">
+            <a:schemeClr val="tx1"/>
+          </a:fontRef>
+        </p:style>
+      </p:cxnSp>
+    </p:spTree>
+    <p:extLst>
+      <p:ext uri="{BB962C8B-B14F-4D97-AF65-F5344CB8AC3E}">
+        <p14:creationId xmlns:p14="http://schemas.microsoft.com/office/powerpoint/2010/main" val="2401350442"/>
+      </p:ext>
+    </p:extLst>
+  </p:cSld>
+  <p:clrMapOvr>
+    <a:masterClrMapping/>
+  </p:clrMapOvr>
+</p:sld>
+</file>
+
+<file path=ppt/slides/slide16.xml><?xml version="1.0" encoding="utf-8"?>
+<p:sld xmlns:a="http://schemas.openxmlformats.org/drawingml/2006/main" xmlns:r="http://schemas.openxmlformats.org/officeDocument/2006/relationships" xmlns:p="http://schemas.openxmlformats.org/presentationml/2006/main">
+  <p:cSld>
+    <p:spTree>
+      <p:nvGrpSpPr>
+        <p:cNvPr id="1" name=""/>
+        <p:cNvGrpSpPr/>
+        <p:nvPr/>
+      </p:nvGrpSpPr>
+      <p:grpSpPr>
+        <a:xfrm>
+          <a:off x="0" y="0"/>
+          <a:ext cx="0" cy="0"/>
+          <a:chOff x="0" y="0"/>
+          <a:chExt cx="0" cy="0"/>
+        </a:xfrm>
+      </p:grpSpPr>
+      <p:sp>
+        <p:nvSpPr>
+          <p:cNvPr id="2" name="Titel 1">
+            <a:extLst>
+              <a:ext uri="{FF2B5EF4-FFF2-40B4-BE49-F238E27FC236}">
+                <a16:creationId xmlns:a16="http://schemas.microsoft.com/office/drawing/2014/main" id="{413D0774-18A2-673D-283B-1C04DB36353E}"/>
+              </a:ext>
+            </a:extLst>
+          </p:cNvPr>
+          <p:cNvSpPr>
+            <a:spLocks noGrp="1"/>
+          </p:cNvSpPr>
+          <p:nvPr>
+            <p:ph type="ctrTitle"/>
+          </p:nvPr>
+        </p:nvSpPr>
+        <p:spPr>
+          <a:xfrm>
             <a:off x="1524000" y="19053"/>
             <a:ext cx="9144000" cy="945272"/>
           </a:xfrm>
@@ -5212,77 +5464,6 @@
       </p:grpSpPr>
       <p:sp>
         <p:nvSpPr>
-          <p:cNvPr id="3" name="Untertitel 2">
-            <a:extLst>
-              <a:ext uri="{FF2B5EF4-FFF2-40B4-BE49-F238E27FC236}">
-                <a16:creationId xmlns:a16="http://schemas.microsoft.com/office/drawing/2014/main" id="{93304FBE-99DF-EE64-5EB2-94852307E71F}"/>
-              </a:ext>
-            </a:extLst>
-          </p:cNvPr>
-          <p:cNvSpPr>
-            <a:spLocks noGrp="1"/>
-          </p:cNvSpPr>
-          <p:nvPr>
-            <p:ph type="subTitle" idx="1"/>
-          </p:nvPr>
-        </p:nvSpPr>
-        <p:spPr>
-          <a:xfrm>
-            <a:off x="1576168" y="2095322"/>
-            <a:ext cx="8714792" cy="1791056"/>
-          </a:xfrm>
-        </p:spPr>
-        <p:txBody>
-          <a:bodyPr>
-            <a:noAutofit/>
-          </a:bodyPr>
-          <a:lstStyle/>
-          <a:p>
-            <a:pPr marL="457200" indent="-457200" algn="l">
-              <a:buFont typeface="Wingdings" panose="05000000000000000000" pitchFamily="2" charset="2"/>
-              <a:buChar char="v"/>
-            </a:pPr>
-            <a:r>
-              <a:rPr lang="de-DE" sz="2000" dirty="0">
-                <a:latin typeface="Liberation Sans" panose="020B0604020202020204" pitchFamily="34" charset="0"/>
-                <a:ea typeface="Liberation Sans" panose="020B0604020202020204" pitchFamily="34" charset="0"/>
-                <a:cs typeface="Liberation Sans" panose="020B0604020202020204" pitchFamily="34" charset="0"/>
-              </a:rPr>
-              <a:t>Frühe durchdachte Planung lohnt sich</a:t>
-            </a:r>
-          </a:p>
-          <a:p>
-            <a:pPr marL="457200" indent="-457200" algn="l">
-              <a:buFont typeface="Wingdings" panose="05000000000000000000" pitchFamily="2" charset="2"/>
-              <a:buChar char="v"/>
-            </a:pPr>
-            <a:r>
-              <a:rPr lang="de-DE" sz="2000" dirty="0">
-                <a:latin typeface="Liberation Sans" panose="020B0604020202020204" pitchFamily="34" charset="0"/>
-                <a:ea typeface="Liberation Sans" panose="020B0604020202020204" pitchFamily="34" charset="0"/>
-                <a:cs typeface="Liberation Sans" panose="020B0604020202020204" pitchFamily="34" charset="0"/>
-              </a:rPr>
-              <a:t>Man muss etwaige 3D-Druck-Ungenauigkeiten antizipieren (und kreativ lösen) können</a:t>
-            </a:r>
-          </a:p>
-          <a:p>
-            <a:pPr marL="457200" indent="-457200" algn="l">
-              <a:buFont typeface="Wingdings" panose="05000000000000000000" pitchFamily="2" charset="2"/>
-              <a:buChar char="v"/>
-            </a:pPr>
-            <a:r>
-              <a:rPr lang="de-DE" sz="2000" dirty="0">
-                <a:latin typeface="Liberation Sans" panose="020B0604020202020204" pitchFamily="34" charset="0"/>
-                <a:ea typeface="Liberation Sans" panose="020B0604020202020204" pitchFamily="34" charset="0"/>
-                <a:cs typeface="Liberation Sans" panose="020B0604020202020204" pitchFamily="34" charset="0"/>
-              </a:rPr>
-              <a:t>Improvisation ist oft notwendig</a:t>
-            </a:r>
-          </a:p>
-        </p:txBody>
-      </p:sp>
-      <p:sp>
-        <p:nvSpPr>
           <p:cNvPr id="4" name="Titel 1">
             <a:extLst>
               <a:ext uri="{FF2B5EF4-FFF2-40B4-BE49-F238E27FC236}">
@@ -5332,7 +5513,7 @@
               <a:rPr lang="de-DE" dirty="0">
                 <a:latin typeface="Impact" panose="020B0806030902050204" pitchFamily="34" charset="0"/>
               </a:rPr>
-              <a:t>Konstruktion</a:t>
+              <a:t>Rahmen</a:t>
             </a:r>
           </a:p>
         </p:txBody>
@@ -5373,10 +5554,40 @@
           </a:fontRef>
         </p:style>
       </p:cxnSp>
+      <p:pic>
+        <p:nvPicPr>
+          <p:cNvPr id="5" name="Grafik 4">
+            <a:extLst>
+              <a:ext uri="{FF2B5EF4-FFF2-40B4-BE49-F238E27FC236}">
+                <a16:creationId xmlns:a16="http://schemas.microsoft.com/office/drawing/2014/main" id="{F7506FDB-45FA-1744-3418-9C5A4750199B}"/>
+              </a:ext>
+            </a:extLst>
+          </p:cNvPr>
+          <p:cNvPicPr>
+            <a:picLocks noChangeAspect="1"/>
+          </p:cNvPicPr>
+          <p:nvPr/>
+        </p:nvPicPr>
+        <p:blipFill>
+          <a:blip r:embed="rId2"/>
+          <a:stretch>
+            <a:fillRect/>
+          </a:stretch>
+        </p:blipFill>
+        <p:spPr>
+          <a:xfrm>
+            <a:off x="1576165" y="1508851"/>
+            <a:ext cx="8714793" cy="4872787"/>
+          </a:xfrm>
+          <a:prstGeom prst="rect">
+            <a:avLst/>
+          </a:prstGeom>
+        </p:spPr>
+      </p:pic>
     </p:spTree>
     <p:extLst>
       <p:ext uri="{BB962C8B-B14F-4D97-AF65-F5344CB8AC3E}">
-        <p14:creationId xmlns:p14="http://schemas.microsoft.com/office/powerpoint/2010/main" val="4088546157"/>
+        <p14:creationId xmlns:p14="http://schemas.microsoft.com/office/powerpoint/2010/main" val="3219921335"/>
       </p:ext>
     </p:extLst>
   </p:cSld>
@@ -5454,7 +5665,7 @@
               <a:rPr lang="de-DE" dirty="0">
                 <a:latin typeface="Impact" panose="020B0806030902050204" pitchFamily="34" charset="0"/>
               </a:rPr>
-              <a:t>Rahmen</a:t>
+              <a:t>Weitere Teile</a:t>
             </a:r>
           </a:p>
         </p:txBody>
@@ -5497,10 +5708,10 @@
       </p:cxnSp>
       <p:pic>
         <p:nvPicPr>
-          <p:cNvPr id="5" name="Grafik 4">
-            <a:extLst>
-              <a:ext uri="{FF2B5EF4-FFF2-40B4-BE49-F238E27FC236}">
-                <a16:creationId xmlns:a16="http://schemas.microsoft.com/office/drawing/2014/main" id="{F7506FDB-45FA-1744-3418-9C5A4750199B}"/>
+          <p:cNvPr id="3" name="Grafik 2">
+            <a:extLst>
+              <a:ext uri="{FF2B5EF4-FFF2-40B4-BE49-F238E27FC236}">
+                <a16:creationId xmlns:a16="http://schemas.microsoft.com/office/drawing/2014/main" id="{EA13F5A4-757A-5D19-E1BF-CE2BF15D55FB}"/>
               </a:ext>
             </a:extLst>
           </p:cNvPr>
@@ -5511,14 +5722,71 @@
         </p:nvPicPr>
         <p:blipFill>
           <a:blip r:embed="rId2"/>
-          <a:stretch>
-            <a:fillRect/>
-          </a:stretch>
+          <a:srcRect r="10317"/>
+          <a:stretch/>
         </p:blipFill>
         <p:spPr>
           <a:xfrm>
-            <a:off x="1576165" y="1508851"/>
-            <a:ext cx="8714793" cy="4872787"/>
+            <a:off x="1576168" y="1780971"/>
+            <a:ext cx="2650106" cy="3958073"/>
+          </a:xfrm>
+          <a:prstGeom prst="rect">
+            <a:avLst/>
+          </a:prstGeom>
+        </p:spPr>
+      </p:pic>
+      <p:pic>
+        <p:nvPicPr>
+          <p:cNvPr id="8" name="Grafik 7">
+            <a:extLst>
+              <a:ext uri="{FF2B5EF4-FFF2-40B4-BE49-F238E27FC236}">
+                <a16:creationId xmlns:a16="http://schemas.microsoft.com/office/drawing/2014/main" id="{A3B4D3C1-839B-CE86-0FA3-E04E8B52245C}"/>
+              </a:ext>
+            </a:extLst>
+          </p:cNvPr>
+          <p:cNvPicPr>
+            <a:picLocks noChangeAspect="1"/>
+          </p:cNvPicPr>
+          <p:nvPr/>
+        </p:nvPicPr>
+        <p:blipFill>
+          <a:blip r:embed="rId3"/>
+          <a:srcRect r="19006"/>
+          <a:stretch/>
+        </p:blipFill>
+        <p:spPr>
+          <a:xfrm>
+            <a:off x="4770947" y="1780972"/>
+            <a:ext cx="2650106" cy="3958072"/>
+          </a:xfrm>
+          <a:prstGeom prst="rect">
+            <a:avLst/>
+          </a:prstGeom>
+        </p:spPr>
+      </p:pic>
+      <p:pic>
+        <p:nvPicPr>
+          <p:cNvPr id="10" name="Grafik 9">
+            <a:extLst>
+              <a:ext uri="{FF2B5EF4-FFF2-40B4-BE49-F238E27FC236}">
+                <a16:creationId xmlns:a16="http://schemas.microsoft.com/office/drawing/2014/main" id="{1C5CCE42-FBEE-5BF3-B4C4-86B7174B0B4F}"/>
+              </a:ext>
+            </a:extLst>
+          </p:cNvPr>
+          <p:cNvPicPr>
+            <a:picLocks noChangeAspect="1"/>
+          </p:cNvPicPr>
+          <p:nvPr/>
+        </p:nvPicPr>
+        <p:blipFill>
+          <a:blip r:embed="rId4"/>
+          <a:srcRect r="25958"/>
+          <a:stretch/>
+        </p:blipFill>
+        <p:spPr>
+          <a:xfrm>
+            <a:off x="7965727" y="1780972"/>
+            <a:ext cx="2325233" cy="3956934"/>
           </a:xfrm>
           <a:prstGeom prst="rect">
             <a:avLst/>
@@ -5528,7 +5796,7 @@
     </p:spTree>
     <p:extLst>
       <p:ext uri="{BB962C8B-B14F-4D97-AF65-F5344CB8AC3E}">
-        <p14:creationId xmlns:p14="http://schemas.microsoft.com/office/powerpoint/2010/main" val="3219921335"/>
+        <p14:creationId xmlns:p14="http://schemas.microsoft.com/office/powerpoint/2010/main" val="1652724053"/>
       </p:ext>
     </p:extLst>
   </p:cSld>
@@ -5571,8 +5839,8 @@
         </p:nvSpPr>
         <p:spPr>
           <a:xfrm>
-            <a:off x="3405187" y="0"/>
-            <a:ext cx="5381625" cy="1019204"/>
+            <a:off x="2524664" y="0"/>
+            <a:ext cx="7142672" cy="1019204"/>
           </a:xfrm>
           <a:prstGeom prst="rect">
             <a:avLst/>
@@ -5606,7 +5874,7 @@
               <a:rPr lang="de-DE" dirty="0">
                 <a:latin typeface="Impact" panose="020B0806030902050204" pitchFamily="34" charset="0"/>
               </a:rPr>
-              <a:t>Weitere Teile</a:t>
+              <a:t>Kabelmanagement</a:t>
             </a:r>
           </a:p>
         </p:txBody>
@@ -5647,97 +5915,285 @@
           </a:fontRef>
         </p:style>
       </p:cxnSp>
-      <p:pic>
-        <p:nvPicPr>
-          <p:cNvPr id="3" name="Grafik 2">
-            <a:extLst>
-              <a:ext uri="{FF2B5EF4-FFF2-40B4-BE49-F238E27FC236}">
-                <a16:creationId xmlns:a16="http://schemas.microsoft.com/office/drawing/2014/main" id="{EA13F5A4-757A-5D19-E1BF-CE2BF15D55FB}"/>
-              </a:ext>
-            </a:extLst>
-          </p:cNvPr>
-          <p:cNvPicPr>
-            <a:picLocks noChangeAspect="1"/>
-          </p:cNvPicPr>
+      <p:sp>
+        <p:nvSpPr>
+          <p:cNvPr id="2" name="Untertitel 2">
+            <a:extLst>
+              <a:ext uri="{FF2B5EF4-FFF2-40B4-BE49-F238E27FC236}">
+                <a16:creationId xmlns:a16="http://schemas.microsoft.com/office/drawing/2014/main" id="{07F31804-9B98-71F0-8A3E-BDECDDA49AE0}"/>
+              </a:ext>
+            </a:extLst>
+          </p:cNvPr>
+          <p:cNvSpPr>
+            <a:spLocks noGrp="1"/>
+          </p:cNvSpPr>
+          <p:nvPr>
+            <p:ph type="subTitle" idx="1"/>
+          </p:nvPr>
+        </p:nvSpPr>
+        <p:spPr>
+          <a:xfrm>
+            <a:off x="1576168" y="2095322"/>
+            <a:ext cx="4519832" cy="1791056"/>
+          </a:xfrm>
+        </p:spPr>
+        <p:txBody>
+          <a:bodyPr>
+            <a:noAutofit/>
+          </a:bodyPr>
+          <a:lstStyle/>
+          <a:p>
+            <a:pPr marL="342900" indent="-342900" algn="l">
+              <a:buFont typeface="Wingdings" panose="05000000000000000000" pitchFamily="2" charset="2"/>
+              <a:buChar char="v"/>
+            </a:pPr>
+            <a:r>
+              <a:rPr lang="de-DE" sz="2000" dirty="0">
+                <a:latin typeface="Liberation Sans" panose="020B0604020202020204" pitchFamily="34" charset="0"/>
+                <a:ea typeface="Liberation Sans" panose="020B0604020202020204" pitchFamily="34" charset="0"/>
+                <a:cs typeface="Liberation Sans" panose="020B0604020202020204" pitchFamily="34" charset="0"/>
+              </a:rPr>
+              <a:t>Oft unterschätzter Faktor</a:t>
+            </a:r>
+          </a:p>
+          <a:p>
+            <a:pPr marL="342900" indent="-342900" algn="l">
+              <a:buFont typeface="Wingdings" panose="05000000000000000000" pitchFamily="2" charset="2"/>
+              <a:buChar char="v"/>
+            </a:pPr>
+            <a:r>
+              <a:rPr lang="de-DE" sz="2000" dirty="0">
+                <a:latin typeface="Liberation Sans" panose="020B0604020202020204" pitchFamily="34" charset="0"/>
+                <a:ea typeface="Liberation Sans" panose="020B0604020202020204" pitchFamily="34" charset="0"/>
+                <a:cs typeface="Liberation Sans" panose="020B0604020202020204" pitchFamily="34" charset="0"/>
+              </a:rPr>
+              <a:t>Flexibilität muss gewährleistet sein</a:t>
+            </a:r>
+          </a:p>
+          <a:p>
+            <a:pPr marL="342900" indent="-342900" algn="l">
+              <a:buFont typeface="Wingdings" panose="05000000000000000000" pitchFamily="2" charset="2"/>
+              <a:buChar char="v"/>
+            </a:pPr>
+            <a:r>
+              <a:rPr lang="de-DE" sz="2000" dirty="0">
+                <a:latin typeface="Liberation Sans" panose="020B0604020202020204" pitchFamily="34" charset="0"/>
+                <a:ea typeface="Liberation Sans" panose="020B0604020202020204" pitchFamily="34" charset="0"/>
+                <a:cs typeface="Liberation Sans" panose="020B0604020202020204" pitchFamily="34" charset="0"/>
+              </a:rPr>
+              <a:t>Verschiedene Mittel, um gutes Kabelmanagement zu gewährleisten</a:t>
+            </a:r>
+          </a:p>
+        </p:txBody>
+      </p:sp>
+      <p:sp>
+        <p:nvSpPr>
+          <p:cNvPr id="3" name="Untertitel 2">
+            <a:extLst>
+              <a:ext uri="{FF2B5EF4-FFF2-40B4-BE49-F238E27FC236}">
+                <a16:creationId xmlns:a16="http://schemas.microsoft.com/office/drawing/2014/main" id="{55BAE6D4-CEFF-172A-3EFF-6E09CB96AA16}"/>
+              </a:ext>
+            </a:extLst>
+          </p:cNvPr>
+          <p:cNvSpPr txBox="1">
+            <a:spLocks/>
+          </p:cNvSpPr>
           <p:nvPr/>
-        </p:nvPicPr>
-        <p:blipFill>
-          <a:blip r:embed="rId2"/>
-          <a:srcRect r="10317"/>
-          <a:stretch/>
-        </p:blipFill>
-        <p:spPr>
-          <a:xfrm>
-            <a:off x="1576168" y="1780971"/>
-            <a:ext cx="2650106" cy="3958073"/>
+        </p:nvSpPr>
+        <p:spPr>
+          <a:xfrm>
+            <a:off x="6443932" y="2095322"/>
+            <a:ext cx="3847028" cy="1791056"/>
           </a:xfrm>
           <a:prstGeom prst="rect">
             <a:avLst/>
           </a:prstGeom>
         </p:spPr>
-      </p:pic>
-      <p:pic>
-        <p:nvPicPr>
-          <p:cNvPr id="8" name="Grafik 7">
-            <a:extLst>
-              <a:ext uri="{FF2B5EF4-FFF2-40B4-BE49-F238E27FC236}">
-                <a16:creationId xmlns:a16="http://schemas.microsoft.com/office/drawing/2014/main" id="{A3B4D3C1-839B-CE86-0FA3-E04E8B52245C}"/>
-              </a:ext>
-            </a:extLst>
-          </p:cNvPr>
-          <p:cNvPicPr>
-            <a:picLocks noChangeAspect="1"/>
-          </p:cNvPicPr>
-          <p:nvPr/>
-        </p:nvPicPr>
-        <p:blipFill>
-          <a:blip r:embed="rId3"/>
-          <a:srcRect r="19006"/>
-          <a:stretch/>
-        </p:blipFill>
-        <p:spPr>
-          <a:xfrm>
-            <a:off x="4770947" y="1780972"/>
-            <a:ext cx="2650106" cy="3958072"/>
-          </a:xfrm>
-          <a:prstGeom prst="rect">
-            <a:avLst/>
-          </a:prstGeom>
-        </p:spPr>
-      </p:pic>
-      <p:pic>
-        <p:nvPicPr>
-          <p:cNvPr id="10" name="Grafik 9">
-            <a:extLst>
-              <a:ext uri="{FF2B5EF4-FFF2-40B4-BE49-F238E27FC236}">
-                <a16:creationId xmlns:a16="http://schemas.microsoft.com/office/drawing/2014/main" id="{1C5CCE42-FBEE-5BF3-B4C4-86B7174B0B4F}"/>
-              </a:ext>
-            </a:extLst>
-          </p:cNvPr>
-          <p:cNvPicPr>
-            <a:picLocks noChangeAspect="1"/>
-          </p:cNvPicPr>
-          <p:nvPr/>
-        </p:nvPicPr>
-        <p:blipFill>
-          <a:blip r:embed="rId4"/>
-          <a:srcRect r="25958"/>
-          <a:stretch/>
-        </p:blipFill>
-        <p:spPr>
-          <a:xfrm>
-            <a:off x="7965727" y="1780972"/>
-            <a:ext cx="2325233" cy="3956934"/>
-          </a:xfrm>
-          <a:prstGeom prst="rect">
-            <a:avLst/>
-          </a:prstGeom>
-        </p:spPr>
-      </p:pic>
+        <p:txBody>
+          <a:bodyPr vert="horz" lIns="91440" tIns="45720" rIns="91440" bIns="45720" rtlCol="0">
+            <a:noAutofit/>
+          </a:bodyPr>
+          <a:lstStyle>
+            <a:lvl1pPr marL="0" indent="0" algn="ctr" defTabSz="914400" rtl="0" eaLnBrk="1" latinLnBrk="0" hangingPunct="1">
+              <a:lnSpc>
+                <a:spcPct val="90000"/>
+              </a:lnSpc>
+              <a:spcBef>
+                <a:spcPts val="1000"/>
+              </a:spcBef>
+              <a:buFont typeface="Arial" panose="020B0604020202020204" pitchFamily="34" charset="0"/>
+              <a:buNone/>
+              <a:defRPr sz="2400" kern="1200">
+                <a:solidFill>
+                  <a:schemeClr val="tx1"/>
+                </a:solidFill>
+                <a:latin typeface="+mn-lt"/>
+                <a:ea typeface="+mn-ea"/>
+                <a:cs typeface="+mn-cs"/>
+              </a:defRPr>
+            </a:lvl1pPr>
+            <a:lvl2pPr marL="457200" indent="0" algn="ctr" defTabSz="914400" rtl="0" eaLnBrk="1" latinLnBrk="0" hangingPunct="1">
+              <a:lnSpc>
+                <a:spcPct val="90000"/>
+              </a:lnSpc>
+              <a:spcBef>
+                <a:spcPts val="500"/>
+              </a:spcBef>
+              <a:buFont typeface="Arial" panose="020B0604020202020204" pitchFamily="34" charset="0"/>
+              <a:buNone/>
+              <a:defRPr sz="2000" kern="1200">
+                <a:solidFill>
+                  <a:schemeClr val="tx1"/>
+                </a:solidFill>
+                <a:latin typeface="+mn-lt"/>
+                <a:ea typeface="+mn-ea"/>
+                <a:cs typeface="+mn-cs"/>
+              </a:defRPr>
+            </a:lvl2pPr>
+            <a:lvl3pPr marL="914400" indent="0" algn="ctr" defTabSz="914400" rtl="0" eaLnBrk="1" latinLnBrk="0" hangingPunct="1">
+              <a:lnSpc>
+                <a:spcPct val="90000"/>
+              </a:lnSpc>
+              <a:spcBef>
+                <a:spcPts val="500"/>
+              </a:spcBef>
+              <a:buFont typeface="Arial" panose="020B0604020202020204" pitchFamily="34" charset="0"/>
+              <a:buNone/>
+              <a:defRPr sz="1800" kern="1200">
+                <a:solidFill>
+                  <a:schemeClr val="tx1"/>
+                </a:solidFill>
+                <a:latin typeface="+mn-lt"/>
+                <a:ea typeface="+mn-ea"/>
+                <a:cs typeface="+mn-cs"/>
+              </a:defRPr>
+            </a:lvl3pPr>
+            <a:lvl4pPr marL="1371600" indent="0" algn="ctr" defTabSz="914400" rtl="0" eaLnBrk="1" latinLnBrk="0" hangingPunct="1">
+              <a:lnSpc>
+                <a:spcPct val="90000"/>
+              </a:lnSpc>
+              <a:spcBef>
+                <a:spcPts val="500"/>
+              </a:spcBef>
+              <a:buFont typeface="Arial" panose="020B0604020202020204" pitchFamily="34" charset="0"/>
+              <a:buNone/>
+              <a:defRPr sz="1600" kern="1200">
+                <a:solidFill>
+                  <a:schemeClr val="tx1"/>
+                </a:solidFill>
+                <a:latin typeface="+mn-lt"/>
+                <a:ea typeface="+mn-ea"/>
+                <a:cs typeface="+mn-cs"/>
+              </a:defRPr>
+            </a:lvl4pPr>
+            <a:lvl5pPr marL="1828800" indent="0" algn="ctr" defTabSz="914400" rtl="0" eaLnBrk="1" latinLnBrk="0" hangingPunct="1">
+              <a:lnSpc>
+                <a:spcPct val="90000"/>
+              </a:lnSpc>
+              <a:spcBef>
+                <a:spcPts val="500"/>
+              </a:spcBef>
+              <a:buFont typeface="Arial" panose="020B0604020202020204" pitchFamily="34" charset="0"/>
+              <a:buNone/>
+              <a:defRPr sz="1600" kern="1200">
+                <a:solidFill>
+                  <a:schemeClr val="tx1"/>
+                </a:solidFill>
+                <a:latin typeface="+mn-lt"/>
+                <a:ea typeface="+mn-ea"/>
+                <a:cs typeface="+mn-cs"/>
+              </a:defRPr>
+            </a:lvl5pPr>
+            <a:lvl6pPr marL="2286000" indent="0" algn="ctr" defTabSz="914400" rtl="0" eaLnBrk="1" latinLnBrk="0" hangingPunct="1">
+              <a:lnSpc>
+                <a:spcPct val="90000"/>
+              </a:lnSpc>
+              <a:spcBef>
+                <a:spcPts val="500"/>
+              </a:spcBef>
+              <a:buFont typeface="Arial" panose="020B0604020202020204" pitchFamily="34" charset="0"/>
+              <a:buNone/>
+              <a:defRPr sz="1600" kern="1200">
+                <a:solidFill>
+                  <a:schemeClr val="tx1"/>
+                </a:solidFill>
+                <a:latin typeface="+mn-lt"/>
+                <a:ea typeface="+mn-ea"/>
+                <a:cs typeface="+mn-cs"/>
+              </a:defRPr>
+            </a:lvl6pPr>
+            <a:lvl7pPr marL="2743200" indent="0" algn="ctr" defTabSz="914400" rtl="0" eaLnBrk="1" latinLnBrk="0" hangingPunct="1">
+              <a:lnSpc>
+                <a:spcPct val="90000"/>
+              </a:lnSpc>
+              <a:spcBef>
+                <a:spcPts val="500"/>
+              </a:spcBef>
+              <a:buFont typeface="Arial" panose="020B0604020202020204" pitchFamily="34" charset="0"/>
+              <a:buNone/>
+              <a:defRPr sz="1600" kern="1200">
+                <a:solidFill>
+                  <a:schemeClr val="tx1"/>
+                </a:solidFill>
+                <a:latin typeface="+mn-lt"/>
+                <a:ea typeface="+mn-ea"/>
+                <a:cs typeface="+mn-cs"/>
+              </a:defRPr>
+            </a:lvl7pPr>
+            <a:lvl8pPr marL="3200400" indent="0" algn="ctr" defTabSz="914400" rtl="0" eaLnBrk="1" latinLnBrk="0" hangingPunct="1">
+              <a:lnSpc>
+                <a:spcPct val="90000"/>
+              </a:lnSpc>
+              <a:spcBef>
+                <a:spcPts val="500"/>
+              </a:spcBef>
+              <a:buFont typeface="Arial" panose="020B0604020202020204" pitchFamily="34" charset="0"/>
+              <a:buNone/>
+              <a:defRPr sz="1600" kern="1200">
+                <a:solidFill>
+                  <a:schemeClr val="tx1"/>
+                </a:solidFill>
+                <a:latin typeface="+mn-lt"/>
+                <a:ea typeface="+mn-ea"/>
+                <a:cs typeface="+mn-cs"/>
+              </a:defRPr>
+            </a:lvl8pPr>
+            <a:lvl9pPr marL="3657600" indent="0" algn="ctr" defTabSz="914400" rtl="0" eaLnBrk="1" latinLnBrk="0" hangingPunct="1">
+              <a:lnSpc>
+                <a:spcPct val="90000"/>
+              </a:lnSpc>
+              <a:spcBef>
+                <a:spcPts val="500"/>
+              </a:spcBef>
+              <a:buFont typeface="Arial" panose="020B0604020202020204" pitchFamily="34" charset="0"/>
+              <a:buNone/>
+              <a:defRPr sz="1600" kern="1200">
+                <a:solidFill>
+                  <a:schemeClr val="tx1"/>
+                </a:solidFill>
+                <a:latin typeface="+mn-lt"/>
+                <a:ea typeface="+mn-ea"/>
+                <a:cs typeface="+mn-cs"/>
+              </a:defRPr>
+            </a:lvl9pPr>
+          </a:lstStyle>
+          <a:p>
+            <a:pPr algn="l"/>
+            <a:r>
+              <a:rPr lang="de-DE" sz="2000" dirty="0">
+                <a:latin typeface="Liberation Sans" panose="020B0604020202020204" pitchFamily="34" charset="0"/>
+                <a:ea typeface="Liberation Sans" panose="020B0604020202020204" pitchFamily="34" charset="0"/>
+                <a:cs typeface="Liberation Sans" panose="020B0604020202020204" pitchFamily="34" charset="0"/>
+              </a:rPr>
+              <a:t>(Foto, wo man Kabel und Kabelführung sieht)</a:t>
+            </a:r>
+          </a:p>
+        </p:txBody>
+      </p:sp>
     </p:spTree>
     <p:extLst>
       <p:ext uri="{BB962C8B-B14F-4D97-AF65-F5344CB8AC3E}">
-        <p14:creationId xmlns:p14="http://schemas.microsoft.com/office/powerpoint/2010/main" val="1652724053"/>
+        <p14:creationId xmlns:p14="http://schemas.microsoft.com/office/powerpoint/2010/main" val="240659321"/>
       </p:ext>
     </p:extLst>
   </p:cSld>
@@ -5944,8 +6400,8 @@
         </p:nvSpPr>
         <p:spPr>
           <a:xfrm>
-            <a:off x="1576168" y="2095322"/>
-            <a:ext cx="8714792" cy="1791056"/>
+            <a:off x="1576168" y="2108888"/>
+            <a:ext cx="2639330" cy="3554980"/>
           </a:xfrm>
         </p:spPr>
         <p:txBody>
@@ -5954,7 +6410,6 @@
           </a:bodyPr>
           <a:lstStyle/>
           <a:p>
-            <a:pPr algn="l"/>
             <a:r>
               <a:rPr lang="de-DE" sz="2000" b="1" dirty="0">
                 <a:latin typeface="Liberation Sans" panose="020B0604020202020204" pitchFamily="34" charset="0"/>
@@ -5965,6 +6420,14 @@
             </a:r>
           </a:p>
           <a:p>
+            <a:pPr algn="l"/>
+            <a:endParaRPr lang="de-DE" sz="2000" b="1" dirty="0">
+              <a:latin typeface="Liberation Sans" panose="020B0604020202020204" pitchFamily="34" charset="0"/>
+              <a:ea typeface="Liberation Sans" panose="020B0604020202020204" pitchFamily="34" charset="0"/>
+              <a:cs typeface="Liberation Sans" panose="020B0604020202020204" pitchFamily="34" charset="0"/>
+            </a:endParaRPr>
+          </a:p>
+          <a:p>
             <a:pPr marL="457200" indent="-457200" algn="l">
               <a:buFont typeface="Wingdings" panose="05000000000000000000" pitchFamily="2" charset="2"/>
               <a:buChar char="v"/>
@@ -6004,56 +6467,6 @@
                 <a:cs typeface="Liberation Sans" panose="020B0604020202020204" pitchFamily="34" charset="0"/>
               </a:rPr>
               <a:t>Flexibilität des Materials ist ein Vorteil</a:t>
-            </a:r>
-          </a:p>
-          <a:p>
-            <a:pPr marL="457200" indent="-457200" algn="l">
-              <a:buFont typeface="Wingdings" panose="05000000000000000000" pitchFamily="2" charset="2"/>
-              <a:buChar char="v"/>
-            </a:pPr>
-            <a:endParaRPr lang="de-DE" sz="2000" dirty="0">
-              <a:latin typeface="Liberation Sans" panose="020B0604020202020204" pitchFamily="34" charset="0"/>
-              <a:ea typeface="Liberation Sans" panose="020B0604020202020204" pitchFamily="34" charset="0"/>
-              <a:cs typeface="Liberation Sans" panose="020B0604020202020204" pitchFamily="34" charset="0"/>
-            </a:endParaRPr>
-          </a:p>
-          <a:p>
-            <a:pPr algn="l"/>
-            <a:r>
-              <a:rPr lang="de-DE" sz="2000" b="1" dirty="0">
-                <a:latin typeface="Liberation Sans" panose="020B0604020202020204" pitchFamily="34" charset="0"/>
-                <a:ea typeface="Liberation Sans" panose="020B0604020202020204" pitchFamily="34" charset="0"/>
-                <a:cs typeface="Liberation Sans" panose="020B0604020202020204" pitchFamily="34" charset="0"/>
-              </a:rPr>
-              <a:t>Negativ</a:t>
-            </a:r>
-          </a:p>
-          <a:p>
-            <a:pPr marL="457200" indent="-457200" algn="l">
-              <a:buFont typeface="Wingdings" panose="05000000000000000000" pitchFamily="2" charset="2"/>
-              <a:buChar char="v"/>
-            </a:pPr>
-            <a:r>
-              <a:rPr lang="de-DE" sz="2000" dirty="0">
-                <a:latin typeface="Liberation Sans" panose="020B0604020202020204" pitchFamily="34" charset="0"/>
-                <a:ea typeface="Liberation Sans" panose="020B0604020202020204" pitchFamily="34" charset="0"/>
-                <a:cs typeface="Liberation Sans" panose="020B0604020202020204" pitchFamily="34" charset="0"/>
-              </a:rPr>
-              <a:t>Viele Testdrucke notwendig (Material- und Zeitaufwand)</a:t>
-            </a:r>
-          </a:p>
-          <a:p>
-            <a:pPr marL="457200" indent="-457200" algn="l">
-              <a:buFont typeface="Wingdings" panose="05000000000000000000" pitchFamily="2" charset="2"/>
-              <a:buChar char="v"/>
-            </a:pPr>
-            <a:r>
-              <a:rPr lang="de-DE" sz="2000" dirty="0">
-                <a:latin typeface="Liberation Sans" panose="020B0604020202020204" pitchFamily="34" charset="0"/>
-                <a:ea typeface="Liberation Sans" panose="020B0604020202020204" pitchFamily="34" charset="0"/>
-                <a:cs typeface="Liberation Sans" panose="020B0604020202020204" pitchFamily="34" charset="0"/>
-              </a:rPr>
-              <a:t>Millimeter können ein Modell unbrauchbar machen</a:t>
             </a:r>
           </a:p>
         </p:txBody>
@@ -6150,6 +6563,509 @@
           </a:fontRef>
         </p:style>
       </p:cxnSp>
+      <p:sp>
+        <p:nvSpPr>
+          <p:cNvPr id="2" name="Untertitel 2">
+            <a:extLst>
+              <a:ext uri="{FF2B5EF4-FFF2-40B4-BE49-F238E27FC236}">
+                <a16:creationId xmlns:a16="http://schemas.microsoft.com/office/drawing/2014/main" id="{3E9646A3-113F-3764-D676-70FA6CA8883E}"/>
+              </a:ext>
+            </a:extLst>
+          </p:cNvPr>
+          <p:cNvSpPr txBox="1">
+            <a:spLocks/>
+          </p:cNvSpPr>
+          <p:nvPr/>
+        </p:nvSpPr>
+        <p:spPr>
+          <a:xfrm>
+            <a:off x="4672302" y="1651510"/>
+            <a:ext cx="2639330" cy="3554980"/>
+          </a:xfrm>
+          <a:prstGeom prst="rect">
+            <a:avLst/>
+          </a:prstGeom>
+        </p:spPr>
+        <p:txBody>
+          <a:bodyPr vert="horz" lIns="91440" tIns="45720" rIns="91440" bIns="45720" rtlCol="0">
+            <a:noAutofit/>
+          </a:bodyPr>
+          <a:lstStyle>
+            <a:lvl1pPr marL="0" indent="0" algn="ctr" defTabSz="914400" rtl="0" eaLnBrk="1" latinLnBrk="0" hangingPunct="1">
+              <a:lnSpc>
+                <a:spcPct val="90000"/>
+              </a:lnSpc>
+              <a:spcBef>
+                <a:spcPts val="1000"/>
+              </a:spcBef>
+              <a:buFont typeface="Arial" panose="020B0604020202020204" pitchFamily="34" charset="0"/>
+              <a:buNone/>
+              <a:defRPr sz="2400" kern="1200">
+                <a:solidFill>
+                  <a:schemeClr val="tx1"/>
+                </a:solidFill>
+                <a:latin typeface="+mn-lt"/>
+                <a:ea typeface="+mn-ea"/>
+                <a:cs typeface="+mn-cs"/>
+              </a:defRPr>
+            </a:lvl1pPr>
+            <a:lvl2pPr marL="457200" indent="0" algn="ctr" defTabSz="914400" rtl="0" eaLnBrk="1" latinLnBrk="0" hangingPunct="1">
+              <a:lnSpc>
+                <a:spcPct val="90000"/>
+              </a:lnSpc>
+              <a:spcBef>
+                <a:spcPts val="500"/>
+              </a:spcBef>
+              <a:buFont typeface="Arial" panose="020B0604020202020204" pitchFamily="34" charset="0"/>
+              <a:buNone/>
+              <a:defRPr sz="2000" kern="1200">
+                <a:solidFill>
+                  <a:schemeClr val="tx1"/>
+                </a:solidFill>
+                <a:latin typeface="+mn-lt"/>
+                <a:ea typeface="+mn-ea"/>
+                <a:cs typeface="+mn-cs"/>
+              </a:defRPr>
+            </a:lvl2pPr>
+            <a:lvl3pPr marL="914400" indent="0" algn="ctr" defTabSz="914400" rtl="0" eaLnBrk="1" latinLnBrk="0" hangingPunct="1">
+              <a:lnSpc>
+                <a:spcPct val="90000"/>
+              </a:lnSpc>
+              <a:spcBef>
+                <a:spcPts val="500"/>
+              </a:spcBef>
+              <a:buFont typeface="Arial" panose="020B0604020202020204" pitchFamily="34" charset="0"/>
+              <a:buNone/>
+              <a:defRPr sz="1800" kern="1200">
+                <a:solidFill>
+                  <a:schemeClr val="tx1"/>
+                </a:solidFill>
+                <a:latin typeface="+mn-lt"/>
+                <a:ea typeface="+mn-ea"/>
+                <a:cs typeface="+mn-cs"/>
+              </a:defRPr>
+            </a:lvl3pPr>
+            <a:lvl4pPr marL="1371600" indent="0" algn="ctr" defTabSz="914400" rtl="0" eaLnBrk="1" latinLnBrk="0" hangingPunct="1">
+              <a:lnSpc>
+                <a:spcPct val="90000"/>
+              </a:lnSpc>
+              <a:spcBef>
+                <a:spcPts val="500"/>
+              </a:spcBef>
+              <a:buFont typeface="Arial" panose="020B0604020202020204" pitchFamily="34" charset="0"/>
+              <a:buNone/>
+              <a:defRPr sz="1600" kern="1200">
+                <a:solidFill>
+                  <a:schemeClr val="tx1"/>
+                </a:solidFill>
+                <a:latin typeface="+mn-lt"/>
+                <a:ea typeface="+mn-ea"/>
+                <a:cs typeface="+mn-cs"/>
+              </a:defRPr>
+            </a:lvl4pPr>
+            <a:lvl5pPr marL="1828800" indent="0" algn="ctr" defTabSz="914400" rtl="0" eaLnBrk="1" latinLnBrk="0" hangingPunct="1">
+              <a:lnSpc>
+                <a:spcPct val="90000"/>
+              </a:lnSpc>
+              <a:spcBef>
+                <a:spcPts val="500"/>
+              </a:spcBef>
+              <a:buFont typeface="Arial" panose="020B0604020202020204" pitchFamily="34" charset="0"/>
+              <a:buNone/>
+              <a:defRPr sz="1600" kern="1200">
+                <a:solidFill>
+                  <a:schemeClr val="tx1"/>
+                </a:solidFill>
+                <a:latin typeface="+mn-lt"/>
+                <a:ea typeface="+mn-ea"/>
+                <a:cs typeface="+mn-cs"/>
+              </a:defRPr>
+            </a:lvl5pPr>
+            <a:lvl6pPr marL="2286000" indent="0" algn="ctr" defTabSz="914400" rtl="0" eaLnBrk="1" latinLnBrk="0" hangingPunct="1">
+              <a:lnSpc>
+                <a:spcPct val="90000"/>
+              </a:lnSpc>
+              <a:spcBef>
+                <a:spcPts val="500"/>
+              </a:spcBef>
+              <a:buFont typeface="Arial" panose="020B0604020202020204" pitchFamily="34" charset="0"/>
+              <a:buNone/>
+              <a:defRPr sz="1600" kern="1200">
+                <a:solidFill>
+                  <a:schemeClr val="tx1"/>
+                </a:solidFill>
+                <a:latin typeface="+mn-lt"/>
+                <a:ea typeface="+mn-ea"/>
+                <a:cs typeface="+mn-cs"/>
+              </a:defRPr>
+            </a:lvl6pPr>
+            <a:lvl7pPr marL="2743200" indent="0" algn="ctr" defTabSz="914400" rtl="0" eaLnBrk="1" latinLnBrk="0" hangingPunct="1">
+              <a:lnSpc>
+                <a:spcPct val="90000"/>
+              </a:lnSpc>
+              <a:spcBef>
+                <a:spcPts val="500"/>
+              </a:spcBef>
+              <a:buFont typeface="Arial" panose="020B0604020202020204" pitchFamily="34" charset="0"/>
+              <a:buNone/>
+              <a:defRPr sz="1600" kern="1200">
+                <a:solidFill>
+                  <a:schemeClr val="tx1"/>
+                </a:solidFill>
+                <a:latin typeface="+mn-lt"/>
+                <a:ea typeface="+mn-ea"/>
+                <a:cs typeface="+mn-cs"/>
+              </a:defRPr>
+            </a:lvl7pPr>
+            <a:lvl8pPr marL="3200400" indent="0" algn="ctr" defTabSz="914400" rtl="0" eaLnBrk="1" latinLnBrk="0" hangingPunct="1">
+              <a:lnSpc>
+                <a:spcPct val="90000"/>
+              </a:lnSpc>
+              <a:spcBef>
+                <a:spcPts val="500"/>
+              </a:spcBef>
+              <a:buFont typeface="Arial" panose="020B0604020202020204" pitchFamily="34" charset="0"/>
+              <a:buNone/>
+              <a:defRPr sz="1600" kern="1200">
+                <a:solidFill>
+                  <a:schemeClr val="tx1"/>
+                </a:solidFill>
+                <a:latin typeface="+mn-lt"/>
+                <a:ea typeface="+mn-ea"/>
+                <a:cs typeface="+mn-cs"/>
+              </a:defRPr>
+            </a:lvl8pPr>
+            <a:lvl9pPr marL="3657600" indent="0" algn="ctr" defTabSz="914400" rtl="0" eaLnBrk="1" latinLnBrk="0" hangingPunct="1">
+              <a:lnSpc>
+                <a:spcPct val="90000"/>
+              </a:lnSpc>
+              <a:spcBef>
+                <a:spcPts val="500"/>
+              </a:spcBef>
+              <a:buFont typeface="Arial" panose="020B0604020202020204" pitchFamily="34" charset="0"/>
+              <a:buNone/>
+              <a:defRPr sz="1600" kern="1200">
+                <a:solidFill>
+                  <a:schemeClr val="tx1"/>
+                </a:solidFill>
+                <a:latin typeface="+mn-lt"/>
+                <a:ea typeface="+mn-ea"/>
+                <a:cs typeface="+mn-cs"/>
+              </a:defRPr>
+            </a:lvl9pPr>
+          </a:lstStyle>
+          <a:p>
+            <a:pPr marL="457200" indent="-457200" algn="l">
+              <a:buFont typeface="Wingdings" panose="05000000000000000000" pitchFamily="2" charset="2"/>
+              <a:buChar char="v"/>
+            </a:pPr>
+            <a:endParaRPr lang="de-DE" sz="2000" dirty="0">
+              <a:latin typeface="Liberation Sans" panose="020B0604020202020204" pitchFamily="34" charset="0"/>
+              <a:ea typeface="Liberation Sans" panose="020B0604020202020204" pitchFamily="34" charset="0"/>
+              <a:cs typeface="Liberation Sans" panose="020B0604020202020204" pitchFamily="34" charset="0"/>
+            </a:endParaRPr>
+          </a:p>
+          <a:p>
+            <a:r>
+              <a:rPr lang="de-DE" sz="2000" b="1" dirty="0">
+                <a:latin typeface="Liberation Sans" panose="020B0604020202020204" pitchFamily="34" charset="0"/>
+                <a:ea typeface="Liberation Sans" panose="020B0604020202020204" pitchFamily="34" charset="0"/>
+                <a:cs typeface="Liberation Sans" panose="020B0604020202020204" pitchFamily="34" charset="0"/>
+              </a:rPr>
+              <a:t>Negativ</a:t>
+            </a:r>
+          </a:p>
+          <a:p>
+            <a:pPr algn="l"/>
+            <a:endParaRPr lang="de-DE" sz="2000" b="1" dirty="0">
+              <a:latin typeface="Liberation Sans" panose="020B0604020202020204" pitchFamily="34" charset="0"/>
+              <a:ea typeface="Liberation Sans" panose="020B0604020202020204" pitchFamily="34" charset="0"/>
+              <a:cs typeface="Liberation Sans" panose="020B0604020202020204" pitchFamily="34" charset="0"/>
+            </a:endParaRPr>
+          </a:p>
+          <a:p>
+            <a:pPr marL="457200" indent="-457200" algn="l">
+              <a:buFont typeface="Wingdings" panose="05000000000000000000" pitchFamily="2" charset="2"/>
+              <a:buChar char="v"/>
+            </a:pPr>
+            <a:r>
+              <a:rPr lang="de-DE" sz="2000" dirty="0">
+                <a:latin typeface="Liberation Sans" panose="020B0604020202020204" pitchFamily="34" charset="0"/>
+                <a:ea typeface="Liberation Sans" panose="020B0604020202020204" pitchFamily="34" charset="0"/>
+                <a:cs typeface="Liberation Sans" panose="020B0604020202020204" pitchFamily="34" charset="0"/>
+              </a:rPr>
+              <a:t>Viele Testdrucke notwendig (Material- und Zeitaufwand)</a:t>
+            </a:r>
+          </a:p>
+          <a:p>
+            <a:pPr marL="457200" indent="-457200" algn="l">
+              <a:buFont typeface="Wingdings" panose="05000000000000000000" pitchFamily="2" charset="2"/>
+              <a:buChar char="v"/>
+            </a:pPr>
+            <a:r>
+              <a:rPr lang="de-DE" sz="2000" dirty="0">
+                <a:latin typeface="Liberation Sans" panose="020B0604020202020204" pitchFamily="34" charset="0"/>
+                <a:ea typeface="Liberation Sans" panose="020B0604020202020204" pitchFamily="34" charset="0"/>
+                <a:cs typeface="Liberation Sans" panose="020B0604020202020204" pitchFamily="34" charset="0"/>
+              </a:rPr>
+              <a:t>Millimeter können ein Modell unbrauchbar machen</a:t>
+            </a:r>
+          </a:p>
+        </p:txBody>
+      </p:sp>
+      <p:sp>
+        <p:nvSpPr>
+          <p:cNvPr id="5" name="Untertitel 2">
+            <a:extLst>
+              <a:ext uri="{FF2B5EF4-FFF2-40B4-BE49-F238E27FC236}">
+                <a16:creationId xmlns:a16="http://schemas.microsoft.com/office/drawing/2014/main" id="{F7F370D7-3BCE-781E-2D22-81B61AD8BA4A}"/>
+              </a:ext>
+            </a:extLst>
+          </p:cNvPr>
+          <p:cNvSpPr txBox="1">
+            <a:spLocks/>
+          </p:cNvSpPr>
+          <p:nvPr/>
+        </p:nvSpPr>
+        <p:spPr>
+          <a:xfrm>
+            <a:off x="7651630" y="2095322"/>
+            <a:ext cx="2639330" cy="1791056"/>
+          </a:xfrm>
+          <a:prstGeom prst="rect">
+            <a:avLst/>
+          </a:prstGeom>
+        </p:spPr>
+        <p:txBody>
+          <a:bodyPr vert="horz" lIns="91440" tIns="45720" rIns="91440" bIns="45720" rtlCol="0">
+            <a:noAutofit/>
+          </a:bodyPr>
+          <a:lstStyle>
+            <a:lvl1pPr marL="0" indent="0" algn="ctr" defTabSz="914400" rtl="0" eaLnBrk="1" latinLnBrk="0" hangingPunct="1">
+              <a:lnSpc>
+                <a:spcPct val="90000"/>
+              </a:lnSpc>
+              <a:spcBef>
+                <a:spcPts val="1000"/>
+              </a:spcBef>
+              <a:buFont typeface="Arial" panose="020B0604020202020204" pitchFamily="34" charset="0"/>
+              <a:buNone/>
+              <a:defRPr sz="2400" kern="1200">
+                <a:solidFill>
+                  <a:schemeClr val="tx1"/>
+                </a:solidFill>
+                <a:latin typeface="+mn-lt"/>
+                <a:ea typeface="+mn-ea"/>
+                <a:cs typeface="+mn-cs"/>
+              </a:defRPr>
+            </a:lvl1pPr>
+            <a:lvl2pPr marL="457200" indent="0" algn="ctr" defTabSz="914400" rtl="0" eaLnBrk="1" latinLnBrk="0" hangingPunct="1">
+              <a:lnSpc>
+                <a:spcPct val="90000"/>
+              </a:lnSpc>
+              <a:spcBef>
+                <a:spcPts val="500"/>
+              </a:spcBef>
+              <a:buFont typeface="Arial" panose="020B0604020202020204" pitchFamily="34" charset="0"/>
+              <a:buNone/>
+              <a:defRPr sz="2000" kern="1200">
+                <a:solidFill>
+                  <a:schemeClr val="tx1"/>
+                </a:solidFill>
+                <a:latin typeface="+mn-lt"/>
+                <a:ea typeface="+mn-ea"/>
+                <a:cs typeface="+mn-cs"/>
+              </a:defRPr>
+            </a:lvl2pPr>
+            <a:lvl3pPr marL="914400" indent="0" algn="ctr" defTabSz="914400" rtl="0" eaLnBrk="1" latinLnBrk="0" hangingPunct="1">
+              <a:lnSpc>
+                <a:spcPct val="90000"/>
+              </a:lnSpc>
+              <a:spcBef>
+                <a:spcPts val="500"/>
+              </a:spcBef>
+              <a:buFont typeface="Arial" panose="020B0604020202020204" pitchFamily="34" charset="0"/>
+              <a:buNone/>
+              <a:defRPr sz="1800" kern="1200">
+                <a:solidFill>
+                  <a:schemeClr val="tx1"/>
+                </a:solidFill>
+                <a:latin typeface="+mn-lt"/>
+                <a:ea typeface="+mn-ea"/>
+                <a:cs typeface="+mn-cs"/>
+              </a:defRPr>
+            </a:lvl3pPr>
+            <a:lvl4pPr marL="1371600" indent="0" algn="ctr" defTabSz="914400" rtl="0" eaLnBrk="1" latinLnBrk="0" hangingPunct="1">
+              <a:lnSpc>
+                <a:spcPct val="90000"/>
+              </a:lnSpc>
+              <a:spcBef>
+                <a:spcPts val="500"/>
+              </a:spcBef>
+              <a:buFont typeface="Arial" panose="020B0604020202020204" pitchFamily="34" charset="0"/>
+              <a:buNone/>
+              <a:defRPr sz="1600" kern="1200">
+                <a:solidFill>
+                  <a:schemeClr val="tx1"/>
+                </a:solidFill>
+                <a:latin typeface="+mn-lt"/>
+                <a:ea typeface="+mn-ea"/>
+                <a:cs typeface="+mn-cs"/>
+              </a:defRPr>
+            </a:lvl4pPr>
+            <a:lvl5pPr marL="1828800" indent="0" algn="ctr" defTabSz="914400" rtl="0" eaLnBrk="1" latinLnBrk="0" hangingPunct="1">
+              <a:lnSpc>
+                <a:spcPct val="90000"/>
+              </a:lnSpc>
+              <a:spcBef>
+                <a:spcPts val="500"/>
+              </a:spcBef>
+              <a:buFont typeface="Arial" panose="020B0604020202020204" pitchFamily="34" charset="0"/>
+              <a:buNone/>
+              <a:defRPr sz="1600" kern="1200">
+                <a:solidFill>
+                  <a:schemeClr val="tx1"/>
+                </a:solidFill>
+                <a:latin typeface="+mn-lt"/>
+                <a:ea typeface="+mn-ea"/>
+                <a:cs typeface="+mn-cs"/>
+              </a:defRPr>
+            </a:lvl5pPr>
+            <a:lvl6pPr marL="2286000" indent="0" algn="ctr" defTabSz="914400" rtl="0" eaLnBrk="1" latinLnBrk="0" hangingPunct="1">
+              <a:lnSpc>
+                <a:spcPct val="90000"/>
+              </a:lnSpc>
+              <a:spcBef>
+                <a:spcPts val="500"/>
+              </a:spcBef>
+              <a:buFont typeface="Arial" panose="020B0604020202020204" pitchFamily="34" charset="0"/>
+              <a:buNone/>
+              <a:defRPr sz="1600" kern="1200">
+                <a:solidFill>
+                  <a:schemeClr val="tx1"/>
+                </a:solidFill>
+                <a:latin typeface="+mn-lt"/>
+                <a:ea typeface="+mn-ea"/>
+                <a:cs typeface="+mn-cs"/>
+              </a:defRPr>
+            </a:lvl6pPr>
+            <a:lvl7pPr marL="2743200" indent="0" algn="ctr" defTabSz="914400" rtl="0" eaLnBrk="1" latinLnBrk="0" hangingPunct="1">
+              <a:lnSpc>
+                <a:spcPct val="90000"/>
+              </a:lnSpc>
+              <a:spcBef>
+                <a:spcPts val="500"/>
+              </a:spcBef>
+              <a:buFont typeface="Arial" panose="020B0604020202020204" pitchFamily="34" charset="0"/>
+              <a:buNone/>
+              <a:defRPr sz="1600" kern="1200">
+                <a:solidFill>
+                  <a:schemeClr val="tx1"/>
+                </a:solidFill>
+                <a:latin typeface="+mn-lt"/>
+                <a:ea typeface="+mn-ea"/>
+                <a:cs typeface="+mn-cs"/>
+              </a:defRPr>
+            </a:lvl7pPr>
+            <a:lvl8pPr marL="3200400" indent="0" algn="ctr" defTabSz="914400" rtl="0" eaLnBrk="1" latinLnBrk="0" hangingPunct="1">
+              <a:lnSpc>
+                <a:spcPct val="90000"/>
+              </a:lnSpc>
+              <a:spcBef>
+                <a:spcPts val="500"/>
+              </a:spcBef>
+              <a:buFont typeface="Arial" panose="020B0604020202020204" pitchFamily="34" charset="0"/>
+              <a:buNone/>
+              <a:defRPr sz="1600" kern="1200">
+                <a:solidFill>
+                  <a:schemeClr val="tx1"/>
+                </a:solidFill>
+                <a:latin typeface="+mn-lt"/>
+                <a:ea typeface="+mn-ea"/>
+                <a:cs typeface="+mn-cs"/>
+              </a:defRPr>
+            </a:lvl8pPr>
+            <a:lvl9pPr marL="3657600" indent="0" algn="ctr" defTabSz="914400" rtl="0" eaLnBrk="1" latinLnBrk="0" hangingPunct="1">
+              <a:lnSpc>
+                <a:spcPct val="90000"/>
+              </a:lnSpc>
+              <a:spcBef>
+                <a:spcPts val="500"/>
+              </a:spcBef>
+              <a:buFont typeface="Arial" panose="020B0604020202020204" pitchFamily="34" charset="0"/>
+              <a:buNone/>
+              <a:defRPr sz="1600" kern="1200">
+                <a:solidFill>
+                  <a:schemeClr val="tx1"/>
+                </a:solidFill>
+                <a:latin typeface="+mn-lt"/>
+                <a:ea typeface="+mn-ea"/>
+                <a:cs typeface="+mn-cs"/>
+              </a:defRPr>
+            </a:lvl9pPr>
+          </a:lstStyle>
+          <a:p>
+            <a:r>
+              <a:rPr lang="de-DE" sz="2000" b="1" dirty="0">
+                <a:latin typeface="Liberation Sans" panose="020B0604020202020204" pitchFamily="34" charset="0"/>
+                <a:ea typeface="Liberation Sans" panose="020B0604020202020204" pitchFamily="34" charset="0"/>
+                <a:cs typeface="Liberation Sans" panose="020B0604020202020204" pitchFamily="34" charset="0"/>
+              </a:rPr>
+              <a:t>Allgemein</a:t>
+            </a:r>
+          </a:p>
+          <a:p>
+            <a:pPr algn="l"/>
+            <a:endParaRPr lang="de-DE" sz="2000" b="1" dirty="0">
+              <a:latin typeface="Liberation Sans" panose="020B0604020202020204" pitchFamily="34" charset="0"/>
+              <a:ea typeface="Liberation Sans" panose="020B0604020202020204" pitchFamily="34" charset="0"/>
+              <a:cs typeface="Liberation Sans" panose="020B0604020202020204" pitchFamily="34" charset="0"/>
+            </a:endParaRPr>
+          </a:p>
+          <a:p>
+            <a:pPr marL="457200" indent="-457200" algn="l">
+              <a:buFont typeface="Wingdings" panose="05000000000000000000" pitchFamily="2" charset="2"/>
+              <a:buChar char="v"/>
+            </a:pPr>
+            <a:r>
+              <a:rPr lang="de-DE" sz="2000" dirty="0">
+                <a:latin typeface="Liberation Sans" panose="020B0604020202020204" pitchFamily="34" charset="0"/>
+                <a:ea typeface="Liberation Sans" panose="020B0604020202020204" pitchFamily="34" charset="0"/>
+                <a:cs typeface="Liberation Sans" panose="020B0604020202020204" pitchFamily="34" charset="0"/>
+              </a:rPr>
+              <a:t>Frühe durchdachte Planung lohnt sich</a:t>
+            </a:r>
+          </a:p>
+          <a:p>
+            <a:pPr marL="457200" indent="-457200" algn="l">
+              <a:buFont typeface="Wingdings" panose="05000000000000000000" pitchFamily="2" charset="2"/>
+              <a:buChar char="v"/>
+            </a:pPr>
+            <a:r>
+              <a:rPr lang="de-DE" sz="2000" dirty="0">
+                <a:latin typeface="Liberation Sans" panose="020B0604020202020204" pitchFamily="34" charset="0"/>
+                <a:ea typeface="Liberation Sans" panose="020B0604020202020204" pitchFamily="34" charset="0"/>
+                <a:cs typeface="Liberation Sans" panose="020B0604020202020204" pitchFamily="34" charset="0"/>
+              </a:rPr>
+              <a:t>3D-Druck-Ungenauigkeiten antizipieren</a:t>
+            </a:r>
+          </a:p>
+          <a:p>
+            <a:pPr marL="457200" indent="-457200" algn="l">
+              <a:buFont typeface="Wingdings" panose="05000000000000000000" pitchFamily="2" charset="2"/>
+              <a:buChar char="v"/>
+            </a:pPr>
+            <a:r>
+              <a:rPr lang="de-DE" sz="2000" dirty="0">
+                <a:latin typeface="Liberation Sans" panose="020B0604020202020204" pitchFamily="34" charset="0"/>
+                <a:ea typeface="Liberation Sans" panose="020B0604020202020204" pitchFamily="34" charset="0"/>
+                <a:cs typeface="Liberation Sans" panose="020B0604020202020204" pitchFamily="34" charset="0"/>
+              </a:rPr>
+              <a:t>Improvisation ist oft notwendig</a:t>
+            </a:r>
+          </a:p>
+        </p:txBody>
+      </p:sp>
     </p:spTree>
     <p:extLst>
       <p:ext uri="{BB962C8B-B14F-4D97-AF65-F5344CB8AC3E}">

--- a/Präsentation/Kettenfahrzeug.pptx
+++ b/Präsentation/Kettenfahrzeug.pptx
@@ -5,7 +5,7 @@
     <p:sldMasterId id="2147483648" r:id="rId1"/>
   </p:sldMasterIdLst>
   <p:notesMasterIdLst>
-    <p:notesMasterId r:id="rId18"/>
+    <p:notesMasterId r:id="rId19"/>
   </p:notesMasterIdLst>
   <p:sldIdLst>
     <p:sldId id="256" r:id="rId2"/>
@@ -15,15 +15,16 @@
     <p:sldId id="268" r:id="rId6"/>
     <p:sldId id="270" r:id="rId7"/>
     <p:sldId id="269" r:id="rId8"/>
-    <p:sldId id="267" r:id="rId9"/>
-    <p:sldId id="262" r:id="rId10"/>
-    <p:sldId id="259" r:id="rId11"/>
-    <p:sldId id="260" r:id="rId12"/>
-    <p:sldId id="263" r:id="rId13"/>
-    <p:sldId id="264" r:id="rId14"/>
-    <p:sldId id="271" r:id="rId15"/>
-    <p:sldId id="272" r:id="rId16"/>
-    <p:sldId id="265" r:id="rId17"/>
+    <p:sldId id="274" r:id="rId9"/>
+    <p:sldId id="267" r:id="rId10"/>
+    <p:sldId id="262" r:id="rId11"/>
+    <p:sldId id="259" r:id="rId12"/>
+    <p:sldId id="260" r:id="rId13"/>
+    <p:sldId id="263" r:id="rId14"/>
+    <p:sldId id="264" r:id="rId15"/>
+    <p:sldId id="271" r:id="rId16"/>
+    <p:sldId id="272" r:id="rId17"/>
+    <p:sldId id="265" r:id="rId18"/>
   </p:sldIdLst>
   <p:sldSz cx="12192000" cy="6858000"/>
   <p:notesSz cx="6858000" cy="9144000"/>
@@ -3768,20 +3769,12 @@
           <a:lstStyle/>
           <a:p>
             <a:r>
-              <a:rPr lang="de-DE" dirty="0" err="1">
+              <a:rPr lang="de-DE" i="1" dirty="0">
                 <a:latin typeface="Liberation Sans" panose="020B0604020202020204" pitchFamily="34" charset="0"/>
                 <a:ea typeface="Liberation Sans" panose="020B0604020202020204" pitchFamily="34" charset="0"/>
                 <a:cs typeface="Liberation Sans" panose="020B0604020202020204" pitchFamily="34" charset="0"/>
               </a:rPr>
-              <a:t>Semsterprojekt</a:t>
-            </a:r>
-            <a:r>
-              <a:rPr lang="de-DE" dirty="0">
-                <a:latin typeface="Liberation Sans" panose="020B0604020202020204" pitchFamily="34" charset="0"/>
-                <a:ea typeface="Liberation Sans" panose="020B0604020202020204" pitchFamily="34" charset="0"/>
-                <a:cs typeface="Liberation Sans" panose="020B0604020202020204" pitchFamily="34" charset="0"/>
-              </a:rPr>
-              <a:t> von Lasse, Hossein, Julian</a:t>
+              <a:t>Semesterprojekt von Lasse, Hossein, Julian</a:t>
             </a:r>
           </a:p>
         </p:txBody>
@@ -3870,8 +3863,8 @@
         </p:nvSpPr>
         <p:spPr>
           <a:xfrm>
-            <a:off x="4430485" y="39054"/>
-            <a:ext cx="3331029" cy="1019204"/>
+            <a:off x="1524000" y="1269579"/>
+            <a:ext cx="9144000" cy="2387600"/>
           </a:xfrm>
         </p:spPr>
         <p:txBody>
@@ -3881,7 +3874,7 @@
           <a:lstStyle/>
           <a:p>
             <a:r>
-              <a:rPr lang="de-DE" dirty="0">
+              <a:rPr lang="de-DE" sz="10000" dirty="0">
                 <a:latin typeface="Impact" panose="020B0806030902050204" pitchFamily="34" charset="0"/>
               </a:rPr>
               <a:t>Elektronik</a:t>
@@ -3907,8 +3900,8 @@
         </p:nvSpPr>
         <p:spPr>
           <a:xfrm>
-            <a:off x="898849" y="2533471"/>
-            <a:ext cx="9144000" cy="3848665"/>
+            <a:off x="1524000" y="4259635"/>
+            <a:ext cx="9144000" cy="1791056"/>
           </a:xfrm>
         </p:spPr>
         <p:txBody>
@@ -3917,117 +3910,13 @@
           </a:bodyPr>
           <a:lstStyle/>
           <a:p>
-            <a:pPr marL="342900" indent="-342900" algn="l">
-              <a:buFont typeface="Wingdings" panose="05000000000000000000" pitchFamily="2" charset="2"/>
-              <a:buChar char="v"/>
-            </a:pPr>
-            <a:r>
-              <a:rPr lang="de-DE" sz="2000" dirty="0">
+            <a:r>
+              <a:rPr lang="de-DE" sz="3000" dirty="0">
                 <a:latin typeface="Liberation Sans" panose="020B0604020202020204" pitchFamily="34" charset="0"/>
                 <a:ea typeface="Liberation Sans" panose="020B0604020202020204" pitchFamily="34" charset="0"/>
                 <a:cs typeface="Liberation Sans" panose="020B0604020202020204" pitchFamily="34" charset="0"/>
               </a:rPr>
-              <a:t>11.1V 3500mAh - Akku</a:t>
-            </a:r>
-          </a:p>
-          <a:p>
-            <a:pPr marL="342900" indent="-342900" algn="l">
-              <a:buFont typeface="Wingdings" panose="05000000000000000000" pitchFamily="2" charset="2"/>
-              <a:buChar char="v"/>
-            </a:pPr>
-            <a:endParaRPr lang="de-DE" sz="2000" dirty="0">
-              <a:latin typeface="Liberation Sans" panose="020B0604020202020204" pitchFamily="34" charset="0"/>
-              <a:ea typeface="Liberation Sans" panose="020B0604020202020204" pitchFamily="34" charset="0"/>
-              <a:cs typeface="Liberation Sans" panose="020B0604020202020204" pitchFamily="34" charset="0"/>
-            </a:endParaRPr>
-          </a:p>
-          <a:p>
-            <a:pPr marL="342900" indent="-342900" algn="l">
-              <a:buFont typeface="Wingdings" panose="05000000000000000000" pitchFamily="2" charset="2"/>
-              <a:buChar char="v"/>
-            </a:pPr>
-            <a:r>
-              <a:rPr lang="de-DE" sz="2000" dirty="0">
-                <a:latin typeface="Liberation Sans" panose="020B0604020202020204" pitchFamily="34" charset="0"/>
-                <a:ea typeface="Liberation Sans" panose="020B0604020202020204" pitchFamily="34" charset="0"/>
-                <a:cs typeface="Liberation Sans" panose="020B0604020202020204" pitchFamily="34" charset="0"/>
-              </a:rPr>
-              <a:t>2x BTS7960 43A – H-Brücke</a:t>
-            </a:r>
-          </a:p>
-          <a:p>
-            <a:pPr marL="342900" indent="-342900" algn="l">
-              <a:buFont typeface="Wingdings" panose="05000000000000000000" pitchFamily="2" charset="2"/>
-              <a:buChar char="v"/>
-            </a:pPr>
-            <a:endParaRPr lang="de-DE" sz="2000" dirty="0">
-              <a:latin typeface="Liberation Sans" panose="020B0604020202020204" pitchFamily="34" charset="0"/>
-              <a:ea typeface="Liberation Sans" panose="020B0604020202020204" pitchFamily="34" charset="0"/>
-              <a:cs typeface="Liberation Sans" panose="020B0604020202020204" pitchFamily="34" charset="0"/>
-            </a:endParaRPr>
-          </a:p>
-          <a:p>
-            <a:pPr marL="342900" indent="-342900" algn="l">
-              <a:buFont typeface="Wingdings" panose="05000000000000000000" pitchFamily="2" charset="2"/>
-              <a:buChar char="v"/>
-            </a:pPr>
-            <a:r>
-              <a:rPr lang="de-DE" sz="2000" dirty="0">
-                <a:latin typeface="Liberation Sans" panose="020B0604020202020204" pitchFamily="34" charset="0"/>
-                <a:ea typeface="Liberation Sans" panose="020B0604020202020204" pitchFamily="34" charset="0"/>
-                <a:cs typeface="Liberation Sans" panose="020B0604020202020204" pitchFamily="34" charset="0"/>
-              </a:rPr>
-              <a:t>2x JGB37-520 12V Motor</a:t>
-            </a:r>
-          </a:p>
-          <a:p>
-            <a:pPr marL="342900" indent="-342900" algn="l">
-              <a:buFont typeface="Wingdings" panose="05000000000000000000" pitchFamily="2" charset="2"/>
-              <a:buChar char="v"/>
-            </a:pPr>
-            <a:endParaRPr lang="de-DE" sz="2000" dirty="0">
-              <a:latin typeface="Liberation Sans" panose="020B0604020202020204" pitchFamily="34" charset="0"/>
-              <a:ea typeface="Liberation Sans" panose="020B0604020202020204" pitchFamily="34" charset="0"/>
-              <a:cs typeface="Liberation Sans" panose="020B0604020202020204" pitchFamily="34" charset="0"/>
-            </a:endParaRPr>
-          </a:p>
-          <a:p>
-            <a:pPr marL="342900" indent="-342900" algn="l">
-              <a:buFont typeface="Wingdings" panose="05000000000000000000" pitchFamily="2" charset="2"/>
-              <a:buChar char="v"/>
-            </a:pPr>
-            <a:r>
-              <a:rPr lang="de-DE" sz="2000" dirty="0">
-                <a:latin typeface="Liberation Sans" panose="020B0604020202020204" pitchFamily="34" charset="0"/>
-                <a:ea typeface="Liberation Sans" panose="020B0604020202020204" pitchFamily="34" charset="0"/>
-                <a:cs typeface="Liberation Sans" panose="020B0604020202020204" pitchFamily="34" charset="0"/>
-              </a:rPr>
-              <a:t>LM2596 – Buck-Converter</a:t>
-            </a:r>
-          </a:p>
-          <a:p>
-            <a:pPr marL="342900" indent="-342900" algn="l">
-              <a:buFont typeface="Wingdings" panose="05000000000000000000" pitchFamily="2" charset="2"/>
-              <a:buChar char="v"/>
-            </a:pPr>
-            <a:endParaRPr lang="de-DE" sz="2000" dirty="0">
-              <a:latin typeface="Liberation Sans" panose="020B0604020202020204" pitchFamily="34" charset="0"/>
-              <a:ea typeface="Liberation Sans" panose="020B0604020202020204" pitchFamily="34" charset="0"/>
-              <a:cs typeface="Liberation Sans" panose="020B0604020202020204" pitchFamily="34" charset="0"/>
-            </a:endParaRPr>
-          </a:p>
-          <a:p>
-            <a:pPr marL="342900" indent="-342900" algn="l">
-              <a:buFont typeface="Wingdings" panose="05000000000000000000" pitchFamily="2" charset="2"/>
-              <a:buChar char="v"/>
-            </a:pPr>
-            <a:r>
-              <a:rPr lang="de-DE" sz="2000" dirty="0">
-                <a:latin typeface="Liberation Sans" panose="020B0604020202020204" pitchFamily="34" charset="0"/>
-                <a:ea typeface="Liberation Sans" panose="020B0604020202020204" pitchFamily="34" charset="0"/>
-                <a:cs typeface="Liberation Sans" panose="020B0604020202020204" pitchFamily="34" charset="0"/>
-              </a:rPr>
-              <a:t>ESP32 Dev-Module (38 Pins)</a:t>
+              <a:t>Julian</a:t>
             </a:r>
           </a:p>
         </p:txBody>
@@ -4046,7 +3935,7 @@
         </p:nvCxnSpPr>
         <p:spPr>
           <a:xfrm>
-            <a:off x="1576168" y="1118956"/>
+            <a:off x="1698171" y="3830217"/>
             <a:ext cx="8714792" cy="0"/>
           </a:xfrm>
           <a:prstGeom prst="line">
@@ -4068,225 +3957,10 @@
           </a:fontRef>
         </p:style>
       </p:cxnSp>
-      <p:pic>
-        <p:nvPicPr>
-          <p:cNvPr id="6" name="Grafik 5" descr="Ein Bild, das Text, Allgemeine Versorgung, Büroausstattung, Etikett enthält.&#10;&#10;KI-generierte Inhalte können fehlerhaft sein.">
-            <a:extLst>
-              <a:ext uri="{FF2B5EF4-FFF2-40B4-BE49-F238E27FC236}">
-                <a16:creationId xmlns:a16="http://schemas.microsoft.com/office/drawing/2014/main" id="{B109BC79-F612-DA75-4651-5C4278F2E95A}"/>
-              </a:ext>
-            </a:extLst>
-          </p:cNvPr>
-          <p:cNvPicPr>
-            <a:picLocks noChangeAspect="1"/>
-          </p:cNvPicPr>
-          <p:nvPr/>
-        </p:nvPicPr>
-        <p:blipFill>
-          <a:blip r:embed="rId2">
-            <a:extLst>
-              <a:ext uri="{28A0092B-C50C-407E-A947-70E740481C1C}">
-                <a14:useLocalDpi xmlns:a14="http://schemas.microsoft.com/office/drawing/2010/main" val="0"/>
-              </a:ext>
-            </a:extLst>
-          </a:blip>
-          <a:stretch>
-            <a:fillRect/>
-          </a:stretch>
-        </p:blipFill>
-        <p:spPr>
-          <a:xfrm>
-            <a:off x="4850372" y="1986084"/>
-            <a:ext cx="2232463" cy="1777916"/>
-          </a:xfrm>
-          <a:prstGeom prst="rect">
-            <a:avLst/>
-          </a:prstGeom>
-        </p:spPr>
-      </p:pic>
-      <p:pic>
-        <p:nvPicPr>
-          <p:cNvPr id="8" name="Grafik 7" descr="Ein Bild, das Elektronik, Elektronisches Bauteil, Elektrisches Bauelement, Schaltung enthält.&#10;&#10;KI-generierte Inhalte können fehlerhaft sein.">
-            <a:extLst>
-              <a:ext uri="{FF2B5EF4-FFF2-40B4-BE49-F238E27FC236}">
-                <a16:creationId xmlns:a16="http://schemas.microsoft.com/office/drawing/2014/main" id="{AF376ADC-B7DD-2D3B-0180-9FCFD057D9AE}"/>
-              </a:ext>
-            </a:extLst>
-          </p:cNvPr>
-          <p:cNvPicPr>
-            <a:picLocks noChangeAspect="1"/>
-          </p:cNvPicPr>
-          <p:nvPr/>
-        </p:nvPicPr>
-        <p:blipFill>
-          <a:blip r:embed="rId3">
-            <a:extLst>
-              <a:ext uri="{28A0092B-C50C-407E-A947-70E740481C1C}">
-                <a14:useLocalDpi xmlns:a14="http://schemas.microsoft.com/office/drawing/2010/main" val="0"/>
-              </a:ext>
-            </a:extLst>
-          </a:blip>
-          <a:stretch>
-            <a:fillRect/>
-          </a:stretch>
-        </p:blipFill>
-        <p:spPr>
-          <a:xfrm>
-            <a:off x="9517044" y="4279431"/>
-            <a:ext cx="1776107" cy="1535419"/>
-          </a:xfrm>
-          <a:prstGeom prst="rect">
-            <a:avLst/>
-          </a:prstGeom>
-        </p:spPr>
-      </p:pic>
-      <p:pic>
-        <p:nvPicPr>
-          <p:cNvPr id="10" name="Grafik 9" descr="Ein Bild, das Elektronik, Elektrisches Bauelement, Elektronisches Bauteil, Schaltung enthält.&#10;&#10;KI-generierte Inhalte können fehlerhaft sein.">
-            <a:extLst>
-              <a:ext uri="{FF2B5EF4-FFF2-40B4-BE49-F238E27FC236}">
-                <a16:creationId xmlns:a16="http://schemas.microsoft.com/office/drawing/2014/main" id="{2C6DB4DF-7CAC-76B2-14FF-CF0AFF5F5D60}"/>
-              </a:ext>
-            </a:extLst>
-          </p:cNvPr>
-          <p:cNvPicPr>
-            <a:picLocks noChangeAspect="1"/>
-          </p:cNvPicPr>
-          <p:nvPr/>
-        </p:nvPicPr>
-        <p:blipFill>
-          <a:blip r:embed="rId4">
-            <a:extLst>
-              <a:ext uri="{28A0092B-C50C-407E-A947-70E740481C1C}">
-                <a14:useLocalDpi xmlns:a14="http://schemas.microsoft.com/office/drawing/2010/main" val="0"/>
-              </a:ext>
-            </a:extLst>
-          </a:blip>
-          <a:stretch>
-            <a:fillRect/>
-          </a:stretch>
-        </p:blipFill>
-        <p:spPr>
-          <a:xfrm>
-            <a:off x="8172633" y="2043827"/>
-            <a:ext cx="2232464" cy="2050686"/>
-          </a:xfrm>
-          <a:prstGeom prst="rect">
-            <a:avLst/>
-          </a:prstGeom>
-        </p:spPr>
-      </p:pic>
-      <p:pic>
-        <p:nvPicPr>
-          <p:cNvPr id="12" name="Grafik 11" descr="Ein Bild, das Röhre enthält.&#10;&#10;KI-generierte Inhalte können fehlerhaft sein.">
-            <a:extLst>
-              <a:ext uri="{FF2B5EF4-FFF2-40B4-BE49-F238E27FC236}">
-                <a16:creationId xmlns:a16="http://schemas.microsoft.com/office/drawing/2014/main" id="{5D354501-3BFF-6440-5702-C64F04BF6ED4}"/>
-              </a:ext>
-            </a:extLst>
-          </p:cNvPr>
-          <p:cNvPicPr>
-            <a:picLocks noChangeAspect="1"/>
-          </p:cNvPicPr>
-          <p:nvPr/>
-        </p:nvPicPr>
-        <p:blipFill>
-          <a:blip r:embed="rId5">
-            <a:extLst>
-              <a:ext uri="{28A0092B-C50C-407E-A947-70E740481C1C}">
-                <a14:useLocalDpi xmlns:a14="http://schemas.microsoft.com/office/drawing/2010/main" val="0"/>
-              </a:ext>
-            </a:extLst>
-          </a:blip>
-          <a:stretch>
-            <a:fillRect/>
-          </a:stretch>
-        </p:blipFill>
-        <p:spPr>
-          <a:xfrm>
-            <a:off x="6719297" y="3307658"/>
-            <a:ext cx="1228602" cy="2233822"/>
-          </a:xfrm>
-          <a:prstGeom prst="rect">
-            <a:avLst/>
-          </a:prstGeom>
-        </p:spPr>
-      </p:pic>
-      <p:pic>
-        <p:nvPicPr>
-          <p:cNvPr id="14" name="Grafik 13" descr="Ein Bild, das Elektronik, Computerkomponenten, Elektronisches Bauteil, Elektrisches Bauelement enthält.&#10;&#10;KI-generierte Inhalte können fehlerhaft sein.">
-            <a:extLst>
-              <a:ext uri="{FF2B5EF4-FFF2-40B4-BE49-F238E27FC236}">
-                <a16:creationId xmlns:a16="http://schemas.microsoft.com/office/drawing/2014/main" id="{6B30D8AC-25CB-8DC9-7B69-C7A7727C16F1}"/>
-              </a:ext>
-            </a:extLst>
-          </p:cNvPr>
-          <p:cNvPicPr>
-            <a:picLocks noChangeAspect="1"/>
-          </p:cNvPicPr>
-          <p:nvPr/>
-        </p:nvPicPr>
-        <p:blipFill>
-          <a:blip r:embed="rId6">
-            <a:extLst>
-              <a:ext uri="{28A0092B-C50C-407E-A947-70E740481C1C}">
-                <a14:useLocalDpi xmlns:a14="http://schemas.microsoft.com/office/drawing/2010/main" val="0"/>
-              </a:ext>
-            </a:extLst>
-          </a:blip>
-          <a:stretch>
-            <a:fillRect/>
-          </a:stretch>
-        </p:blipFill>
-        <p:spPr>
-          <a:xfrm>
-            <a:off x="7709513" y="5087251"/>
-            <a:ext cx="1619317" cy="1455197"/>
-          </a:xfrm>
-          <a:prstGeom prst="rect">
-            <a:avLst/>
-          </a:prstGeom>
-        </p:spPr>
-      </p:pic>
-      <p:sp>
-        <p:nvSpPr>
-          <p:cNvPr id="15" name="Textfeld 14">
-            <a:extLst>
-              <a:ext uri="{FF2B5EF4-FFF2-40B4-BE49-F238E27FC236}">
-                <a16:creationId xmlns:a16="http://schemas.microsoft.com/office/drawing/2014/main" id="{D3227EC0-6C59-6CD2-5D53-172A65B2C243}"/>
-              </a:ext>
-            </a:extLst>
-          </p:cNvPr>
-          <p:cNvSpPr txBox="1"/>
-          <p:nvPr/>
-        </p:nvSpPr>
-        <p:spPr>
-          <a:xfrm>
-            <a:off x="233265" y="6456784"/>
-            <a:ext cx="5299788" cy="369332"/>
-          </a:xfrm>
-          <a:prstGeom prst="rect">
-            <a:avLst/>
-          </a:prstGeom>
-          <a:noFill/>
-        </p:spPr>
-        <p:txBody>
-          <a:bodyPr wrap="square" rtlCol="0">
-            <a:spAutoFit/>
-          </a:bodyPr>
-          <a:lstStyle/>
-          <a:p>
-            <a:r>
-              <a:rPr lang="de-DE" dirty="0"/>
-              <a:t>*Alle aufgeführten Bauteile stammen von Aliexpress</a:t>
-            </a:r>
-          </a:p>
-        </p:txBody>
-      </p:sp>
     </p:spTree>
     <p:extLst>
       <p:ext uri="{BB962C8B-B14F-4D97-AF65-F5344CB8AC3E}">
-        <p14:creationId xmlns:p14="http://schemas.microsoft.com/office/powerpoint/2010/main" val="1379536395"/>
+        <p14:creationId xmlns:p14="http://schemas.microsoft.com/office/powerpoint/2010/main" val="383897644"/>
       </p:ext>
     </p:extLst>
   </p:cSld>
@@ -4313,6 +3987,467 @@
           <a:chExt cx="0" cy="0"/>
         </a:xfrm>
       </p:grpSpPr>
+      <p:sp>
+        <p:nvSpPr>
+          <p:cNvPr id="2" name="Titel 1">
+            <a:extLst>
+              <a:ext uri="{FF2B5EF4-FFF2-40B4-BE49-F238E27FC236}">
+                <a16:creationId xmlns:a16="http://schemas.microsoft.com/office/drawing/2014/main" id="{413D0774-18A2-673D-283B-1C04DB36353E}"/>
+              </a:ext>
+            </a:extLst>
+          </p:cNvPr>
+          <p:cNvSpPr>
+            <a:spLocks noGrp="1"/>
+          </p:cNvSpPr>
+          <p:nvPr>
+            <p:ph type="ctrTitle"/>
+          </p:nvPr>
+        </p:nvSpPr>
+        <p:spPr>
+          <a:xfrm>
+            <a:off x="4430485" y="39054"/>
+            <a:ext cx="3331029" cy="1019204"/>
+          </a:xfrm>
+        </p:spPr>
+        <p:txBody>
+          <a:bodyPr>
+            <a:normAutofit/>
+          </a:bodyPr>
+          <a:lstStyle/>
+          <a:p>
+            <a:r>
+              <a:rPr lang="de-DE" dirty="0">
+                <a:latin typeface="Impact" panose="020B0806030902050204" pitchFamily="34" charset="0"/>
+              </a:rPr>
+              <a:t>Elektronik</a:t>
+            </a:r>
+          </a:p>
+        </p:txBody>
+      </p:sp>
+      <p:sp>
+        <p:nvSpPr>
+          <p:cNvPr id="3" name="Untertitel 2">
+            <a:extLst>
+              <a:ext uri="{FF2B5EF4-FFF2-40B4-BE49-F238E27FC236}">
+                <a16:creationId xmlns:a16="http://schemas.microsoft.com/office/drawing/2014/main" id="{93304FBE-99DF-EE64-5EB2-94852307E71F}"/>
+              </a:ext>
+            </a:extLst>
+          </p:cNvPr>
+          <p:cNvSpPr>
+            <a:spLocks noGrp="1"/>
+          </p:cNvSpPr>
+          <p:nvPr>
+            <p:ph type="subTitle" idx="1"/>
+          </p:nvPr>
+        </p:nvSpPr>
+        <p:spPr>
+          <a:xfrm>
+            <a:off x="898849" y="2533471"/>
+            <a:ext cx="9144000" cy="3848665"/>
+          </a:xfrm>
+        </p:spPr>
+        <p:txBody>
+          <a:bodyPr>
+            <a:noAutofit/>
+          </a:bodyPr>
+          <a:lstStyle/>
+          <a:p>
+            <a:pPr marL="342900" indent="-342900" algn="l">
+              <a:buFont typeface="Wingdings" panose="05000000000000000000" pitchFamily="2" charset="2"/>
+              <a:buChar char="v"/>
+            </a:pPr>
+            <a:r>
+              <a:rPr lang="de-DE" sz="2000" dirty="0">
+                <a:latin typeface="Liberation Sans" panose="020B0604020202020204" pitchFamily="34" charset="0"/>
+                <a:ea typeface="Liberation Sans" panose="020B0604020202020204" pitchFamily="34" charset="0"/>
+                <a:cs typeface="Liberation Sans" panose="020B0604020202020204" pitchFamily="34" charset="0"/>
+              </a:rPr>
+              <a:t>11.1V 3500mAh - Akku</a:t>
+            </a:r>
+          </a:p>
+          <a:p>
+            <a:pPr marL="342900" indent="-342900" algn="l">
+              <a:buFont typeface="Wingdings" panose="05000000000000000000" pitchFamily="2" charset="2"/>
+              <a:buChar char="v"/>
+            </a:pPr>
+            <a:endParaRPr lang="de-DE" sz="2000" dirty="0">
+              <a:latin typeface="Liberation Sans" panose="020B0604020202020204" pitchFamily="34" charset="0"/>
+              <a:ea typeface="Liberation Sans" panose="020B0604020202020204" pitchFamily="34" charset="0"/>
+              <a:cs typeface="Liberation Sans" panose="020B0604020202020204" pitchFamily="34" charset="0"/>
+            </a:endParaRPr>
+          </a:p>
+          <a:p>
+            <a:pPr marL="342900" indent="-342900" algn="l">
+              <a:buFont typeface="Wingdings" panose="05000000000000000000" pitchFamily="2" charset="2"/>
+              <a:buChar char="v"/>
+            </a:pPr>
+            <a:r>
+              <a:rPr lang="de-DE" sz="2000" dirty="0">
+                <a:latin typeface="Liberation Sans" panose="020B0604020202020204" pitchFamily="34" charset="0"/>
+                <a:ea typeface="Liberation Sans" panose="020B0604020202020204" pitchFamily="34" charset="0"/>
+                <a:cs typeface="Liberation Sans" panose="020B0604020202020204" pitchFamily="34" charset="0"/>
+              </a:rPr>
+              <a:t>2x BTS7960 43A – H-Brücke</a:t>
+            </a:r>
+          </a:p>
+          <a:p>
+            <a:pPr marL="342900" indent="-342900" algn="l">
+              <a:buFont typeface="Wingdings" panose="05000000000000000000" pitchFamily="2" charset="2"/>
+              <a:buChar char="v"/>
+            </a:pPr>
+            <a:endParaRPr lang="de-DE" sz="2000" dirty="0">
+              <a:latin typeface="Liberation Sans" panose="020B0604020202020204" pitchFamily="34" charset="0"/>
+              <a:ea typeface="Liberation Sans" panose="020B0604020202020204" pitchFamily="34" charset="0"/>
+              <a:cs typeface="Liberation Sans" panose="020B0604020202020204" pitchFamily="34" charset="0"/>
+            </a:endParaRPr>
+          </a:p>
+          <a:p>
+            <a:pPr marL="342900" indent="-342900" algn="l">
+              <a:buFont typeface="Wingdings" panose="05000000000000000000" pitchFamily="2" charset="2"/>
+              <a:buChar char="v"/>
+            </a:pPr>
+            <a:r>
+              <a:rPr lang="de-DE" sz="2000" dirty="0">
+                <a:latin typeface="Liberation Sans" panose="020B0604020202020204" pitchFamily="34" charset="0"/>
+                <a:ea typeface="Liberation Sans" panose="020B0604020202020204" pitchFamily="34" charset="0"/>
+                <a:cs typeface="Liberation Sans" panose="020B0604020202020204" pitchFamily="34" charset="0"/>
+              </a:rPr>
+              <a:t>2x JGB37-520 12V Motor</a:t>
+            </a:r>
+          </a:p>
+          <a:p>
+            <a:pPr marL="342900" indent="-342900" algn="l">
+              <a:buFont typeface="Wingdings" panose="05000000000000000000" pitchFamily="2" charset="2"/>
+              <a:buChar char="v"/>
+            </a:pPr>
+            <a:endParaRPr lang="de-DE" sz="2000" dirty="0">
+              <a:latin typeface="Liberation Sans" panose="020B0604020202020204" pitchFamily="34" charset="0"/>
+              <a:ea typeface="Liberation Sans" panose="020B0604020202020204" pitchFamily="34" charset="0"/>
+              <a:cs typeface="Liberation Sans" panose="020B0604020202020204" pitchFamily="34" charset="0"/>
+            </a:endParaRPr>
+          </a:p>
+          <a:p>
+            <a:pPr marL="342900" indent="-342900" algn="l">
+              <a:buFont typeface="Wingdings" panose="05000000000000000000" pitchFamily="2" charset="2"/>
+              <a:buChar char="v"/>
+            </a:pPr>
+            <a:r>
+              <a:rPr lang="de-DE" sz="2000" dirty="0">
+                <a:latin typeface="Liberation Sans" panose="020B0604020202020204" pitchFamily="34" charset="0"/>
+                <a:ea typeface="Liberation Sans" panose="020B0604020202020204" pitchFamily="34" charset="0"/>
+                <a:cs typeface="Liberation Sans" panose="020B0604020202020204" pitchFamily="34" charset="0"/>
+              </a:rPr>
+              <a:t>LM2596 – Buck-Converter</a:t>
+            </a:r>
+          </a:p>
+          <a:p>
+            <a:pPr marL="342900" indent="-342900" algn="l">
+              <a:buFont typeface="Wingdings" panose="05000000000000000000" pitchFamily="2" charset="2"/>
+              <a:buChar char="v"/>
+            </a:pPr>
+            <a:endParaRPr lang="de-DE" sz="2000" dirty="0">
+              <a:latin typeface="Liberation Sans" panose="020B0604020202020204" pitchFamily="34" charset="0"/>
+              <a:ea typeface="Liberation Sans" panose="020B0604020202020204" pitchFamily="34" charset="0"/>
+              <a:cs typeface="Liberation Sans" panose="020B0604020202020204" pitchFamily="34" charset="0"/>
+            </a:endParaRPr>
+          </a:p>
+          <a:p>
+            <a:pPr marL="342900" indent="-342900" algn="l">
+              <a:buFont typeface="Wingdings" panose="05000000000000000000" pitchFamily="2" charset="2"/>
+              <a:buChar char="v"/>
+            </a:pPr>
+            <a:r>
+              <a:rPr lang="de-DE" sz="2000" dirty="0">
+                <a:latin typeface="Liberation Sans" panose="020B0604020202020204" pitchFamily="34" charset="0"/>
+                <a:ea typeface="Liberation Sans" panose="020B0604020202020204" pitchFamily="34" charset="0"/>
+                <a:cs typeface="Liberation Sans" panose="020B0604020202020204" pitchFamily="34" charset="0"/>
+              </a:rPr>
+              <a:t>ESP32 Dev-Module (38 Pins)</a:t>
+            </a:r>
+          </a:p>
+        </p:txBody>
+      </p:sp>
+      <p:cxnSp>
+        <p:nvCxnSpPr>
+          <p:cNvPr id="5" name="Gerader Verbinder 4">
+            <a:extLst>
+              <a:ext uri="{FF2B5EF4-FFF2-40B4-BE49-F238E27FC236}">
+                <a16:creationId xmlns:a16="http://schemas.microsoft.com/office/drawing/2014/main" id="{2B753068-DCEB-B788-AD32-F324BF9F36F0}"/>
+              </a:ext>
+            </a:extLst>
+          </p:cNvPr>
+          <p:cNvCxnSpPr/>
+          <p:nvPr/>
+        </p:nvCxnSpPr>
+        <p:spPr>
+          <a:xfrm>
+            <a:off x="1576168" y="1118956"/>
+            <a:ext cx="8714792" cy="0"/>
+          </a:xfrm>
+          <a:prstGeom prst="line">
+            <a:avLst/>
+          </a:prstGeom>
+        </p:spPr>
+        <p:style>
+          <a:lnRef idx="2">
+            <a:schemeClr val="dk1"/>
+          </a:lnRef>
+          <a:fillRef idx="0">
+            <a:schemeClr val="dk1"/>
+          </a:fillRef>
+          <a:effectRef idx="1">
+            <a:schemeClr val="dk1"/>
+          </a:effectRef>
+          <a:fontRef idx="minor">
+            <a:schemeClr val="tx1"/>
+          </a:fontRef>
+        </p:style>
+      </p:cxnSp>
+      <p:pic>
+        <p:nvPicPr>
+          <p:cNvPr id="6" name="Grafik 5" descr="Ein Bild, das Text, Allgemeine Versorgung, Büroausstattung, Etikett enthält.&#10;&#10;KI-generierte Inhalte können fehlerhaft sein.">
+            <a:extLst>
+              <a:ext uri="{FF2B5EF4-FFF2-40B4-BE49-F238E27FC236}">
+                <a16:creationId xmlns:a16="http://schemas.microsoft.com/office/drawing/2014/main" id="{B109BC79-F612-DA75-4651-5C4278F2E95A}"/>
+              </a:ext>
+            </a:extLst>
+          </p:cNvPr>
+          <p:cNvPicPr>
+            <a:picLocks noChangeAspect="1"/>
+          </p:cNvPicPr>
+          <p:nvPr/>
+        </p:nvPicPr>
+        <p:blipFill>
+          <a:blip r:embed="rId2">
+            <a:extLst>
+              <a:ext uri="{28A0092B-C50C-407E-A947-70E740481C1C}">
+                <a14:useLocalDpi xmlns:a14="http://schemas.microsoft.com/office/drawing/2010/main" val="0"/>
+              </a:ext>
+            </a:extLst>
+          </a:blip>
+          <a:stretch>
+            <a:fillRect/>
+          </a:stretch>
+        </p:blipFill>
+        <p:spPr>
+          <a:xfrm>
+            <a:off x="4850372" y="1986084"/>
+            <a:ext cx="2232463" cy="1777916"/>
+          </a:xfrm>
+          <a:prstGeom prst="rect">
+            <a:avLst/>
+          </a:prstGeom>
+        </p:spPr>
+      </p:pic>
+      <p:pic>
+        <p:nvPicPr>
+          <p:cNvPr id="8" name="Grafik 7" descr="Ein Bild, das Elektronik, Elektronisches Bauteil, Elektrisches Bauelement, Schaltung enthält.&#10;&#10;KI-generierte Inhalte können fehlerhaft sein.">
+            <a:extLst>
+              <a:ext uri="{FF2B5EF4-FFF2-40B4-BE49-F238E27FC236}">
+                <a16:creationId xmlns:a16="http://schemas.microsoft.com/office/drawing/2014/main" id="{AF376ADC-B7DD-2D3B-0180-9FCFD057D9AE}"/>
+              </a:ext>
+            </a:extLst>
+          </p:cNvPr>
+          <p:cNvPicPr>
+            <a:picLocks noChangeAspect="1"/>
+          </p:cNvPicPr>
+          <p:nvPr/>
+        </p:nvPicPr>
+        <p:blipFill>
+          <a:blip r:embed="rId3">
+            <a:extLst>
+              <a:ext uri="{28A0092B-C50C-407E-A947-70E740481C1C}">
+                <a14:useLocalDpi xmlns:a14="http://schemas.microsoft.com/office/drawing/2010/main" val="0"/>
+              </a:ext>
+            </a:extLst>
+          </a:blip>
+          <a:stretch>
+            <a:fillRect/>
+          </a:stretch>
+        </p:blipFill>
+        <p:spPr>
+          <a:xfrm>
+            <a:off x="9517044" y="4279431"/>
+            <a:ext cx="1776107" cy="1535419"/>
+          </a:xfrm>
+          <a:prstGeom prst="rect">
+            <a:avLst/>
+          </a:prstGeom>
+        </p:spPr>
+      </p:pic>
+      <p:pic>
+        <p:nvPicPr>
+          <p:cNvPr id="10" name="Grafik 9" descr="Ein Bild, das Elektronik, Elektrisches Bauelement, Elektronisches Bauteil, Schaltung enthält.&#10;&#10;KI-generierte Inhalte können fehlerhaft sein.">
+            <a:extLst>
+              <a:ext uri="{FF2B5EF4-FFF2-40B4-BE49-F238E27FC236}">
+                <a16:creationId xmlns:a16="http://schemas.microsoft.com/office/drawing/2014/main" id="{2C6DB4DF-7CAC-76B2-14FF-CF0AFF5F5D60}"/>
+              </a:ext>
+            </a:extLst>
+          </p:cNvPr>
+          <p:cNvPicPr>
+            <a:picLocks noChangeAspect="1"/>
+          </p:cNvPicPr>
+          <p:nvPr/>
+        </p:nvPicPr>
+        <p:blipFill>
+          <a:blip r:embed="rId4">
+            <a:extLst>
+              <a:ext uri="{28A0092B-C50C-407E-A947-70E740481C1C}">
+                <a14:useLocalDpi xmlns:a14="http://schemas.microsoft.com/office/drawing/2010/main" val="0"/>
+              </a:ext>
+            </a:extLst>
+          </a:blip>
+          <a:stretch>
+            <a:fillRect/>
+          </a:stretch>
+        </p:blipFill>
+        <p:spPr>
+          <a:xfrm>
+            <a:off x="8172633" y="2043827"/>
+            <a:ext cx="2232464" cy="2050686"/>
+          </a:xfrm>
+          <a:prstGeom prst="rect">
+            <a:avLst/>
+          </a:prstGeom>
+        </p:spPr>
+      </p:pic>
+      <p:pic>
+        <p:nvPicPr>
+          <p:cNvPr id="12" name="Grafik 11" descr="Ein Bild, das Röhre enthält.&#10;&#10;KI-generierte Inhalte können fehlerhaft sein.">
+            <a:extLst>
+              <a:ext uri="{FF2B5EF4-FFF2-40B4-BE49-F238E27FC236}">
+                <a16:creationId xmlns:a16="http://schemas.microsoft.com/office/drawing/2014/main" id="{5D354501-3BFF-6440-5702-C64F04BF6ED4}"/>
+              </a:ext>
+            </a:extLst>
+          </p:cNvPr>
+          <p:cNvPicPr>
+            <a:picLocks noChangeAspect="1"/>
+          </p:cNvPicPr>
+          <p:nvPr/>
+        </p:nvPicPr>
+        <p:blipFill>
+          <a:blip r:embed="rId5">
+            <a:extLst>
+              <a:ext uri="{28A0092B-C50C-407E-A947-70E740481C1C}">
+                <a14:useLocalDpi xmlns:a14="http://schemas.microsoft.com/office/drawing/2010/main" val="0"/>
+              </a:ext>
+            </a:extLst>
+          </a:blip>
+          <a:stretch>
+            <a:fillRect/>
+          </a:stretch>
+        </p:blipFill>
+        <p:spPr>
+          <a:xfrm>
+            <a:off x="6719297" y="3307658"/>
+            <a:ext cx="1228602" cy="2233822"/>
+          </a:xfrm>
+          <a:prstGeom prst="rect">
+            <a:avLst/>
+          </a:prstGeom>
+        </p:spPr>
+      </p:pic>
+      <p:pic>
+        <p:nvPicPr>
+          <p:cNvPr id="14" name="Grafik 13" descr="Ein Bild, das Elektronik, Computerkomponenten, Elektronisches Bauteil, Elektrisches Bauelement enthält.&#10;&#10;KI-generierte Inhalte können fehlerhaft sein.">
+            <a:extLst>
+              <a:ext uri="{FF2B5EF4-FFF2-40B4-BE49-F238E27FC236}">
+                <a16:creationId xmlns:a16="http://schemas.microsoft.com/office/drawing/2014/main" id="{6B30D8AC-25CB-8DC9-7B69-C7A7727C16F1}"/>
+              </a:ext>
+            </a:extLst>
+          </p:cNvPr>
+          <p:cNvPicPr>
+            <a:picLocks noChangeAspect="1"/>
+          </p:cNvPicPr>
+          <p:nvPr/>
+        </p:nvPicPr>
+        <p:blipFill>
+          <a:blip r:embed="rId6">
+            <a:extLst>
+              <a:ext uri="{28A0092B-C50C-407E-A947-70E740481C1C}">
+                <a14:useLocalDpi xmlns:a14="http://schemas.microsoft.com/office/drawing/2010/main" val="0"/>
+              </a:ext>
+            </a:extLst>
+          </a:blip>
+          <a:stretch>
+            <a:fillRect/>
+          </a:stretch>
+        </p:blipFill>
+        <p:spPr>
+          <a:xfrm>
+            <a:off x="7709513" y="5087251"/>
+            <a:ext cx="1619317" cy="1455197"/>
+          </a:xfrm>
+          <a:prstGeom prst="rect">
+            <a:avLst/>
+          </a:prstGeom>
+        </p:spPr>
+      </p:pic>
+      <p:sp>
+        <p:nvSpPr>
+          <p:cNvPr id="15" name="Textfeld 14">
+            <a:extLst>
+              <a:ext uri="{FF2B5EF4-FFF2-40B4-BE49-F238E27FC236}">
+                <a16:creationId xmlns:a16="http://schemas.microsoft.com/office/drawing/2014/main" id="{D3227EC0-6C59-6CD2-5D53-172A65B2C243}"/>
+              </a:ext>
+            </a:extLst>
+          </p:cNvPr>
+          <p:cNvSpPr txBox="1"/>
+          <p:nvPr/>
+        </p:nvSpPr>
+        <p:spPr>
+          <a:xfrm>
+            <a:off x="233265" y="6456784"/>
+            <a:ext cx="5299788" cy="369332"/>
+          </a:xfrm>
+          <a:prstGeom prst="rect">
+            <a:avLst/>
+          </a:prstGeom>
+          <a:noFill/>
+        </p:spPr>
+        <p:txBody>
+          <a:bodyPr wrap="square" rtlCol="0">
+            <a:spAutoFit/>
+          </a:bodyPr>
+          <a:lstStyle/>
+          <a:p>
+            <a:r>
+              <a:rPr lang="de-DE" dirty="0"/>
+              <a:t>*Alle aufgeführten Bauteile stammen von Aliexpress</a:t>
+            </a:r>
+          </a:p>
+        </p:txBody>
+      </p:sp>
+    </p:spTree>
+    <p:extLst>
+      <p:ext uri="{BB962C8B-B14F-4D97-AF65-F5344CB8AC3E}">
+        <p14:creationId xmlns:p14="http://schemas.microsoft.com/office/powerpoint/2010/main" val="1379536395"/>
+      </p:ext>
+    </p:extLst>
+  </p:cSld>
+  <p:clrMapOvr>
+    <a:masterClrMapping/>
+  </p:clrMapOvr>
+</p:sld>
+</file>
+
+<file path=ppt/slides/slide12.xml><?xml version="1.0" encoding="utf-8"?>
+<p:sld xmlns:a="http://schemas.openxmlformats.org/drawingml/2006/main" xmlns:r="http://schemas.openxmlformats.org/officeDocument/2006/relationships" xmlns:p="http://schemas.openxmlformats.org/presentationml/2006/main">
+  <p:cSld>
+    <p:spTree>
+      <p:nvGrpSpPr>
+        <p:cNvPr id="1" name=""/>
+        <p:cNvGrpSpPr/>
+        <p:nvPr/>
+      </p:nvGrpSpPr>
+      <p:grpSpPr>
+        <a:xfrm>
+          <a:off x="0" y="0"/>
+          <a:ext cx="0" cy="0"/>
+          <a:chOff x="0" y="0"/>
+          <a:chExt cx="0" cy="0"/>
+        </a:xfrm>
+      </p:grpSpPr>
       <p:pic>
         <p:nvPicPr>
           <p:cNvPr id="5" name="Inhaltsplatzhalter 4" descr="Ein Bild, das Text, Diagramm, Plan, technische Zeichnung enthält.&#10;&#10;KI-generierte Inhalte können fehlerhaft sein.">
@@ -4395,7 +4530,7 @@
 </p:sld>
 </file>
 
-<file path=ppt/slides/slide12.xml><?xml version="1.0" encoding="utf-8"?>
+<file path=ppt/slides/slide13.xml><?xml version="1.0" encoding="utf-8"?>
 <p:sld xmlns:a="http://schemas.openxmlformats.org/drawingml/2006/main" xmlns:r="http://schemas.openxmlformats.org/officeDocument/2006/relationships" xmlns:p="http://schemas.openxmlformats.org/presentationml/2006/main">
   <p:cSld>
     <p:spTree>
@@ -4542,7 +4677,7 @@
 </p:sld>
 </file>
 
-<file path=ppt/slides/slide13.xml><?xml version="1.0" encoding="utf-8"?>
+<file path=ppt/slides/slide14.xml><?xml version="1.0" encoding="utf-8"?>
 <p:sld xmlns:a="http://schemas.openxmlformats.org/drawingml/2006/main" xmlns:r="http://schemas.openxmlformats.org/officeDocument/2006/relationships" xmlns:p="http://schemas.openxmlformats.org/presentationml/2006/main">
   <p:cSld>
     <p:spTree>
@@ -4715,7 +4850,7 @@
 </p:sld>
 </file>
 
-<file path=ppt/slides/slide14.xml><?xml version="1.0" encoding="utf-8"?>
+<file path=ppt/slides/slide15.xml><?xml version="1.0" encoding="utf-8"?>
 <p:sld xmlns:a="http://schemas.openxmlformats.org/drawingml/2006/main" xmlns:r="http://schemas.openxmlformats.org/officeDocument/2006/relationships" xmlns:p="http://schemas.openxmlformats.org/presentationml/2006/main">
   <p:cSld>
     <p:spTree>
@@ -4862,7 +4997,7 @@
 </p:sld>
 </file>
 
-<file path=ppt/slides/slide15.xml><?xml version="1.0" encoding="utf-8"?>
+<file path=ppt/slides/slide16.xml><?xml version="1.0" encoding="utf-8"?>
 <p:sld xmlns:a="http://schemas.openxmlformats.org/drawingml/2006/main" xmlns:r="http://schemas.openxmlformats.org/officeDocument/2006/relationships" xmlns:p="http://schemas.openxmlformats.org/presentationml/2006/main">
   <p:cSld>
     <p:spTree>
@@ -4965,7 +5100,7 @@
 </p:sld>
 </file>
 
-<file path=ppt/slides/slide16.xml><?xml version="1.0" encoding="utf-8"?>
+<file path=ppt/slides/slide17.xml><?xml version="1.0" encoding="utf-8"?>
 <p:sld xmlns:a="http://schemas.openxmlformats.org/drawingml/2006/main" xmlns:r="http://schemas.openxmlformats.org/officeDocument/2006/relationships" xmlns:p="http://schemas.openxmlformats.org/presentationml/2006/main">
   <p:cSld>
     <p:spTree>
@@ -5164,18 +5299,18 @@
         </p:nvSpPr>
         <p:spPr>
           <a:xfrm>
-            <a:off x="1524000" y="-689850"/>
-            <a:ext cx="9144000" cy="2387600"/>
+            <a:off x="1524000" y="-181393"/>
+            <a:ext cx="9144000" cy="1241941"/>
           </a:xfrm>
         </p:spPr>
         <p:txBody>
           <a:bodyPr>
-            <a:normAutofit fontScale="90000"/>
+            <a:normAutofit/>
           </a:bodyPr>
           <a:lstStyle/>
           <a:p>
             <a:r>
-              <a:rPr lang="de-DE" sz="10000" dirty="0">
+              <a:rPr lang="de-DE" dirty="0">
                 <a:latin typeface="Impact" panose="020B0806030902050204" pitchFamily="34" charset="0"/>
               </a:rPr>
               <a:t>Inhaltsverzeichnis</a:t>
@@ -5201,8 +5336,8 @@
         </p:nvSpPr>
         <p:spPr>
           <a:xfrm>
-            <a:off x="898849" y="2533472"/>
-            <a:ext cx="9144000" cy="1791056"/>
+            <a:off x="3497424" y="2533472"/>
+            <a:ext cx="5197151" cy="1791056"/>
           </a:xfrm>
         </p:spPr>
         <p:txBody>
@@ -5216,7 +5351,7 @@
               <a:buAutoNum type="arabicPeriod"/>
             </a:pPr>
             <a:r>
-              <a:rPr lang="de-DE" sz="3000" dirty="0">
+              <a:rPr lang="de-DE" sz="2000" dirty="0">
                 <a:latin typeface="Liberation Sans" panose="020B0604020202020204" pitchFamily="34" charset="0"/>
                 <a:ea typeface="Liberation Sans" panose="020B0604020202020204" pitchFamily="34" charset="0"/>
                 <a:cs typeface="Liberation Sans" panose="020B0604020202020204" pitchFamily="34" charset="0"/>
@@ -5230,7 +5365,7 @@
               <a:buAutoNum type="arabicPeriod"/>
             </a:pPr>
             <a:r>
-              <a:rPr lang="de-DE" sz="3000" dirty="0">
+              <a:rPr lang="de-DE" sz="2000" dirty="0">
                 <a:latin typeface="Liberation Sans" panose="020B0604020202020204" pitchFamily="34" charset="0"/>
                 <a:ea typeface="Liberation Sans" panose="020B0604020202020204" pitchFamily="34" charset="0"/>
                 <a:cs typeface="Liberation Sans" panose="020B0604020202020204" pitchFamily="34" charset="0"/>
@@ -5244,7 +5379,7 @@
               <a:buAutoNum type="arabicPeriod"/>
             </a:pPr>
             <a:r>
-              <a:rPr lang="de-DE" sz="3000" dirty="0">
+              <a:rPr lang="de-DE" sz="2000" dirty="0">
                 <a:latin typeface="Liberation Sans" panose="020B0604020202020204" pitchFamily="34" charset="0"/>
                 <a:ea typeface="Liberation Sans" panose="020B0604020202020204" pitchFamily="34" charset="0"/>
                 <a:cs typeface="Liberation Sans" panose="020B0604020202020204" pitchFamily="34" charset="0"/>
@@ -5252,6 +5387,20 @@
               <a:t>Programmierung</a:t>
             </a:r>
           </a:p>
+          <a:p>
+            <a:pPr marL="514350" indent="-514350" algn="l">
+              <a:buFont typeface="+mj-lt"/>
+              <a:buAutoNum type="arabicPeriod"/>
+            </a:pPr>
+            <a:r>
+              <a:rPr lang="de-DE" sz="2000" dirty="0">
+                <a:latin typeface="Liberation Sans" panose="020B0604020202020204" pitchFamily="34" charset="0"/>
+                <a:ea typeface="Liberation Sans" panose="020B0604020202020204" pitchFamily="34" charset="0"/>
+                <a:cs typeface="Liberation Sans" panose="020B0604020202020204" pitchFamily="34" charset="0"/>
+              </a:rPr>
+              <a:t>Allgemeines</a:t>
+            </a:r>
+          </a:p>
         </p:txBody>
       </p:sp>
       <p:cxnSp>
@@ -5268,7 +5417,7 @@
         </p:nvCxnSpPr>
         <p:spPr>
           <a:xfrm>
-            <a:off x="1698171" y="1870788"/>
+            <a:off x="1738604" y="1137542"/>
             <a:ext cx="8714792" cy="0"/>
           </a:xfrm>
           <a:prstGeom prst="line">
@@ -6236,7 +6385,7 @@
         </p:nvSpPr>
         <p:spPr>
           <a:xfrm>
-            <a:off x="3405187" y="16437"/>
+            <a:off x="3405186" y="0"/>
             <a:ext cx="5381625" cy="1019204"/>
           </a:xfrm>
           <a:prstGeom prst="rect">
@@ -6290,7 +6439,7 @@
         </p:nvCxnSpPr>
         <p:spPr>
           <a:xfrm>
-            <a:off x="1576168" y="1118956"/>
+            <a:off x="1738604" y="1110800"/>
             <a:ext cx="8714792" cy="0"/>
           </a:xfrm>
           <a:prstGeom prst="line">
@@ -6312,46 +6461,36 @@
           </a:fontRef>
         </p:style>
       </p:cxnSp>
-      <p:sp>
-        <p:nvSpPr>
-          <p:cNvPr id="2" name="Untertitel 2">
-            <a:extLst>
-              <a:ext uri="{FF2B5EF4-FFF2-40B4-BE49-F238E27FC236}">
-                <a16:creationId xmlns:a16="http://schemas.microsoft.com/office/drawing/2014/main" id="{07F31804-9B98-71F0-8A3E-BDECDDA49AE0}"/>
-              </a:ext>
-            </a:extLst>
-          </p:cNvPr>
-          <p:cNvSpPr>
-            <a:spLocks noGrp="1"/>
-          </p:cNvSpPr>
-          <p:nvPr>
-            <p:ph type="subTitle" idx="1"/>
-          </p:nvPr>
-        </p:nvSpPr>
-        <p:spPr>
-          <a:xfrm>
-            <a:off x="1576168" y="2095322"/>
-            <a:ext cx="8714792" cy="1791056"/>
-          </a:xfrm>
-        </p:spPr>
-        <p:txBody>
-          <a:bodyPr>
-            <a:noAutofit/>
-          </a:bodyPr>
-          <a:lstStyle/>
-          <a:p>
-            <a:pPr algn="l"/>
-            <a:r>
-              <a:rPr lang="de-DE" sz="2000" dirty="0">
-                <a:latin typeface="Liberation Sans" panose="020B0604020202020204" pitchFamily="34" charset="0"/>
-                <a:ea typeface="Liberation Sans" panose="020B0604020202020204" pitchFamily="34" charset="0"/>
-                <a:cs typeface="Liberation Sans" panose="020B0604020202020204" pitchFamily="34" charset="0"/>
-              </a:rPr>
-              <a:t>(Foto des Fahrgestells mit Kugellager etc.)</a:t>
-            </a:r>
-          </a:p>
-        </p:txBody>
-      </p:sp>
+      <p:pic>
+        <p:nvPicPr>
+          <p:cNvPr id="8" name="Grafik 7">
+            <a:extLst>
+              <a:ext uri="{FF2B5EF4-FFF2-40B4-BE49-F238E27FC236}">
+                <a16:creationId xmlns:a16="http://schemas.microsoft.com/office/drawing/2014/main" id="{A8F6D6A0-ECC8-EB46-7E96-C6A52450381B}"/>
+              </a:ext>
+            </a:extLst>
+          </p:cNvPr>
+          <p:cNvPicPr>
+            <a:picLocks noChangeAspect="1"/>
+          </p:cNvPicPr>
+          <p:nvPr/>
+        </p:nvPicPr>
+        <p:blipFill>
+          <a:blip r:embed="rId2"/>
+          <a:stretch>
+            <a:fillRect/>
+          </a:stretch>
+        </p:blipFill>
+        <p:spPr>
+          <a:xfrm>
+            <a:off x="1738603" y="1712150"/>
+            <a:ext cx="8714792" cy="4086808"/>
+          </a:xfrm>
+          <a:prstGeom prst="rect">
+            <a:avLst/>
+          </a:prstGeom>
+        </p:spPr>
+      </p:pic>
     </p:spTree>
     <p:extLst>
       <p:ext uri="{BB962C8B-B14F-4D97-AF65-F5344CB8AC3E}">
@@ -6384,95 +6523,6 @@
       </p:grpSpPr>
       <p:sp>
         <p:nvSpPr>
-          <p:cNvPr id="3" name="Untertitel 2">
-            <a:extLst>
-              <a:ext uri="{FF2B5EF4-FFF2-40B4-BE49-F238E27FC236}">
-                <a16:creationId xmlns:a16="http://schemas.microsoft.com/office/drawing/2014/main" id="{93304FBE-99DF-EE64-5EB2-94852307E71F}"/>
-              </a:ext>
-            </a:extLst>
-          </p:cNvPr>
-          <p:cNvSpPr>
-            <a:spLocks noGrp="1"/>
-          </p:cNvSpPr>
-          <p:nvPr>
-            <p:ph type="subTitle" idx="1"/>
-          </p:nvPr>
-        </p:nvSpPr>
-        <p:spPr>
-          <a:xfrm>
-            <a:off x="1576168" y="2108888"/>
-            <a:ext cx="2639330" cy="3554980"/>
-          </a:xfrm>
-        </p:spPr>
-        <p:txBody>
-          <a:bodyPr>
-            <a:noAutofit/>
-          </a:bodyPr>
-          <a:lstStyle/>
-          <a:p>
-            <a:r>
-              <a:rPr lang="de-DE" sz="2000" b="1" dirty="0">
-                <a:latin typeface="Liberation Sans" panose="020B0604020202020204" pitchFamily="34" charset="0"/>
-                <a:ea typeface="Liberation Sans" panose="020B0604020202020204" pitchFamily="34" charset="0"/>
-                <a:cs typeface="Liberation Sans" panose="020B0604020202020204" pitchFamily="34" charset="0"/>
-              </a:rPr>
-              <a:t>Positiv</a:t>
-            </a:r>
-          </a:p>
-          <a:p>
-            <a:pPr algn="l"/>
-            <a:endParaRPr lang="de-DE" sz="2000" b="1" dirty="0">
-              <a:latin typeface="Liberation Sans" panose="020B0604020202020204" pitchFamily="34" charset="0"/>
-              <a:ea typeface="Liberation Sans" panose="020B0604020202020204" pitchFamily="34" charset="0"/>
-              <a:cs typeface="Liberation Sans" panose="020B0604020202020204" pitchFamily="34" charset="0"/>
-            </a:endParaRPr>
-          </a:p>
-          <a:p>
-            <a:pPr marL="457200" indent="-457200" algn="l">
-              <a:buFont typeface="Wingdings" panose="05000000000000000000" pitchFamily="2" charset="2"/>
-              <a:buChar char="v"/>
-            </a:pPr>
-            <a:r>
-              <a:rPr lang="de-DE" sz="2000" dirty="0">
-                <a:latin typeface="Liberation Sans" panose="020B0604020202020204" pitchFamily="34" charset="0"/>
-                <a:ea typeface="Liberation Sans" panose="020B0604020202020204" pitchFamily="34" charset="0"/>
-                <a:cs typeface="Liberation Sans" panose="020B0604020202020204" pitchFamily="34" charset="0"/>
-              </a:rPr>
-              <a:t>Doppeltes Fahrgestell</a:t>
-            </a:r>
-          </a:p>
-          <a:p>
-            <a:pPr marL="457200" indent="-457200" algn="l">
-              <a:buFont typeface="Wingdings" panose="05000000000000000000" pitchFamily="2" charset="2"/>
-              <a:buChar char="v"/>
-            </a:pPr>
-            <a:r>
-              <a:rPr lang="de-DE" sz="2000" dirty="0">
-                <a:latin typeface="Liberation Sans" panose="020B0604020202020204" pitchFamily="34" charset="0"/>
-                <a:ea typeface="Liberation Sans" panose="020B0604020202020204" pitchFamily="34" charset="0"/>
-                <a:cs typeface="Liberation Sans" panose="020B0604020202020204" pitchFamily="34" charset="0"/>
-              </a:rPr>
-              <a:t>Modulares System mit vielen externen Teilen</a:t>
-            </a:r>
-          </a:p>
-          <a:p>
-            <a:pPr marL="457200" indent="-457200" algn="l">
-              <a:buFont typeface="Wingdings" panose="05000000000000000000" pitchFamily="2" charset="2"/>
-              <a:buChar char="v"/>
-            </a:pPr>
-            <a:r>
-              <a:rPr lang="de-DE" sz="2000" dirty="0">
-                <a:latin typeface="Liberation Sans" panose="020B0604020202020204" pitchFamily="34" charset="0"/>
-                <a:ea typeface="Liberation Sans" panose="020B0604020202020204" pitchFamily="34" charset="0"/>
-                <a:cs typeface="Liberation Sans" panose="020B0604020202020204" pitchFamily="34" charset="0"/>
-              </a:rPr>
-              <a:t>Flexibilität des Materials ist ein Vorteil</a:t>
-            </a:r>
-          </a:p>
-        </p:txBody>
-      </p:sp>
-      <p:sp>
-        <p:nvSpPr>
           <p:cNvPr id="4" name="Titel 1">
             <a:extLst>
               <a:ext uri="{FF2B5EF4-FFF2-40B4-BE49-F238E27FC236}">
@@ -6487,7 +6537,7 @@
         </p:nvSpPr>
         <p:spPr>
           <a:xfrm>
-            <a:off x="3405187" y="0"/>
+            <a:off x="3405186" y="0"/>
             <a:ext cx="5381625" cy="1019204"/>
           </a:xfrm>
           <a:prstGeom prst="rect">
@@ -6522,7 +6572,7 @@
               <a:rPr lang="de-DE" dirty="0">
                 <a:latin typeface="Impact" panose="020B0806030902050204" pitchFamily="34" charset="0"/>
               </a:rPr>
-              <a:t>Zwischenfazit</a:t>
+              <a:t>Fahrgestell</a:t>
             </a:r>
           </a:p>
         </p:txBody>
@@ -6541,7 +6591,7 @@
         </p:nvCxnSpPr>
         <p:spPr>
           <a:xfrm>
-            <a:off x="1576168" y="1118956"/>
+            <a:off x="1738604" y="1110800"/>
             <a:ext cx="8714792" cy="0"/>
           </a:xfrm>
           <a:prstGeom prst="line">
@@ -6568,500 +6618,37 @@
           <p:cNvPr id="2" name="Untertitel 2">
             <a:extLst>
               <a:ext uri="{FF2B5EF4-FFF2-40B4-BE49-F238E27FC236}">
-                <a16:creationId xmlns:a16="http://schemas.microsoft.com/office/drawing/2014/main" id="{3E9646A3-113F-3764-D676-70FA6CA8883E}"/>
-              </a:ext>
-            </a:extLst>
-          </p:cNvPr>
-          <p:cNvSpPr txBox="1">
-            <a:spLocks/>
-          </p:cNvSpPr>
-          <p:nvPr/>
-        </p:nvSpPr>
-        <p:spPr>
-          <a:xfrm>
-            <a:off x="4672302" y="1651510"/>
-            <a:ext cx="2639330" cy="3554980"/>
-          </a:xfrm>
-          <a:prstGeom prst="rect">
-            <a:avLst/>
-          </a:prstGeom>
-        </p:spPr>
-        <p:txBody>
-          <a:bodyPr vert="horz" lIns="91440" tIns="45720" rIns="91440" bIns="45720" rtlCol="0">
+                <a16:creationId xmlns:a16="http://schemas.microsoft.com/office/drawing/2014/main" id="{12D955C8-9645-1965-AECD-97498057E746}"/>
+              </a:ext>
+            </a:extLst>
+          </p:cNvPr>
+          <p:cNvSpPr>
+            <a:spLocks noGrp="1"/>
+          </p:cNvSpPr>
+          <p:nvPr>
+            <p:ph type="subTitle" idx="1"/>
+          </p:nvPr>
+        </p:nvSpPr>
+        <p:spPr>
+          <a:xfrm>
+            <a:off x="1576168" y="2095322"/>
+            <a:ext cx="4519832" cy="1791056"/>
+          </a:xfrm>
+        </p:spPr>
+        <p:txBody>
+          <a:bodyPr>
             <a:noAutofit/>
           </a:bodyPr>
-          <a:lstStyle>
-            <a:lvl1pPr marL="0" indent="0" algn="ctr" defTabSz="914400" rtl="0" eaLnBrk="1" latinLnBrk="0" hangingPunct="1">
-              <a:lnSpc>
-                <a:spcPct val="90000"/>
-              </a:lnSpc>
-              <a:spcBef>
-                <a:spcPts val="1000"/>
-              </a:spcBef>
-              <a:buFont typeface="Arial" panose="020B0604020202020204" pitchFamily="34" charset="0"/>
-              <a:buNone/>
-              <a:defRPr sz="2400" kern="1200">
-                <a:solidFill>
-                  <a:schemeClr val="tx1"/>
-                </a:solidFill>
-                <a:latin typeface="+mn-lt"/>
-                <a:ea typeface="+mn-ea"/>
-                <a:cs typeface="+mn-cs"/>
-              </a:defRPr>
-            </a:lvl1pPr>
-            <a:lvl2pPr marL="457200" indent="0" algn="ctr" defTabSz="914400" rtl="0" eaLnBrk="1" latinLnBrk="0" hangingPunct="1">
-              <a:lnSpc>
-                <a:spcPct val="90000"/>
-              </a:lnSpc>
-              <a:spcBef>
-                <a:spcPts val="500"/>
-              </a:spcBef>
-              <a:buFont typeface="Arial" panose="020B0604020202020204" pitchFamily="34" charset="0"/>
-              <a:buNone/>
-              <a:defRPr sz="2000" kern="1200">
-                <a:solidFill>
-                  <a:schemeClr val="tx1"/>
-                </a:solidFill>
-                <a:latin typeface="+mn-lt"/>
-                <a:ea typeface="+mn-ea"/>
-                <a:cs typeface="+mn-cs"/>
-              </a:defRPr>
-            </a:lvl2pPr>
-            <a:lvl3pPr marL="914400" indent="0" algn="ctr" defTabSz="914400" rtl="0" eaLnBrk="1" latinLnBrk="0" hangingPunct="1">
-              <a:lnSpc>
-                <a:spcPct val="90000"/>
-              </a:lnSpc>
-              <a:spcBef>
-                <a:spcPts val="500"/>
-              </a:spcBef>
-              <a:buFont typeface="Arial" panose="020B0604020202020204" pitchFamily="34" charset="0"/>
-              <a:buNone/>
-              <a:defRPr sz="1800" kern="1200">
-                <a:solidFill>
-                  <a:schemeClr val="tx1"/>
-                </a:solidFill>
-                <a:latin typeface="+mn-lt"/>
-                <a:ea typeface="+mn-ea"/>
-                <a:cs typeface="+mn-cs"/>
-              </a:defRPr>
-            </a:lvl3pPr>
-            <a:lvl4pPr marL="1371600" indent="0" algn="ctr" defTabSz="914400" rtl="0" eaLnBrk="1" latinLnBrk="0" hangingPunct="1">
-              <a:lnSpc>
-                <a:spcPct val="90000"/>
-              </a:lnSpc>
-              <a:spcBef>
-                <a:spcPts val="500"/>
-              </a:spcBef>
-              <a:buFont typeface="Arial" panose="020B0604020202020204" pitchFamily="34" charset="0"/>
-              <a:buNone/>
-              <a:defRPr sz="1600" kern="1200">
-                <a:solidFill>
-                  <a:schemeClr val="tx1"/>
-                </a:solidFill>
-                <a:latin typeface="+mn-lt"/>
-                <a:ea typeface="+mn-ea"/>
-                <a:cs typeface="+mn-cs"/>
-              </a:defRPr>
-            </a:lvl4pPr>
-            <a:lvl5pPr marL="1828800" indent="0" algn="ctr" defTabSz="914400" rtl="0" eaLnBrk="1" latinLnBrk="0" hangingPunct="1">
-              <a:lnSpc>
-                <a:spcPct val="90000"/>
-              </a:lnSpc>
-              <a:spcBef>
-                <a:spcPts val="500"/>
-              </a:spcBef>
-              <a:buFont typeface="Arial" panose="020B0604020202020204" pitchFamily="34" charset="0"/>
-              <a:buNone/>
-              <a:defRPr sz="1600" kern="1200">
-                <a:solidFill>
-                  <a:schemeClr val="tx1"/>
-                </a:solidFill>
-                <a:latin typeface="+mn-lt"/>
-                <a:ea typeface="+mn-ea"/>
-                <a:cs typeface="+mn-cs"/>
-              </a:defRPr>
-            </a:lvl5pPr>
-            <a:lvl6pPr marL="2286000" indent="0" algn="ctr" defTabSz="914400" rtl="0" eaLnBrk="1" latinLnBrk="0" hangingPunct="1">
-              <a:lnSpc>
-                <a:spcPct val="90000"/>
-              </a:lnSpc>
-              <a:spcBef>
-                <a:spcPts val="500"/>
-              </a:spcBef>
-              <a:buFont typeface="Arial" panose="020B0604020202020204" pitchFamily="34" charset="0"/>
-              <a:buNone/>
-              <a:defRPr sz="1600" kern="1200">
-                <a:solidFill>
-                  <a:schemeClr val="tx1"/>
-                </a:solidFill>
-                <a:latin typeface="+mn-lt"/>
-                <a:ea typeface="+mn-ea"/>
-                <a:cs typeface="+mn-cs"/>
-              </a:defRPr>
-            </a:lvl6pPr>
-            <a:lvl7pPr marL="2743200" indent="0" algn="ctr" defTabSz="914400" rtl="0" eaLnBrk="1" latinLnBrk="0" hangingPunct="1">
-              <a:lnSpc>
-                <a:spcPct val="90000"/>
-              </a:lnSpc>
-              <a:spcBef>
-                <a:spcPts val="500"/>
-              </a:spcBef>
-              <a:buFont typeface="Arial" panose="020B0604020202020204" pitchFamily="34" charset="0"/>
-              <a:buNone/>
-              <a:defRPr sz="1600" kern="1200">
-                <a:solidFill>
-                  <a:schemeClr val="tx1"/>
-                </a:solidFill>
-                <a:latin typeface="+mn-lt"/>
-                <a:ea typeface="+mn-ea"/>
-                <a:cs typeface="+mn-cs"/>
-              </a:defRPr>
-            </a:lvl7pPr>
-            <a:lvl8pPr marL="3200400" indent="0" algn="ctr" defTabSz="914400" rtl="0" eaLnBrk="1" latinLnBrk="0" hangingPunct="1">
-              <a:lnSpc>
-                <a:spcPct val="90000"/>
-              </a:lnSpc>
-              <a:spcBef>
-                <a:spcPts val="500"/>
-              </a:spcBef>
-              <a:buFont typeface="Arial" panose="020B0604020202020204" pitchFamily="34" charset="0"/>
-              <a:buNone/>
-              <a:defRPr sz="1600" kern="1200">
-                <a:solidFill>
-                  <a:schemeClr val="tx1"/>
-                </a:solidFill>
-                <a:latin typeface="+mn-lt"/>
-                <a:ea typeface="+mn-ea"/>
-                <a:cs typeface="+mn-cs"/>
-              </a:defRPr>
-            </a:lvl8pPr>
-            <a:lvl9pPr marL="3657600" indent="0" algn="ctr" defTabSz="914400" rtl="0" eaLnBrk="1" latinLnBrk="0" hangingPunct="1">
-              <a:lnSpc>
-                <a:spcPct val="90000"/>
-              </a:lnSpc>
-              <a:spcBef>
-                <a:spcPts val="500"/>
-              </a:spcBef>
-              <a:buFont typeface="Arial" panose="020B0604020202020204" pitchFamily="34" charset="0"/>
-              <a:buNone/>
-              <a:defRPr sz="1600" kern="1200">
-                <a:solidFill>
-                  <a:schemeClr val="tx1"/>
-                </a:solidFill>
-                <a:latin typeface="+mn-lt"/>
-                <a:ea typeface="+mn-ea"/>
-                <a:cs typeface="+mn-cs"/>
-              </a:defRPr>
-            </a:lvl9pPr>
-          </a:lstStyle>
-          <a:p>
-            <a:pPr marL="457200" indent="-457200" algn="l">
-              <a:buFont typeface="Wingdings" panose="05000000000000000000" pitchFamily="2" charset="2"/>
-              <a:buChar char="v"/>
-            </a:pPr>
-            <a:endParaRPr lang="de-DE" sz="2000" dirty="0">
-              <a:latin typeface="Liberation Sans" panose="020B0604020202020204" pitchFamily="34" charset="0"/>
-              <a:ea typeface="Liberation Sans" panose="020B0604020202020204" pitchFamily="34" charset="0"/>
-              <a:cs typeface="Liberation Sans" panose="020B0604020202020204" pitchFamily="34" charset="0"/>
-            </a:endParaRPr>
-          </a:p>
-          <a:p>
-            <a:r>
-              <a:rPr lang="de-DE" sz="2000" b="1" dirty="0">
-                <a:latin typeface="Liberation Sans" panose="020B0604020202020204" pitchFamily="34" charset="0"/>
-                <a:ea typeface="Liberation Sans" panose="020B0604020202020204" pitchFamily="34" charset="0"/>
-                <a:cs typeface="Liberation Sans" panose="020B0604020202020204" pitchFamily="34" charset="0"/>
-              </a:rPr>
-              <a:t>Negativ</a:t>
-            </a:r>
-          </a:p>
+          <a:lstStyle/>
           <a:p>
             <a:pPr algn="l"/>
-            <a:endParaRPr lang="de-DE" sz="2000" b="1" dirty="0">
-              <a:latin typeface="Liberation Sans" panose="020B0604020202020204" pitchFamily="34" charset="0"/>
-              <a:ea typeface="Liberation Sans" panose="020B0604020202020204" pitchFamily="34" charset="0"/>
-              <a:cs typeface="Liberation Sans" panose="020B0604020202020204" pitchFamily="34" charset="0"/>
-            </a:endParaRPr>
-          </a:p>
-          <a:p>
-            <a:pPr marL="457200" indent="-457200" algn="l">
-              <a:buFont typeface="Wingdings" panose="05000000000000000000" pitchFamily="2" charset="2"/>
-              <a:buChar char="v"/>
-            </a:pPr>
             <a:r>
               <a:rPr lang="de-DE" sz="2000" dirty="0">
                 <a:latin typeface="Liberation Sans" panose="020B0604020202020204" pitchFamily="34" charset="0"/>
                 <a:ea typeface="Liberation Sans" panose="020B0604020202020204" pitchFamily="34" charset="0"/>
                 <a:cs typeface="Liberation Sans" panose="020B0604020202020204" pitchFamily="34" charset="0"/>
               </a:rPr>
-              <a:t>Viele Testdrucke notwendig (Material- und Zeitaufwand)</a:t>
-            </a:r>
-          </a:p>
-          <a:p>
-            <a:pPr marL="457200" indent="-457200" algn="l">
-              <a:buFont typeface="Wingdings" panose="05000000000000000000" pitchFamily="2" charset="2"/>
-              <a:buChar char="v"/>
-            </a:pPr>
-            <a:r>
-              <a:rPr lang="de-DE" sz="2000" dirty="0">
-                <a:latin typeface="Liberation Sans" panose="020B0604020202020204" pitchFamily="34" charset="0"/>
-                <a:ea typeface="Liberation Sans" panose="020B0604020202020204" pitchFamily="34" charset="0"/>
-                <a:cs typeface="Liberation Sans" panose="020B0604020202020204" pitchFamily="34" charset="0"/>
-              </a:rPr>
-              <a:t>Millimeter können ein Modell unbrauchbar machen</a:t>
-            </a:r>
-          </a:p>
-        </p:txBody>
-      </p:sp>
-      <p:sp>
-        <p:nvSpPr>
-          <p:cNvPr id="5" name="Untertitel 2">
-            <a:extLst>
-              <a:ext uri="{FF2B5EF4-FFF2-40B4-BE49-F238E27FC236}">
-                <a16:creationId xmlns:a16="http://schemas.microsoft.com/office/drawing/2014/main" id="{F7F370D7-3BCE-781E-2D22-81B61AD8BA4A}"/>
-              </a:ext>
-            </a:extLst>
-          </p:cNvPr>
-          <p:cNvSpPr txBox="1">
-            <a:spLocks/>
-          </p:cNvSpPr>
-          <p:nvPr/>
-        </p:nvSpPr>
-        <p:spPr>
-          <a:xfrm>
-            <a:off x="7651630" y="2095322"/>
-            <a:ext cx="2639330" cy="1791056"/>
-          </a:xfrm>
-          <a:prstGeom prst="rect">
-            <a:avLst/>
-          </a:prstGeom>
-        </p:spPr>
-        <p:txBody>
-          <a:bodyPr vert="horz" lIns="91440" tIns="45720" rIns="91440" bIns="45720" rtlCol="0">
-            <a:noAutofit/>
-          </a:bodyPr>
-          <a:lstStyle>
-            <a:lvl1pPr marL="0" indent="0" algn="ctr" defTabSz="914400" rtl="0" eaLnBrk="1" latinLnBrk="0" hangingPunct="1">
-              <a:lnSpc>
-                <a:spcPct val="90000"/>
-              </a:lnSpc>
-              <a:spcBef>
-                <a:spcPts val="1000"/>
-              </a:spcBef>
-              <a:buFont typeface="Arial" panose="020B0604020202020204" pitchFamily="34" charset="0"/>
-              <a:buNone/>
-              <a:defRPr sz="2400" kern="1200">
-                <a:solidFill>
-                  <a:schemeClr val="tx1"/>
-                </a:solidFill>
-                <a:latin typeface="+mn-lt"/>
-                <a:ea typeface="+mn-ea"/>
-                <a:cs typeface="+mn-cs"/>
-              </a:defRPr>
-            </a:lvl1pPr>
-            <a:lvl2pPr marL="457200" indent="0" algn="ctr" defTabSz="914400" rtl="0" eaLnBrk="1" latinLnBrk="0" hangingPunct="1">
-              <a:lnSpc>
-                <a:spcPct val="90000"/>
-              </a:lnSpc>
-              <a:spcBef>
-                <a:spcPts val="500"/>
-              </a:spcBef>
-              <a:buFont typeface="Arial" panose="020B0604020202020204" pitchFamily="34" charset="0"/>
-              <a:buNone/>
-              <a:defRPr sz="2000" kern="1200">
-                <a:solidFill>
-                  <a:schemeClr val="tx1"/>
-                </a:solidFill>
-                <a:latin typeface="+mn-lt"/>
-                <a:ea typeface="+mn-ea"/>
-                <a:cs typeface="+mn-cs"/>
-              </a:defRPr>
-            </a:lvl2pPr>
-            <a:lvl3pPr marL="914400" indent="0" algn="ctr" defTabSz="914400" rtl="0" eaLnBrk="1" latinLnBrk="0" hangingPunct="1">
-              <a:lnSpc>
-                <a:spcPct val="90000"/>
-              </a:lnSpc>
-              <a:spcBef>
-                <a:spcPts val="500"/>
-              </a:spcBef>
-              <a:buFont typeface="Arial" panose="020B0604020202020204" pitchFamily="34" charset="0"/>
-              <a:buNone/>
-              <a:defRPr sz="1800" kern="1200">
-                <a:solidFill>
-                  <a:schemeClr val="tx1"/>
-                </a:solidFill>
-                <a:latin typeface="+mn-lt"/>
-                <a:ea typeface="+mn-ea"/>
-                <a:cs typeface="+mn-cs"/>
-              </a:defRPr>
-            </a:lvl3pPr>
-            <a:lvl4pPr marL="1371600" indent="0" algn="ctr" defTabSz="914400" rtl="0" eaLnBrk="1" latinLnBrk="0" hangingPunct="1">
-              <a:lnSpc>
-                <a:spcPct val="90000"/>
-              </a:lnSpc>
-              <a:spcBef>
-                <a:spcPts val="500"/>
-              </a:spcBef>
-              <a:buFont typeface="Arial" panose="020B0604020202020204" pitchFamily="34" charset="0"/>
-              <a:buNone/>
-              <a:defRPr sz="1600" kern="1200">
-                <a:solidFill>
-                  <a:schemeClr val="tx1"/>
-                </a:solidFill>
-                <a:latin typeface="+mn-lt"/>
-                <a:ea typeface="+mn-ea"/>
-                <a:cs typeface="+mn-cs"/>
-              </a:defRPr>
-            </a:lvl4pPr>
-            <a:lvl5pPr marL="1828800" indent="0" algn="ctr" defTabSz="914400" rtl="0" eaLnBrk="1" latinLnBrk="0" hangingPunct="1">
-              <a:lnSpc>
-                <a:spcPct val="90000"/>
-              </a:lnSpc>
-              <a:spcBef>
-                <a:spcPts val="500"/>
-              </a:spcBef>
-              <a:buFont typeface="Arial" panose="020B0604020202020204" pitchFamily="34" charset="0"/>
-              <a:buNone/>
-              <a:defRPr sz="1600" kern="1200">
-                <a:solidFill>
-                  <a:schemeClr val="tx1"/>
-                </a:solidFill>
-                <a:latin typeface="+mn-lt"/>
-                <a:ea typeface="+mn-ea"/>
-                <a:cs typeface="+mn-cs"/>
-              </a:defRPr>
-            </a:lvl5pPr>
-            <a:lvl6pPr marL="2286000" indent="0" algn="ctr" defTabSz="914400" rtl="0" eaLnBrk="1" latinLnBrk="0" hangingPunct="1">
-              <a:lnSpc>
-                <a:spcPct val="90000"/>
-              </a:lnSpc>
-              <a:spcBef>
-                <a:spcPts val="500"/>
-              </a:spcBef>
-              <a:buFont typeface="Arial" panose="020B0604020202020204" pitchFamily="34" charset="0"/>
-              <a:buNone/>
-              <a:defRPr sz="1600" kern="1200">
-                <a:solidFill>
-                  <a:schemeClr val="tx1"/>
-                </a:solidFill>
-                <a:latin typeface="+mn-lt"/>
-                <a:ea typeface="+mn-ea"/>
-                <a:cs typeface="+mn-cs"/>
-              </a:defRPr>
-            </a:lvl6pPr>
-            <a:lvl7pPr marL="2743200" indent="0" algn="ctr" defTabSz="914400" rtl="0" eaLnBrk="1" latinLnBrk="0" hangingPunct="1">
-              <a:lnSpc>
-                <a:spcPct val="90000"/>
-              </a:lnSpc>
-              <a:spcBef>
-                <a:spcPts val="500"/>
-              </a:spcBef>
-              <a:buFont typeface="Arial" panose="020B0604020202020204" pitchFamily="34" charset="0"/>
-              <a:buNone/>
-              <a:defRPr sz="1600" kern="1200">
-                <a:solidFill>
-                  <a:schemeClr val="tx1"/>
-                </a:solidFill>
-                <a:latin typeface="+mn-lt"/>
-                <a:ea typeface="+mn-ea"/>
-                <a:cs typeface="+mn-cs"/>
-              </a:defRPr>
-            </a:lvl7pPr>
-            <a:lvl8pPr marL="3200400" indent="0" algn="ctr" defTabSz="914400" rtl="0" eaLnBrk="1" latinLnBrk="0" hangingPunct="1">
-              <a:lnSpc>
-                <a:spcPct val="90000"/>
-              </a:lnSpc>
-              <a:spcBef>
-                <a:spcPts val="500"/>
-              </a:spcBef>
-              <a:buFont typeface="Arial" panose="020B0604020202020204" pitchFamily="34" charset="0"/>
-              <a:buNone/>
-              <a:defRPr sz="1600" kern="1200">
-                <a:solidFill>
-                  <a:schemeClr val="tx1"/>
-                </a:solidFill>
-                <a:latin typeface="+mn-lt"/>
-                <a:ea typeface="+mn-ea"/>
-                <a:cs typeface="+mn-cs"/>
-              </a:defRPr>
-            </a:lvl8pPr>
-            <a:lvl9pPr marL="3657600" indent="0" algn="ctr" defTabSz="914400" rtl="0" eaLnBrk="1" latinLnBrk="0" hangingPunct="1">
-              <a:lnSpc>
-                <a:spcPct val="90000"/>
-              </a:lnSpc>
-              <a:spcBef>
-                <a:spcPts val="500"/>
-              </a:spcBef>
-              <a:buFont typeface="Arial" panose="020B0604020202020204" pitchFamily="34" charset="0"/>
-              <a:buNone/>
-              <a:defRPr sz="1600" kern="1200">
-                <a:solidFill>
-                  <a:schemeClr val="tx1"/>
-                </a:solidFill>
-                <a:latin typeface="+mn-lt"/>
-                <a:ea typeface="+mn-ea"/>
-                <a:cs typeface="+mn-cs"/>
-              </a:defRPr>
-            </a:lvl9pPr>
-          </a:lstStyle>
-          <a:p>
-            <a:r>
-              <a:rPr lang="de-DE" sz="2000" b="1" dirty="0">
-                <a:latin typeface="Liberation Sans" panose="020B0604020202020204" pitchFamily="34" charset="0"/>
-                <a:ea typeface="Liberation Sans" panose="020B0604020202020204" pitchFamily="34" charset="0"/>
-                <a:cs typeface="Liberation Sans" panose="020B0604020202020204" pitchFamily="34" charset="0"/>
-              </a:rPr>
-              <a:t>Allgemein</a:t>
-            </a:r>
-          </a:p>
-          <a:p>
-            <a:pPr algn="l"/>
-            <a:endParaRPr lang="de-DE" sz="2000" b="1" dirty="0">
-              <a:latin typeface="Liberation Sans" panose="020B0604020202020204" pitchFamily="34" charset="0"/>
-              <a:ea typeface="Liberation Sans" panose="020B0604020202020204" pitchFamily="34" charset="0"/>
-              <a:cs typeface="Liberation Sans" panose="020B0604020202020204" pitchFamily="34" charset="0"/>
-            </a:endParaRPr>
-          </a:p>
-          <a:p>
-            <a:pPr marL="457200" indent="-457200" algn="l">
-              <a:buFont typeface="Wingdings" panose="05000000000000000000" pitchFamily="2" charset="2"/>
-              <a:buChar char="v"/>
-            </a:pPr>
-            <a:r>
-              <a:rPr lang="de-DE" sz="2000" dirty="0">
-                <a:latin typeface="Liberation Sans" panose="020B0604020202020204" pitchFamily="34" charset="0"/>
-                <a:ea typeface="Liberation Sans" panose="020B0604020202020204" pitchFamily="34" charset="0"/>
-                <a:cs typeface="Liberation Sans" panose="020B0604020202020204" pitchFamily="34" charset="0"/>
-              </a:rPr>
-              <a:t>Frühe durchdachte Planung lohnt sich</a:t>
-            </a:r>
-          </a:p>
-          <a:p>
-            <a:pPr marL="457200" indent="-457200" algn="l">
-              <a:buFont typeface="Wingdings" panose="05000000000000000000" pitchFamily="2" charset="2"/>
-              <a:buChar char="v"/>
-            </a:pPr>
-            <a:r>
-              <a:rPr lang="de-DE" sz="2000" dirty="0">
-                <a:latin typeface="Liberation Sans" panose="020B0604020202020204" pitchFamily="34" charset="0"/>
-                <a:ea typeface="Liberation Sans" panose="020B0604020202020204" pitchFamily="34" charset="0"/>
-                <a:cs typeface="Liberation Sans" panose="020B0604020202020204" pitchFamily="34" charset="0"/>
-              </a:rPr>
-              <a:t>3D-Druck-Ungenauigkeiten antizipieren</a:t>
-            </a:r>
-          </a:p>
-          <a:p>
-            <a:pPr marL="457200" indent="-457200" algn="l">
-              <a:buFont typeface="Wingdings" panose="05000000000000000000" pitchFamily="2" charset="2"/>
-              <a:buChar char="v"/>
-            </a:pPr>
-            <a:r>
-              <a:rPr lang="de-DE" sz="2000" dirty="0">
-                <a:latin typeface="Liberation Sans" panose="020B0604020202020204" pitchFamily="34" charset="0"/>
-                <a:ea typeface="Liberation Sans" panose="020B0604020202020204" pitchFamily="34" charset="0"/>
-                <a:cs typeface="Liberation Sans" panose="020B0604020202020204" pitchFamily="34" charset="0"/>
-              </a:rPr>
-              <a:t>Improvisation ist oft notwendig</a:t>
+              <a:t>(Foto des Fahrgestells)</a:t>
             </a:r>
           </a:p>
         </p:txBody>
@@ -7069,7 +6656,7 @@
     </p:spTree>
     <p:extLst>
       <p:ext uri="{BB962C8B-B14F-4D97-AF65-F5344CB8AC3E}">
-        <p14:creationId xmlns:p14="http://schemas.microsoft.com/office/powerpoint/2010/main" val="1779069297"/>
+        <p14:creationId xmlns:p14="http://schemas.microsoft.com/office/powerpoint/2010/main" val="2227412484"/>
       </p:ext>
     </p:extLst>
   </p:cSld>
@@ -7098,43 +6685,6 @@
       </p:grpSpPr>
       <p:sp>
         <p:nvSpPr>
-          <p:cNvPr id="2" name="Titel 1">
-            <a:extLst>
-              <a:ext uri="{FF2B5EF4-FFF2-40B4-BE49-F238E27FC236}">
-                <a16:creationId xmlns:a16="http://schemas.microsoft.com/office/drawing/2014/main" id="{413D0774-18A2-673D-283B-1C04DB36353E}"/>
-              </a:ext>
-            </a:extLst>
-          </p:cNvPr>
-          <p:cNvSpPr>
-            <a:spLocks noGrp="1"/>
-          </p:cNvSpPr>
-          <p:nvPr>
-            <p:ph type="ctrTitle"/>
-          </p:nvPr>
-        </p:nvSpPr>
-        <p:spPr>
-          <a:xfrm>
-            <a:off x="1524000" y="1269579"/>
-            <a:ext cx="9144000" cy="2387600"/>
-          </a:xfrm>
-        </p:spPr>
-        <p:txBody>
-          <a:bodyPr>
-            <a:normAutofit/>
-          </a:bodyPr>
-          <a:lstStyle/>
-          <a:p>
-            <a:r>
-              <a:rPr lang="de-DE" sz="10000" dirty="0">
-                <a:latin typeface="Impact" panose="020B0806030902050204" pitchFamily="34" charset="0"/>
-              </a:rPr>
-              <a:t>Elektronik</a:t>
-            </a:r>
-          </a:p>
-        </p:txBody>
-      </p:sp>
-      <p:sp>
-        <p:nvSpPr>
           <p:cNvPr id="3" name="Untertitel 2">
             <a:extLst>
               <a:ext uri="{FF2B5EF4-FFF2-40B4-BE49-F238E27FC236}">
@@ -7151,8 +6701,8 @@
         </p:nvSpPr>
         <p:spPr>
           <a:xfrm>
-            <a:off x="1524000" y="4259635"/>
-            <a:ext cx="9144000" cy="1791056"/>
+            <a:off x="1576168" y="2108888"/>
+            <a:ext cx="2639330" cy="3554980"/>
           </a:xfrm>
         </p:spPr>
         <p:txBody>
@@ -7162,22 +6712,128 @@
           <a:lstStyle/>
           <a:p>
             <a:r>
-              <a:rPr lang="de-DE" sz="3000" dirty="0">
+              <a:rPr lang="de-DE" sz="2000" b="1" dirty="0">
                 <a:latin typeface="Liberation Sans" panose="020B0604020202020204" pitchFamily="34" charset="0"/>
                 <a:ea typeface="Liberation Sans" panose="020B0604020202020204" pitchFamily="34" charset="0"/>
                 <a:cs typeface="Liberation Sans" panose="020B0604020202020204" pitchFamily="34" charset="0"/>
               </a:rPr>
-              <a:t>Julian</a:t>
+              <a:t>Positiv</a:t>
+            </a:r>
+          </a:p>
+          <a:p>
+            <a:pPr algn="l"/>
+            <a:endParaRPr lang="de-DE" sz="2000" b="1" dirty="0">
+              <a:latin typeface="Liberation Sans" panose="020B0604020202020204" pitchFamily="34" charset="0"/>
+              <a:ea typeface="Liberation Sans" panose="020B0604020202020204" pitchFamily="34" charset="0"/>
+              <a:cs typeface="Liberation Sans" panose="020B0604020202020204" pitchFamily="34" charset="0"/>
+            </a:endParaRPr>
+          </a:p>
+          <a:p>
+            <a:pPr marL="457200" indent="-457200" algn="l">
+              <a:buFont typeface="Wingdings" panose="05000000000000000000" pitchFamily="2" charset="2"/>
+              <a:buChar char="v"/>
+            </a:pPr>
+            <a:r>
+              <a:rPr lang="de-DE" sz="2000" dirty="0">
+                <a:latin typeface="Liberation Sans" panose="020B0604020202020204" pitchFamily="34" charset="0"/>
+                <a:ea typeface="Liberation Sans" panose="020B0604020202020204" pitchFamily="34" charset="0"/>
+                <a:cs typeface="Liberation Sans" panose="020B0604020202020204" pitchFamily="34" charset="0"/>
+              </a:rPr>
+              <a:t>Doppeltes Fahrgestell</a:t>
+            </a:r>
+          </a:p>
+          <a:p>
+            <a:pPr marL="457200" indent="-457200" algn="l">
+              <a:buFont typeface="Wingdings" panose="05000000000000000000" pitchFamily="2" charset="2"/>
+              <a:buChar char="v"/>
+            </a:pPr>
+            <a:r>
+              <a:rPr lang="de-DE" sz="2000" dirty="0">
+                <a:latin typeface="Liberation Sans" panose="020B0604020202020204" pitchFamily="34" charset="0"/>
+                <a:ea typeface="Liberation Sans" panose="020B0604020202020204" pitchFamily="34" charset="0"/>
+                <a:cs typeface="Liberation Sans" panose="020B0604020202020204" pitchFamily="34" charset="0"/>
+              </a:rPr>
+              <a:t>Modulares System mit vielen externen Teilen</a:t>
+            </a:r>
+          </a:p>
+          <a:p>
+            <a:pPr marL="457200" indent="-457200" algn="l">
+              <a:buFont typeface="Wingdings" panose="05000000000000000000" pitchFamily="2" charset="2"/>
+              <a:buChar char="v"/>
+            </a:pPr>
+            <a:r>
+              <a:rPr lang="de-DE" sz="2000" dirty="0">
+                <a:latin typeface="Liberation Sans" panose="020B0604020202020204" pitchFamily="34" charset="0"/>
+                <a:ea typeface="Liberation Sans" panose="020B0604020202020204" pitchFamily="34" charset="0"/>
+                <a:cs typeface="Liberation Sans" panose="020B0604020202020204" pitchFamily="34" charset="0"/>
+              </a:rPr>
+              <a:t>Flexibilität des Materials ist ein Vorteil</a:t>
+            </a:r>
+          </a:p>
+        </p:txBody>
+      </p:sp>
+      <p:sp>
+        <p:nvSpPr>
+          <p:cNvPr id="4" name="Titel 1">
+            <a:extLst>
+              <a:ext uri="{FF2B5EF4-FFF2-40B4-BE49-F238E27FC236}">
+                <a16:creationId xmlns:a16="http://schemas.microsoft.com/office/drawing/2014/main" id="{BE92422F-6CFB-6703-F428-2208AF7C4F27}"/>
+              </a:ext>
+            </a:extLst>
+          </p:cNvPr>
+          <p:cNvSpPr txBox="1">
+            <a:spLocks/>
+          </p:cNvSpPr>
+          <p:nvPr/>
+        </p:nvSpPr>
+        <p:spPr>
+          <a:xfrm>
+            <a:off x="3405187" y="0"/>
+            <a:ext cx="5381625" cy="1019204"/>
+          </a:xfrm>
+          <a:prstGeom prst="rect">
+            <a:avLst/>
+          </a:prstGeom>
+        </p:spPr>
+        <p:txBody>
+          <a:bodyPr vert="horz" lIns="91440" tIns="45720" rIns="91440" bIns="45720" rtlCol="0" anchor="b">
+            <a:normAutofit/>
+          </a:bodyPr>
+          <a:lstStyle>
+            <a:lvl1pPr algn="ctr" defTabSz="914400" rtl="0" eaLnBrk="1" latinLnBrk="0" hangingPunct="1">
+              <a:lnSpc>
+                <a:spcPct val="90000"/>
+              </a:lnSpc>
+              <a:spcBef>
+                <a:spcPct val="0"/>
+              </a:spcBef>
+              <a:buNone/>
+              <a:defRPr sz="6000" kern="1200">
+                <a:solidFill>
+                  <a:schemeClr val="tx1"/>
+                </a:solidFill>
+                <a:latin typeface="+mj-lt"/>
+                <a:ea typeface="+mj-ea"/>
+                <a:cs typeface="+mj-cs"/>
+              </a:defRPr>
+            </a:lvl1pPr>
+          </a:lstStyle>
+          <a:p>
+            <a:r>
+              <a:rPr lang="de-DE" dirty="0">
+                <a:latin typeface="Impact" panose="020B0806030902050204" pitchFamily="34" charset="0"/>
+              </a:rPr>
+              <a:t>Zwischenfazit</a:t>
             </a:r>
           </a:p>
         </p:txBody>
       </p:sp>
       <p:cxnSp>
         <p:nvCxnSpPr>
-          <p:cNvPr id="5" name="Gerader Verbinder 4">
-            <a:extLst>
-              <a:ext uri="{FF2B5EF4-FFF2-40B4-BE49-F238E27FC236}">
-                <a16:creationId xmlns:a16="http://schemas.microsoft.com/office/drawing/2014/main" id="{2B753068-DCEB-B788-AD32-F324BF9F36F0}"/>
+          <p:cNvPr id="6" name="Gerader Verbinder 5">
+            <a:extLst>
+              <a:ext uri="{FF2B5EF4-FFF2-40B4-BE49-F238E27FC236}">
+                <a16:creationId xmlns:a16="http://schemas.microsoft.com/office/drawing/2014/main" id="{86D8AB01-C043-70CC-51BD-6A6967F3BAD5}"/>
               </a:ext>
             </a:extLst>
           </p:cNvPr>
@@ -7186,7 +6842,7 @@
         </p:nvCxnSpPr>
         <p:spPr>
           <a:xfrm>
-            <a:off x="1698171" y="3830217"/>
+            <a:off x="1576168" y="1118956"/>
             <a:ext cx="8714792" cy="0"/>
           </a:xfrm>
           <a:prstGeom prst="line">
@@ -7208,10 +6864,513 @@
           </a:fontRef>
         </p:style>
       </p:cxnSp>
+      <p:sp>
+        <p:nvSpPr>
+          <p:cNvPr id="2" name="Untertitel 2">
+            <a:extLst>
+              <a:ext uri="{FF2B5EF4-FFF2-40B4-BE49-F238E27FC236}">
+                <a16:creationId xmlns:a16="http://schemas.microsoft.com/office/drawing/2014/main" id="{3E9646A3-113F-3764-D676-70FA6CA8883E}"/>
+              </a:ext>
+            </a:extLst>
+          </p:cNvPr>
+          <p:cNvSpPr txBox="1">
+            <a:spLocks/>
+          </p:cNvSpPr>
+          <p:nvPr/>
+        </p:nvSpPr>
+        <p:spPr>
+          <a:xfrm>
+            <a:off x="4672302" y="1651510"/>
+            <a:ext cx="2639330" cy="3554980"/>
+          </a:xfrm>
+          <a:prstGeom prst="rect">
+            <a:avLst/>
+          </a:prstGeom>
+        </p:spPr>
+        <p:txBody>
+          <a:bodyPr vert="horz" lIns="91440" tIns="45720" rIns="91440" bIns="45720" rtlCol="0">
+            <a:noAutofit/>
+          </a:bodyPr>
+          <a:lstStyle>
+            <a:lvl1pPr marL="0" indent="0" algn="ctr" defTabSz="914400" rtl="0" eaLnBrk="1" latinLnBrk="0" hangingPunct="1">
+              <a:lnSpc>
+                <a:spcPct val="90000"/>
+              </a:lnSpc>
+              <a:spcBef>
+                <a:spcPts val="1000"/>
+              </a:spcBef>
+              <a:buFont typeface="Arial" panose="020B0604020202020204" pitchFamily="34" charset="0"/>
+              <a:buNone/>
+              <a:defRPr sz="2400" kern="1200">
+                <a:solidFill>
+                  <a:schemeClr val="tx1"/>
+                </a:solidFill>
+                <a:latin typeface="+mn-lt"/>
+                <a:ea typeface="+mn-ea"/>
+                <a:cs typeface="+mn-cs"/>
+              </a:defRPr>
+            </a:lvl1pPr>
+            <a:lvl2pPr marL="457200" indent="0" algn="ctr" defTabSz="914400" rtl="0" eaLnBrk="1" latinLnBrk="0" hangingPunct="1">
+              <a:lnSpc>
+                <a:spcPct val="90000"/>
+              </a:lnSpc>
+              <a:spcBef>
+                <a:spcPts val="500"/>
+              </a:spcBef>
+              <a:buFont typeface="Arial" panose="020B0604020202020204" pitchFamily="34" charset="0"/>
+              <a:buNone/>
+              <a:defRPr sz="2000" kern="1200">
+                <a:solidFill>
+                  <a:schemeClr val="tx1"/>
+                </a:solidFill>
+                <a:latin typeface="+mn-lt"/>
+                <a:ea typeface="+mn-ea"/>
+                <a:cs typeface="+mn-cs"/>
+              </a:defRPr>
+            </a:lvl2pPr>
+            <a:lvl3pPr marL="914400" indent="0" algn="ctr" defTabSz="914400" rtl="0" eaLnBrk="1" latinLnBrk="0" hangingPunct="1">
+              <a:lnSpc>
+                <a:spcPct val="90000"/>
+              </a:lnSpc>
+              <a:spcBef>
+                <a:spcPts val="500"/>
+              </a:spcBef>
+              <a:buFont typeface="Arial" panose="020B0604020202020204" pitchFamily="34" charset="0"/>
+              <a:buNone/>
+              <a:defRPr sz="1800" kern="1200">
+                <a:solidFill>
+                  <a:schemeClr val="tx1"/>
+                </a:solidFill>
+                <a:latin typeface="+mn-lt"/>
+                <a:ea typeface="+mn-ea"/>
+                <a:cs typeface="+mn-cs"/>
+              </a:defRPr>
+            </a:lvl3pPr>
+            <a:lvl4pPr marL="1371600" indent="0" algn="ctr" defTabSz="914400" rtl="0" eaLnBrk="1" latinLnBrk="0" hangingPunct="1">
+              <a:lnSpc>
+                <a:spcPct val="90000"/>
+              </a:lnSpc>
+              <a:spcBef>
+                <a:spcPts val="500"/>
+              </a:spcBef>
+              <a:buFont typeface="Arial" panose="020B0604020202020204" pitchFamily="34" charset="0"/>
+              <a:buNone/>
+              <a:defRPr sz="1600" kern="1200">
+                <a:solidFill>
+                  <a:schemeClr val="tx1"/>
+                </a:solidFill>
+                <a:latin typeface="+mn-lt"/>
+                <a:ea typeface="+mn-ea"/>
+                <a:cs typeface="+mn-cs"/>
+              </a:defRPr>
+            </a:lvl4pPr>
+            <a:lvl5pPr marL="1828800" indent="0" algn="ctr" defTabSz="914400" rtl="0" eaLnBrk="1" latinLnBrk="0" hangingPunct="1">
+              <a:lnSpc>
+                <a:spcPct val="90000"/>
+              </a:lnSpc>
+              <a:spcBef>
+                <a:spcPts val="500"/>
+              </a:spcBef>
+              <a:buFont typeface="Arial" panose="020B0604020202020204" pitchFamily="34" charset="0"/>
+              <a:buNone/>
+              <a:defRPr sz="1600" kern="1200">
+                <a:solidFill>
+                  <a:schemeClr val="tx1"/>
+                </a:solidFill>
+                <a:latin typeface="+mn-lt"/>
+                <a:ea typeface="+mn-ea"/>
+                <a:cs typeface="+mn-cs"/>
+              </a:defRPr>
+            </a:lvl5pPr>
+            <a:lvl6pPr marL="2286000" indent="0" algn="ctr" defTabSz="914400" rtl="0" eaLnBrk="1" latinLnBrk="0" hangingPunct="1">
+              <a:lnSpc>
+                <a:spcPct val="90000"/>
+              </a:lnSpc>
+              <a:spcBef>
+                <a:spcPts val="500"/>
+              </a:spcBef>
+              <a:buFont typeface="Arial" panose="020B0604020202020204" pitchFamily="34" charset="0"/>
+              <a:buNone/>
+              <a:defRPr sz="1600" kern="1200">
+                <a:solidFill>
+                  <a:schemeClr val="tx1"/>
+                </a:solidFill>
+                <a:latin typeface="+mn-lt"/>
+                <a:ea typeface="+mn-ea"/>
+                <a:cs typeface="+mn-cs"/>
+              </a:defRPr>
+            </a:lvl6pPr>
+            <a:lvl7pPr marL="2743200" indent="0" algn="ctr" defTabSz="914400" rtl="0" eaLnBrk="1" latinLnBrk="0" hangingPunct="1">
+              <a:lnSpc>
+                <a:spcPct val="90000"/>
+              </a:lnSpc>
+              <a:spcBef>
+                <a:spcPts val="500"/>
+              </a:spcBef>
+              <a:buFont typeface="Arial" panose="020B0604020202020204" pitchFamily="34" charset="0"/>
+              <a:buNone/>
+              <a:defRPr sz="1600" kern="1200">
+                <a:solidFill>
+                  <a:schemeClr val="tx1"/>
+                </a:solidFill>
+                <a:latin typeface="+mn-lt"/>
+                <a:ea typeface="+mn-ea"/>
+                <a:cs typeface="+mn-cs"/>
+              </a:defRPr>
+            </a:lvl7pPr>
+            <a:lvl8pPr marL="3200400" indent="0" algn="ctr" defTabSz="914400" rtl="0" eaLnBrk="1" latinLnBrk="0" hangingPunct="1">
+              <a:lnSpc>
+                <a:spcPct val="90000"/>
+              </a:lnSpc>
+              <a:spcBef>
+                <a:spcPts val="500"/>
+              </a:spcBef>
+              <a:buFont typeface="Arial" panose="020B0604020202020204" pitchFamily="34" charset="0"/>
+              <a:buNone/>
+              <a:defRPr sz="1600" kern="1200">
+                <a:solidFill>
+                  <a:schemeClr val="tx1"/>
+                </a:solidFill>
+                <a:latin typeface="+mn-lt"/>
+                <a:ea typeface="+mn-ea"/>
+                <a:cs typeface="+mn-cs"/>
+              </a:defRPr>
+            </a:lvl8pPr>
+            <a:lvl9pPr marL="3657600" indent="0" algn="ctr" defTabSz="914400" rtl="0" eaLnBrk="1" latinLnBrk="0" hangingPunct="1">
+              <a:lnSpc>
+                <a:spcPct val="90000"/>
+              </a:lnSpc>
+              <a:spcBef>
+                <a:spcPts val="500"/>
+              </a:spcBef>
+              <a:buFont typeface="Arial" panose="020B0604020202020204" pitchFamily="34" charset="0"/>
+              <a:buNone/>
+              <a:defRPr sz="1600" kern="1200">
+                <a:solidFill>
+                  <a:schemeClr val="tx1"/>
+                </a:solidFill>
+                <a:latin typeface="+mn-lt"/>
+                <a:ea typeface="+mn-ea"/>
+                <a:cs typeface="+mn-cs"/>
+              </a:defRPr>
+            </a:lvl9pPr>
+          </a:lstStyle>
+          <a:p>
+            <a:pPr marL="457200" indent="-457200" algn="l">
+              <a:buFont typeface="Wingdings" panose="05000000000000000000" pitchFamily="2" charset="2"/>
+              <a:buChar char="v"/>
+            </a:pPr>
+            <a:endParaRPr lang="de-DE" sz="2000" dirty="0">
+              <a:latin typeface="Liberation Sans" panose="020B0604020202020204" pitchFamily="34" charset="0"/>
+              <a:ea typeface="Liberation Sans" panose="020B0604020202020204" pitchFamily="34" charset="0"/>
+              <a:cs typeface="Liberation Sans" panose="020B0604020202020204" pitchFamily="34" charset="0"/>
+            </a:endParaRPr>
+          </a:p>
+          <a:p>
+            <a:r>
+              <a:rPr lang="de-DE" sz="2000" b="1" dirty="0">
+                <a:latin typeface="Liberation Sans" panose="020B0604020202020204" pitchFamily="34" charset="0"/>
+                <a:ea typeface="Liberation Sans" panose="020B0604020202020204" pitchFamily="34" charset="0"/>
+                <a:cs typeface="Liberation Sans" panose="020B0604020202020204" pitchFamily="34" charset="0"/>
+              </a:rPr>
+              <a:t>Negativ</a:t>
+            </a:r>
+          </a:p>
+          <a:p>
+            <a:pPr algn="l"/>
+            <a:endParaRPr lang="de-DE" sz="2000" b="1" dirty="0">
+              <a:latin typeface="Liberation Sans" panose="020B0604020202020204" pitchFamily="34" charset="0"/>
+              <a:ea typeface="Liberation Sans" panose="020B0604020202020204" pitchFamily="34" charset="0"/>
+              <a:cs typeface="Liberation Sans" panose="020B0604020202020204" pitchFamily="34" charset="0"/>
+            </a:endParaRPr>
+          </a:p>
+          <a:p>
+            <a:pPr marL="457200" indent="-457200" algn="l">
+              <a:buFont typeface="Wingdings" panose="05000000000000000000" pitchFamily="2" charset="2"/>
+              <a:buChar char="v"/>
+            </a:pPr>
+            <a:r>
+              <a:rPr lang="de-DE" sz="2000" dirty="0">
+                <a:latin typeface="Liberation Sans" panose="020B0604020202020204" pitchFamily="34" charset="0"/>
+                <a:ea typeface="Liberation Sans" panose="020B0604020202020204" pitchFamily="34" charset="0"/>
+                <a:cs typeface="Liberation Sans" panose="020B0604020202020204" pitchFamily="34" charset="0"/>
+              </a:rPr>
+              <a:t>Viele Testdrucke notwendig (Material- und Zeitaufwand)</a:t>
+            </a:r>
+          </a:p>
+          <a:p>
+            <a:pPr marL="457200" indent="-457200" algn="l">
+              <a:buFont typeface="Wingdings" panose="05000000000000000000" pitchFamily="2" charset="2"/>
+              <a:buChar char="v"/>
+            </a:pPr>
+            <a:r>
+              <a:rPr lang="de-DE" sz="2000" dirty="0">
+                <a:latin typeface="Liberation Sans" panose="020B0604020202020204" pitchFamily="34" charset="0"/>
+                <a:ea typeface="Liberation Sans" panose="020B0604020202020204" pitchFamily="34" charset="0"/>
+                <a:cs typeface="Liberation Sans" panose="020B0604020202020204" pitchFamily="34" charset="0"/>
+              </a:rPr>
+              <a:t>Millimeter können ein Modell unbrauchbar machen</a:t>
+            </a:r>
+          </a:p>
+        </p:txBody>
+      </p:sp>
+      <p:sp>
+        <p:nvSpPr>
+          <p:cNvPr id="5" name="Untertitel 2">
+            <a:extLst>
+              <a:ext uri="{FF2B5EF4-FFF2-40B4-BE49-F238E27FC236}">
+                <a16:creationId xmlns:a16="http://schemas.microsoft.com/office/drawing/2014/main" id="{F7F370D7-3BCE-781E-2D22-81B61AD8BA4A}"/>
+              </a:ext>
+            </a:extLst>
+          </p:cNvPr>
+          <p:cNvSpPr txBox="1">
+            <a:spLocks/>
+          </p:cNvSpPr>
+          <p:nvPr/>
+        </p:nvSpPr>
+        <p:spPr>
+          <a:xfrm>
+            <a:off x="7651630" y="2095322"/>
+            <a:ext cx="2639330" cy="1791056"/>
+          </a:xfrm>
+          <a:prstGeom prst="rect">
+            <a:avLst/>
+          </a:prstGeom>
+        </p:spPr>
+        <p:txBody>
+          <a:bodyPr vert="horz" lIns="91440" tIns="45720" rIns="91440" bIns="45720" rtlCol="0">
+            <a:noAutofit/>
+          </a:bodyPr>
+          <a:lstStyle>
+            <a:lvl1pPr marL="0" indent="0" algn="ctr" defTabSz="914400" rtl="0" eaLnBrk="1" latinLnBrk="0" hangingPunct="1">
+              <a:lnSpc>
+                <a:spcPct val="90000"/>
+              </a:lnSpc>
+              <a:spcBef>
+                <a:spcPts val="1000"/>
+              </a:spcBef>
+              <a:buFont typeface="Arial" panose="020B0604020202020204" pitchFamily="34" charset="0"/>
+              <a:buNone/>
+              <a:defRPr sz="2400" kern="1200">
+                <a:solidFill>
+                  <a:schemeClr val="tx1"/>
+                </a:solidFill>
+                <a:latin typeface="+mn-lt"/>
+                <a:ea typeface="+mn-ea"/>
+                <a:cs typeface="+mn-cs"/>
+              </a:defRPr>
+            </a:lvl1pPr>
+            <a:lvl2pPr marL="457200" indent="0" algn="ctr" defTabSz="914400" rtl="0" eaLnBrk="1" latinLnBrk="0" hangingPunct="1">
+              <a:lnSpc>
+                <a:spcPct val="90000"/>
+              </a:lnSpc>
+              <a:spcBef>
+                <a:spcPts val="500"/>
+              </a:spcBef>
+              <a:buFont typeface="Arial" panose="020B0604020202020204" pitchFamily="34" charset="0"/>
+              <a:buNone/>
+              <a:defRPr sz="2000" kern="1200">
+                <a:solidFill>
+                  <a:schemeClr val="tx1"/>
+                </a:solidFill>
+                <a:latin typeface="+mn-lt"/>
+                <a:ea typeface="+mn-ea"/>
+                <a:cs typeface="+mn-cs"/>
+              </a:defRPr>
+            </a:lvl2pPr>
+            <a:lvl3pPr marL="914400" indent="0" algn="ctr" defTabSz="914400" rtl="0" eaLnBrk="1" latinLnBrk="0" hangingPunct="1">
+              <a:lnSpc>
+                <a:spcPct val="90000"/>
+              </a:lnSpc>
+              <a:spcBef>
+                <a:spcPts val="500"/>
+              </a:spcBef>
+              <a:buFont typeface="Arial" panose="020B0604020202020204" pitchFamily="34" charset="0"/>
+              <a:buNone/>
+              <a:defRPr sz="1800" kern="1200">
+                <a:solidFill>
+                  <a:schemeClr val="tx1"/>
+                </a:solidFill>
+                <a:latin typeface="+mn-lt"/>
+                <a:ea typeface="+mn-ea"/>
+                <a:cs typeface="+mn-cs"/>
+              </a:defRPr>
+            </a:lvl3pPr>
+            <a:lvl4pPr marL="1371600" indent="0" algn="ctr" defTabSz="914400" rtl="0" eaLnBrk="1" latinLnBrk="0" hangingPunct="1">
+              <a:lnSpc>
+                <a:spcPct val="90000"/>
+              </a:lnSpc>
+              <a:spcBef>
+                <a:spcPts val="500"/>
+              </a:spcBef>
+              <a:buFont typeface="Arial" panose="020B0604020202020204" pitchFamily="34" charset="0"/>
+              <a:buNone/>
+              <a:defRPr sz="1600" kern="1200">
+                <a:solidFill>
+                  <a:schemeClr val="tx1"/>
+                </a:solidFill>
+                <a:latin typeface="+mn-lt"/>
+                <a:ea typeface="+mn-ea"/>
+                <a:cs typeface="+mn-cs"/>
+              </a:defRPr>
+            </a:lvl4pPr>
+            <a:lvl5pPr marL="1828800" indent="0" algn="ctr" defTabSz="914400" rtl="0" eaLnBrk="1" latinLnBrk="0" hangingPunct="1">
+              <a:lnSpc>
+                <a:spcPct val="90000"/>
+              </a:lnSpc>
+              <a:spcBef>
+                <a:spcPts val="500"/>
+              </a:spcBef>
+              <a:buFont typeface="Arial" panose="020B0604020202020204" pitchFamily="34" charset="0"/>
+              <a:buNone/>
+              <a:defRPr sz="1600" kern="1200">
+                <a:solidFill>
+                  <a:schemeClr val="tx1"/>
+                </a:solidFill>
+                <a:latin typeface="+mn-lt"/>
+                <a:ea typeface="+mn-ea"/>
+                <a:cs typeface="+mn-cs"/>
+              </a:defRPr>
+            </a:lvl5pPr>
+            <a:lvl6pPr marL="2286000" indent="0" algn="ctr" defTabSz="914400" rtl="0" eaLnBrk="1" latinLnBrk="0" hangingPunct="1">
+              <a:lnSpc>
+                <a:spcPct val="90000"/>
+              </a:lnSpc>
+              <a:spcBef>
+                <a:spcPts val="500"/>
+              </a:spcBef>
+              <a:buFont typeface="Arial" panose="020B0604020202020204" pitchFamily="34" charset="0"/>
+              <a:buNone/>
+              <a:defRPr sz="1600" kern="1200">
+                <a:solidFill>
+                  <a:schemeClr val="tx1"/>
+                </a:solidFill>
+                <a:latin typeface="+mn-lt"/>
+                <a:ea typeface="+mn-ea"/>
+                <a:cs typeface="+mn-cs"/>
+              </a:defRPr>
+            </a:lvl6pPr>
+            <a:lvl7pPr marL="2743200" indent="0" algn="ctr" defTabSz="914400" rtl="0" eaLnBrk="1" latinLnBrk="0" hangingPunct="1">
+              <a:lnSpc>
+                <a:spcPct val="90000"/>
+              </a:lnSpc>
+              <a:spcBef>
+                <a:spcPts val="500"/>
+              </a:spcBef>
+              <a:buFont typeface="Arial" panose="020B0604020202020204" pitchFamily="34" charset="0"/>
+              <a:buNone/>
+              <a:defRPr sz="1600" kern="1200">
+                <a:solidFill>
+                  <a:schemeClr val="tx1"/>
+                </a:solidFill>
+                <a:latin typeface="+mn-lt"/>
+                <a:ea typeface="+mn-ea"/>
+                <a:cs typeface="+mn-cs"/>
+              </a:defRPr>
+            </a:lvl7pPr>
+            <a:lvl8pPr marL="3200400" indent="0" algn="ctr" defTabSz="914400" rtl="0" eaLnBrk="1" latinLnBrk="0" hangingPunct="1">
+              <a:lnSpc>
+                <a:spcPct val="90000"/>
+              </a:lnSpc>
+              <a:spcBef>
+                <a:spcPts val="500"/>
+              </a:spcBef>
+              <a:buFont typeface="Arial" panose="020B0604020202020204" pitchFamily="34" charset="0"/>
+              <a:buNone/>
+              <a:defRPr sz="1600" kern="1200">
+                <a:solidFill>
+                  <a:schemeClr val="tx1"/>
+                </a:solidFill>
+                <a:latin typeface="+mn-lt"/>
+                <a:ea typeface="+mn-ea"/>
+                <a:cs typeface="+mn-cs"/>
+              </a:defRPr>
+            </a:lvl8pPr>
+            <a:lvl9pPr marL="3657600" indent="0" algn="ctr" defTabSz="914400" rtl="0" eaLnBrk="1" latinLnBrk="0" hangingPunct="1">
+              <a:lnSpc>
+                <a:spcPct val="90000"/>
+              </a:lnSpc>
+              <a:spcBef>
+                <a:spcPts val="500"/>
+              </a:spcBef>
+              <a:buFont typeface="Arial" panose="020B0604020202020204" pitchFamily="34" charset="0"/>
+              <a:buNone/>
+              <a:defRPr sz="1600" kern="1200">
+                <a:solidFill>
+                  <a:schemeClr val="tx1"/>
+                </a:solidFill>
+                <a:latin typeface="+mn-lt"/>
+                <a:ea typeface="+mn-ea"/>
+                <a:cs typeface="+mn-cs"/>
+              </a:defRPr>
+            </a:lvl9pPr>
+          </a:lstStyle>
+          <a:p>
+            <a:r>
+              <a:rPr lang="de-DE" sz="2000" b="1" dirty="0">
+                <a:latin typeface="Liberation Sans" panose="020B0604020202020204" pitchFamily="34" charset="0"/>
+                <a:ea typeface="Liberation Sans" panose="020B0604020202020204" pitchFamily="34" charset="0"/>
+                <a:cs typeface="Liberation Sans" panose="020B0604020202020204" pitchFamily="34" charset="0"/>
+              </a:rPr>
+              <a:t>Allgemein</a:t>
+            </a:r>
+          </a:p>
+          <a:p>
+            <a:pPr algn="l"/>
+            <a:endParaRPr lang="de-DE" sz="2000" b="1" dirty="0">
+              <a:latin typeface="Liberation Sans" panose="020B0604020202020204" pitchFamily="34" charset="0"/>
+              <a:ea typeface="Liberation Sans" panose="020B0604020202020204" pitchFamily="34" charset="0"/>
+              <a:cs typeface="Liberation Sans" panose="020B0604020202020204" pitchFamily="34" charset="0"/>
+            </a:endParaRPr>
+          </a:p>
+          <a:p>
+            <a:pPr marL="457200" indent="-457200" algn="l">
+              <a:buFont typeface="Wingdings" panose="05000000000000000000" pitchFamily="2" charset="2"/>
+              <a:buChar char="v"/>
+            </a:pPr>
+            <a:r>
+              <a:rPr lang="de-DE" sz="2000" dirty="0">
+                <a:latin typeface="Liberation Sans" panose="020B0604020202020204" pitchFamily="34" charset="0"/>
+                <a:ea typeface="Liberation Sans" panose="020B0604020202020204" pitchFamily="34" charset="0"/>
+                <a:cs typeface="Liberation Sans" panose="020B0604020202020204" pitchFamily="34" charset="0"/>
+              </a:rPr>
+              <a:t>Frühe durchdachte Planung lohnt sich</a:t>
+            </a:r>
+          </a:p>
+          <a:p>
+            <a:pPr marL="457200" indent="-457200" algn="l">
+              <a:buFont typeface="Wingdings" panose="05000000000000000000" pitchFamily="2" charset="2"/>
+              <a:buChar char="v"/>
+            </a:pPr>
+            <a:r>
+              <a:rPr lang="de-DE" sz="2000" dirty="0">
+                <a:latin typeface="Liberation Sans" panose="020B0604020202020204" pitchFamily="34" charset="0"/>
+                <a:ea typeface="Liberation Sans" panose="020B0604020202020204" pitchFamily="34" charset="0"/>
+                <a:cs typeface="Liberation Sans" panose="020B0604020202020204" pitchFamily="34" charset="0"/>
+              </a:rPr>
+              <a:t>3D-Druck-Ungenauigkeiten antizipieren</a:t>
+            </a:r>
+          </a:p>
+          <a:p>
+            <a:pPr marL="457200" indent="-457200" algn="l">
+              <a:buFont typeface="Wingdings" panose="05000000000000000000" pitchFamily="2" charset="2"/>
+              <a:buChar char="v"/>
+            </a:pPr>
+            <a:r>
+              <a:rPr lang="de-DE" sz="2000" dirty="0">
+                <a:latin typeface="Liberation Sans" panose="020B0604020202020204" pitchFamily="34" charset="0"/>
+                <a:ea typeface="Liberation Sans" panose="020B0604020202020204" pitchFamily="34" charset="0"/>
+                <a:cs typeface="Liberation Sans" panose="020B0604020202020204" pitchFamily="34" charset="0"/>
+              </a:rPr>
+              <a:t>Improvisation ist oft notwendig</a:t>
+            </a:r>
+          </a:p>
+        </p:txBody>
+      </p:sp>
     </p:spTree>
     <p:extLst>
       <p:ext uri="{BB962C8B-B14F-4D97-AF65-F5344CB8AC3E}">
-        <p14:creationId xmlns:p14="http://schemas.microsoft.com/office/powerpoint/2010/main" val="383897644"/>
+        <p14:creationId xmlns:p14="http://schemas.microsoft.com/office/powerpoint/2010/main" val="1779069297"/>
       </p:ext>
     </p:extLst>
   </p:cSld>

--- a/Präsentation/Kettenfahrzeug.pptx
+++ b/Präsentation/Kettenfahrzeug.pptx
@@ -5,7 +5,7 @@
     <p:sldMasterId id="2147483648" r:id="rId1"/>
   </p:sldMasterIdLst>
   <p:notesMasterIdLst>
-    <p:notesMasterId r:id="rId19"/>
+    <p:notesMasterId r:id="rId30"/>
   </p:notesMasterIdLst>
   <p:sldIdLst>
     <p:sldId id="256" r:id="rId2"/>
@@ -14,17 +14,28 @@
     <p:sldId id="266" r:id="rId5"/>
     <p:sldId id="268" r:id="rId6"/>
     <p:sldId id="270" r:id="rId7"/>
-    <p:sldId id="269" r:id="rId8"/>
-    <p:sldId id="274" r:id="rId9"/>
-    <p:sldId id="267" r:id="rId10"/>
-    <p:sldId id="262" r:id="rId11"/>
-    <p:sldId id="259" r:id="rId12"/>
-    <p:sldId id="260" r:id="rId13"/>
-    <p:sldId id="263" r:id="rId14"/>
-    <p:sldId id="264" r:id="rId15"/>
-    <p:sldId id="271" r:id="rId16"/>
-    <p:sldId id="272" r:id="rId17"/>
-    <p:sldId id="265" r:id="rId18"/>
+    <p:sldId id="285" r:id="rId8"/>
+    <p:sldId id="269" r:id="rId9"/>
+    <p:sldId id="274" r:id="rId10"/>
+    <p:sldId id="267" r:id="rId11"/>
+    <p:sldId id="262" r:id="rId12"/>
+    <p:sldId id="259" r:id="rId13"/>
+    <p:sldId id="260" r:id="rId14"/>
+    <p:sldId id="263" r:id="rId15"/>
+    <p:sldId id="264" r:id="rId16"/>
+    <p:sldId id="275" r:id="rId17"/>
+    <p:sldId id="276" r:id="rId18"/>
+    <p:sldId id="277" r:id="rId19"/>
+    <p:sldId id="278" r:id="rId20"/>
+    <p:sldId id="279" r:id="rId21"/>
+    <p:sldId id="280" r:id="rId22"/>
+    <p:sldId id="281" r:id="rId23"/>
+    <p:sldId id="282" r:id="rId24"/>
+    <p:sldId id="283" r:id="rId25"/>
+    <p:sldId id="284" r:id="rId26"/>
+    <p:sldId id="271" r:id="rId27"/>
+    <p:sldId id="272" r:id="rId28"/>
+    <p:sldId id="265" r:id="rId29"/>
   </p:sldIdLst>
   <p:sldSz cx="12192000" cy="6858000"/>
   <p:notesSz cx="6858000" cy="9144000"/>
@@ -224,7 +235,7 @@
           <a:p>
             <a:fld id="{C2F6FDA6-0D6A-4597-A732-5CBC71724CDA}" type="datetimeFigureOut">
               <a:rPr lang="de-DE" smtClean="0"/>
-              <a:t>22.03.2026</a:t>
+              <a:t>23.03.2026</a:t>
             </a:fld>
             <a:endParaRPr lang="de-DE"/>
           </a:p>
@@ -638,7 +649,7 @@
           <a:p>
             <a:fld id="{229CC8E3-8B86-4C26-9958-4FB51168DB07}" type="datetimeFigureOut">
               <a:rPr lang="de-DE" smtClean="0"/>
-              <a:t>22.03.2026</a:t>
+              <a:t>23.03.2026</a:t>
             </a:fld>
             <a:endParaRPr lang="de-DE"/>
           </a:p>
@@ -836,7 +847,7 @@
           <a:p>
             <a:fld id="{229CC8E3-8B86-4C26-9958-4FB51168DB07}" type="datetimeFigureOut">
               <a:rPr lang="de-DE" smtClean="0"/>
-              <a:t>22.03.2026</a:t>
+              <a:t>23.03.2026</a:t>
             </a:fld>
             <a:endParaRPr lang="de-DE"/>
           </a:p>
@@ -1044,7 +1055,7 @@
           <a:p>
             <a:fld id="{229CC8E3-8B86-4C26-9958-4FB51168DB07}" type="datetimeFigureOut">
               <a:rPr lang="de-DE" smtClean="0"/>
-              <a:t>22.03.2026</a:t>
+              <a:t>23.03.2026</a:t>
             </a:fld>
             <a:endParaRPr lang="de-DE"/>
           </a:p>
@@ -1242,7 +1253,7 @@
           <a:p>
             <a:fld id="{229CC8E3-8B86-4C26-9958-4FB51168DB07}" type="datetimeFigureOut">
               <a:rPr lang="de-DE" smtClean="0"/>
-              <a:t>22.03.2026</a:t>
+              <a:t>23.03.2026</a:t>
             </a:fld>
             <a:endParaRPr lang="de-DE"/>
           </a:p>
@@ -1517,7 +1528,7 @@
           <a:p>
             <a:fld id="{229CC8E3-8B86-4C26-9958-4FB51168DB07}" type="datetimeFigureOut">
               <a:rPr lang="de-DE" smtClean="0"/>
-              <a:t>22.03.2026</a:t>
+              <a:t>23.03.2026</a:t>
             </a:fld>
             <a:endParaRPr lang="de-DE"/>
           </a:p>
@@ -1782,7 +1793,7 @@
           <a:p>
             <a:fld id="{229CC8E3-8B86-4C26-9958-4FB51168DB07}" type="datetimeFigureOut">
               <a:rPr lang="de-DE" smtClean="0"/>
-              <a:t>22.03.2026</a:t>
+              <a:t>23.03.2026</a:t>
             </a:fld>
             <a:endParaRPr lang="de-DE"/>
           </a:p>
@@ -2194,7 +2205,7 @@
           <a:p>
             <a:fld id="{229CC8E3-8B86-4C26-9958-4FB51168DB07}" type="datetimeFigureOut">
               <a:rPr lang="de-DE" smtClean="0"/>
-              <a:t>22.03.2026</a:t>
+              <a:t>23.03.2026</a:t>
             </a:fld>
             <a:endParaRPr lang="de-DE"/>
           </a:p>
@@ -2335,7 +2346,7 @@
           <a:p>
             <a:fld id="{229CC8E3-8B86-4C26-9958-4FB51168DB07}" type="datetimeFigureOut">
               <a:rPr lang="de-DE" smtClean="0"/>
-              <a:t>22.03.2026</a:t>
+              <a:t>23.03.2026</a:t>
             </a:fld>
             <a:endParaRPr lang="de-DE"/>
           </a:p>
@@ -2448,7 +2459,7 @@
           <a:p>
             <a:fld id="{229CC8E3-8B86-4C26-9958-4FB51168DB07}" type="datetimeFigureOut">
               <a:rPr lang="de-DE" smtClean="0"/>
-              <a:t>22.03.2026</a:t>
+              <a:t>23.03.2026</a:t>
             </a:fld>
             <a:endParaRPr lang="de-DE"/>
           </a:p>
@@ -2759,7 +2770,7 @@
           <a:p>
             <a:fld id="{229CC8E3-8B86-4C26-9958-4FB51168DB07}" type="datetimeFigureOut">
               <a:rPr lang="de-DE" smtClean="0"/>
-              <a:t>22.03.2026</a:t>
+              <a:t>23.03.2026</a:t>
             </a:fld>
             <a:endParaRPr lang="de-DE"/>
           </a:p>
@@ -3047,7 +3058,7 @@
           <a:p>
             <a:fld id="{229CC8E3-8B86-4C26-9958-4FB51168DB07}" type="datetimeFigureOut">
               <a:rPr lang="de-DE" smtClean="0"/>
-              <a:t>22.03.2026</a:t>
+              <a:t>23.03.2026</a:t>
             </a:fld>
             <a:endParaRPr lang="de-DE"/>
           </a:p>
@@ -3288,7 +3299,7 @@
           <a:p>
             <a:fld id="{229CC8E3-8B86-4C26-9958-4FB51168DB07}" type="datetimeFigureOut">
               <a:rPr lang="de-DE" smtClean="0"/>
-              <a:t>22.03.2026</a:t>
+              <a:t>23.03.2026</a:t>
             </a:fld>
             <a:endParaRPr lang="de-DE"/>
           </a:p>
@@ -3847,43 +3858,6 @@
       </p:grpSpPr>
       <p:sp>
         <p:nvSpPr>
-          <p:cNvPr id="2" name="Titel 1">
-            <a:extLst>
-              <a:ext uri="{FF2B5EF4-FFF2-40B4-BE49-F238E27FC236}">
-                <a16:creationId xmlns:a16="http://schemas.microsoft.com/office/drawing/2014/main" id="{413D0774-18A2-673D-283B-1C04DB36353E}"/>
-              </a:ext>
-            </a:extLst>
-          </p:cNvPr>
-          <p:cNvSpPr>
-            <a:spLocks noGrp="1"/>
-          </p:cNvSpPr>
-          <p:nvPr>
-            <p:ph type="ctrTitle"/>
-          </p:nvPr>
-        </p:nvSpPr>
-        <p:spPr>
-          <a:xfrm>
-            <a:off x="1524000" y="1269579"/>
-            <a:ext cx="9144000" cy="2387600"/>
-          </a:xfrm>
-        </p:spPr>
-        <p:txBody>
-          <a:bodyPr>
-            <a:normAutofit/>
-          </a:bodyPr>
-          <a:lstStyle/>
-          <a:p>
-            <a:r>
-              <a:rPr lang="de-DE" sz="10000" dirty="0">
-                <a:latin typeface="Impact" panose="020B0806030902050204" pitchFamily="34" charset="0"/>
-              </a:rPr>
-              <a:t>Elektronik</a:t>
-            </a:r>
-          </a:p>
-        </p:txBody>
-      </p:sp>
-      <p:sp>
-        <p:nvSpPr>
           <p:cNvPr id="3" name="Untertitel 2">
             <a:extLst>
               <a:ext uri="{FF2B5EF4-FFF2-40B4-BE49-F238E27FC236}">
@@ -3900,8 +3874,8 @@
         </p:nvSpPr>
         <p:spPr>
           <a:xfrm>
-            <a:off x="1524000" y="4259635"/>
-            <a:ext cx="9144000" cy="1791056"/>
+            <a:off x="1576168" y="2108888"/>
+            <a:ext cx="2639330" cy="3554980"/>
           </a:xfrm>
         </p:spPr>
         <p:txBody>
@@ -3911,148 +3885,24 @@
           <a:lstStyle/>
           <a:p>
             <a:r>
-              <a:rPr lang="de-DE" sz="3000" dirty="0">
+              <a:rPr lang="de-DE" sz="2000" b="1" dirty="0">
                 <a:latin typeface="Liberation Sans" panose="020B0604020202020204" pitchFamily="34" charset="0"/>
                 <a:ea typeface="Liberation Sans" panose="020B0604020202020204" pitchFamily="34" charset="0"/>
                 <a:cs typeface="Liberation Sans" panose="020B0604020202020204" pitchFamily="34" charset="0"/>
               </a:rPr>
-              <a:t>Julian</a:t>
-            </a:r>
-          </a:p>
-        </p:txBody>
-      </p:sp>
-      <p:cxnSp>
-        <p:nvCxnSpPr>
-          <p:cNvPr id="5" name="Gerader Verbinder 4">
-            <a:extLst>
-              <a:ext uri="{FF2B5EF4-FFF2-40B4-BE49-F238E27FC236}">
-                <a16:creationId xmlns:a16="http://schemas.microsoft.com/office/drawing/2014/main" id="{2B753068-DCEB-B788-AD32-F324BF9F36F0}"/>
-              </a:ext>
-            </a:extLst>
-          </p:cNvPr>
-          <p:cNvCxnSpPr/>
-          <p:nvPr/>
-        </p:nvCxnSpPr>
-        <p:spPr>
-          <a:xfrm>
-            <a:off x="1698171" y="3830217"/>
-            <a:ext cx="8714792" cy="0"/>
-          </a:xfrm>
-          <a:prstGeom prst="line">
-            <a:avLst/>
-          </a:prstGeom>
-        </p:spPr>
-        <p:style>
-          <a:lnRef idx="2">
-            <a:schemeClr val="dk1"/>
-          </a:lnRef>
-          <a:fillRef idx="0">
-            <a:schemeClr val="dk1"/>
-          </a:fillRef>
-          <a:effectRef idx="1">
-            <a:schemeClr val="dk1"/>
-          </a:effectRef>
-          <a:fontRef idx="minor">
-            <a:schemeClr val="tx1"/>
-          </a:fontRef>
-        </p:style>
-      </p:cxnSp>
-    </p:spTree>
-    <p:extLst>
-      <p:ext uri="{BB962C8B-B14F-4D97-AF65-F5344CB8AC3E}">
-        <p14:creationId xmlns:p14="http://schemas.microsoft.com/office/powerpoint/2010/main" val="383897644"/>
-      </p:ext>
-    </p:extLst>
-  </p:cSld>
-  <p:clrMapOvr>
-    <a:masterClrMapping/>
-  </p:clrMapOvr>
-</p:sld>
-</file>
-
-<file path=ppt/slides/slide11.xml><?xml version="1.0" encoding="utf-8"?>
-<p:sld xmlns:a="http://schemas.openxmlformats.org/drawingml/2006/main" xmlns:r="http://schemas.openxmlformats.org/officeDocument/2006/relationships" xmlns:p="http://schemas.openxmlformats.org/presentationml/2006/main">
-  <p:cSld>
-    <p:spTree>
-      <p:nvGrpSpPr>
-        <p:cNvPr id="1" name=""/>
-        <p:cNvGrpSpPr/>
-        <p:nvPr/>
-      </p:nvGrpSpPr>
-      <p:grpSpPr>
-        <a:xfrm>
-          <a:off x="0" y="0"/>
-          <a:ext cx="0" cy="0"/>
-          <a:chOff x="0" y="0"/>
-          <a:chExt cx="0" cy="0"/>
-        </a:xfrm>
-      </p:grpSpPr>
-      <p:sp>
-        <p:nvSpPr>
-          <p:cNvPr id="2" name="Titel 1">
-            <a:extLst>
-              <a:ext uri="{FF2B5EF4-FFF2-40B4-BE49-F238E27FC236}">
-                <a16:creationId xmlns:a16="http://schemas.microsoft.com/office/drawing/2014/main" id="{413D0774-18A2-673D-283B-1C04DB36353E}"/>
-              </a:ext>
-            </a:extLst>
-          </p:cNvPr>
-          <p:cNvSpPr>
-            <a:spLocks noGrp="1"/>
-          </p:cNvSpPr>
-          <p:nvPr>
-            <p:ph type="ctrTitle"/>
-          </p:nvPr>
-        </p:nvSpPr>
-        <p:spPr>
-          <a:xfrm>
-            <a:off x="4430485" y="39054"/>
-            <a:ext cx="3331029" cy="1019204"/>
-          </a:xfrm>
-        </p:spPr>
-        <p:txBody>
-          <a:bodyPr>
-            <a:normAutofit/>
-          </a:bodyPr>
-          <a:lstStyle/>
-          <a:p>
-            <a:r>
-              <a:rPr lang="de-DE" dirty="0">
-                <a:latin typeface="Impact" panose="020B0806030902050204" pitchFamily="34" charset="0"/>
-              </a:rPr>
-              <a:t>Elektronik</a:t>
-            </a:r>
-          </a:p>
-        </p:txBody>
-      </p:sp>
-      <p:sp>
-        <p:nvSpPr>
-          <p:cNvPr id="3" name="Untertitel 2">
-            <a:extLst>
-              <a:ext uri="{FF2B5EF4-FFF2-40B4-BE49-F238E27FC236}">
-                <a16:creationId xmlns:a16="http://schemas.microsoft.com/office/drawing/2014/main" id="{93304FBE-99DF-EE64-5EB2-94852307E71F}"/>
-              </a:ext>
-            </a:extLst>
-          </p:cNvPr>
-          <p:cNvSpPr>
-            <a:spLocks noGrp="1"/>
-          </p:cNvSpPr>
-          <p:nvPr>
-            <p:ph type="subTitle" idx="1"/>
-          </p:nvPr>
-        </p:nvSpPr>
-        <p:spPr>
-          <a:xfrm>
-            <a:off x="898849" y="2533471"/>
-            <a:ext cx="9144000" cy="3848665"/>
-          </a:xfrm>
-        </p:spPr>
-        <p:txBody>
-          <a:bodyPr>
-            <a:noAutofit/>
-          </a:bodyPr>
-          <a:lstStyle/>
-          <a:p>
-            <a:pPr marL="342900" indent="-342900" algn="l">
+              <a:t>Positiv</a:t>
+            </a:r>
+          </a:p>
+          <a:p>
+            <a:pPr algn="l"/>
+            <a:endParaRPr lang="de-DE" sz="2000" b="1" dirty="0">
+              <a:latin typeface="Liberation Sans" panose="020B0604020202020204" pitchFamily="34" charset="0"/>
+              <a:ea typeface="Liberation Sans" panose="020B0604020202020204" pitchFamily="34" charset="0"/>
+              <a:cs typeface="Liberation Sans" panose="020B0604020202020204" pitchFamily="34" charset="0"/>
+            </a:endParaRPr>
+          </a:p>
+          <a:p>
+            <a:pPr marL="457200" indent="-457200" algn="l">
               <a:buFont typeface="Wingdings" panose="05000000000000000000" pitchFamily="2" charset="2"/>
               <a:buChar char="v"/>
             </a:pPr>
@@ -4062,22 +3912,11 @@
                 <a:ea typeface="Liberation Sans" panose="020B0604020202020204" pitchFamily="34" charset="0"/>
                 <a:cs typeface="Liberation Sans" panose="020B0604020202020204" pitchFamily="34" charset="0"/>
               </a:rPr>
-              <a:t>11.1V 3500mAh - Akku</a:t>
-            </a:r>
-          </a:p>
-          <a:p>
-            <a:pPr marL="342900" indent="-342900" algn="l">
-              <a:buFont typeface="Wingdings" panose="05000000000000000000" pitchFamily="2" charset="2"/>
-              <a:buChar char="v"/>
-            </a:pPr>
-            <a:endParaRPr lang="de-DE" sz="2000" dirty="0">
-              <a:latin typeface="Liberation Sans" panose="020B0604020202020204" pitchFamily="34" charset="0"/>
-              <a:ea typeface="Liberation Sans" panose="020B0604020202020204" pitchFamily="34" charset="0"/>
-              <a:cs typeface="Liberation Sans" panose="020B0604020202020204" pitchFamily="34" charset="0"/>
-            </a:endParaRPr>
-          </a:p>
-          <a:p>
-            <a:pPr marL="342900" indent="-342900" algn="l">
+              <a:t>Doppeltes Fahrgestell</a:t>
+            </a:r>
+          </a:p>
+          <a:p>
+            <a:pPr marL="457200" indent="-457200" algn="l">
               <a:buFont typeface="Wingdings" panose="05000000000000000000" pitchFamily="2" charset="2"/>
               <a:buChar char="v"/>
             </a:pPr>
@@ -4087,22 +3926,11 @@
                 <a:ea typeface="Liberation Sans" panose="020B0604020202020204" pitchFamily="34" charset="0"/>
                 <a:cs typeface="Liberation Sans" panose="020B0604020202020204" pitchFamily="34" charset="0"/>
               </a:rPr>
-              <a:t>2x BTS7960 43A – H-Brücke</a:t>
-            </a:r>
-          </a:p>
-          <a:p>
-            <a:pPr marL="342900" indent="-342900" algn="l">
-              <a:buFont typeface="Wingdings" panose="05000000000000000000" pitchFamily="2" charset="2"/>
-              <a:buChar char="v"/>
-            </a:pPr>
-            <a:endParaRPr lang="de-DE" sz="2000" dirty="0">
-              <a:latin typeface="Liberation Sans" panose="020B0604020202020204" pitchFamily="34" charset="0"/>
-              <a:ea typeface="Liberation Sans" panose="020B0604020202020204" pitchFamily="34" charset="0"/>
-              <a:cs typeface="Liberation Sans" panose="020B0604020202020204" pitchFamily="34" charset="0"/>
-            </a:endParaRPr>
-          </a:p>
-          <a:p>
-            <a:pPr marL="342900" indent="-342900" algn="l">
+              <a:t>Modulares System mit vielen externen Teilen</a:t>
+            </a:r>
+          </a:p>
+          <a:p>
+            <a:pPr marL="457200" indent="-457200" algn="l">
               <a:buFont typeface="Wingdings" panose="05000000000000000000" pitchFamily="2" charset="2"/>
               <a:buChar char="v"/>
             </a:pPr>
@@ -4112,1505 +3940,11 @@
                 <a:ea typeface="Liberation Sans" panose="020B0604020202020204" pitchFamily="34" charset="0"/>
                 <a:cs typeface="Liberation Sans" panose="020B0604020202020204" pitchFamily="34" charset="0"/>
               </a:rPr>
-              <a:t>2x JGB37-520 12V Motor</a:t>
-            </a:r>
-          </a:p>
-          <a:p>
-            <a:pPr marL="342900" indent="-342900" algn="l">
-              <a:buFont typeface="Wingdings" panose="05000000000000000000" pitchFamily="2" charset="2"/>
-              <a:buChar char="v"/>
-            </a:pPr>
-            <a:endParaRPr lang="de-DE" sz="2000" dirty="0">
-              <a:latin typeface="Liberation Sans" panose="020B0604020202020204" pitchFamily="34" charset="0"/>
-              <a:ea typeface="Liberation Sans" panose="020B0604020202020204" pitchFamily="34" charset="0"/>
-              <a:cs typeface="Liberation Sans" panose="020B0604020202020204" pitchFamily="34" charset="0"/>
-            </a:endParaRPr>
-          </a:p>
-          <a:p>
-            <a:pPr marL="342900" indent="-342900" algn="l">
-              <a:buFont typeface="Wingdings" panose="05000000000000000000" pitchFamily="2" charset="2"/>
-              <a:buChar char="v"/>
-            </a:pPr>
-            <a:r>
-              <a:rPr lang="de-DE" sz="2000" dirty="0">
-                <a:latin typeface="Liberation Sans" panose="020B0604020202020204" pitchFamily="34" charset="0"/>
-                <a:ea typeface="Liberation Sans" panose="020B0604020202020204" pitchFamily="34" charset="0"/>
-                <a:cs typeface="Liberation Sans" panose="020B0604020202020204" pitchFamily="34" charset="0"/>
-              </a:rPr>
-              <a:t>LM2596 – Buck-Converter</a:t>
-            </a:r>
-          </a:p>
-          <a:p>
-            <a:pPr marL="342900" indent="-342900" algn="l">
-              <a:buFont typeface="Wingdings" panose="05000000000000000000" pitchFamily="2" charset="2"/>
-              <a:buChar char="v"/>
-            </a:pPr>
-            <a:endParaRPr lang="de-DE" sz="2000" dirty="0">
-              <a:latin typeface="Liberation Sans" panose="020B0604020202020204" pitchFamily="34" charset="0"/>
-              <a:ea typeface="Liberation Sans" panose="020B0604020202020204" pitchFamily="34" charset="0"/>
-              <a:cs typeface="Liberation Sans" panose="020B0604020202020204" pitchFamily="34" charset="0"/>
-            </a:endParaRPr>
-          </a:p>
-          <a:p>
-            <a:pPr marL="342900" indent="-342900" algn="l">
-              <a:buFont typeface="Wingdings" panose="05000000000000000000" pitchFamily="2" charset="2"/>
-              <a:buChar char="v"/>
-            </a:pPr>
-            <a:r>
-              <a:rPr lang="de-DE" sz="2000" dirty="0">
-                <a:latin typeface="Liberation Sans" panose="020B0604020202020204" pitchFamily="34" charset="0"/>
-                <a:ea typeface="Liberation Sans" panose="020B0604020202020204" pitchFamily="34" charset="0"/>
-                <a:cs typeface="Liberation Sans" panose="020B0604020202020204" pitchFamily="34" charset="0"/>
-              </a:rPr>
-              <a:t>ESP32 Dev-Module (38 Pins)</a:t>
-            </a:r>
-          </a:p>
-        </p:txBody>
-      </p:sp>
-      <p:cxnSp>
-        <p:nvCxnSpPr>
-          <p:cNvPr id="5" name="Gerader Verbinder 4">
-            <a:extLst>
-              <a:ext uri="{FF2B5EF4-FFF2-40B4-BE49-F238E27FC236}">
-                <a16:creationId xmlns:a16="http://schemas.microsoft.com/office/drawing/2014/main" id="{2B753068-DCEB-B788-AD32-F324BF9F36F0}"/>
-              </a:ext>
-            </a:extLst>
-          </p:cNvPr>
-          <p:cNvCxnSpPr/>
-          <p:nvPr/>
-        </p:nvCxnSpPr>
-        <p:spPr>
-          <a:xfrm>
-            <a:off x="1576168" y="1118956"/>
-            <a:ext cx="8714792" cy="0"/>
-          </a:xfrm>
-          <a:prstGeom prst="line">
-            <a:avLst/>
-          </a:prstGeom>
-        </p:spPr>
-        <p:style>
-          <a:lnRef idx="2">
-            <a:schemeClr val="dk1"/>
-          </a:lnRef>
-          <a:fillRef idx="0">
-            <a:schemeClr val="dk1"/>
-          </a:fillRef>
-          <a:effectRef idx="1">
-            <a:schemeClr val="dk1"/>
-          </a:effectRef>
-          <a:fontRef idx="minor">
-            <a:schemeClr val="tx1"/>
-          </a:fontRef>
-        </p:style>
-      </p:cxnSp>
-      <p:pic>
-        <p:nvPicPr>
-          <p:cNvPr id="6" name="Grafik 5" descr="Ein Bild, das Text, Allgemeine Versorgung, Büroausstattung, Etikett enthält.&#10;&#10;KI-generierte Inhalte können fehlerhaft sein.">
-            <a:extLst>
-              <a:ext uri="{FF2B5EF4-FFF2-40B4-BE49-F238E27FC236}">
-                <a16:creationId xmlns:a16="http://schemas.microsoft.com/office/drawing/2014/main" id="{B109BC79-F612-DA75-4651-5C4278F2E95A}"/>
-              </a:ext>
-            </a:extLst>
-          </p:cNvPr>
-          <p:cNvPicPr>
-            <a:picLocks noChangeAspect="1"/>
-          </p:cNvPicPr>
-          <p:nvPr/>
-        </p:nvPicPr>
-        <p:blipFill>
-          <a:blip r:embed="rId2">
-            <a:extLst>
-              <a:ext uri="{28A0092B-C50C-407E-A947-70E740481C1C}">
-                <a14:useLocalDpi xmlns:a14="http://schemas.microsoft.com/office/drawing/2010/main" val="0"/>
-              </a:ext>
-            </a:extLst>
-          </a:blip>
-          <a:stretch>
-            <a:fillRect/>
-          </a:stretch>
-        </p:blipFill>
-        <p:spPr>
-          <a:xfrm>
-            <a:off x="4850372" y="1986084"/>
-            <a:ext cx="2232463" cy="1777916"/>
-          </a:xfrm>
-          <a:prstGeom prst="rect">
-            <a:avLst/>
-          </a:prstGeom>
-        </p:spPr>
-      </p:pic>
-      <p:pic>
-        <p:nvPicPr>
-          <p:cNvPr id="8" name="Grafik 7" descr="Ein Bild, das Elektronik, Elektronisches Bauteil, Elektrisches Bauelement, Schaltung enthält.&#10;&#10;KI-generierte Inhalte können fehlerhaft sein.">
-            <a:extLst>
-              <a:ext uri="{FF2B5EF4-FFF2-40B4-BE49-F238E27FC236}">
-                <a16:creationId xmlns:a16="http://schemas.microsoft.com/office/drawing/2014/main" id="{AF376ADC-B7DD-2D3B-0180-9FCFD057D9AE}"/>
-              </a:ext>
-            </a:extLst>
-          </p:cNvPr>
-          <p:cNvPicPr>
-            <a:picLocks noChangeAspect="1"/>
-          </p:cNvPicPr>
-          <p:nvPr/>
-        </p:nvPicPr>
-        <p:blipFill>
-          <a:blip r:embed="rId3">
-            <a:extLst>
-              <a:ext uri="{28A0092B-C50C-407E-A947-70E740481C1C}">
-                <a14:useLocalDpi xmlns:a14="http://schemas.microsoft.com/office/drawing/2010/main" val="0"/>
-              </a:ext>
-            </a:extLst>
-          </a:blip>
-          <a:stretch>
-            <a:fillRect/>
-          </a:stretch>
-        </p:blipFill>
-        <p:spPr>
-          <a:xfrm>
-            <a:off x="9517044" y="4279431"/>
-            <a:ext cx="1776107" cy="1535419"/>
-          </a:xfrm>
-          <a:prstGeom prst="rect">
-            <a:avLst/>
-          </a:prstGeom>
-        </p:spPr>
-      </p:pic>
-      <p:pic>
-        <p:nvPicPr>
-          <p:cNvPr id="10" name="Grafik 9" descr="Ein Bild, das Elektronik, Elektrisches Bauelement, Elektronisches Bauteil, Schaltung enthält.&#10;&#10;KI-generierte Inhalte können fehlerhaft sein.">
-            <a:extLst>
-              <a:ext uri="{FF2B5EF4-FFF2-40B4-BE49-F238E27FC236}">
-                <a16:creationId xmlns:a16="http://schemas.microsoft.com/office/drawing/2014/main" id="{2C6DB4DF-7CAC-76B2-14FF-CF0AFF5F5D60}"/>
-              </a:ext>
-            </a:extLst>
-          </p:cNvPr>
-          <p:cNvPicPr>
-            <a:picLocks noChangeAspect="1"/>
-          </p:cNvPicPr>
-          <p:nvPr/>
-        </p:nvPicPr>
-        <p:blipFill>
-          <a:blip r:embed="rId4">
-            <a:extLst>
-              <a:ext uri="{28A0092B-C50C-407E-A947-70E740481C1C}">
-                <a14:useLocalDpi xmlns:a14="http://schemas.microsoft.com/office/drawing/2010/main" val="0"/>
-              </a:ext>
-            </a:extLst>
-          </a:blip>
-          <a:stretch>
-            <a:fillRect/>
-          </a:stretch>
-        </p:blipFill>
-        <p:spPr>
-          <a:xfrm>
-            <a:off x="8172633" y="2043827"/>
-            <a:ext cx="2232464" cy="2050686"/>
-          </a:xfrm>
-          <a:prstGeom prst="rect">
-            <a:avLst/>
-          </a:prstGeom>
-        </p:spPr>
-      </p:pic>
-      <p:pic>
-        <p:nvPicPr>
-          <p:cNvPr id="12" name="Grafik 11" descr="Ein Bild, das Röhre enthält.&#10;&#10;KI-generierte Inhalte können fehlerhaft sein.">
-            <a:extLst>
-              <a:ext uri="{FF2B5EF4-FFF2-40B4-BE49-F238E27FC236}">
-                <a16:creationId xmlns:a16="http://schemas.microsoft.com/office/drawing/2014/main" id="{5D354501-3BFF-6440-5702-C64F04BF6ED4}"/>
-              </a:ext>
-            </a:extLst>
-          </p:cNvPr>
-          <p:cNvPicPr>
-            <a:picLocks noChangeAspect="1"/>
-          </p:cNvPicPr>
-          <p:nvPr/>
-        </p:nvPicPr>
-        <p:blipFill>
-          <a:blip r:embed="rId5">
-            <a:extLst>
-              <a:ext uri="{28A0092B-C50C-407E-A947-70E740481C1C}">
-                <a14:useLocalDpi xmlns:a14="http://schemas.microsoft.com/office/drawing/2010/main" val="0"/>
-              </a:ext>
-            </a:extLst>
-          </a:blip>
-          <a:stretch>
-            <a:fillRect/>
-          </a:stretch>
-        </p:blipFill>
-        <p:spPr>
-          <a:xfrm>
-            <a:off x="6719297" y="3307658"/>
-            <a:ext cx="1228602" cy="2233822"/>
-          </a:xfrm>
-          <a:prstGeom prst="rect">
-            <a:avLst/>
-          </a:prstGeom>
-        </p:spPr>
-      </p:pic>
-      <p:pic>
-        <p:nvPicPr>
-          <p:cNvPr id="14" name="Grafik 13" descr="Ein Bild, das Elektronik, Computerkomponenten, Elektronisches Bauteil, Elektrisches Bauelement enthält.&#10;&#10;KI-generierte Inhalte können fehlerhaft sein.">
-            <a:extLst>
-              <a:ext uri="{FF2B5EF4-FFF2-40B4-BE49-F238E27FC236}">
-                <a16:creationId xmlns:a16="http://schemas.microsoft.com/office/drawing/2014/main" id="{6B30D8AC-25CB-8DC9-7B69-C7A7727C16F1}"/>
-              </a:ext>
-            </a:extLst>
-          </p:cNvPr>
-          <p:cNvPicPr>
-            <a:picLocks noChangeAspect="1"/>
-          </p:cNvPicPr>
-          <p:nvPr/>
-        </p:nvPicPr>
-        <p:blipFill>
-          <a:blip r:embed="rId6">
-            <a:extLst>
-              <a:ext uri="{28A0092B-C50C-407E-A947-70E740481C1C}">
-                <a14:useLocalDpi xmlns:a14="http://schemas.microsoft.com/office/drawing/2010/main" val="0"/>
-              </a:ext>
-            </a:extLst>
-          </a:blip>
-          <a:stretch>
-            <a:fillRect/>
-          </a:stretch>
-        </p:blipFill>
-        <p:spPr>
-          <a:xfrm>
-            <a:off x="7709513" y="5087251"/>
-            <a:ext cx="1619317" cy="1455197"/>
-          </a:xfrm>
-          <a:prstGeom prst="rect">
-            <a:avLst/>
-          </a:prstGeom>
-        </p:spPr>
-      </p:pic>
-      <p:sp>
-        <p:nvSpPr>
-          <p:cNvPr id="15" name="Textfeld 14">
-            <a:extLst>
-              <a:ext uri="{FF2B5EF4-FFF2-40B4-BE49-F238E27FC236}">
-                <a16:creationId xmlns:a16="http://schemas.microsoft.com/office/drawing/2014/main" id="{D3227EC0-6C59-6CD2-5D53-172A65B2C243}"/>
-              </a:ext>
-            </a:extLst>
-          </p:cNvPr>
-          <p:cNvSpPr txBox="1"/>
-          <p:nvPr/>
-        </p:nvSpPr>
-        <p:spPr>
-          <a:xfrm>
-            <a:off x="233265" y="6456784"/>
-            <a:ext cx="5299788" cy="369332"/>
-          </a:xfrm>
-          <a:prstGeom prst="rect">
-            <a:avLst/>
-          </a:prstGeom>
-          <a:noFill/>
-        </p:spPr>
-        <p:txBody>
-          <a:bodyPr wrap="square" rtlCol="0">
-            <a:spAutoFit/>
-          </a:bodyPr>
-          <a:lstStyle/>
-          <a:p>
-            <a:r>
-              <a:rPr lang="de-DE" dirty="0"/>
-              <a:t>*Alle aufgeführten Bauteile stammen von Aliexpress</a:t>
-            </a:r>
-          </a:p>
-        </p:txBody>
-      </p:sp>
-    </p:spTree>
-    <p:extLst>
-      <p:ext uri="{BB962C8B-B14F-4D97-AF65-F5344CB8AC3E}">
-        <p14:creationId xmlns:p14="http://schemas.microsoft.com/office/powerpoint/2010/main" val="1379536395"/>
-      </p:ext>
-    </p:extLst>
-  </p:cSld>
-  <p:clrMapOvr>
-    <a:masterClrMapping/>
-  </p:clrMapOvr>
-</p:sld>
-</file>
-
-<file path=ppt/slides/slide12.xml><?xml version="1.0" encoding="utf-8"?>
-<p:sld xmlns:a="http://schemas.openxmlformats.org/drawingml/2006/main" xmlns:r="http://schemas.openxmlformats.org/officeDocument/2006/relationships" xmlns:p="http://schemas.openxmlformats.org/presentationml/2006/main">
-  <p:cSld>
-    <p:spTree>
-      <p:nvGrpSpPr>
-        <p:cNvPr id="1" name=""/>
-        <p:cNvGrpSpPr/>
-        <p:nvPr/>
-      </p:nvGrpSpPr>
-      <p:grpSpPr>
-        <a:xfrm>
-          <a:off x="0" y="0"/>
-          <a:ext cx="0" cy="0"/>
-          <a:chOff x="0" y="0"/>
-          <a:chExt cx="0" cy="0"/>
-        </a:xfrm>
-      </p:grpSpPr>
-      <p:pic>
-        <p:nvPicPr>
-          <p:cNvPr id="5" name="Inhaltsplatzhalter 4" descr="Ein Bild, das Text, Diagramm, Plan, technische Zeichnung enthält.&#10;&#10;KI-generierte Inhalte können fehlerhaft sein.">
-            <a:extLst>
-              <a:ext uri="{FF2B5EF4-FFF2-40B4-BE49-F238E27FC236}">
-                <a16:creationId xmlns:a16="http://schemas.microsoft.com/office/drawing/2014/main" id="{7B82A2CC-6A98-31A3-AE4C-FB7D82868BDA}"/>
-              </a:ext>
-            </a:extLst>
-          </p:cNvPr>
-          <p:cNvPicPr>
-            <a:picLocks noGrp="1" noChangeAspect="1"/>
-          </p:cNvPicPr>
-          <p:nvPr>
-            <p:ph idx="1"/>
-          </p:nvPr>
-        </p:nvPicPr>
-        <p:blipFill>
-          <a:blip r:embed="rId2">
-            <a:extLst>
-              <a:ext uri="{28A0092B-C50C-407E-A947-70E740481C1C}">
-                <a14:useLocalDpi xmlns:a14="http://schemas.microsoft.com/office/drawing/2010/main" val="0"/>
-              </a:ext>
-            </a:extLst>
-          </a:blip>
-          <a:srcRect l="18112" t="12063" r="21627" b="12230"/>
-          <a:stretch/>
-        </p:blipFill>
-        <p:spPr>
-          <a:xfrm>
-            <a:off x="2166061" y="-136062"/>
-            <a:ext cx="7859877" cy="6994062"/>
-          </a:xfrm>
-        </p:spPr>
-      </p:pic>
-      <p:sp>
-        <p:nvSpPr>
-          <p:cNvPr id="7" name="Textfeld 6">
-            <a:extLst>
-              <a:ext uri="{FF2B5EF4-FFF2-40B4-BE49-F238E27FC236}">
-                <a16:creationId xmlns:a16="http://schemas.microsoft.com/office/drawing/2014/main" id="{84DDF3DC-E437-73A9-3E48-A989147B64CA}"/>
-              </a:ext>
-            </a:extLst>
-          </p:cNvPr>
-          <p:cNvSpPr txBox="1"/>
-          <p:nvPr/>
-        </p:nvSpPr>
-        <p:spPr>
-          <a:xfrm>
-            <a:off x="165619" y="6412077"/>
-            <a:ext cx="6097554" cy="369332"/>
-          </a:xfrm>
-          <a:prstGeom prst="rect">
-            <a:avLst/>
-          </a:prstGeom>
-          <a:noFill/>
-        </p:spPr>
-        <p:txBody>
-          <a:bodyPr wrap="square">
-            <a:spAutoFit/>
-          </a:bodyPr>
-          <a:lstStyle/>
-          <a:p>
-            <a:r>
-              <a:rPr lang="de-DE" dirty="0"/>
-              <a:t>https://easyeda.com</a:t>
-            </a:r>
-          </a:p>
-        </p:txBody>
-      </p:sp>
-    </p:spTree>
-    <p:extLst>
-      <p:ext uri="{BB962C8B-B14F-4D97-AF65-F5344CB8AC3E}">
-        <p14:creationId xmlns:p14="http://schemas.microsoft.com/office/powerpoint/2010/main" val="4040044785"/>
-      </p:ext>
-    </p:extLst>
-  </p:cSld>
-  <p:clrMapOvr>
-    <a:masterClrMapping/>
-  </p:clrMapOvr>
-</p:sld>
-</file>
-
-<file path=ppt/slides/slide13.xml><?xml version="1.0" encoding="utf-8"?>
-<p:sld xmlns:a="http://schemas.openxmlformats.org/drawingml/2006/main" xmlns:r="http://schemas.openxmlformats.org/officeDocument/2006/relationships" xmlns:p="http://schemas.openxmlformats.org/presentationml/2006/main">
-  <p:cSld>
-    <p:spTree>
-      <p:nvGrpSpPr>
-        <p:cNvPr id="1" name=""/>
-        <p:cNvGrpSpPr/>
-        <p:nvPr/>
-      </p:nvGrpSpPr>
-      <p:grpSpPr>
-        <a:xfrm>
-          <a:off x="0" y="0"/>
-          <a:ext cx="0" cy="0"/>
-          <a:chOff x="0" y="0"/>
-          <a:chExt cx="0" cy="0"/>
-        </a:xfrm>
-      </p:grpSpPr>
-      <p:sp>
-        <p:nvSpPr>
-          <p:cNvPr id="2" name="Titel 1">
-            <a:extLst>
-              <a:ext uri="{FF2B5EF4-FFF2-40B4-BE49-F238E27FC236}">
-                <a16:creationId xmlns:a16="http://schemas.microsoft.com/office/drawing/2014/main" id="{413D0774-18A2-673D-283B-1C04DB36353E}"/>
-              </a:ext>
-            </a:extLst>
-          </p:cNvPr>
-          <p:cNvSpPr>
-            <a:spLocks noGrp="1"/>
-          </p:cNvSpPr>
-          <p:nvPr>
-            <p:ph type="ctrTitle"/>
-          </p:nvPr>
-        </p:nvSpPr>
-        <p:spPr>
-          <a:xfrm>
-            <a:off x="1524000" y="1269579"/>
-            <a:ext cx="9144000" cy="2387600"/>
-          </a:xfrm>
-        </p:spPr>
-        <p:txBody>
-          <a:bodyPr>
-            <a:normAutofit fontScale="90000"/>
-          </a:bodyPr>
-          <a:lstStyle/>
-          <a:p>
-            <a:br>
-              <a:rPr lang="de-DE" sz="10000" dirty="0">
-                <a:latin typeface="Impact" panose="020B0806030902050204" pitchFamily="34" charset="0"/>
-              </a:rPr>
-            </a:br>
-            <a:r>
-              <a:rPr lang="de-DE" sz="10000" dirty="0">
-                <a:latin typeface="Impact" panose="020B0806030902050204" pitchFamily="34" charset="0"/>
-              </a:rPr>
-              <a:t>Programmierung</a:t>
-            </a:r>
-          </a:p>
-        </p:txBody>
-      </p:sp>
-      <p:sp>
-        <p:nvSpPr>
-          <p:cNvPr id="3" name="Untertitel 2">
-            <a:extLst>
-              <a:ext uri="{FF2B5EF4-FFF2-40B4-BE49-F238E27FC236}">
-                <a16:creationId xmlns:a16="http://schemas.microsoft.com/office/drawing/2014/main" id="{93304FBE-99DF-EE64-5EB2-94852307E71F}"/>
-              </a:ext>
-            </a:extLst>
-          </p:cNvPr>
-          <p:cNvSpPr>
-            <a:spLocks noGrp="1"/>
-          </p:cNvSpPr>
-          <p:nvPr>
-            <p:ph type="subTitle" idx="1"/>
-          </p:nvPr>
-        </p:nvSpPr>
-        <p:spPr>
-          <a:xfrm>
-            <a:off x="1524000" y="4259635"/>
-            <a:ext cx="9144000" cy="1791056"/>
-          </a:xfrm>
-        </p:spPr>
-        <p:txBody>
-          <a:bodyPr>
-            <a:noAutofit/>
-          </a:bodyPr>
-          <a:lstStyle/>
-          <a:p>
-            <a:r>
-              <a:rPr lang="de-DE" sz="3000" dirty="0">
-                <a:latin typeface="Liberation Sans" panose="020B0604020202020204" pitchFamily="34" charset="0"/>
-                <a:ea typeface="Liberation Sans" panose="020B0604020202020204" pitchFamily="34" charset="0"/>
-                <a:cs typeface="Liberation Sans" panose="020B0604020202020204" pitchFamily="34" charset="0"/>
-              </a:rPr>
-              <a:t>Hossein</a:t>
-            </a:r>
-          </a:p>
-        </p:txBody>
-      </p:sp>
-      <p:cxnSp>
-        <p:nvCxnSpPr>
-          <p:cNvPr id="5" name="Gerader Verbinder 4">
-            <a:extLst>
-              <a:ext uri="{FF2B5EF4-FFF2-40B4-BE49-F238E27FC236}">
-                <a16:creationId xmlns:a16="http://schemas.microsoft.com/office/drawing/2014/main" id="{2B753068-DCEB-B788-AD32-F324BF9F36F0}"/>
-              </a:ext>
-            </a:extLst>
-          </p:cNvPr>
-          <p:cNvCxnSpPr/>
-          <p:nvPr/>
-        </p:nvCxnSpPr>
-        <p:spPr>
-          <a:xfrm>
-            <a:off x="1698171" y="3830217"/>
-            <a:ext cx="8714792" cy="0"/>
-          </a:xfrm>
-          <a:prstGeom prst="line">
-            <a:avLst/>
-          </a:prstGeom>
-        </p:spPr>
-        <p:style>
-          <a:lnRef idx="2">
-            <a:schemeClr val="dk1"/>
-          </a:lnRef>
-          <a:fillRef idx="0">
-            <a:schemeClr val="dk1"/>
-          </a:fillRef>
-          <a:effectRef idx="1">
-            <a:schemeClr val="dk1"/>
-          </a:effectRef>
-          <a:fontRef idx="minor">
-            <a:schemeClr val="tx1"/>
-          </a:fontRef>
-        </p:style>
-      </p:cxnSp>
-    </p:spTree>
-    <p:extLst>
-      <p:ext uri="{BB962C8B-B14F-4D97-AF65-F5344CB8AC3E}">
-        <p14:creationId xmlns:p14="http://schemas.microsoft.com/office/powerpoint/2010/main" val="3934917728"/>
-      </p:ext>
-    </p:extLst>
-  </p:cSld>
-  <p:clrMapOvr>
-    <a:masterClrMapping/>
-  </p:clrMapOvr>
-</p:sld>
-</file>
-
-<file path=ppt/slides/slide14.xml><?xml version="1.0" encoding="utf-8"?>
-<p:sld xmlns:a="http://schemas.openxmlformats.org/drawingml/2006/main" xmlns:r="http://schemas.openxmlformats.org/officeDocument/2006/relationships" xmlns:p="http://schemas.openxmlformats.org/presentationml/2006/main">
-  <p:cSld>
-    <p:spTree>
-      <p:nvGrpSpPr>
-        <p:cNvPr id="1" name=""/>
-        <p:cNvGrpSpPr/>
-        <p:nvPr/>
-      </p:nvGrpSpPr>
-      <p:grpSpPr>
-        <a:xfrm>
-          <a:off x="0" y="0"/>
-          <a:ext cx="0" cy="0"/>
-          <a:chOff x="0" y="0"/>
-          <a:chExt cx="0" cy="0"/>
-        </a:xfrm>
-      </p:grpSpPr>
-      <p:sp>
-        <p:nvSpPr>
-          <p:cNvPr id="2" name="Titel 1">
-            <a:extLst>
-              <a:ext uri="{FF2B5EF4-FFF2-40B4-BE49-F238E27FC236}">
-                <a16:creationId xmlns:a16="http://schemas.microsoft.com/office/drawing/2014/main" id="{413D0774-18A2-673D-283B-1C04DB36353E}"/>
-              </a:ext>
-            </a:extLst>
-          </p:cNvPr>
-          <p:cNvSpPr>
-            <a:spLocks noGrp="1"/>
-          </p:cNvSpPr>
-          <p:nvPr>
-            <p:ph type="ctrTitle"/>
-          </p:nvPr>
-        </p:nvSpPr>
-        <p:spPr>
-          <a:xfrm>
-            <a:off x="1524000" y="38100"/>
-            <a:ext cx="9144000" cy="926225"/>
-          </a:xfrm>
-        </p:spPr>
-        <p:txBody>
-          <a:bodyPr>
-            <a:normAutofit/>
-          </a:bodyPr>
-          <a:lstStyle/>
-          <a:p>
-            <a:r>
-              <a:rPr lang="de-DE" dirty="0">
-                <a:latin typeface="Impact" panose="020B0806030902050204" pitchFamily="34" charset="0"/>
-              </a:rPr>
-              <a:t>Programmierung</a:t>
-            </a:r>
-          </a:p>
-        </p:txBody>
-      </p:sp>
-      <p:sp>
-        <p:nvSpPr>
-          <p:cNvPr id="3" name="Untertitel 2">
-            <a:extLst>
-              <a:ext uri="{FF2B5EF4-FFF2-40B4-BE49-F238E27FC236}">
-                <a16:creationId xmlns:a16="http://schemas.microsoft.com/office/drawing/2014/main" id="{93304FBE-99DF-EE64-5EB2-94852307E71F}"/>
-              </a:ext>
-            </a:extLst>
-          </p:cNvPr>
-          <p:cNvSpPr>
-            <a:spLocks noGrp="1"/>
-          </p:cNvSpPr>
-          <p:nvPr>
-            <p:ph type="subTitle" idx="1"/>
-          </p:nvPr>
-        </p:nvSpPr>
-        <p:spPr>
-          <a:xfrm>
-            <a:off x="898849" y="2533472"/>
-            <a:ext cx="9144000" cy="1791056"/>
-          </a:xfrm>
-        </p:spPr>
-        <p:txBody>
-          <a:bodyPr>
-            <a:noAutofit/>
-          </a:bodyPr>
-          <a:lstStyle/>
-          <a:p>
-            <a:pPr algn="l"/>
-            <a:r>
-              <a:rPr lang="de-DE" sz="3000" dirty="0">
-                <a:latin typeface="Liberation Sans" panose="020B0604020202020204" pitchFamily="34" charset="0"/>
-                <a:ea typeface="Liberation Sans" panose="020B0604020202020204" pitchFamily="34" charset="0"/>
-                <a:cs typeface="Liberation Sans" panose="020B0604020202020204" pitchFamily="34" charset="0"/>
-              </a:rPr>
-              <a:t>Hossein Stichpunkte</a:t>
-            </a:r>
-          </a:p>
-          <a:p>
-            <a:pPr algn="l"/>
-            <a:endParaRPr lang="de-DE" sz="3000" dirty="0">
-              <a:latin typeface="Liberation Sans" panose="020B0604020202020204" pitchFamily="34" charset="0"/>
-              <a:ea typeface="Liberation Sans" panose="020B0604020202020204" pitchFamily="34" charset="0"/>
-              <a:cs typeface="Liberation Sans" panose="020B0604020202020204" pitchFamily="34" charset="0"/>
-            </a:endParaRPr>
-          </a:p>
-          <a:p>
-            <a:pPr algn="l"/>
-            <a:r>
-              <a:rPr lang="de-DE" sz="3000" dirty="0">
-                <a:latin typeface="Liberation Sans" panose="020B0604020202020204" pitchFamily="34" charset="0"/>
-                <a:ea typeface="Liberation Sans" panose="020B0604020202020204" pitchFamily="34" charset="0"/>
-                <a:cs typeface="Liberation Sans" panose="020B0604020202020204" pitchFamily="34" charset="0"/>
-              </a:rPr>
-              <a:t>Code!</a:t>
-            </a:r>
-          </a:p>
-          <a:p>
-            <a:pPr algn="l"/>
-            <a:r>
-              <a:rPr lang="de-DE" sz="3000" dirty="0">
-                <a:latin typeface="Liberation Sans" panose="020B0604020202020204" pitchFamily="34" charset="0"/>
-                <a:ea typeface="Liberation Sans" panose="020B0604020202020204" pitchFamily="34" charset="0"/>
-                <a:cs typeface="Liberation Sans" panose="020B0604020202020204" pitchFamily="34" charset="0"/>
-              </a:rPr>
-              <a:t>-&gt; Entwicklung</a:t>
-            </a:r>
-          </a:p>
-        </p:txBody>
-      </p:sp>
-      <p:cxnSp>
-        <p:nvCxnSpPr>
-          <p:cNvPr id="5" name="Gerader Verbinder 4">
-            <a:extLst>
-              <a:ext uri="{FF2B5EF4-FFF2-40B4-BE49-F238E27FC236}">
-                <a16:creationId xmlns:a16="http://schemas.microsoft.com/office/drawing/2014/main" id="{2B753068-DCEB-B788-AD32-F324BF9F36F0}"/>
-              </a:ext>
-            </a:extLst>
-          </p:cNvPr>
-          <p:cNvCxnSpPr/>
-          <p:nvPr/>
-        </p:nvCxnSpPr>
-        <p:spPr>
-          <a:xfrm>
-            <a:off x="1738604" y="987263"/>
-            <a:ext cx="8714792" cy="0"/>
-          </a:xfrm>
-          <a:prstGeom prst="line">
-            <a:avLst/>
-          </a:prstGeom>
-        </p:spPr>
-        <p:style>
-          <a:lnRef idx="2">
-            <a:schemeClr val="dk1"/>
-          </a:lnRef>
-          <a:fillRef idx="0">
-            <a:schemeClr val="dk1"/>
-          </a:fillRef>
-          <a:effectRef idx="1">
-            <a:schemeClr val="dk1"/>
-          </a:effectRef>
-          <a:fontRef idx="minor">
-            <a:schemeClr val="tx1"/>
-          </a:fontRef>
-        </p:style>
-      </p:cxnSp>
-    </p:spTree>
-    <p:extLst>
-      <p:ext uri="{BB962C8B-B14F-4D97-AF65-F5344CB8AC3E}">
-        <p14:creationId xmlns:p14="http://schemas.microsoft.com/office/powerpoint/2010/main" val="2258326793"/>
-      </p:ext>
-    </p:extLst>
-  </p:cSld>
-  <p:clrMapOvr>
-    <a:masterClrMapping/>
-  </p:clrMapOvr>
-</p:sld>
-</file>
-
-<file path=ppt/slides/slide15.xml><?xml version="1.0" encoding="utf-8"?>
-<p:sld xmlns:a="http://schemas.openxmlformats.org/drawingml/2006/main" xmlns:r="http://schemas.openxmlformats.org/officeDocument/2006/relationships" xmlns:p="http://schemas.openxmlformats.org/presentationml/2006/main">
-  <p:cSld>
-    <p:spTree>
-      <p:nvGrpSpPr>
-        <p:cNvPr id="1" name=""/>
-        <p:cNvGrpSpPr/>
-        <p:nvPr/>
-      </p:nvGrpSpPr>
-      <p:grpSpPr>
-        <a:xfrm>
-          <a:off x="0" y="0"/>
-          <a:ext cx="0" cy="0"/>
-          <a:chOff x="0" y="0"/>
-          <a:chExt cx="0" cy="0"/>
-        </a:xfrm>
-      </p:grpSpPr>
-      <p:sp>
-        <p:nvSpPr>
-          <p:cNvPr id="2" name="Titel 1">
-            <a:extLst>
-              <a:ext uri="{FF2B5EF4-FFF2-40B4-BE49-F238E27FC236}">
-                <a16:creationId xmlns:a16="http://schemas.microsoft.com/office/drawing/2014/main" id="{413D0774-18A2-673D-283B-1C04DB36353E}"/>
-              </a:ext>
-            </a:extLst>
-          </p:cNvPr>
-          <p:cNvSpPr>
-            <a:spLocks noGrp="1"/>
-          </p:cNvSpPr>
-          <p:nvPr>
-            <p:ph type="ctrTitle"/>
-          </p:nvPr>
-        </p:nvSpPr>
-        <p:spPr>
-          <a:xfrm>
-            <a:off x="1524000" y="1269579"/>
-            <a:ext cx="9144000" cy="2387600"/>
-          </a:xfrm>
-        </p:spPr>
-        <p:txBody>
-          <a:bodyPr>
-            <a:normAutofit fontScale="90000"/>
-          </a:bodyPr>
-          <a:lstStyle/>
-          <a:p>
-            <a:br>
-              <a:rPr lang="de-DE" sz="10000" dirty="0">
-                <a:latin typeface="Impact" panose="020B0806030902050204" pitchFamily="34" charset="0"/>
-              </a:rPr>
-            </a:br>
-            <a:r>
-              <a:rPr lang="de-DE" sz="10000" dirty="0">
-                <a:latin typeface="Impact" panose="020B0806030902050204" pitchFamily="34" charset="0"/>
-              </a:rPr>
-              <a:t>Allgemeines</a:t>
-            </a:r>
-          </a:p>
-        </p:txBody>
-      </p:sp>
-      <p:sp>
-        <p:nvSpPr>
-          <p:cNvPr id="3" name="Untertitel 2">
-            <a:extLst>
-              <a:ext uri="{FF2B5EF4-FFF2-40B4-BE49-F238E27FC236}">
-                <a16:creationId xmlns:a16="http://schemas.microsoft.com/office/drawing/2014/main" id="{93304FBE-99DF-EE64-5EB2-94852307E71F}"/>
-              </a:ext>
-            </a:extLst>
-          </p:cNvPr>
-          <p:cNvSpPr>
-            <a:spLocks noGrp="1"/>
-          </p:cNvSpPr>
-          <p:nvPr>
-            <p:ph type="subTitle" idx="1"/>
-          </p:nvPr>
-        </p:nvSpPr>
-        <p:spPr>
-          <a:xfrm>
-            <a:off x="1524000" y="4259635"/>
-            <a:ext cx="9144000" cy="1791056"/>
-          </a:xfrm>
-        </p:spPr>
-        <p:txBody>
-          <a:bodyPr>
-            <a:noAutofit/>
-          </a:bodyPr>
-          <a:lstStyle/>
-          <a:p>
-            <a:r>
-              <a:rPr lang="de-DE" sz="3000" dirty="0">
-                <a:latin typeface="Liberation Sans" panose="020B0604020202020204" pitchFamily="34" charset="0"/>
-                <a:ea typeface="Liberation Sans" panose="020B0604020202020204" pitchFamily="34" charset="0"/>
-                <a:cs typeface="Liberation Sans" panose="020B0604020202020204" pitchFamily="34" charset="0"/>
-              </a:rPr>
-              <a:t>Hossein</a:t>
-            </a:r>
-          </a:p>
-        </p:txBody>
-      </p:sp>
-      <p:cxnSp>
-        <p:nvCxnSpPr>
-          <p:cNvPr id="5" name="Gerader Verbinder 4">
-            <a:extLst>
-              <a:ext uri="{FF2B5EF4-FFF2-40B4-BE49-F238E27FC236}">
-                <a16:creationId xmlns:a16="http://schemas.microsoft.com/office/drawing/2014/main" id="{2B753068-DCEB-B788-AD32-F324BF9F36F0}"/>
-              </a:ext>
-            </a:extLst>
-          </p:cNvPr>
-          <p:cNvCxnSpPr/>
-          <p:nvPr/>
-        </p:nvCxnSpPr>
-        <p:spPr>
-          <a:xfrm>
-            <a:off x="1698171" y="3830217"/>
-            <a:ext cx="8714792" cy="0"/>
-          </a:xfrm>
-          <a:prstGeom prst="line">
-            <a:avLst/>
-          </a:prstGeom>
-        </p:spPr>
-        <p:style>
-          <a:lnRef idx="2">
-            <a:schemeClr val="dk1"/>
-          </a:lnRef>
-          <a:fillRef idx="0">
-            <a:schemeClr val="dk1"/>
-          </a:fillRef>
-          <a:effectRef idx="1">
-            <a:schemeClr val="dk1"/>
-          </a:effectRef>
-          <a:fontRef idx="minor">
-            <a:schemeClr val="tx1"/>
-          </a:fontRef>
-        </p:style>
-      </p:cxnSp>
-    </p:spTree>
-    <p:extLst>
-      <p:ext uri="{BB962C8B-B14F-4D97-AF65-F5344CB8AC3E}">
-        <p14:creationId xmlns:p14="http://schemas.microsoft.com/office/powerpoint/2010/main" val="3495136108"/>
-      </p:ext>
-    </p:extLst>
-  </p:cSld>
-  <p:clrMapOvr>
-    <a:masterClrMapping/>
-  </p:clrMapOvr>
-</p:sld>
-</file>
-
-<file path=ppt/slides/slide16.xml><?xml version="1.0" encoding="utf-8"?>
-<p:sld xmlns:a="http://schemas.openxmlformats.org/drawingml/2006/main" xmlns:r="http://schemas.openxmlformats.org/officeDocument/2006/relationships" xmlns:p="http://schemas.openxmlformats.org/presentationml/2006/main">
-  <p:cSld>
-    <p:spTree>
-      <p:nvGrpSpPr>
-        <p:cNvPr id="1" name=""/>
-        <p:cNvGrpSpPr/>
-        <p:nvPr/>
-      </p:nvGrpSpPr>
-      <p:grpSpPr>
-        <a:xfrm>
-          <a:off x="0" y="0"/>
-          <a:ext cx="0" cy="0"/>
-          <a:chOff x="0" y="0"/>
-          <a:chExt cx="0" cy="0"/>
-        </a:xfrm>
-      </p:grpSpPr>
-      <p:sp>
-        <p:nvSpPr>
-          <p:cNvPr id="2" name="Titel 1">
-            <a:extLst>
-              <a:ext uri="{FF2B5EF4-FFF2-40B4-BE49-F238E27FC236}">
-                <a16:creationId xmlns:a16="http://schemas.microsoft.com/office/drawing/2014/main" id="{413D0774-18A2-673D-283B-1C04DB36353E}"/>
-              </a:ext>
-            </a:extLst>
-          </p:cNvPr>
-          <p:cNvSpPr>
-            <a:spLocks noGrp="1"/>
-          </p:cNvSpPr>
-          <p:nvPr>
-            <p:ph type="ctrTitle"/>
-          </p:nvPr>
-        </p:nvSpPr>
-        <p:spPr>
-          <a:xfrm>
-            <a:off x="1524000" y="38100"/>
-            <a:ext cx="9144000" cy="926225"/>
-          </a:xfrm>
-        </p:spPr>
-        <p:txBody>
-          <a:bodyPr>
-            <a:normAutofit/>
-          </a:bodyPr>
-          <a:lstStyle/>
-          <a:p>
-            <a:r>
-              <a:rPr lang="de-DE" dirty="0">
-                <a:latin typeface="Impact" panose="020B0806030902050204" pitchFamily="34" charset="0"/>
-              </a:rPr>
-              <a:t>Allgemeines</a:t>
-            </a:r>
-          </a:p>
-        </p:txBody>
-      </p:sp>
-      <p:cxnSp>
-        <p:nvCxnSpPr>
-          <p:cNvPr id="5" name="Gerader Verbinder 4">
-            <a:extLst>
-              <a:ext uri="{FF2B5EF4-FFF2-40B4-BE49-F238E27FC236}">
-                <a16:creationId xmlns:a16="http://schemas.microsoft.com/office/drawing/2014/main" id="{2B753068-DCEB-B788-AD32-F324BF9F36F0}"/>
-              </a:ext>
-            </a:extLst>
-          </p:cNvPr>
-          <p:cNvCxnSpPr/>
-          <p:nvPr/>
-        </p:nvCxnSpPr>
-        <p:spPr>
-          <a:xfrm>
-            <a:off x="1738604" y="987263"/>
-            <a:ext cx="8714792" cy="0"/>
-          </a:xfrm>
-          <a:prstGeom prst="line">
-            <a:avLst/>
-          </a:prstGeom>
-        </p:spPr>
-        <p:style>
-          <a:lnRef idx="2">
-            <a:schemeClr val="dk1"/>
-          </a:lnRef>
-          <a:fillRef idx="0">
-            <a:schemeClr val="dk1"/>
-          </a:fillRef>
-          <a:effectRef idx="1">
-            <a:schemeClr val="dk1"/>
-          </a:effectRef>
-          <a:fontRef idx="minor">
-            <a:schemeClr val="tx1"/>
-          </a:fontRef>
-        </p:style>
-      </p:cxnSp>
-    </p:spTree>
-    <p:extLst>
-      <p:ext uri="{BB962C8B-B14F-4D97-AF65-F5344CB8AC3E}">
-        <p14:creationId xmlns:p14="http://schemas.microsoft.com/office/powerpoint/2010/main" val="2401350442"/>
-      </p:ext>
-    </p:extLst>
-  </p:cSld>
-  <p:clrMapOvr>
-    <a:masterClrMapping/>
-  </p:clrMapOvr>
-</p:sld>
-</file>
-
-<file path=ppt/slides/slide17.xml><?xml version="1.0" encoding="utf-8"?>
-<p:sld xmlns:a="http://schemas.openxmlformats.org/drawingml/2006/main" xmlns:r="http://schemas.openxmlformats.org/officeDocument/2006/relationships" xmlns:p="http://schemas.openxmlformats.org/presentationml/2006/main">
-  <p:cSld>
-    <p:spTree>
-      <p:nvGrpSpPr>
-        <p:cNvPr id="1" name=""/>
-        <p:cNvGrpSpPr/>
-        <p:nvPr/>
-      </p:nvGrpSpPr>
-      <p:grpSpPr>
-        <a:xfrm>
-          <a:off x="0" y="0"/>
-          <a:ext cx="0" cy="0"/>
-          <a:chOff x="0" y="0"/>
-          <a:chExt cx="0" cy="0"/>
-        </a:xfrm>
-      </p:grpSpPr>
-      <p:sp>
-        <p:nvSpPr>
-          <p:cNvPr id="2" name="Titel 1">
-            <a:extLst>
-              <a:ext uri="{FF2B5EF4-FFF2-40B4-BE49-F238E27FC236}">
-                <a16:creationId xmlns:a16="http://schemas.microsoft.com/office/drawing/2014/main" id="{413D0774-18A2-673D-283B-1C04DB36353E}"/>
-              </a:ext>
-            </a:extLst>
-          </p:cNvPr>
-          <p:cNvSpPr>
-            <a:spLocks noGrp="1"/>
-          </p:cNvSpPr>
-          <p:nvPr>
-            <p:ph type="ctrTitle"/>
-          </p:nvPr>
-        </p:nvSpPr>
-        <p:spPr>
-          <a:xfrm>
-            <a:off x="1524000" y="19053"/>
-            <a:ext cx="9144000" cy="945272"/>
-          </a:xfrm>
-        </p:spPr>
-        <p:txBody>
-          <a:bodyPr>
-            <a:normAutofit/>
-          </a:bodyPr>
-          <a:lstStyle/>
-          <a:p>
-            <a:r>
-              <a:rPr lang="de-DE" dirty="0">
-                <a:latin typeface="Impact" panose="020B0806030902050204" pitchFamily="34" charset="0"/>
-              </a:rPr>
-              <a:t>Quellen</a:t>
-            </a:r>
-          </a:p>
-        </p:txBody>
-      </p:sp>
-      <p:sp>
-        <p:nvSpPr>
-          <p:cNvPr id="3" name="Untertitel 2">
-            <a:extLst>
-              <a:ext uri="{FF2B5EF4-FFF2-40B4-BE49-F238E27FC236}">
-                <a16:creationId xmlns:a16="http://schemas.microsoft.com/office/drawing/2014/main" id="{93304FBE-99DF-EE64-5EB2-94852307E71F}"/>
-              </a:ext>
-            </a:extLst>
-          </p:cNvPr>
-          <p:cNvSpPr>
-            <a:spLocks noGrp="1"/>
-          </p:cNvSpPr>
-          <p:nvPr>
-            <p:ph type="subTitle" idx="1"/>
-          </p:nvPr>
-        </p:nvSpPr>
-        <p:spPr>
-          <a:xfrm>
-            <a:off x="898849" y="2533472"/>
-            <a:ext cx="9144000" cy="1791056"/>
-          </a:xfrm>
-        </p:spPr>
-        <p:txBody>
-          <a:bodyPr>
-            <a:noAutofit/>
-          </a:bodyPr>
-          <a:lstStyle/>
-          <a:p>
-            <a:pPr algn="l"/>
-            <a:r>
-              <a:rPr lang="de-DE" sz="3000" dirty="0">
-                <a:latin typeface="Liberation Sans" panose="020B0604020202020204" pitchFamily="34" charset="0"/>
-                <a:ea typeface="Liberation Sans" panose="020B0604020202020204" pitchFamily="34" charset="0"/>
-                <a:cs typeface="Liberation Sans" panose="020B0604020202020204" pitchFamily="34" charset="0"/>
-              </a:rPr>
-              <a:t>Keine Ahnung, ob und wie viele Quellen wir </a:t>
-            </a:r>
-            <a:r>
-              <a:rPr lang="de-DE" sz="3000">
-                <a:latin typeface="Liberation Sans" panose="020B0604020202020204" pitchFamily="34" charset="0"/>
-                <a:ea typeface="Liberation Sans" panose="020B0604020202020204" pitchFamily="34" charset="0"/>
-                <a:cs typeface="Liberation Sans" panose="020B0604020202020204" pitchFamily="34" charset="0"/>
-              </a:rPr>
-              <a:t>angeben sollten</a:t>
-            </a:r>
-            <a:endParaRPr lang="de-DE" sz="3000" dirty="0">
-              <a:latin typeface="Liberation Sans" panose="020B0604020202020204" pitchFamily="34" charset="0"/>
-              <a:ea typeface="Liberation Sans" panose="020B0604020202020204" pitchFamily="34" charset="0"/>
-              <a:cs typeface="Liberation Sans" panose="020B0604020202020204" pitchFamily="34" charset="0"/>
-            </a:endParaRPr>
-          </a:p>
-          <a:p>
-            <a:pPr algn="l"/>
-            <a:endParaRPr lang="de-DE" sz="3000" dirty="0">
-              <a:latin typeface="Liberation Sans" panose="020B0604020202020204" pitchFamily="34" charset="0"/>
-              <a:ea typeface="Liberation Sans" panose="020B0604020202020204" pitchFamily="34" charset="0"/>
-              <a:cs typeface="Liberation Sans" panose="020B0604020202020204" pitchFamily="34" charset="0"/>
-            </a:endParaRPr>
-          </a:p>
-        </p:txBody>
-      </p:sp>
-      <p:cxnSp>
-        <p:nvCxnSpPr>
-          <p:cNvPr id="5" name="Gerader Verbinder 4">
-            <a:extLst>
-              <a:ext uri="{FF2B5EF4-FFF2-40B4-BE49-F238E27FC236}">
-                <a16:creationId xmlns:a16="http://schemas.microsoft.com/office/drawing/2014/main" id="{2B753068-DCEB-B788-AD32-F324BF9F36F0}"/>
-              </a:ext>
-            </a:extLst>
-          </p:cNvPr>
-          <p:cNvCxnSpPr/>
-          <p:nvPr/>
-        </p:nvCxnSpPr>
-        <p:spPr>
-          <a:xfrm>
-            <a:off x="1602921" y="1034888"/>
-            <a:ext cx="8714792" cy="0"/>
-          </a:xfrm>
-          <a:prstGeom prst="line">
-            <a:avLst/>
-          </a:prstGeom>
-        </p:spPr>
-        <p:style>
-          <a:lnRef idx="2">
-            <a:schemeClr val="dk1"/>
-          </a:lnRef>
-          <a:fillRef idx="0">
-            <a:schemeClr val="dk1"/>
-          </a:fillRef>
-          <a:effectRef idx="1">
-            <a:schemeClr val="dk1"/>
-          </a:effectRef>
-          <a:fontRef idx="minor">
-            <a:schemeClr val="tx1"/>
-          </a:fontRef>
-        </p:style>
-      </p:cxnSp>
-    </p:spTree>
-    <p:extLst>
-      <p:ext uri="{BB962C8B-B14F-4D97-AF65-F5344CB8AC3E}">
-        <p14:creationId xmlns:p14="http://schemas.microsoft.com/office/powerpoint/2010/main" val="3499731097"/>
-      </p:ext>
-    </p:extLst>
-  </p:cSld>
-  <p:clrMapOvr>
-    <a:masterClrMapping/>
-  </p:clrMapOvr>
-</p:sld>
-</file>
-
-<file path=ppt/slides/slide2.xml><?xml version="1.0" encoding="utf-8"?>
-<p:sld xmlns:a="http://schemas.openxmlformats.org/drawingml/2006/main" xmlns:r="http://schemas.openxmlformats.org/officeDocument/2006/relationships" xmlns:p="http://schemas.openxmlformats.org/presentationml/2006/main">
-  <p:cSld>
-    <p:spTree>
-      <p:nvGrpSpPr>
-        <p:cNvPr id="1" name=""/>
-        <p:cNvGrpSpPr/>
-        <p:nvPr/>
-      </p:nvGrpSpPr>
-      <p:grpSpPr>
-        <a:xfrm>
-          <a:off x="0" y="0"/>
-          <a:ext cx="0" cy="0"/>
-          <a:chOff x="0" y="0"/>
-          <a:chExt cx="0" cy="0"/>
-        </a:xfrm>
-      </p:grpSpPr>
-      <p:sp>
-        <p:nvSpPr>
-          <p:cNvPr id="2" name="Titel 1">
-            <a:extLst>
-              <a:ext uri="{FF2B5EF4-FFF2-40B4-BE49-F238E27FC236}">
-                <a16:creationId xmlns:a16="http://schemas.microsoft.com/office/drawing/2014/main" id="{413D0774-18A2-673D-283B-1C04DB36353E}"/>
-              </a:ext>
-            </a:extLst>
-          </p:cNvPr>
-          <p:cNvSpPr>
-            <a:spLocks noGrp="1"/>
-          </p:cNvSpPr>
-          <p:nvPr>
-            <p:ph type="ctrTitle"/>
-          </p:nvPr>
-        </p:nvSpPr>
-        <p:spPr>
-          <a:xfrm>
-            <a:off x="1524000" y="-181393"/>
-            <a:ext cx="9144000" cy="1241941"/>
-          </a:xfrm>
-        </p:spPr>
-        <p:txBody>
-          <a:bodyPr>
-            <a:normAutofit/>
-          </a:bodyPr>
-          <a:lstStyle/>
-          <a:p>
-            <a:r>
-              <a:rPr lang="de-DE" dirty="0">
-                <a:latin typeface="Impact" panose="020B0806030902050204" pitchFamily="34" charset="0"/>
-              </a:rPr>
-              <a:t>Inhaltsverzeichnis</a:t>
-            </a:r>
-          </a:p>
-        </p:txBody>
-      </p:sp>
-      <p:sp>
-        <p:nvSpPr>
-          <p:cNvPr id="3" name="Untertitel 2">
-            <a:extLst>
-              <a:ext uri="{FF2B5EF4-FFF2-40B4-BE49-F238E27FC236}">
-                <a16:creationId xmlns:a16="http://schemas.microsoft.com/office/drawing/2014/main" id="{93304FBE-99DF-EE64-5EB2-94852307E71F}"/>
-              </a:ext>
-            </a:extLst>
-          </p:cNvPr>
-          <p:cNvSpPr>
-            <a:spLocks noGrp="1"/>
-          </p:cNvSpPr>
-          <p:nvPr>
-            <p:ph type="subTitle" idx="1"/>
-          </p:nvPr>
-        </p:nvSpPr>
-        <p:spPr>
-          <a:xfrm>
-            <a:off x="3497424" y="2533472"/>
-            <a:ext cx="5197151" cy="1791056"/>
-          </a:xfrm>
-        </p:spPr>
-        <p:txBody>
-          <a:bodyPr>
-            <a:noAutofit/>
-          </a:bodyPr>
-          <a:lstStyle/>
-          <a:p>
-            <a:pPr marL="514350" indent="-514350" algn="l">
-              <a:buFont typeface="+mj-lt"/>
-              <a:buAutoNum type="arabicPeriod"/>
-            </a:pPr>
-            <a:r>
-              <a:rPr lang="de-DE" sz="2000" dirty="0">
-                <a:latin typeface="Liberation Sans" panose="020B0604020202020204" pitchFamily="34" charset="0"/>
-                <a:ea typeface="Liberation Sans" panose="020B0604020202020204" pitchFamily="34" charset="0"/>
-                <a:cs typeface="Liberation Sans" panose="020B0604020202020204" pitchFamily="34" charset="0"/>
-              </a:rPr>
-              <a:t>Konstruktion und Planung</a:t>
-            </a:r>
-          </a:p>
-          <a:p>
-            <a:pPr marL="514350" indent="-514350" algn="l">
-              <a:buFont typeface="+mj-lt"/>
-              <a:buAutoNum type="arabicPeriod"/>
-            </a:pPr>
-            <a:r>
-              <a:rPr lang="de-DE" sz="2000" dirty="0">
-                <a:latin typeface="Liberation Sans" panose="020B0604020202020204" pitchFamily="34" charset="0"/>
-                <a:ea typeface="Liberation Sans" panose="020B0604020202020204" pitchFamily="34" charset="0"/>
-                <a:cs typeface="Liberation Sans" panose="020B0604020202020204" pitchFamily="34" charset="0"/>
-              </a:rPr>
-              <a:t>Elektronik und Verkabelung</a:t>
-            </a:r>
-          </a:p>
-          <a:p>
-            <a:pPr marL="514350" indent="-514350" algn="l">
-              <a:buFont typeface="+mj-lt"/>
-              <a:buAutoNum type="arabicPeriod"/>
-            </a:pPr>
-            <a:r>
-              <a:rPr lang="de-DE" sz="2000" dirty="0">
-                <a:latin typeface="Liberation Sans" panose="020B0604020202020204" pitchFamily="34" charset="0"/>
-                <a:ea typeface="Liberation Sans" panose="020B0604020202020204" pitchFamily="34" charset="0"/>
-                <a:cs typeface="Liberation Sans" panose="020B0604020202020204" pitchFamily="34" charset="0"/>
-              </a:rPr>
-              <a:t>Programmierung</a:t>
-            </a:r>
-          </a:p>
-          <a:p>
-            <a:pPr marL="514350" indent="-514350" algn="l">
-              <a:buFont typeface="+mj-lt"/>
-              <a:buAutoNum type="arabicPeriod"/>
-            </a:pPr>
-            <a:r>
-              <a:rPr lang="de-DE" sz="2000" dirty="0">
-                <a:latin typeface="Liberation Sans" panose="020B0604020202020204" pitchFamily="34" charset="0"/>
-                <a:ea typeface="Liberation Sans" panose="020B0604020202020204" pitchFamily="34" charset="0"/>
-                <a:cs typeface="Liberation Sans" panose="020B0604020202020204" pitchFamily="34" charset="0"/>
-              </a:rPr>
-              <a:t>Allgemeines</a:t>
-            </a:r>
-          </a:p>
-        </p:txBody>
-      </p:sp>
-      <p:cxnSp>
-        <p:nvCxnSpPr>
-          <p:cNvPr id="5" name="Gerader Verbinder 4">
-            <a:extLst>
-              <a:ext uri="{FF2B5EF4-FFF2-40B4-BE49-F238E27FC236}">
-                <a16:creationId xmlns:a16="http://schemas.microsoft.com/office/drawing/2014/main" id="{2B753068-DCEB-B788-AD32-F324BF9F36F0}"/>
-              </a:ext>
-            </a:extLst>
-          </p:cNvPr>
-          <p:cNvCxnSpPr/>
-          <p:nvPr/>
-        </p:nvCxnSpPr>
-        <p:spPr>
-          <a:xfrm>
-            <a:off x="1738604" y="1137542"/>
-            <a:ext cx="8714792" cy="0"/>
-          </a:xfrm>
-          <a:prstGeom prst="line">
-            <a:avLst/>
-          </a:prstGeom>
-        </p:spPr>
-        <p:style>
-          <a:lnRef idx="2">
-            <a:schemeClr val="dk1"/>
-          </a:lnRef>
-          <a:fillRef idx="0">
-            <a:schemeClr val="dk1"/>
-          </a:fillRef>
-          <a:effectRef idx="1">
-            <a:schemeClr val="dk1"/>
-          </a:effectRef>
-          <a:fontRef idx="minor">
-            <a:schemeClr val="tx1"/>
-          </a:fontRef>
-        </p:style>
-      </p:cxnSp>
-    </p:spTree>
-    <p:extLst>
-      <p:ext uri="{BB962C8B-B14F-4D97-AF65-F5344CB8AC3E}">
-        <p14:creationId xmlns:p14="http://schemas.microsoft.com/office/powerpoint/2010/main" val="908878147"/>
-      </p:ext>
-    </p:extLst>
-  </p:cSld>
-  <p:clrMapOvr>
-    <a:masterClrMapping/>
-  </p:clrMapOvr>
-</p:sld>
-</file>
-
-<file path=ppt/slides/slide3.xml><?xml version="1.0" encoding="utf-8"?>
-<p:sld xmlns:a="http://schemas.openxmlformats.org/drawingml/2006/main" xmlns:r="http://schemas.openxmlformats.org/officeDocument/2006/relationships" xmlns:p="http://schemas.openxmlformats.org/presentationml/2006/main">
-  <p:cSld>
-    <p:spTree>
-      <p:nvGrpSpPr>
-        <p:cNvPr id="1" name=""/>
-        <p:cNvGrpSpPr/>
-        <p:nvPr/>
-      </p:nvGrpSpPr>
-      <p:grpSpPr>
-        <a:xfrm>
-          <a:off x="0" y="0"/>
-          <a:ext cx="0" cy="0"/>
-          <a:chOff x="0" y="0"/>
-          <a:chExt cx="0" cy="0"/>
-        </a:xfrm>
-      </p:grpSpPr>
-      <p:sp>
-        <p:nvSpPr>
-          <p:cNvPr id="2" name="Titel 1">
-            <a:extLst>
-              <a:ext uri="{FF2B5EF4-FFF2-40B4-BE49-F238E27FC236}">
-                <a16:creationId xmlns:a16="http://schemas.microsoft.com/office/drawing/2014/main" id="{413D0774-18A2-673D-283B-1C04DB36353E}"/>
-              </a:ext>
-            </a:extLst>
-          </p:cNvPr>
-          <p:cNvSpPr>
-            <a:spLocks noGrp="1"/>
-          </p:cNvSpPr>
-          <p:nvPr>
-            <p:ph type="ctrTitle"/>
-          </p:nvPr>
-        </p:nvSpPr>
-        <p:spPr>
-          <a:xfrm>
-            <a:off x="1524000" y="1269579"/>
-            <a:ext cx="9144000" cy="2387600"/>
-          </a:xfrm>
-        </p:spPr>
-        <p:txBody>
-          <a:bodyPr>
-            <a:normAutofit/>
-          </a:bodyPr>
-          <a:lstStyle/>
-          <a:p>
-            <a:r>
-              <a:rPr lang="de-DE" sz="10000" dirty="0">
-                <a:latin typeface="Impact" panose="020B0806030902050204" pitchFamily="34" charset="0"/>
-              </a:rPr>
-              <a:t>Konstruktion</a:t>
-            </a:r>
-          </a:p>
-        </p:txBody>
-      </p:sp>
-      <p:sp>
-        <p:nvSpPr>
-          <p:cNvPr id="3" name="Untertitel 2">
-            <a:extLst>
-              <a:ext uri="{FF2B5EF4-FFF2-40B4-BE49-F238E27FC236}">
-                <a16:creationId xmlns:a16="http://schemas.microsoft.com/office/drawing/2014/main" id="{93304FBE-99DF-EE64-5EB2-94852307E71F}"/>
-              </a:ext>
-            </a:extLst>
-          </p:cNvPr>
-          <p:cNvSpPr>
-            <a:spLocks noGrp="1"/>
-          </p:cNvSpPr>
-          <p:nvPr>
-            <p:ph type="subTitle" idx="1"/>
-          </p:nvPr>
-        </p:nvSpPr>
-        <p:spPr>
-          <a:xfrm>
-            <a:off x="1524000" y="4259635"/>
-            <a:ext cx="9144000" cy="1791056"/>
-          </a:xfrm>
-        </p:spPr>
-        <p:txBody>
-          <a:bodyPr>
-            <a:noAutofit/>
-          </a:bodyPr>
-          <a:lstStyle/>
-          <a:p>
-            <a:r>
-              <a:rPr lang="de-DE" sz="3000" dirty="0">
-                <a:latin typeface="Liberation Sans" panose="020B0604020202020204" pitchFamily="34" charset="0"/>
-                <a:ea typeface="Liberation Sans" panose="020B0604020202020204" pitchFamily="34" charset="0"/>
-                <a:cs typeface="Liberation Sans" panose="020B0604020202020204" pitchFamily="34" charset="0"/>
-              </a:rPr>
-              <a:t>Lasse</a:t>
-            </a:r>
-          </a:p>
-        </p:txBody>
-      </p:sp>
-      <p:cxnSp>
-        <p:nvCxnSpPr>
-          <p:cNvPr id="5" name="Gerader Verbinder 4">
-            <a:extLst>
-              <a:ext uri="{FF2B5EF4-FFF2-40B4-BE49-F238E27FC236}">
-                <a16:creationId xmlns:a16="http://schemas.microsoft.com/office/drawing/2014/main" id="{2B753068-DCEB-B788-AD32-F324BF9F36F0}"/>
-              </a:ext>
-            </a:extLst>
-          </p:cNvPr>
-          <p:cNvCxnSpPr/>
-          <p:nvPr/>
-        </p:nvCxnSpPr>
-        <p:spPr>
-          <a:xfrm>
-            <a:off x="1698171" y="3830217"/>
-            <a:ext cx="8714792" cy="0"/>
-          </a:xfrm>
-          <a:prstGeom prst="line">
-            <a:avLst/>
-          </a:prstGeom>
-        </p:spPr>
-        <p:style>
-          <a:lnRef idx="2">
-            <a:schemeClr val="dk1"/>
-          </a:lnRef>
-          <a:fillRef idx="0">
-            <a:schemeClr val="dk1"/>
-          </a:fillRef>
-          <a:effectRef idx="1">
-            <a:schemeClr val="dk1"/>
-          </a:effectRef>
-          <a:fontRef idx="minor">
-            <a:schemeClr val="tx1"/>
-          </a:fontRef>
-        </p:style>
-      </p:cxnSp>
-    </p:spTree>
-    <p:extLst>
-      <p:ext uri="{BB962C8B-B14F-4D97-AF65-F5344CB8AC3E}">
-        <p14:creationId xmlns:p14="http://schemas.microsoft.com/office/powerpoint/2010/main" val="606463830"/>
-      </p:ext>
-    </p:extLst>
-  </p:cSld>
-  <p:clrMapOvr>
-    <a:masterClrMapping/>
-  </p:clrMapOvr>
-</p:sld>
-</file>
-
-<file path=ppt/slides/slide4.xml><?xml version="1.0" encoding="utf-8"?>
-<p:sld xmlns:a="http://schemas.openxmlformats.org/drawingml/2006/main" xmlns:r="http://schemas.openxmlformats.org/officeDocument/2006/relationships" xmlns:p="http://schemas.openxmlformats.org/presentationml/2006/main">
-  <p:cSld>
-    <p:spTree>
-      <p:nvGrpSpPr>
-        <p:cNvPr id="1" name=""/>
-        <p:cNvGrpSpPr/>
-        <p:nvPr/>
-      </p:nvGrpSpPr>
-      <p:grpSpPr>
-        <a:xfrm>
-          <a:off x="0" y="0"/>
-          <a:ext cx="0" cy="0"/>
-          <a:chOff x="0" y="0"/>
-          <a:chExt cx="0" cy="0"/>
-        </a:xfrm>
-      </p:grpSpPr>
+              <a:t>Flexibilität des Materials ist ein Vorteil</a:t>
+            </a:r>
+          </a:p>
+        </p:txBody>
+      </p:sp>
       <p:sp>
         <p:nvSpPr>
           <p:cNvPr id="4" name="Titel 1">
@@ -5662,7 +3996,7 @@
               <a:rPr lang="de-DE" dirty="0">
                 <a:latin typeface="Impact" panose="020B0806030902050204" pitchFamily="34" charset="0"/>
               </a:rPr>
-              <a:t>Rahmen</a:t>
+              <a:t>Zwischenfazit</a:t>
             </a:r>
           </a:p>
         </p:txBody>
@@ -5703,72 +4037,12 @@
           </a:fontRef>
         </p:style>
       </p:cxnSp>
-      <p:pic>
-        <p:nvPicPr>
-          <p:cNvPr id="5" name="Grafik 4">
-            <a:extLst>
-              <a:ext uri="{FF2B5EF4-FFF2-40B4-BE49-F238E27FC236}">
-                <a16:creationId xmlns:a16="http://schemas.microsoft.com/office/drawing/2014/main" id="{F7506FDB-45FA-1744-3418-9C5A4750199B}"/>
-              </a:ext>
-            </a:extLst>
-          </p:cNvPr>
-          <p:cNvPicPr>
-            <a:picLocks noChangeAspect="1"/>
-          </p:cNvPicPr>
-          <p:nvPr/>
-        </p:nvPicPr>
-        <p:blipFill>
-          <a:blip r:embed="rId2"/>
-          <a:stretch>
-            <a:fillRect/>
-          </a:stretch>
-        </p:blipFill>
-        <p:spPr>
-          <a:xfrm>
-            <a:off x="1576165" y="1508851"/>
-            <a:ext cx="8714793" cy="4872787"/>
-          </a:xfrm>
-          <a:prstGeom prst="rect">
-            <a:avLst/>
-          </a:prstGeom>
-        </p:spPr>
-      </p:pic>
-    </p:spTree>
-    <p:extLst>
-      <p:ext uri="{BB962C8B-B14F-4D97-AF65-F5344CB8AC3E}">
-        <p14:creationId xmlns:p14="http://schemas.microsoft.com/office/powerpoint/2010/main" val="3219921335"/>
-      </p:ext>
-    </p:extLst>
-  </p:cSld>
-  <p:clrMapOvr>
-    <a:masterClrMapping/>
-  </p:clrMapOvr>
-</p:sld>
-</file>
-
-<file path=ppt/slides/slide5.xml><?xml version="1.0" encoding="utf-8"?>
-<p:sld xmlns:a="http://schemas.openxmlformats.org/drawingml/2006/main" xmlns:r="http://schemas.openxmlformats.org/officeDocument/2006/relationships" xmlns:p="http://schemas.openxmlformats.org/presentationml/2006/main">
-  <p:cSld>
-    <p:spTree>
-      <p:nvGrpSpPr>
-        <p:cNvPr id="1" name=""/>
-        <p:cNvGrpSpPr/>
-        <p:nvPr/>
-      </p:nvGrpSpPr>
-      <p:grpSpPr>
-        <a:xfrm>
-          <a:off x="0" y="0"/>
-          <a:ext cx="0" cy="0"/>
-          <a:chOff x="0" y="0"/>
-          <a:chExt cx="0" cy="0"/>
-        </a:xfrm>
-      </p:grpSpPr>
-      <p:sp>
-        <p:nvSpPr>
-          <p:cNvPr id="4" name="Titel 1">
-            <a:extLst>
-              <a:ext uri="{FF2B5EF4-FFF2-40B4-BE49-F238E27FC236}">
-                <a16:creationId xmlns:a16="http://schemas.microsoft.com/office/drawing/2014/main" id="{BE92422F-6CFB-6703-F428-2208AF7C4F27}"/>
+      <p:sp>
+        <p:nvSpPr>
+          <p:cNvPr id="2" name="Untertitel 2">
+            <a:extLst>
+              <a:ext uri="{FF2B5EF4-FFF2-40B4-BE49-F238E27FC236}">
+                <a16:creationId xmlns:a16="http://schemas.microsoft.com/office/drawing/2014/main" id="{3E9646A3-113F-3764-D676-70FA6CA8883E}"/>
               </a:ext>
             </a:extLst>
           </p:cNvPr>
@@ -5779,380 +4053,8 @@
         </p:nvSpPr>
         <p:spPr>
           <a:xfrm>
-            <a:off x="3405187" y="0"/>
-            <a:ext cx="5381625" cy="1019204"/>
-          </a:xfrm>
-          <a:prstGeom prst="rect">
-            <a:avLst/>
-          </a:prstGeom>
-        </p:spPr>
-        <p:txBody>
-          <a:bodyPr vert="horz" lIns="91440" tIns="45720" rIns="91440" bIns="45720" rtlCol="0" anchor="b">
-            <a:normAutofit/>
-          </a:bodyPr>
-          <a:lstStyle>
-            <a:lvl1pPr algn="ctr" defTabSz="914400" rtl="0" eaLnBrk="1" latinLnBrk="0" hangingPunct="1">
-              <a:lnSpc>
-                <a:spcPct val="90000"/>
-              </a:lnSpc>
-              <a:spcBef>
-                <a:spcPct val="0"/>
-              </a:spcBef>
-              <a:buNone/>
-              <a:defRPr sz="6000" kern="1200">
-                <a:solidFill>
-                  <a:schemeClr val="tx1"/>
-                </a:solidFill>
-                <a:latin typeface="+mj-lt"/>
-                <a:ea typeface="+mj-ea"/>
-                <a:cs typeface="+mj-cs"/>
-              </a:defRPr>
-            </a:lvl1pPr>
-          </a:lstStyle>
-          <a:p>
-            <a:r>
-              <a:rPr lang="de-DE" dirty="0">
-                <a:latin typeface="Impact" panose="020B0806030902050204" pitchFamily="34" charset="0"/>
-              </a:rPr>
-              <a:t>Weitere Teile</a:t>
-            </a:r>
-          </a:p>
-        </p:txBody>
-      </p:sp>
-      <p:cxnSp>
-        <p:nvCxnSpPr>
-          <p:cNvPr id="6" name="Gerader Verbinder 5">
-            <a:extLst>
-              <a:ext uri="{FF2B5EF4-FFF2-40B4-BE49-F238E27FC236}">
-                <a16:creationId xmlns:a16="http://schemas.microsoft.com/office/drawing/2014/main" id="{86D8AB01-C043-70CC-51BD-6A6967F3BAD5}"/>
-              </a:ext>
-            </a:extLst>
-          </p:cNvPr>
-          <p:cNvCxnSpPr/>
-          <p:nvPr/>
-        </p:nvCxnSpPr>
-        <p:spPr>
-          <a:xfrm>
-            <a:off x="1576168" y="1118956"/>
-            <a:ext cx="8714792" cy="0"/>
-          </a:xfrm>
-          <a:prstGeom prst="line">
-            <a:avLst/>
-          </a:prstGeom>
-        </p:spPr>
-        <p:style>
-          <a:lnRef idx="2">
-            <a:schemeClr val="dk1"/>
-          </a:lnRef>
-          <a:fillRef idx="0">
-            <a:schemeClr val="dk1"/>
-          </a:fillRef>
-          <a:effectRef idx="1">
-            <a:schemeClr val="dk1"/>
-          </a:effectRef>
-          <a:fontRef idx="minor">
-            <a:schemeClr val="tx1"/>
-          </a:fontRef>
-        </p:style>
-      </p:cxnSp>
-      <p:pic>
-        <p:nvPicPr>
-          <p:cNvPr id="3" name="Grafik 2">
-            <a:extLst>
-              <a:ext uri="{FF2B5EF4-FFF2-40B4-BE49-F238E27FC236}">
-                <a16:creationId xmlns:a16="http://schemas.microsoft.com/office/drawing/2014/main" id="{EA13F5A4-757A-5D19-E1BF-CE2BF15D55FB}"/>
-              </a:ext>
-            </a:extLst>
-          </p:cNvPr>
-          <p:cNvPicPr>
-            <a:picLocks noChangeAspect="1"/>
-          </p:cNvPicPr>
-          <p:nvPr/>
-        </p:nvPicPr>
-        <p:blipFill>
-          <a:blip r:embed="rId2"/>
-          <a:srcRect r="10317"/>
-          <a:stretch/>
-        </p:blipFill>
-        <p:spPr>
-          <a:xfrm>
-            <a:off x="1576168" y="1780971"/>
-            <a:ext cx="2650106" cy="3958073"/>
-          </a:xfrm>
-          <a:prstGeom prst="rect">
-            <a:avLst/>
-          </a:prstGeom>
-        </p:spPr>
-      </p:pic>
-      <p:pic>
-        <p:nvPicPr>
-          <p:cNvPr id="8" name="Grafik 7">
-            <a:extLst>
-              <a:ext uri="{FF2B5EF4-FFF2-40B4-BE49-F238E27FC236}">
-                <a16:creationId xmlns:a16="http://schemas.microsoft.com/office/drawing/2014/main" id="{A3B4D3C1-839B-CE86-0FA3-E04E8B52245C}"/>
-              </a:ext>
-            </a:extLst>
-          </p:cNvPr>
-          <p:cNvPicPr>
-            <a:picLocks noChangeAspect="1"/>
-          </p:cNvPicPr>
-          <p:nvPr/>
-        </p:nvPicPr>
-        <p:blipFill>
-          <a:blip r:embed="rId3"/>
-          <a:srcRect r="19006"/>
-          <a:stretch/>
-        </p:blipFill>
-        <p:spPr>
-          <a:xfrm>
-            <a:off x="4770947" y="1780972"/>
-            <a:ext cx="2650106" cy="3958072"/>
-          </a:xfrm>
-          <a:prstGeom prst="rect">
-            <a:avLst/>
-          </a:prstGeom>
-        </p:spPr>
-      </p:pic>
-      <p:pic>
-        <p:nvPicPr>
-          <p:cNvPr id="10" name="Grafik 9">
-            <a:extLst>
-              <a:ext uri="{FF2B5EF4-FFF2-40B4-BE49-F238E27FC236}">
-                <a16:creationId xmlns:a16="http://schemas.microsoft.com/office/drawing/2014/main" id="{1C5CCE42-FBEE-5BF3-B4C4-86B7174B0B4F}"/>
-              </a:ext>
-            </a:extLst>
-          </p:cNvPr>
-          <p:cNvPicPr>
-            <a:picLocks noChangeAspect="1"/>
-          </p:cNvPicPr>
-          <p:nvPr/>
-        </p:nvPicPr>
-        <p:blipFill>
-          <a:blip r:embed="rId4"/>
-          <a:srcRect r="25958"/>
-          <a:stretch/>
-        </p:blipFill>
-        <p:spPr>
-          <a:xfrm>
-            <a:off x="7965727" y="1780972"/>
-            <a:ext cx="2325233" cy="3956934"/>
-          </a:xfrm>
-          <a:prstGeom prst="rect">
-            <a:avLst/>
-          </a:prstGeom>
-        </p:spPr>
-      </p:pic>
-    </p:spTree>
-    <p:extLst>
-      <p:ext uri="{BB962C8B-B14F-4D97-AF65-F5344CB8AC3E}">
-        <p14:creationId xmlns:p14="http://schemas.microsoft.com/office/powerpoint/2010/main" val="1652724053"/>
-      </p:ext>
-    </p:extLst>
-  </p:cSld>
-  <p:clrMapOvr>
-    <a:masterClrMapping/>
-  </p:clrMapOvr>
-</p:sld>
-</file>
-
-<file path=ppt/slides/slide6.xml><?xml version="1.0" encoding="utf-8"?>
-<p:sld xmlns:a="http://schemas.openxmlformats.org/drawingml/2006/main" xmlns:r="http://schemas.openxmlformats.org/officeDocument/2006/relationships" xmlns:p="http://schemas.openxmlformats.org/presentationml/2006/main">
-  <p:cSld>
-    <p:spTree>
-      <p:nvGrpSpPr>
-        <p:cNvPr id="1" name=""/>
-        <p:cNvGrpSpPr/>
-        <p:nvPr/>
-      </p:nvGrpSpPr>
-      <p:grpSpPr>
-        <a:xfrm>
-          <a:off x="0" y="0"/>
-          <a:ext cx="0" cy="0"/>
-          <a:chOff x="0" y="0"/>
-          <a:chExt cx="0" cy="0"/>
-        </a:xfrm>
-      </p:grpSpPr>
-      <p:sp>
-        <p:nvSpPr>
-          <p:cNvPr id="4" name="Titel 1">
-            <a:extLst>
-              <a:ext uri="{FF2B5EF4-FFF2-40B4-BE49-F238E27FC236}">
-                <a16:creationId xmlns:a16="http://schemas.microsoft.com/office/drawing/2014/main" id="{BE92422F-6CFB-6703-F428-2208AF7C4F27}"/>
-              </a:ext>
-            </a:extLst>
-          </p:cNvPr>
-          <p:cNvSpPr txBox="1">
-            <a:spLocks/>
-          </p:cNvSpPr>
-          <p:nvPr/>
-        </p:nvSpPr>
-        <p:spPr>
-          <a:xfrm>
-            <a:off x="2524664" y="0"/>
-            <a:ext cx="7142672" cy="1019204"/>
-          </a:xfrm>
-          <a:prstGeom prst="rect">
-            <a:avLst/>
-          </a:prstGeom>
-        </p:spPr>
-        <p:txBody>
-          <a:bodyPr vert="horz" lIns="91440" tIns="45720" rIns="91440" bIns="45720" rtlCol="0" anchor="b">
-            <a:normAutofit/>
-          </a:bodyPr>
-          <a:lstStyle>
-            <a:lvl1pPr algn="ctr" defTabSz="914400" rtl="0" eaLnBrk="1" latinLnBrk="0" hangingPunct="1">
-              <a:lnSpc>
-                <a:spcPct val="90000"/>
-              </a:lnSpc>
-              <a:spcBef>
-                <a:spcPct val="0"/>
-              </a:spcBef>
-              <a:buNone/>
-              <a:defRPr sz="6000" kern="1200">
-                <a:solidFill>
-                  <a:schemeClr val="tx1"/>
-                </a:solidFill>
-                <a:latin typeface="+mj-lt"/>
-                <a:ea typeface="+mj-ea"/>
-                <a:cs typeface="+mj-cs"/>
-              </a:defRPr>
-            </a:lvl1pPr>
-          </a:lstStyle>
-          <a:p>
-            <a:r>
-              <a:rPr lang="de-DE" dirty="0">
-                <a:latin typeface="Impact" panose="020B0806030902050204" pitchFamily="34" charset="0"/>
-              </a:rPr>
-              <a:t>Kabelmanagement</a:t>
-            </a:r>
-          </a:p>
-        </p:txBody>
-      </p:sp>
-      <p:cxnSp>
-        <p:nvCxnSpPr>
-          <p:cNvPr id="6" name="Gerader Verbinder 5">
-            <a:extLst>
-              <a:ext uri="{FF2B5EF4-FFF2-40B4-BE49-F238E27FC236}">
-                <a16:creationId xmlns:a16="http://schemas.microsoft.com/office/drawing/2014/main" id="{86D8AB01-C043-70CC-51BD-6A6967F3BAD5}"/>
-              </a:ext>
-            </a:extLst>
-          </p:cNvPr>
-          <p:cNvCxnSpPr/>
-          <p:nvPr/>
-        </p:nvCxnSpPr>
-        <p:spPr>
-          <a:xfrm>
-            <a:off x="1576168" y="1118956"/>
-            <a:ext cx="8714792" cy="0"/>
-          </a:xfrm>
-          <a:prstGeom prst="line">
-            <a:avLst/>
-          </a:prstGeom>
-        </p:spPr>
-        <p:style>
-          <a:lnRef idx="2">
-            <a:schemeClr val="dk1"/>
-          </a:lnRef>
-          <a:fillRef idx="0">
-            <a:schemeClr val="dk1"/>
-          </a:fillRef>
-          <a:effectRef idx="1">
-            <a:schemeClr val="dk1"/>
-          </a:effectRef>
-          <a:fontRef idx="minor">
-            <a:schemeClr val="tx1"/>
-          </a:fontRef>
-        </p:style>
-      </p:cxnSp>
-      <p:sp>
-        <p:nvSpPr>
-          <p:cNvPr id="2" name="Untertitel 2">
-            <a:extLst>
-              <a:ext uri="{FF2B5EF4-FFF2-40B4-BE49-F238E27FC236}">
-                <a16:creationId xmlns:a16="http://schemas.microsoft.com/office/drawing/2014/main" id="{07F31804-9B98-71F0-8A3E-BDECDDA49AE0}"/>
-              </a:ext>
-            </a:extLst>
-          </p:cNvPr>
-          <p:cNvSpPr>
-            <a:spLocks noGrp="1"/>
-          </p:cNvSpPr>
-          <p:nvPr>
-            <p:ph type="subTitle" idx="1"/>
-          </p:nvPr>
-        </p:nvSpPr>
-        <p:spPr>
-          <a:xfrm>
-            <a:off x="1576168" y="2095322"/>
-            <a:ext cx="4519832" cy="1791056"/>
-          </a:xfrm>
-        </p:spPr>
-        <p:txBody>
-          <a:bodyPr>
-            <a:noAutofit/>
-          </a:bodyPr>
-          <a:lstStyle/>
-          <a:p>
-            <a:pPr marL="342900" indent="-342900" algn="l">
-              <a:buFont typeface="Wingdings" panose="05000000000000000000" pitchFamily="2" charset="2"/>
-              <a:buChar char="v"/>
-            </a:pPr>
-            <a:r>
-              <a:rPr lang="de-DE" sz="2000" dirty="0">
-                <a:latin typeface="Liberation Sans" panose="020B0604020202020204" pitchFamily="34" charset="0"/>
-                <a:ea typeface="Liberation Sans" panose="020B0604020202020204" pitchFamily="34" charset="0"/>
-                <a:cs typeface="Liberation Sans" panose="020B0604020202020204" pitchFamily="34" charset="0"/>
-              </a:rPr>
-              <a:t>Oft unterschätzter Faktor</a:t>
-            </a:r>
-          </a:p>
-          <a:p>
-            <a:pPr marL="342900" indent="-342900" algn="l">
-              <a:buFont typeface="Wingdings" panose="05000000000000000000" pitchFamily="2" charset="2"/>
-              <a:buChar char="v"/>
-            </a:pPr>
-            <a:r>
-              <a:rPr lang="de-DE" sz="2000" dirty="0">
-                <a:latin typeface="Liberation Sans" panose="020B0604020202020204" pitchFamily="34" charset="0"/>
-                <a:ea typeface="Liberation Sans" panose="020B0604020202020204" pitchFamily="34" charset="0"/>
-                <a:cs typeface="Liberation Sans" panose="020B0604020202020204" pitchFamily="34" charset="0"/>
-              </a:rPr>
-              <a:t>Flexibilität muss gewährleistet sein</a:t>
-            </a:r>
-          </a:p>
-          <a:p>
-            <a:pPr marL="342900" indent="-342900" algn="l">
-              <a:buFont typeface="Wingdings" panose="05000000000000000000" pitchFamily="2" charset="2"/>
-              <a:buChar char="v"/>
-            </a:pPr>
-            <a:r>
-              <a:rPr lang="de-DE" sz="2000" dirty="0">
-                <a:latin typeface="Liberation Sans" panose="020B0604020202020204" pitchFamily="34" charset="0"/>
-                <a:ea typeface="Liberation Sans" panose="020B0604020202020204" pitchFamily="34" charset="0"/>
-                <a:cs typeface="Liberation Sans" panose="020B0604020202020204" pitchFamily="34" charset="0"/>
-              </a:rPr>
-              <a:t>Verschiedene Mittel, um gutes Kabelmanagement zu gewährleisten</a:t>
-            </a:r>
-          </a:p>
-        </p:txBody>
-      </p:sp>
-      <p:sp>
-        <p:nvSpPr>
-          <p:cNvPr id="3" name="Untertitel 2">
-            <a:extLst>
-              <a:ext uri="{FF2B5EF4-FFF2-40B4-BE49-F238E27FC236}">
-                <a16:creationId xmlns:a16="http://schemas.microsoft.com/office/drawing/2014/main" id="{55BAE6D4-CEFF-172A-3EFF-6E09CB96AA16}"/>
-              </a:ext>
-            </a:extLst>
-          </p:cNvPr>
-          <p:cNvSpPr txBox="1">
-            <a:spLocks/>
-          </p:cNvSpPr>
-          <p:nvPr/>
-        </p:nvSpPr>
-        <p:spPr>
-          <a:xfrm>
-            <a:off x="6443932" y="2095322"/>
-            <a:ext cx="3847028" cy="1791056"/>
+            <a:off x="4672302" y="1651510"/>
+            <a:ext cx="2639330" cy="3554980"/>
           </a:xfrm>
           <a:prstGeom prst="rect">
             <a:avLst/>
@@ -6327,389 +4229,16 @@
             </a:lvl9pPr>
           </a:lstStyle>
           <a:p>
-            <a:pPr algn="l"/>
-            <a:r>
-              <a:rPr lang="de-DE" sz="2000" dirty="0">
-                <a:latin typeface="Liberation Sans" panose="020B0604020202020204" pitchFamily="34" charset="0"/>
-                <a:ea typeface="Liberation Sans" panose="020B0604020202020204" pitchFamily="34" charset="0"/>
-                <a:cs typeface="Liberation Sans" panose="020B0604020202020204" pitchFamily="34" charset="0"/>
-              </a:rPr>
-              <a:t>(Foto, wo man Kabel und Kabelführung sieht)</a:t>
-            </a:r>
-          </a:p>
-        </p:txBody>
-      </p:sp>
-    </p:spTree>
-    <p:extLst>
-      <p:ext uri="{BB962C8B-B14F-4D97-AF65-F5344CB8AC3E}">
-        <p14:creationId xmlns:p14="http://schemas.microsoft.com/office/powerpoint/2010/main" val="240659321"/>
-      </p:ext>
-    </p:extLst>
-  </p:cSld>
-  <p:clrMapOvr>
-    <a:masterClrMapping/>
-  </p:clrMapOvr>
-</p:sld>
-</file>
-
-<file path=ppt/slides/slide7.xml><?xml version="1.0" encoding="utf-8"?>
-<p:sld xmlns:a="http://schemas.openxmlformats.org/drawingml/2006/main" xmlns:r="http://schemas.openxmlformats.org/officeDocument/2006/relationships" xmlns:p="http://schemas.openxmlformats.org/presentationml/2006/main">
-  <p:cSld>
-    <p:spTree>
-      <p:nvGrpSpPr>
-        <p:cNvPr id="1" name=""/>
-        <p:cNvGrpSpPr/>
-        <p:nvPr/>
-      </p:nvGrpSpPr>
-      <p:grpSpPr>
-        <a:xfrm>
-          <a:off x="0" y="0"/>
-          <a:ext cx="0" cy="0"/>
-          <a:chOff x="0" y="0"/>
-          <a:chExt cx="0" cy="0"/>
-        </a:xfrm>
-      </p:grpSpPr>
-      <p:sp>
-        <p:nvSpPr>
-          <p:cNvPr id="4" name="Titel 1">
-            <a:extLst>
-              <a:ext uri="{FF2B5EF4-FFF2-40B4-BE49-F238E27FC236}">
-                <a16:creationId xmlns:a16="http://schemas.microsoft.com/office/drawing/2014/main" id="{BE92422F-6CFB-6703-F428-2208AF7C4F27}"/>
-              </a:ext>
-            </a:extLst>
-          </p:cNvPr>
-          <p:cNvSpPr txBox="1">
-            <a:spLocks/>
-          </p:cNvSpPr>
-          <p:nvPr/>
-        </p:nvSpPr>
-        <p:spPr>
-          <a:xfrm>
-            <a:off x="3405186" y="0"/>
-            <a:ext cx="5381625" cy="1019204"/>
-          </a:xfrm>
-          <a:prstGeom prst="rect">
-            <a:avLst/>
-          </a:prstGeom>
-        </p:spPr>
-        <p:txBody>
-          <a:bodyPr vert="horz" lIns="91440" tIns="45720" rIns="91440" bIns="45720" rtlCol="0" anchor="b">
-            <a:normAutofit/>
-          </a:bodyPr>
-          <a:lstStyle>
-            <a:lvl1pPr algn="ctr" defTabSz="914400" rtl="0" eaLnBrk="1" latinLnBrk="0" hangingPunct="1">
-              <a:lnSpc>
-                <a:spcPct val="90000"/>
-              </a:lnSpc>
-              <a:spcBef>
-                <a:spcPct val="0"/>
-              </a:spcBef>
-              <a:buNone/>
-              <a:defRPr sz="6000" kern="1200">
-                <a:solidFill>
-                  <a:schemeClr val="tx1"/>
-                </a:solidFill>
-                <a:latin typeface="+mj-lt"/>
-                <a:ea typeface="+mj-ea"/>
-                <a:cs typeface="+mj-cs"/>
-              </a:defRPr>
-            </a:lvl1pPr>
-          </a:lstStyle>
-          <a:p>
-            <a:r>
-              <a:rPr lang="de-DE" dirty="0">
-                <a:latin typeface="Impact" panose="020B0806030902050204" pitchFamily="34" charset="0"/>
-              </a:rPr>
-              <a:t>Fahrgestell</a:t>
-            </a:r>
-          </a:p>
-        </p:txBody>
-      </p:sp>
-      <p:cxnSp>
-        <p:nvCxnSpPr>
-          <p:cNvPr id="6" name="Gerader Verbinder 5">
-            <a:extLst>
-              <a:ext uri="{FF2B5EF4-FFF2-40B4-BE49-F238E27FC236}">
-                <a16:creationId xmlns:a16="http://schemas.microsoft.com/office/drawing/2014/main" id="{86D8AB01-C043-70CC-51BD-6A6967F3BAD5}"/>
-              </a:ext>
-            </a:extLst>
-          </p:cNvPr>
-          <p:cNvCxnSpPr/>
-          <p:nvPr/>
-        </p:nvCxnSpPr>
-        <p:spPr>
-          <a:xfrm>
-            <a:off x="1738604" y="1110800"/>
-            <a:ext cx="8714792" cy="0"/>
-          </a:xfrm>
-          <a:prstGeom prst="line">
-            <a:avLst/>
-          </a:prstGeom>
-        </p:spPr>
-        <p:style>
-          <a:lnRef idx="2">
-            <a:schemeClr val="dk1"/>
-          </a:lnRef>
-          <a:fillRef idx="0">
-            <a:schemeClr val="dk1"/>
-          </a:fillRef>
-          <a:effectRef idx="1">
-            <a:schemeClr val="dk1"/>
-          </a:effectRef>
-          <a:fontRef idx="minor">
-            <a:schemeClr val="tx1"/>
-          </a:fontRef>
-        </p:style>
-      </p:cxnSp>
-      <p:pic>
-        <p:nvPicPr>
-          <p:cNvPr id="8" name="Grafik 7">
-            <a:extLst>
-              <a:ext uri="{FF2B5EF4-FFF2-40B4-BE49-F238E27FC236}">
-                <a16:creationId xmlns:a16="http://schemas.microsoft.com/office/drawing/2014/main" id="{A8F6D6A0-ECC8-EB46-7E96-C6A52450381B}"/>
-              </a:ext>
-            </a:extLst>
-          </p:cNvPr>
-          <p:cNvPicPr>
-            <a:picLocks noChangeAspect="1"/>
-          </p:cNvPicPr>
-          <p:nvPr/>
-        </p:nvPicPr>
-        <p:blipFill>
-          <a:blip r:embed="rId2"/>
-          <a:stretch>
-            <a:fillRect/>
-          </a:stretch>
-        </p:blipFill>
-        <p:spPr>
-          <a:xfrm>
-            <a:off x="1738603" y="1712150"/>
-            <a:ext cx="8714792" cy="4086808"/>
-          </a:xfrm>
-          <a:prstGeom prst="rect">
-            <a:avLst/>
-          </a:prstGeom>
-        </p:spPr>
-      </p:pic>
-    </p:spTree>
-    <p:extLst>
-      <p:ext uri="{BB962C8B-B14F-4D97-AF65-F5344CB8AC3E}">
-        <p14:creationId xmlns:p14="http://schemas.microsoft.com/office/powerpoint/2010/main" val="995308410"/>
-      </p:ext>
-    </p:extLst>
-  </p:cSld>
-  <p:clrMapOvr>
-    <a:masterClrMapping/>
-  </p:clrMapOvr>
-</p:sld>
-</file>
-
-<file path=ppt/slides/slide8.xml><?xml version="1.0" encoding="utf-8"?>
-<p:sld xmlns:a="http://schemas.openxmlformats.org/drawingml/2006/main" xmlns:r="http://schemas.openxmlformats.org/officeDocument/2006/relationships" xmlns:p="http://schemas.openxmlformats.org/presentationml/2006/main">
-  <p:cSld>
-    <p:spTree>
-      <p:nvGrpSpPr>
-        <p:cNvPr id="1" name=""/>
-        <p:cNvGrpSpPr/>
-        <p:nvPr/>
-      </p:nvGrpSpPr>
-      <p:grpSpPr>
-        <a:xfrm>
-          <a:off x="0" y="0"/>
-          <a:ext cx="0" cy="0"/>
-          <a:chOff x="0" y="0"/>
-          <a:chExt cx="0" cy="0"/>
-        </a:xfrm>
-      </p:grpSpPr>
-      <p:sp>
-        <p:nvSpPr>
-          <p:cNvPr id="4" name="Titel 1">
-            <a:extLst>
-              <a:ext uri="{FF2B5EF4-FFF2-40B4-BE49-F238E27FC236}">
-                <a16:creationId xmlns:a16="http://schemas.microsoft.com/office/drawing/2014/main" id="{BE92422F-6CFB-6703-F428-2208AF7C4F27}"/>
-              </a:ext>
-            </a:extLst>
-          </p:cNvPr>
-          <p:cNvSpPr txBox="1">
-            <a:spLocks/>
-          </p:cNvSpPr>
-          <p:nvPr/>
-        </p:nvSpPr>
-        <p:spPr>
-          <a:xfrm>
-            <a:off x="3405186" y="0"/>
-            <a:ext cx="5381625" cy="1019204"/>
-          </a:xfrm>
-          <a:prstGeom prst="rect">
-            <a:avLst/>
-          </a:prstGeom>
-        </p:spPr>
-        <p:txBody>
-          <a:bodyPr vert="horz" lIns="91440" tIns="45720" rIns="91440" bIns="45720" rtlCol="0" anchor="b">
-            <a:normAutofit/>
-          </a:bodyPr>
-          <a:lstStyle>
-            <a:lvl1pPr algn="ctr" defTabSz="914400" rtl="0" eaLnBrk="1" latinLnBrk="0" hangingPunct="1">
-              <a:lnSpc>
-                <a:spcPct val="90000"/>
-              </a:lnSpc>
-              <a:spcBef>
-                <a:spcPct val="0"/>
-              </a:spcBef>
-              <a:buNone/>
-              <a:defRPr sz="6000" kern="1200">
-                <a:solidFill>
-                  <a:schemeClr val="tx1"/>
-                </a:solidFill>
-                <a:latin typeface="+mj-lt"/>
-                <a:ea typeface="+mj-ea"/>
-                <a:cs typeface="+mj-cs"/>
-              </a:defRPr>
-            </a:lvl1pPr>
-          </a:lstStyle>
-          <a:p>
-            <a:r>
-              <a:rPr lang="de-DE" dirty="0">
-                <a:latin typeface="Impact" panose="020B0806030902050204" pitchFamily="34" charset="0"/>
-              </a:rPr>
-              <a:t>Fahrgestell</a:t>
-            </a:r>
-          </a:p>
-        </p:txBody>
-      </p:sp>
-      <p:cxnSp>
-        <p:nvCxnSpPr>
-          <p:cNvPr id="6" name="Gerader Verbinder 5">
-            <a:extLst>
-              <a:ext uri="{FF2B5EF4-FFF2-40B4-BE49-F238E27FC236}">
-                <a16:creationId xmlns:a16="http://schemas.microsoft.com/office/drawing/2014/main" id="{86D8AB01-C043-70CC-51BD-6A6967F3BAD5}"/>
-              </a:ext>
-            </a:extLst>
-          </p:cNvPr>
-          <p:cNvCxnSpPr/>
-          <p:nvPr/>
-        </p:nvCxnSpPr>
-        <p:spPr>
-          <a:xfrm>
-            <a:off x="1738604" y="1110800"/>
-            <a:ext cx="8714792" cy="0"/>
-          </a:xfrm>
-          <a:prstGeom prst="line">
-            <a:avLst/>
-          </a:prstGeom>
-        </p:spPr>
-        <p:style>
-          <a:lnRef idx="2">
-            <a:schemeClr val="dk1"/>
-          </a:lnRef>
-          <a:fillRef idx="0">
-            <a:schemeClr val="dk1"/>
-          </a:fillRef>
-          <a:effectRef idx="1">
-            <a:schemeClr val="dk1"/>
-          </a:effectRef>
-          <a:fontRef idx="minor">
-            <a:schemeClr val="tx1"/>
-          </a:fontRef>
-        </p:style>
-      </p:cxnSp>
-      <p:sp>
-        <p:nvSpPr>
-          <p:cNvPr id="2" name="Untertitel 2">
-            <a:extLst>
-              <a:ext uri="{FF2B5EF4-FFF2-40B4-BE49-F238E27FC236}">
-                <a16:creationId xmlns:a16="http://schemas.microsoft.com/office/drawing/2014/main" id="{12D955C8-9645-1965-AECD-97498057E746}"/>
-              </a:ext>
-            </a:extLst>
-          </p:cNvPr>
-          <p:cNvSpPr>
-            <a:spLocks noGrp="1"/>
-          </p:cNvSpPr>
-          <p:nvPr>
-            <p:ph type="subTitle" idx="1"/>
-          </p:nvPr>
-        </p:nvSpPr>
-        <p:spPr>
-          <a:xfrm>
-            <a:off x="1576168" y="2095322"/>
-            <a:ext cx="4519832" cy="1791056"/>
-          </a:xfrm>
-        </p:spPr>
-        <p:txBody>
-          <a:bodyPr>
-            <a:noAutofit/>
-          </a:bodyPr>
-          <a:lstStyle/>
-          <a:p>
-            <a:pPr algn="l"/>
-            <a:r>
-              <a:rPr lang="de-DE" sz="2000" dirty="0">
-                <a:latin typeface="Liberation Sans" panose="020B0604020202020204" pitchFamily="34" charset="0"/>
-                <a:ea typeface="Liberation Sans" panose="020B0604020202020204" pitchFamily="34" charset="0"/>
-                <a:cs typeface="Liberation Sans" panose="020B0604020202020204" pitchFamily="34" charset="0"/>
-              </a:rPr>
-              <a:t>(Foto des Fahrgestells)</a:t>
-            </a:r>
-          </a:p>
-        </p:txBody>
-      </p:sp>
-    </p:spTree>
-    <p:extLst>
-      <p:ext uri="{BB962C8B-B14F-4D97-AF65-F5344CB8AC3E}">
-        <p14:creationId xmlns:p14="http://schemas.microsoft.com/office/powerpoint/2010/main" val="2227412484"/>
-      </p:ext>
-    </p:extLst>
-  </p:cSld>
-  <p:clrMapOvr>
-    <a:masterClrMapping/>
-  </p:clrMapOvr>
-</p:sld>
-</file>
-
-<file path=ppt/slides/slide9.xml><?xml version="1.0" encoding="utf-8"?>
-<p:sld xmlns:a="http://schemas.openxmlformats.org/drawingml/2006/main" xmlns:r="http://schemas.openxmlformats.org/officeDocument/2006/relationships" xmlns:p="http://schemas.openxmlformats.org/presentationml/2006/main">
-  <p:cSld>
-    <p:spTree>
-      <p:nvGrpSpPr>
-        <p:cNvPr id="1" name=""/>
-        <p:cNvGrpSpPr/>
-        <p:nvPr/>
-      </p:nvGrpSpPr>
-      <p:grpSpPr>
-        <a:xfrm>
-          <a:off x="0" y="0"/>
-          <a:ext cx="0" cy="0"/>
-          <a:chOff x="0" y="0"/>
-          <a:chExt cx="0" cy="0"/>
-        </a:xfrm>
-      </p:grpSpPr>
-      <p:sp>
-        <p:nvSpPr>
-          <p:cNvPr id="3" name="Untertitel 2">
-            <a:extLst>
-              <a:ext uri="{FF2B5EF4-FFF2-40B4-BE49-F238E27FC236}">
-                <a16:creationId xmlns:a16="http://schemas.microsoft.com/office/drawing/2014/main" id="{93304FBE-99DF-EE64-5EB2-94852307E71F}"/>
-              </a:ext>
-            </a:extLst>
-          </p:cNvPr>
-          <p:cNvSpPr>
-            <a:spLocks noGrp="1"/>
-          </p:cNvSpPr>
-          <p:nvPr>
-            <p:ph type="subTitle" idx="1"/>
-          </p:nvPr>
-        </p:nvSpPr>
-        <p:spPr>
-          <a:xfrm>
-            <a:off x="1576168" y="2108888"/>
-            <a:ext cx="2639330" cy="3554980"/>
-          </a:xfrm>
-        </p:spPr>
-        <p:txBody>
-          <a:bodyPr>
-            <a:noAutofit/>
-          </a:bodyPr>
-          <a:lstStyle/>
+            <a:pPr marL="457200" indent="-457200" algn="l">
+              <a:buFont typeface="Wingdings" panose="05000000000000000000" pitchFamily="2" charset="2"/>
+              <a:buChar char="v"/>
+            </a:pPr>
+            <a:endParaRPr lang="de-DE" sz="2000" dirty="0">
+              <a:latin typeface="Liberation Sans" panose="020B0604020202020204" pitchFamily="34" charset="0"/>
+              <a:ea typeface="Liberation Sans" panose="020B0604020202020204" pitchFamily="34" charset="0"/>
+              <a:cs typeface="Liberation Sans" panose="020B0604020202020204" pitchFamily="34" charset="0"/>
+            </a:endParaRPr>
+          </a:p>
           <a:p>
             <a:r>
               <a:rPr lang="de-DE" sz="2000" b="1" dirty="0">
@@ -6717,7 +4246,7 @@
                 <a:ea typeface="Liberation Sans" panose="020B0604020202020204" pitchFamily="34" charset="0"/>
                 <a:cs typeface="Liberation Sans" panose="020B0604020202020204" pitchFamily="34" charset="0"/>
               </a:rPr>
-              <a:t>Positiv</a:t>
+              <a:t>Negativ</a:t>
             </a:r>
           </a:p>
           <a:p>
@@ -6739,7 +4268,7 @@
                 <a:ea typeface="Liberation Sans" panose="020B0604020202020204" pitchFamily="34" charset="0"/>
                 <a:cs typeface="Liberation Sans" panose="020B0604020202020204" pitchFamily="34" charset="0"/>
               </a:rPr>
-              <a:t>Doppeltes Fahrgestell</a:t>
+              <a:t>Viele Testdrucke notwendig (Material- und Zeitaufwand)</a:t>
             </a:r>
           </a:p>
           <a:p>
@@ -6753,31 +4282,17 @@
                 <a:ea typeface="Liberation Sans" panose="020B0604020202020204" pitchFamily="34" charset="0"/>
                 <a:cs typeface="Liberation Sans" panose="020B0604020202020204" pitchFamily="34" charset="0"/>
               </a:rPr>
-              <a:t>Modulares System mit vielen externen Teilen</a:t>
-            </a:r>
-          </a:p>
-          <a:p>
-            <a:pPr marL="457200" indent="-457200" algn="l">
-              <a:buFont typeface="Wingdings" panose="05000000000000000000" pitchFamily="2" charset="2"/>
-              <a:buChar char="v"/>
-            </a:pPr>
-            <a:r>
-              <a:rPr lang="de-DE" sz="2000" dirty="0">
-                <a:latin typeface="Liberation Sans" panose="020B0604020202020204" pitchFamily="34" charset="0"/>
-                <a:ea typeface="Liberation Sans" panose="020B0604020202020204" pitchFamily="34" charset="0"/>
-                <a:cs typeface="Liberation Sans" panose="020B0604020202020204" pitchFamily="34" charset="0"/>
-              </a:rPr>
-              <a:t>Flexibilität des Materials ist ein Vorteil</a:t>
-            </a:r>
-          </a:p>
-        </p:txBody>
-      </p:sp>
-      <p:sp>
-        <p:nvSpPr>
-          <p:cNvPr id="4" name="Titel 1">
-            <a:extLst>
-              <a:ext uri="{FF2B5EF4-FFF2-40B4-BE49-F238E27FC236}">
-                <a16:creationId xmlns:a16="http://schemas.microsoft.com/office/drawing/2014/main" id="{BE92422F-6CFB-6703-F428-2208AF7C4F27}"/>
+              <a:t>Millimeter können ein Modell unbrauchbar machen</a:t>
+            </a:r>
+          </a:p>
+        </p:txBody>
+      </p:sp>
+      <p:sp>
+        <p:nvSpPr>
+          <p:cNvPr id="5" name="Untertitel 2">
+            <a:extLst>
+              <a:ext uri="{FF2B5EF4-FFF2-40B4-BE49-F238E27FC236}">
+                <a16:creationId xmlns:a16="http://schemas.microsoft.com/office/drawing/2014/main" id="{F7F370D7-3BCE-781E-2D22-81B61AD8BA4A}"/>
               </a:ext>
             </a:extLst>
           </p:cNvPr>
@@ -6788,100 +4303,8 @@
         </p:nvSpPr>
         <p:spPr>
           <a:xfrm>
-            <a:off x="3405187" y="0"/>
-            <a:ext cx="5381625" cy="1019204"/>
-          </a:xfrm>
-          <a:prstGeom prst="rect">
-            <a:avLst/>
-          </a:prstGeom>
-        </p:spPr>
-        <p:txBody>
-          <a:bodyPr vert="horz" lIns="91440" tIns="45720" rIns="91440" bIns="45720" rtlCol="0" anchor="b">
-            <a:normAutofit/>
-          </a:bodyPr>
-          <a:lstStyle>
-            <a:lvl1pPr algn="ctr" defTabSz="914400" rtl="0" eaLnBrk="1" latinLnBrk="0" hangingPunct="1">
-              <a:lnSpc>
-                <a:spcPct val="90000"/>
-              </a:lnSpc>
-              <a:spcBef>
-                <a:spcPct val="0"/>
-              </a:spcBef>
-              <a:buNone/>
-              <a:defRPr sz="6000" kern="1200">
-                <a:solidFill>
-                  <a:schemeClr val="tx1"/>
-                </a:solidFill>
-                <a:latin typeface="+mj-lt"/>
-                <a:ea typeface="+mj-ea"/>
-                <a:cs typeface="+mj-cs"/>
-              </a:defRPr>
-            </a:lvl1pPr>
-          </a:lstStyle>
-          <a:p>
-            <a:r>
-              <a:rPr lang="de-DE" dirty="0">
-                <a:latin typeface="Impact" panose="020B0806030902050204" pitchFamily="34" charset="0"/>
-              </a:rPr>
-              <a:t>Zwischenfazit</a:t>
-            </a:r>
-          </a:p>
-        </p:txBody>
-      </p:sp>
-      <p:cxnSp>
-        <p:nvCxnSpPr>
-          <p:cNvPr id="6" name="Gerader Verbinder 5">
-            <a:extLst>
-              <a:ext uri="{FF2B5EF4-FFF2-40B4-BE49-F238E27FC236}">
-                <a16:creationId xmlns:a16="http://schemas.microsoft.com/office/drawing/2014/main" id="{86D8AB01-C043-70CC-51BD-6A6967F3BAD5}"/>
-              </a:ext>
-            </a:extLst>
-          </p:cNvPr>
-          <p:cNvCxnSpPr/>
-          <p:nvPr/>
-        </p:nvCxnSpPr>
-        <p:spPr>
-          <a:xfrm>
-            <a:off x="1576168" y="1118956"/>
-            <a:ext cx="8714792" cy="0"/>
-          </a:xfrm>
-          <a:prstGeom prst="line">
-            <a:avLst/>
-          </a:prstGeom>
-        </p:spPr>
-        <p:style>
-          <a:lnRef idx="2">
-            <a:schemeClr val="dk1"/>
-          </a:lnRef>
-          <a:fillRef idx="0">
-            <a:schemeClr val="dk1"/>
-          </a:fillRef>
-          <a:effectRef idx="1">
-            <a:schemeClr val="dk1"/>
-          </a:effectRef>
-          <a:fontRef idx="minor">
-            <a:schemeClr val="tx1"/>
-          </a:fontRef>
-        </p:style>
-      </p:cxnSp>
-      <p:sp>
-        <p:nvSpPr>
-          <p:cNvPr id="2" name="Untertitel 2">
-            <a:extLst>
-              <a:ext uri="{FF2B5EF4-FFF2-40B4-BE49-F238E27FC236}">
-                <a16:creationId xmlns:a16="http://schemas.microsoft.com/office/drawing/2014/main" id="{3E9646A3-113F-3764-D676-70FA6CA8883E}"/>
-              </a:ext>
-            </a:extLst>
-          </p:cNvPr>
-          <p:cNvSpPr txBox="1">
-            <a:spLocks/>
-          </p:cNvSpPr>
-          <p:nvPr/>
-        </p:nvSpPr>
-        <p:spPr>
-          <a:xfrm>
-            <a:off x="4672302" y="1651510"/>
-            <a:ext cx="2639330" cy="3554980"/>
+            <a:off x="7651630" y="2095322"/>
+            <a:ext cx="2639330" cy="1791056"/>
           </a:xfrm>
           <a:prstGeom prst="rect">
             <a:avLst/>
@@ -7056,7 +4479,319 @@
             </a:lvl9pPr>
           </a:lstStyle>
           <a:p>
+            <a:r>
+              <a:rPr lang="de-DE" sz="2000" b="1" dirty="0">
+                <a:latin typeface="Liberation Sans" panose="020B0604020202020204" pitchFamily="34" charset="0"/>
+                <a:ea typeface="Liberation Sans" panose="020B0604020202020204" pitchFamily="34" charset="0"/>
+                <a:cs typeface="Liberation Sans" panose="020B0604020202020204" pitchFamily="34" charset="0"/>
+              </a:rPr>
+              <a:t>Allgemein</a:t>
+            </a:r>
+          </a:p>
+          <a:p>
+            <a:pPr algn="l"/>
+            <a:endParaRPr lang="de-DE" sz="2000" b="1" dirty="0">
+              <a:latin typeface="Liberation Sans" panose="020B0604020202020204" pitchFamily="34" charset="0"/>
+              <a:ea typeface="Liberation Sans" panose="020B0604020202020204" pitchFamily="34" charset="0"/>
+              <a:cs typeface="Liberation Sans" panose="020B0604020202020204" pitchFamily="34" charset="0"/>
+            </a:endParaRPr>
+          </a:p>
+          <a:p>
             <a:pPr marL="457200" indent="-457200" algn="l">
+              <a:buFont typeface="Wingdings" panose="05000000000000000000" pitchFamily="2" charset="2"/>
+              <a:buChar char="v"/>
+            </a:pPr>
+            <a:r>
+              <a:rPr lang="de-DE" sz="2000" dirty="0">
+                <a:latin typeface="Liberation Sans" panose="020B0604020202020204" pitchFamily="34" charset="0"/>
+                <a:ea typeface="Liberation Sans" panose="020B0604020202020204" pitchFamily="34" charset="0"/>
+                <a:cs typeface="Liberation Sans" panose="020B0604020202020204" pitchFamily="34" charset="0"/>
+              </a:rPr>
+              <a:t>Frühe durchdachte Planung lohnt sich</a:t>
+            </a:r>
+          </a:p>
+          <a:p>
+            <a:pPr marL="457200" indent="-457200" algn="l">
+              <a:buFont typeface="Wingdings" panose="05000000000000000000" pitchFamily="2" charset="2"/>
+              <a:buChar char="v"/>
+            </a:pPr>
+            <a:r>
+              <a:rPr lang="de-DE" sz="2000" dirty="0">
+                <a:latin typeface="Liberation Sans" panose="020B0604020202020204" pitchFamily="34" charset="0"/>
+                <a:ea typeface="Liberation Sans" panose="020B0604020202020204" pitchFamily="34" charset="0"/>
+                <a:cs typeface="Liberation Sans" panose="020B0604020202020204" pitchFamily="34" charset="0"/>
+              </a:rPr>
+              <a:t>3D-Druck-Ungenauigkeiten antizipieren</a:t>
+            </a:r>
+          </a:p>
+          <a:p>
+            <a:pPr marL="457200" indent="-457200" algn="l">
+              <a:buFont typeface="Wingdings" panose="05000000000000000000" pitchFamily="2" charset="2"/>
+              <a:buChar char="v"/>
+            </a:pPr>
+            <a:r>
+              <a:rPr lang="de-DE" sz="2000" dirty="0">
+                <a:latin typeface="Liberation Sans" panose="020B0604020202020204" pitchFamily="34" charset="0"/>
+                <a:ea typeface="Liberation Sans" panose="020B0604020202020204" pitchFamily="34" charset="0"/>
+                <a:cs typeface="Liberation Sans" panose="020B0604020202020204" pitchFamily="34" charset="0"/>
+              </a:rPr>
+              <a:t>Improvisation ist oft notwendig</a:t>
+            </a:r>
+          </a:p>
+        </p:txBody>
+      </p:sp>
+    </p:spTree>
+    <p:extLst>
+      <p:ext uri="{BB962C8B-B14F-4D97-AF65-F5344CB8AC3E}">
+        <p14:creationId xmlns:p14="http://schemas.microsoft.com/office/powerpoint/2010/main" val="1779069297"/>
+      </p:ext>
+    </p:extLst>
+  </p:cSld>
+  <p:clrMapOvr>
+    <a:masterClrMapping/>
+  </p:clrMapOvr>
+</p:sld>
+</file>
+
+<file path=ppt/slides/slide11.xml><?xml version="1.0" encoding="utf-8"?>
+<p:sld xmlns:a="http://schemas.openxmlformats.org/drawingml/2006/main" xmlns:r="http://schemas.openxmlformats.org/officeDocument/2006/relationships" xmlns:p="http://schemas.openxmlformats.org/presentationml/2006/main">
+  <p:cSld>
+    <p:spTree>
+      <p:nvGrpSpPr>
+        <p:cNvPr id="1" name=""/>
+        <p:cNvGrpSpPr/>
+        <p:nvPr/>
+      </p:nvGrpSpPr>
+      <p:grpSpPr>
+        <a:xfrm>
+          <a:off x="0" y="0"/>
+          <a:ext cx="0" cy="0"/>
+          <a:chOff x="0" y="0"/>
+          <a:chExt cx="0" cy="0"/>
+        </a:xfrm>
+      </p:grpSpPr>
+      <p:sp>
+        <p:nvSpPr>
+          <p:cNvPr id="2" name="Titel 1">
+            <a:extLst>
+              <a:ext uri="{FF2B5EF4-FFF2-40B4-BE49-F238E27FC236}">
+                <a16:creationId xmlns:a16="http://schemas.microsoft.com/office/drawing/2014/main" id="{413D0774-18A2-673D-283B-1C04DB36353E}"/>
+              </a:ext>
+            </a:extLst>
+          </p:cNvPr>
+          <p:cNvSpPr>
+            <a:spLocks noGrp="1"/>
+          </p:cNvSpPr>
+          <p:nvPr>
+            <p:ph type="ctrTitle"/>
+          </p:nvPr>
+        </p:nvSpPr>
+        <p:spPr>
+          <a:xfrm>
+            <a:off x="1524000" y="1269579"/>
+            <a:ext cx="9144000" cy="2387600"/>
+          </a:xfrm>
+        </p:spPr>
+        <p:txBody>
+          <a:bodyPr>
+            <a:normAutofit/>
+          </a:bodyPr>
+          <a:lstStyle/>
+          <a:p>
+            <a:r>
+              <a:rPr lang="de-DE" sz="10000" dirty="0">
+                <a:latin typeface="Impact" panose="020B0806030902050204" pitchFamily="34" charset="0"/>
+              </a:rPr>
+              <a:t>Elektronik</a:t>
+            </a:r>
+          </a:p>
+        </p:txBody>
+      </p:sp>
+      <p:sp>
+        <p:nvSpPr>
+          <p:cNvPr id="3" name="Untertitel 2">
+            <a:extLst>
+              <a:ext uri="{FF2B5EF4-FFF2-40B4-BE49-F238E27FC236}">
+                <a16:creationId xmlns:a16="http://schemas.microsoft.com/office/drawing/2014/main" id="{93304FBE-99DF-EE64-5EB2-94852307E71F}"/>
+              </a:ext>
+            </a:extLst>
+          </p:cNvPr>
+          <p:cNvSpPr>
+            <a:spLocks noGrp="1"/>
+          </p:cNvSpPr>
+          <p:nvPr>
+            <p:ph type="subTitle" idx="1"/>
+          </p:nvPr>
+        </p:nvSpPr>
+        <p:spPr>
+          <a:xfrm>
+            <a:off x="1524000" y="4259635"/>
+            <a:ext cx="9144000" cy="1791056"/>
+          </a:xfrm>
+        </p:spPr>
+        <p:txBody>
+          <a:bodyPr>
+            <a:noAutofit/>
+          </a:bodyPr>
+          <a:lstStyle/>
+          <a:p>
+            <a:r>
+              <a:rPr lang="de-DE" sz="3000" dirty="0">
+                <a:latin typeface="Liberation Sans" panose="020B0604020202020204" pitchFamily="34" charset="0"/>
+                <a:ea typeface="Liberation Sans" panose="020B0604020202020204" pitchFamily="34" charset="0"/>
+                <a:cs typeface="Liberation Sans" panose="020B0604020202020204" pitchFamily="34" charset="0"/>
+              </a:rPr>
+              <a:t>Julian</a:t>
+            </a:r>
+          </a:p>
+        </p:txBody>
+      </p:sp>
+      <p:cxnSp>
+        <p:nvCxnSpPr>
+          <p:cNvPr id="5" name="Gerader Verbinder 4">
+            <a:extLst>
+              <a:ext uri="{FF2B5EF4-FFF2-40B4-BE49-F238E27FC236}">
+                <a16:creationId xmlns:a16="http://schemas.microsoft.com/office/drawing/2014/main" id="{2B753068-DCEB-B788-AD32-F324BF9F36F0}"/>
+              </a:ext>
+            </a:extLst>
+          </p:cNvPr>
+          <p:cNvCxnSpPr/>
+          <p:nvPr/>
+        </p:nvCxnSpPr>
+        <p:spPr>
+          <a:xfrm>
+            <a:off x="1698171" y="3830217"/>
+            <a:ext cx="8714792" cy="0"/>
+          </a:xfrm>
+          <a:prstGeom prst="line">
+            <a:avLst/>
+          </a:prstGeom>
+        </p:spPr>
+        <p:style>
+          <a:lnRef idx="2">
+            <a:schemeClr val="dk1"/>
+          </a:lnRef>
+          <a:fillRef idx="0">
+            <a:schemeClr val="dk1"/>
+          </a:fillRef>
+          <a:effectRef idx="1">
+            <a:schemeClr val="dk1"/>
+          </a:effectRef>
+          <a:fontRef idx="minor">
+            <a:schemeClr val="tx1"/>
+          </a:fontRef>
+        </p:style>
+      </p:cxnSp>
+    </p:spTree>
+    <p:extLst>
+      <p:ext uri="{BB962C8B-B14F-4D97-AF65-F5344CB8AC3E}">
+        <p14:creationId xmlns:p14="http://schemas.microsoft.com/office/powerpoint/2010/main" val="383897644"/>
+      </p:ext>
+    </p:extLst>
+  </p:cSld>
+  <p:clrMapOvr>
+    <a:masterClrMapping/>
+  </p:clrMapOvr>
+</p:sld>
+</file>
+
+<file path=ppt/slides/slide12.xml><?xml version="1.0" encoding="utf-8"?>
+<p:sld xmlns:a="http://schemas.openxmlformats.org/drawingml/2006/main" xmlns:r="http://schemas.openxmlformats.org/officeDocument/2006/relationships" xmlns:p="http://schemas.openxmlformats.org/presentationml/2006/main">
+  <p:cSld>
+    <p:spTree>
+      <p:nvGrpSpPr>
+        <p:cNvPr id="1" name=""/>
+        <p:cNvGrpSpPr/>
+        <p:nvPr/>
+      </p:nvGrpSpPr>
+      <p:grpSpPr>
+        <a:xfrm>
+          <a:off x="0" y="0"/>
+          <a:ext cx="0" cy="0"/>
+          <a:chOff x="0" y="0"/>
+          <a:chExt cx="0" cy="0"/>
+        </a:xfrm>
+      </p:grpSpPr>
+      <p:sp>
+        <p:nvSpPr>
+          <p:cNvPr id="2" name="Titel 1">
+            <a:extLst>
+              <a:ext uri="{FF2B5EF4-FFF2-40B4-BE49-F238E27FC236}">
+                <a16:creationId xmlns:a16="http://schemas.microsoft.com/office/drawing/2014/main" id="{413D0774-18A2-673D-283B-1C04DB36353E}"/>
+              </a:ext>
+            </a:extLst>
+          </p:cNvPr>
+          <p:cNvSpPr>
+            <a:spLocks noGrp="1"/>
+          </p:cNvSpPr>
+          <p:nvPr>
+            <p:ph type="ctrTitle"/>
+          </p:nvPr>
+        </p:nvSpPr>
+        <p:spPr>
+          <a:xfrm>
+            <a:off x="4430485" y="39054"/>
+            <a:ext cx="3331029" cy="1019204"/>
+          </a:xfrm>
+        </p:spPr>
+        <p:txBody>
+          <a:bodyPr>
+            <a:normAutofit/>
+          </a:bodyPr>
+          <a:lstStyle/>
+          <a:p>
+            <a:r>
+              <a:rPr lang="de-DE" dirty="0">
+                <a:latin typeface="Impact" panose="020B0806030902050204" pitchFamily="34" charset="0"/>
+              </a:rPr>
+              <a:t>Elektronik</a:t>
+            </a:r>
+          </a:p>
+        </p:txBody>
+      </p:sp>
+      <p:sp>
+        <p:nvSpPr>
+          <p:cNvPr id="3" name="Untertitel 2">
+            <a:extLst>
+              <a:ext uri="{FF2B5EF4-FFF2-40B4-BE49-F238E27FC236}">
+                <a16:creationId xmlns:a16="http://schemas.microsoft.com/office/drawing/2014/main" id="{93304FBE-99DF-EE64-5EB2-94852307E71F}"/>
+              </a:ext>
+            </a:extLst>
+          </p:cNvPr>
+          <p:cNvSpPr>
+            <a:spLocks noGrp="1"/>
+          </p:cNvSpPr>
+          <p:nvPr>
+            <p:ph type="subTitle" idx="1"/>
+          </p:nvPr>
+        </p:nvSpPr>
+        <p:spPr>
+          <a:xfrm>
+            <a:off x="898849" y="2533471"/>
+            <a:ext cx="9144000" cy="3848665"/>
+          </a:xfrm>
+        </p:spPr>
+        <p:txBody>
+          <a:bodyPr>
+            <a:noAutofit/>
+          </a:bodyPr>
+          <a:lstStyle/>
+          <a:p>
+            <a:pPr marL="342900" indent="-342900" algn="l">
+              <a:buFont typeface="Wingdings" panose="05000000000000000000" pitchFamily="2" charset="2"/>
+              <a:buChar char="v"/>
+            </a:pPr>
+            <a:r>
+              <a:rPr lang="de-DE" sz="2000" dirty="0">
+                <a:latin typeface="Liberation Sans" panose="020B0604020202020204" pitchFamily="34" charset="0"/>
+                <a:ea typeface="Liberation Sans" panose="020B0604020202020204" pitchFamily="34" charset="0"/>
+                <a:cs typeface="Liberation Sans" panose="020B0604020202020204" pitchFamily="34" charset="0"/>
+              </a:rPr>
+              <a:t>11.1V 3500mAh - Akku</a:t>
+            </a:r>
+          </a:p>
+          <a:p>
+            <a:pPr marL="342900" indent="-342900" algn="l">
               <a:buFont typeface="Wingdings" panose="05000000000000000000" pitchFamily="2" charset="2"/>
               <a:buChar char="v"/>
             </a:pPr>
@@ -7067,25 +4802,32 @@
             </a:endParaRPr>
           </a:p>
           <a:p>
-            <a:r>
-              <a:rPr lang="de-DE" sz="2000" b="1" dirty="0">
+            <a:pPr marL="342900" indent="-342900" algn="l">
+              <a:buFont typeface="Wingdings" panose="05000000000000000000" pitchFamily="2" charset="2"/>
+              <a:buChar char="v"/>
+            </a:pPr>
+            <a:r>
+              <a:rPr lang="de-DE" sz="2000" dirty="0">
                 <a:latin typeface="Liberation Sans" panose="020B0604020202020204" pitchFamily="34" charset="0"/>
                 <a:ea typeface="Liberation Sans" panose="020B0604020202020204" pitchFamily="34" charset="0"/>
                 <a:cs typeface="Liberation Sans" panose="020B0604020202020204" pitchFamily="34" charset="0"/>
               </a:rPr>
-              <a:t>Negativ</a:t>
-            </a:r>
-          </a:p>
-          <a:p>
-            <a:pPr algn="l"/>
-            <a:endParaRPr lang="de-DE" sz="2000" b="1" dirty="0">
+              <a:t>2x BTS7960 43A – H-Brücke</a:t>
+            </a:r>
+          </a:p>
+          <a:p>
+            <a:pPr marL="342900" indent="-342900" algn="l">
+              <a:buFont typeface="Wingdings" panose="05000000000000000000" pitchFamily="2" charset="2"/>
+              <a:buChar char="v"/>
+            </a:pPr>
+            <a:endParaRPr lang="de-DE" sz="2000" dirty="0">
               <a:latin typeface="Liberation Sans" panose="020B0604020202020204" pitchFamily="34" charset="0"/>
               <a:ea typeface="Liberation Sans" panose="020B0604020202020204" pitchFamily="34" charset="0"/>
               <a:cs typeface="Liberation Sans" panose="020B0604020202020204" pitchFamily="34" charset="0"/>
             </a:endParaRPr>
           </a:p>
           <a:p>
-            <a:pPr marL="457200" indent="-457200" algn="l">
+            <a:pPr marL="342900" indent="-342900" algn="l">
               <a:buFont typeface="Wingdings" panose="05000000000000000000" pitchFamily="2" charset="2"/>
               <a:buChar char="v"/>
             </a:pPr>
@@ -7095,11 +4837,22 @@
                 <a:ea typeface="Liberation Sans" panose="020B0604020202020204" pitchFamily="34" charset="0"/>
                 <a:cs typeface="Liberation Sans" panose="020B0604020202020204" pitchFamily="34" charset="0"/>
               </a:rPr>
-              <a:t>Viele Testdrucke notwendig (Material- und Zeitaufwand)</a:t>
-            </a:r>
-          </a:p>
-          <a:p>
-            <a:pPr marL="457200" indent="-457200" algn="l">
+              <a:t>2x JGB37-520 12V Motor</a:t>
+            </a:r>
+          </a:p>
+          <a:p>
+            <a:pPr marL="342900" indent="-342900" algn="l">
+              <a:buFont typeface="Wingdings" panose="05000000000000000000" pitchFamily="2" charset="2"/>
+              <a:buChar char="v"/>
+            </a:pPr>
+            <a:endParaRPr lang="de-DE" sz="2000" dirty="0">
+              <a:latin typeface="Liberation Sans" panose="020B0604020202020204" pitchFamily="34" charset="0"/>
+              <a:ea typeface="Liberation Sans" panose="020B0604020202020204" pitchFamily="34" charset="0"/>
+              <a:cs typeface="Liberation Sans" panose="020B0604020202020204" pitchFamily="34" charset="0"/>
+            </a:endParaRPr>
+          </a:p>
+          <a:p>
+            <a:pPr marL="342900" indent="-342900" algn="l">
               <a:buFont typeface="Wingdings" panose="05000000000000000000" pitchFamily="2" charset="2"/>
               <a:buChar char="v"/>
             </a:pPr>
@@ -7109,17 +4862,2200 @@
                 <a:ea typeface="Liberation Sans" panose="020B0604020202020204" pitchFamily="34" charset="0"/>
                 <a:cs typeface="Liberation Sans" panose="020B0604020202020204" pitchFamily="34" charset="0"/>
               </a:rPr>
-              <a:t>Millimeter können ein Modell unbrauchbar machen</a:t>
-            </a:r>
-          </a:p>
-        </p:txBody>
-      </p:sp>
-      <p:sp>
-        <p:nvSpPr>
-          <p:cNvPr id="5" name="Untertitel 2">
-            <a:extLst>
-              <a:ext uri="{FF2B5EF4-FFF2-40B4-BE49-F238E27FC236}">
-                <a16:creationId xmlns:a16="http://schemas.microsoft.com/office/drawing/2014/main" id="{F7F370D7-3BCE-781E-2D22-81B61AD8BA4A}"/>
+              <a:t>LM2596 – Buck-Converter</a:t>
+            </a:r>
+          </a:p>
+          <a:p>
+            <a:pPr marL="342900" indent="-342900" algn="l">
+              <a:buFont typeface="Wingdings" panose="05000000000000000000" pitchFamily="2" charset="2"/>
+              <a:buChar char="v"/>
+            </a:pPr>
+            <a:endParaRPr lang="de-DE" sz="2000" dirty="0">
+              <a:latin typeface="Liberation Sans" panose="020B0604020202020204" pitchFamily="34" charset="0"/>
+              <a:ea typeface="Liberation Sans" panose="020B0604020202020204" pitchFamily="34" charset="0"/>
+              <a:cs typeface="Liberation Sans" panose="020B0604020202020204" pitchFamily="34" charset="0"/>
+            </a:endParaRPr>
+          </a:p>
+          <a:p>
+            <a:pPr marL="342900" indent="-342900" algn="l">
+              <a:buFont typeface="Wingdings" panose="05000000000000000000" pitchFamily="2" charset="2"/>
+              <a:buChar char="v"/>
+            </a:pPr>
+            <a:r>
+              <a:rPr lang="de-DE" sz="2000" dirty="0">
+                <a:latin typeface="Liberation Sans" panose="020B0604020202020204" pitchFamily="34" charset="0"/>
+                <a:ea typeface="Liberation Sans" panose="020B0604020202020204" pitchFamily="34" charset="0"/>
+                <a:cs typeface="Liberation Sans" panose="020B0604020202020204" pitchFamily="34" charset="0"/>
+              </a:rPr>
+              <a:t>ESP32 Dev-Module (38 Pins)</a:t>
+            </a:r>
+          </a:p>
+        </p:txBody>
+      </p:sp>
+      <p:cxnSp>
+        <p:nvCxnSpPr>
+          <p:cNvPr id="5" name="Gerader Verbinder 4">
+            <a:extLst>
+              <a:ext uri="{FF2B5EF4-FFF2-40B4-BE49-F238E27FC236}">
+                <a16:creationId xmlns:a16="http://schemas.microsoft.com/office/drawing/2014/main" id="{2B753068-DCEB-B788-AD32-F324BF9F36F0}"/>
+              </a:ext>
+            </a:extLst>
+          </p:cNvPr>
+          <p:cNvCxnSpPr/>
+          <p:nvPr/>
+        </p:nvCxnSpPr>
+        <p:spPr>
+          <a:xfrm>
+            <a:off x="1576168" y="1118956"/>
+            <a:ext cx="8714792" cy="0"/>
+          </a:xfrm>
+          <a:prstGeom prst="line">
+            <a:avLst/>
+          </a:prstGeom>
+        </p:spPr>
+        <p:style>
+          <a:lnRef idx="2">
+            <a:schemeClr val="dk1"/>
+          </a:lnRef>
+          <a:fillRef idx="0">
+            <a:schemeClr val="dk1"/>
+          </a:fillRef>
+          <a:effectRef idx="1">
+            <a:schemeClr val="dk1"/>
+          </a:effectRef>
+          <a:fontRef idx="minor">
+            <a:schemeClr val="tx1"/>
+          </a:fontRef>
+        </p:style>
+      </p:cxnSp>
+      <p:pic>
+        <p:nvPicPr>
+          <p:cNvPr id="6" name="Grafik 5" descr="Ein Bild, das Text, Allgemeine Versorgung, Büroausstattung, Etikett enthält.&#10;&#10;KI-generierte Inhalte können fehlerhaft sein.">
+            <a:extLst>
+              <a:ext uri="{FF2B5EF4-FFF2-40B4-BE49-F238E27FC236}">
+                <a16:creationId xmlns:a16="http://schemas.microsoft.com/office/drawing/2014/main" id="{B109BC79-F612-DA75-4651-5C4278F2E95A}"/>
+              </a:ext>
+            </a:extLst>
+          </p:cNvPr>
+          <p:cNvPicPr>
+            <a:picLocks noChangeAspect="1"/>
+          </p:cNvPicPr>
+          <p:nvPr/>
+        </p:nvPicPr>
+        <p:blipFill>
+          <a:blip r:embed="rId2">
+            <a:extLst>
+              <a:ext uri="{28A0092B-C50C-407E-A947-70E740481C1C}">
+                <a14:useLocalDpi xmlns:a14="http://schemas.microsoft.com/office/drawing/2010/main" val="0"/>
+              </a:ext>
+            </a:extLst>
+          </a:blip>
+          <a:stretch>
+            <a:fillRect/>
+          </a:stretch>
+        </p:blipFill>
+        <p:spPr>
+          <a:xfrm>
+            <a:off x="4850372" y="1986084"/>
+            <a:ext cx="2232463" cy="1777916"/>
+          </a:xfrm>
+          <a:prstGeom prst="rect">
+            <a:avLst/>
+          </a:prstGeom>
+        </p:spPr>
+      </p:pic>
+      <p:pic>
+        <p:nvPicPr>
+          <p:cNvPr id="8" name="Grafik 7" descr="Ein Bild, das Elektronik, Elektronisches Bauteil, Elektrisches Bauelement, Schaltung enthält.&#10;&#10;KI-generierte Inhalte können fehlerhaft sein.">
+            <a:extLst>
+              <a:ext uri="{FF2B5EF4-FFF2-40B4-BE49-F238E27FC236}">
+                <a16:creationId xmlns:a16="http://schemas.microsoft.com/office/drawing/2014/main" id="{AF376ADC-B7DD-2D3B-0180-9FCFD057D9AE}"/>
+              </a:ext>
+            </a:extLst>
+          </p:cNvPr>
+          <p:cNvPicPr>
+            <a:picLocks noChangeAspect="1"/>
+          </p:cNvPicPr>
+          <p:nvPr/>
+        </p:nvPicPr>
+        <p:blipFill>
+          <a:blip r:embed="rId3">
+            <a:extLst>
+              <a:ext uri="{28A0092B-C50C-407E-A947-70E740481C1C}">
+                <a14:useLocalDpi xmlns:a14="http://schemas.microsoft.com/office/drawing/2010/main" val="0"/>
+              </a:ext>
+            </a:extLst>
+          </a:blip>
+          <a:stretch>
+            <a:fillRect/>
+          </a:stretch>
+        </p:blipFill>
+        <p:spPr>
+          <a:xfrm>
+            <a:off x="9517044" y="4279431"/>
+            <a:ext cx="1776107" cy="1535419"/>
+          </a:xfrm>
+          <a:prstGeom prst="rect">
+            <a:avLst/>
+          </a:prstGeom>
+        </p:spPr>
+      </p:pic>
+      <p:pic>
+        <p:nvPicPr>
+          <p:cNvPr id="10" name="Grafik 9" descr="Ein Bild, das Elektronik, Elektrisches Bauelement, Elektronisches Bauteil, Schaltung enthält.&#10;&#10;KI-generierte Inhalte können fehlerhaft sein.">
+            <a:extLst>
+              <a:ext uri="{FF2B5EF4-FFF2-40B4-BE49-F238E27FC236}">
+                <a16:creationId xmlns:a16="http://schemas.microsoft.com/office/drawing/2014/main" id="{2C6DB4DF-7CAC-76B2-14FF-CF0AFF5F5D60}"/>
+              </a:ext>
+            </a:extLst>
+          </p:cNvPr>
+          <p:cNvPicPr>
+            <a:picLocks noChangeAspect="1"/>
+          </p:cNvPicPr>
+          <p:nvPr/>
+        </p:nvPicPr>
+        <p:blipFill>
+          <a:blip r:embed="rId4">
+            <a:extLst>
+              <a:ext uri="{28A0092B-C50C-407E-A947-70E740481C1C}">
+                <a14:useLocalDpi xmlns:a14="http://schemas.microsoft.com/office/drawing/2010/main" val="0"/>
+              </a:ext>
+            </a:extLst>
+          </a:blip>
+          <a:stretch>
+            <a:fillRect/>
+          </a:stretch>
+        </p:blipFill>
+        <p:spPr>
+          <a:xfrm>
+            <a:off x="8172633" y="2043827"/>
+            <a:ext cx="2232464" cy="2050686"/>
+          </a:xfrm>
+          <a:prstGeom prst="rect">
+            <a:avLst/>
+          </a:prstGeom>
+        </p:spPr>
+      </p:pic>
+      <p:pic>
+        <p:nvPicPr>
+          <p:cNvPr id="12" name="Grafik 11" descr="Ein Bild, das Röhre enthält.&#10;&#10;KI-generierte Inhalte können fehlerhaft sein.">
+            <a:extLst>
+              <a:ext uri="{FF2B5EF4-FFF2-40B4-BE49-F238E27FC236}">
+                <a16:creationId xmlns:a16="http://schemas.microsoft.com/office/drawing/2014/main" id="{5D354501-3BFF-6440-5702-C64F04BF6ED4}"/>
+              </a:ext>
+            </a:extLst>
+          </p:cNvPr>
+          <p:cNvPicPr>
+            <a:picLocks noChangeAspect="1"/>
+          </p:cNvPicPr>
+          <p:nvPr/>
+        </p:nvPicPr>
+        <p:blipFill>
+          <a:blip r:embed="rId5">
+            <a:extLst>
+              <a:ext uri="{28A0092B-C50C-407E-A947-70E740481C1C}">
+                <a14:useLocalDpi xmlns:a14="http://schemas.microsoft.com/office/drawing/2010/main" val="0"/>
+              </a:ext>
+            </a:extLst>
+          </a:blip>
+          <a:stretch>
+            <a:fillRect/>
+          </a:stretch>
+        </p:blipFill>
+        <p:spPr>
+          <a:xfrm>
+            <a:off x="6719297" y="3307658"/>
+            <a:ext cx="1228602" cy="2233822"/>
+          </a:xfrm>
+          <a:prstGeom prst="rect">
+            <a:avLst/>
+          </a:prstGeom>
+        </p:spPr>
+      </p:pic>
+      <p:pic>
+        <p:nvPicPr>
+          <p:cNvPr id="14" name="Grafik 13" descr="Ein Bild, das Elektronik, Computerkomponenten, Elektronisches Bauteil, Elektrisches Bauelement enthält.&#10;&#10;KI-generierte Inhalte können fehlerhaft sein.">
+            <a:extLst>
+              <a:ext uri="{FF2B5EF4-FFF2-40B4-BE49-F238E27FC236}">
+                <a16:creationId xmlns:a16="http://schemas.microsoft.com/office/drawing/2014/main" id="{6B30D8AC-25CB-8DC9-7B69-C7A7727C16F1}"/>
+              </a:ext>
+            </a:extLst>
+          </p:cNvPr>
+          <p:cNvPicPr>
+            <a:picLocks noChangeAspect="1"/>
+          </p:cNvPicPr>
+          <p:nvPr/>
+        </p:nvPicPr>
+        <p:blipFill>
+          <a:blip r:embed="rId6">
+            <a:extLst>
+              <a:ext uri="{28A0092B-C50C-407E-A947-70E740481C1C}">
+                <a14:useLocalDpi xmlns:a14="http://schemas.microsoft.com/office/drawing/2010/main" val="0"/>
+              </a:ext>
+            </a:extLst>
+          </a:blip>
+          <a:stretch>
+            <a:fillRect/>
+          </a:stretch>
+        </p:blipFill>
+        <p:spPr>
+          <a:xfrm>
+            <a:off x="7709513" y="5087251"/>
+            <a:ext cx="1619317" cy="1455197"/>
+          </a:xfrm>
+          <a:prstGeom prst="rect">
+            <a:avLst/>
+          </a:prstGeom>
+        </p:spPr>
+      </p:pic>
+      <p:sp>
+        <p:nvSpPr>
+          <p:cNvPr id="15" name="Textfeld 14">
+            <a:extLst>
+              <a:ext uri="{FF2B5EF4-FFF2-40B4-BE49-F238E27FC236}">
+                <a16:creationId xmlns:a16="http://schemas.microsoft.com/office/drawing/2014/main" id="{D3227EC0-6C59-6CD2-5D53-172A65B2C243}"/>
+              </a:ext>
+            </a:extLst>
+          </p:cNvPr>
+          <p:cNvSpPr txBox="1"/>
+          <p:nvPr/>
+        </p:nvSpPr>
+        <p:spPr>
+          <a:xfrm>
+            <a:off x="233265" y="6456784"/>
+            <a:ext cx="5299788" cy="369332"/>
+          </a:xfrm>
+          <a:prstGeom prst="rect">
+            <a:avLst/>
+          </a:prstGeom>
+          <a:noFill/>
+        </p:spPr>
+        <p:txBody>
+          <a:bodyPr wrap="square" rtlCol="0">
+            <a:spAutoFit/>
+          </a:bodyPr>
+          <a:lstStyle/>
+          <a:p>
+            <a:r>
+              <a:rPr lang="de-DE" dirty="0"/>
+              <a:t>*Alle aufgeführten Bauteile stammen von Aliexpress</a:t>
+            </a:r>
+          </a:p>
+        </p:txBody>
+      </p:sp>
+    </p:spTree>
+    <p:extLst>
+      <p:ext uri="{BB962C8B-B14F-4D97-AF65-F5344CB8AC3E}">
+        <p14:creationId xmlns:p14="http://schemas.microsoft.com/office/powerpoint/2010/main" val="1379536395"/>
+      </p:ext>
+    </p:extLst>
+  </p:cSld>
+  <p:clrMapOvr>
+    <a:masterClrMapping/>
+  </p:clrMapOvr>
+</p:sld>
+</file>
+
+<file path=ppt/slides/slide13.xml><?xml version="1.0" encoding="utf-8"?>
+<p:sld xmlns:a="http://schemas.openxmlformats.org/drawingml/2006/main" xmlns:r="http://schemas.openxmlformats.org/officeDocument/2006/relationships" xmlns:p="http://schemas.openxmlformats.org/presentationml/2006/main">
+  <p:cSld>
+    <p:spTree>
+      <p:nvGrpSpPr>
+        <p:cNvPr id="1" name=""/>
+        <p:cNvGrpSpPr/>
+        <p:nvPr/>
+      </p:nvGrpSpPr>
+      <p:grpSpPr>
+        <a:xfrm>
+          <a:off x="0" y="0"/>
+          <a:ext cx="0" cy="0"/>
+          <a:chOff x="0" y="0"/>
+          <a:chExt cx="0" cy="0"/>
+        </a:xfrm>
+      </p:grpSpPr>
+      <p:pic>
+        <p:nvPicPr>
+          <p:cNvPr id="5" name="Inhaltsplatzhalter 4" descr="Ein Bild, das Text, Diagramm, Plan, technische Zeichnung enthält.&#10;&#10;KI-generierte Inhalte können fehlerhaft sein.">
+            <a:extLst>
+              <a:ext uri="{FF2B5EF4-FFF2-40B4-BE49-F238E27FC236}">
+                <a16:creationId xmlns:a16="http://schemas.microsoft.com/office/drawing/2014/main" id="{7B82A2CC-6A98-31A3-AE4C-FB7D82868BDA}"/>
+              </a:ext>
+            </a:extLst>
+          </p:cNvPr>
+          <p:cNvPicPr>
+            <a:picLocks noGrp="1" noChangeAspect="1"/>
+          </p:cNvPicPr>
+          <p:nvPr>
+            <p:ph idx="1"/>
+          </p:nvPr>
+        </p:nvPicPr>
+        <p:blipFill>
+          <a:blip r:embed="rId2">
+            <a:extLst>
+              <a:ext uri="{28A0092B-C50C-407E-A947-70E740481C1C}">
+                <a14:useLocalDpi xmlns:a14="http://schemas.microsoft.com/office/drawing/2010/main" val="0"/>
+              </a:ext>
+            </a:extLst>
+          </a:blip>
+          <a:srcRect l="18112" t="12063" r="21627" b="12230"/>
+          <a:stretch/>
+        </p:blipFill>
+        <p:spPr>
+          <a:xfrm>
+            <a:off x="2166061" y="-136062"/>
+            <a:ext cx="7859877" cy="6994062"/>
+          </a:xfrm>
+        </p:spPr>
+      </p:pic>
+      <p:sp>
+        <p:nvSpPr>
+          <p:cNvPr id="7" name="Textfeld 6">
+            <a:extLst>
+              <a:ext uri="{FF2B5EF4-FFF2-40B4-BE49-F238E27FC236}">
+                <a16:creationId xmlns:a16="http://schemas.microsoft.com/office/drawing/2014/main" id="{84DDF3DC-E437-73A9-3E48-A989147B64CA}"/>
+              </a:ext>
+            </a:extLst>
+          </p:cNvPr>
+          <p:cNvSpPr txBox="1"/>
+          <p:nvPr/>
+        </p:nvSpPr>
+        <p:spPr>
+          <a:xfrm>
+            <a:off x="165619" y="6412077"/>
+            <a:ext cx="6097554" cy="369332"/>
+          </a:xfrm>
+          <a:prstGeom prst="rect">
+            <a:avLst/>
+          </a:prstGeom>
+          <a:noFill/>
+        </p:spPr>
+        <p:txBody>
+          <a:bodyPr wrap="square">
+            <a:spAutoFit/>
+          </a:bodyPr>
+          <a:lstStyle/>
+          <a:p>
+            <a:r>
+              <a:rPr lang="de-DE" dirty="0"/>
+              <a:t>https://easyeda.com</a:t>
+            </a:r>
+          </a:p>
+        </p:txBody>
+      </p:sp>
+    </p:spTree>
+    <p:extLst>
+      <p:ext uri="{BB962C8B-B14F-4D97-AF65-F5344CB8AC3E}">
+        <p14:creationId xmlns:p14="http://schemas.microsoft.com/office/powerpoint/2010/main" val="4040044785"/>
+      </p:ext>
+    </p:extLst>
+  </p:cSld>
+  <p:clrMapOvr>
+    <a:masterClrMapping/>
+  </p:clrMapOvr>
+</p:sld>
+</file>
+
+<file path=ppt/slides/slide14.xml><?xml version="1.0" encoding="utf-8"?>
+<p:sld xmlns:a="http://schemas.openxmlformats.org/drawingml/2006/main" xmlns:r="http://schemas.openxmlformats.org/officeDocument/2006/relationships" xmlns:p="http://schemas.openxmlformats.org/presentationml/2006/main">
+  <p:cSld>
+    <p:spTree>
+      <p:nvGrpSpPr>
+        <p:cNvPr id="1" name=""/>
+        <p:cNvGrpSpPr/>
+        <p:nvPr/>
+      </p:nvGrpSpPr>
+      <p:grpSpPr>
+        <a:xfrm>
+          <a:off x="0" y="0"/>
+          <a:ext cx="0" cy="0"/>
+          <a:chOff x="0" y="0"/>
+          <a:chExt cx="0" cy="0"/>
+        </a:xfrm>
+      </p:grpSpPr>
+      <p:sp>
+        <p:nvSpPr>
+          <p:cNvPr id="2" name="Titel 1">
+            <a:extLst>
+              <a:ext uri="{FF2B5EF4-FFF2-40B4-BE49-F238E27FC236}">
+                <a16:creationId xmlns:a16="http://schemas.microsoft.com/office/drawing/2014/main" id="{413D0774-18A2-673D-283B-1C04DB36353E}"/>
+              </a:ext>
+            </a:extLst>
+          </p:cNvPr>
+          <p:cNvSpPr>
+            <a:spLocks noGrp="1"/>
+          </p:cNvSpPr>
+          <p:nvPr>
+            <p:ph type="ctrTitle"/>
+          </p:nvPr>
+        </p:nvSpPr>
+        <p:spPr>
+          <a:xfrm>
+            <a:off x="1524000" y="1269579"/>
+            <a:ext cx="9144000" cy="2387600"/>
+          </a:xfrm>
+        </p:spPr>
+        <p:txBody>
+          <a:bodyPr>
+            <a:normAutofit fontScale="90000"/>
+          </a:bodyPr>
+          <a:lstStyle/>
+          <a:p>
+            <a:br>
+              <a:rPr lang="de-DE" sz="10000" dirty="0">
+                <a:latin typeface="Impact" panose="020B0806030902050204" pitchFamily="34" charset="0"/>
+              </a:rPr>
+            </a:br>
+            <a:r>
+              <a:rPr lang="de-DE" sz="11100" dirty="0">
+                <a:latin typeface="Impact" panose="020B0806030902050204" pitchFamily="34" charset="0"/>
+              </a:rPr>
+              <a:t>Programmierung</a:t>
+            </a:r>
+          </a:p>
+        </p:txBody>
+      </p:sp>
+      <p:sp>
+        <p:nvSpPr>
+          <p:cNvPr id="3" name="Untertitel 2">
+            <a:extLst>
+              <a:ext uri="{FF2B5EF4-FFF2-40B4-BE49-F238E27FC236}">
+                <a16:creationId xmlns:a16="http://schemas.microsoft.com/office/drawing/2014/main" id="{93304FBE-99DF-EE64-5EB2-94852307E71F}"/>
+              </a:ext>
+            </a:extLst>
+          </p:cNvPr>
+          <p:cNvSpPr>
+            <a:spLocks noGrp="1"/>
+          </p:cNvSpPr>
+          <p:nvPr>
+            <p:ph type="subTitle" idx="1"/>
+          </p:nvPr>
+        </p:nvSpPr>
+        <p:spPr>
+          <a:xfrm>
+            <a:off x="1524000" y="4259635"/>
+            <a:ext cx="9144000" cy="1791056"/>
+          </a:xfrm>
+        </p:spPr>
+        <p:txBody>
+          <a:bodyPr>
+            <a:noAutofit/>
+          </a:bodyPr>
+          <a:lstStyle/>
+          <a:p>
+            <a:r>
+              <a:rPr lang="de-DE" sz="3000" dirty="0">
+                <a:latin typeface="Liberation Sans" panose="020B0604020202020204" pitchFamily="34" charset="0"/>
+                <a:ea typeface="Liberation Sans" panose="020B0604020202020204" pitchFamily="34" charset="0"/>
+                <a:cs typeface="Liberation Sans" panose="020B0604020202020204" pitchFamily="34" charset="0"/>
+              </a:rPr>
+              <a:t>Hossein</a:t>
+            </a:r>
+          </a:p>
+        </p:txBody>
+      </p:sp>
+      <p:cxnSp>
+        <p:nvCxnSpPr>
+          <p:cNvPr id="5" name="Gerader Verbinder 4">
+            <a:extLst>
+              <a:ext uri="{FF2B5EF4-FFF2-40B4-BE49-F238E27FC236}">
+                <a16:creationId xmlns:a16="http://schemas.microsoft.com/office/drawing/2014/main" id="{2B753068-DCEB-B788-AD32-F324BF9F36F0}"/>
+              </a:ext>
+            </a:extLst>
+          </p:cNvPr>
+          <p:cNvCxnSpPr/>
+          <p:nvPr/>
+        </p:nvCxnSpPr>
+        <p:spPr>
+          <a:xfrm>
+            <a:off x="1698171" y="3830217"/>
+            <a:ext cx="8714792" cy="0"/>
+          </a:xfrm>
+          <a:prstGeom prst="line">
+            <a:avLst/>
+          </a:prstGeom>
+        </p:spPr>
+        <p:style>
+          <a:lnRef idx="2">
+            <a:schemeClr val="dk1"/>
+          </a:lnRef>
+          <a:fillRef idx="0">
+            <a:schemeClr val="dk1"/>
+          </a:fillRef>
+          <a:effectRef idx="1">
+            <a:schemeClr val="dk1"/>
+          </a:effectRef>
+          <a:fontRef idx="minor">
+            <a:schemeClr val="tx1"/>
+          </a:fontRef>
+        </p:style>
+      </p:cxnSp>
+    </p:spTree>
+    <p:extLst>
+      <p:ext uri="{BB962C8B-B14F-4D97-AF65-F5344CB8AC3E}">
+        <p14:creationId xmlns:p14="http://schemas.microsoft.com/office/powerpoint/2010/main" val="3934917728"/>
+      </p:ext>
+    </p:extLst>
+  </p:cSld>
+  <p:clrMapOvr>
+    <a:masterClrMapping/>
+  </p:clrMapOvr>
+</p:sld>
+</file>
+
+<file path=ppt/slides/slide15.xml><?xml version="1.0" encoding="utf-8"?>
+<p:sld xmlns:a="http://schemas.openxmlformats.org/drawingml/2006/main" xmlns:r="http://schemas.openxmlformats.org/officeDocument/2006/relationships" xmlns:p="http://schemas.openxmlformats.org/presentationml/2006/main">
+  <p:cSld>
+    <p:spTree>
+      <p:nvGrpSpPr>
+        <p:cNvPr id="1" name=""/>
+        <p:cNvGrpSpPr/>
+        <p:nvPr/>
+      </p:nvGrpSpPr>
+      <p:grpSpPr>
+        <a:xfrm>
+          <a:off x="0" y="0"/>
+          <a:ext cx="0" cy="0"/>
+          <a:chOff x="0" y="0"/>
+          <a:chExt cx="0" cy="0"/>
+        </a:xfrm>
+      </p:grpSpPr>
+      <p:sp>
+        <p:nvSpPr>
+          <p:cNvPr id="2" name="Titel 1">
+            <a:extLst>
+              <a:ext uri="{FF2B5EF4-FFF2-40B4-BE49-F238E27FC236}">
+                <a16:creationId xmlns:a16="http://schemas.microsoft.com/office/drawing/2014/main" id="{413D0774-18A2-673D-283B-1C04DB36353E}"/>
+              </a:ext>
+            </a:extLst>
+          </p:cNvPr>
+          <p:cNvSpPr>
+            <a:spLocks noGrp="1"/>
+          </p:cNvSpPr>
+          <p:nvPr>
+            <p:ph type="ctrTitle"/>
+          </p:nvPr>
+        </p:nvSpPr>
+        <p:spPr>
+          <a:xfrm>
+            <a:off x="1524000" y="38100"/>
+            <a:ext cx="9144000" cy="926225"/>
+          </a:xfrm>
+        </p:spPr>
+        <p:txBody>
+          <a:bodyPr>
+            <a:normAutofit/>
+          </a:bodyPr>
+          <a:lstStyle/>
+          <a:p>
+            <a:r>
+              <a:rPr lang="de-DE" dirty="0">
+                <a:latin typeface="Impact" panose="020B0806030902050204" pitchFamily="34" charset="0"/>
+              </a:rPr>
+              <a:t>Programmierung</a:t>
+            </a:r>
+          </a:p>
+        </p:txBody>
+      </p:sp>
+      <p:sp>
+        <p:nvSpPr>
+          <p:cNvPr id="3" name="Untertitel 2">
+            <a:extLst>
+              <a:ext uri="{FF2B5EF4-FFF2-40B4-BE49-F238E27FC236}">
+                <a16:creationId xmlns:a16="http://schemas.microsoft.com/office/drawing/2014/main" id="{93304FBE-99DF-EE64-5EB2-94852307E71F}"/>
+              </a:ext>
+            </a:extLst>
+          </p:cNvPr>
+          <p:cNvSpPr>
+            <a:spLocks noGrp="1"/>
+          </p:cNvSpPr>
+          <p:nvPr>
+            <p:ph type="subTitle" idx="1"/>
+          </p:nvPr>
+        </p:nvSpPr>
+        <p:spPr>
+          <a:xfrm>
+            <a:off x="1738604" y="2533472"/>
+            <a:ext cx="9926994" cy="1791056"/>
+          </a:xfrm>
+        </p:spPr>
+        <p:txBody>
+          <a:bodyPr>
+            <a:noAutofit/>
+          </a:bodyPr>
+          <a:lstStyle/>
+          <a:p>
+            <a:pPr marL="514350" indent="-514350" algn="l">
+              <a:buAutoNum type="arabicPeriod"/>
+            </a:pPr>
+            <a:r>
+              <a:rPr lang="de-DE" sz="2500" dirty="0">
+                <a:latin typeface="Liberation Sans" panose="020B0604020202020204" pitchFamily="34" charset="0"/>
+                <a:ea typeface="Liberation Sans" panose="020B0604020202020204" pitchFamily="34" charset="0"/>
+                <a:cs typeface="Liberation Sans" panose="020B0604020202020204" pitchFamily="34" charset="0"/>
+              </a:rPr>
+              <a:t>Mit </a:t>
+            </a:r>
+            <a:r>
+              <a:rPr lang="de-DE" sz="2500" dirty="0" err="1">
+                <a:latin typeface="Liberation Sans" panose="020B0604020202020204" pitchFamily="34" charset="0"/>
+                <a:ea typeface="Liberation Sans" panose="020B0604020202020204" pitchFamily="34" charset="0"/>
+                <a:cs typeface="Liberation Sans" panose="020B0604020202020204" pitchFamily="34" charset="0"/>
+              </a:rPr>
+              <a:t>ChatGPT</a:t>
+            </a:r>
+            <a:r>
+              <a:rPr lang="de-DE" sz="2500" dirty="0">
+                <a:latin typeface="Liberation Sans" panose="020B0604020202020204" pitchFamily="34" charset="0"/>
+                <a:ea typeface="Liberation Sans" panose="020B0604020202020204" pitchFamily="34" charset="0"/>
+                <a:cs typeface="Liberation Sans" panose="020B0604020202020204" pitchFamily="34" charset="0"/>
+              </a:rPr>
+              <a:t> ein Überblick erstellt (nötige Tools usw.)</a:t>
+            </a:r>
+          </a:p>
+          <a:p>
+            <a:pPr marL="514350" indent="-514350" algn="l">
+              <a:buAutoNum type="arabicPeriod"/>
+            </a:pPr>
+            <a:r>
+              <a:rPr lang="de-DE" sz="2500" dirty="0">
+                <a:latin typeface="Liberation Sans" panose="020B0604020202020204" pitchFamily="34" charset="0"/>
+                <a:ea typeface="Liberation Sans" panose="020B0604020202020204" pitchFamily="34" charset="0"/>
+                <a:cs typeface="Liberation Sans" panose="020B0604020202020204" pitchFamily="34" charset="0"/>
+              </a:rPr>
+              <a:t>Verbindung zwischen ESP32 und PS5 Controller (Bluepad32)</a:t>
+            </a:r>
+          </a:p>
+          <a:p>
+            <a:pPr marL="514350" indent="-514350" algn="l">
+              <a:buAutoNum type="arabicPeriod"/>
+            </a:pPr>
+            <a:r>
+              <a:rPr lang="de-DE" sz="2500" dirty="0">
+                <a:latin typeface="Liberation Sans" panose="020B0604020202020204" pitchFamily="34" charset="0"/>
+                <a:ea typeface="Liberation Sans" panose="020B0604020202020204" pitchFamily="34" charset="0"/>
+                <a:cs typeface="Liberation Sans" panose="020B0604020202020204" pitchFamily="34" charset="0"/>
+              </a:rPr>
+              <a:t>Schnittstelle zwischen Elektronik und Code</a:t>
+            </a:r>
+          </a:p>
+        </p:txBody>
+      </p:sp>
+      <p:cxnSp>
+        <p:nvCxnSpPr>
+          <p:cNvPr id="5" name="Gerader Verbinder 4">
+            <a:extLst>
+              <a:ext uri="{FF2B5EF4-FFF2-40B4-BE49-F238E27FC236}">
+                <a16:creationId xmlns:a16="http://schemas.microsoft.com/office/drawing/2014/main" id="{2B753068-DCEB-B788-AD32-F324BF9F36F0}"/>
+              </a:ext>
+            </a:extLst>
+          </p:cNvPr>
+          <p:cNvCxnSpPr/>
+          <p:nvPr/>
+        </p:nvCxnSpPr>
+        <p:spPr>
+          <a:xfrm>
+            <a:off x="1738604" y="987263"/>
+            <a:ext cx="8714792" cy="0"/>
+          </a:xfrm>
+          <a:prstGeom prst="line">
+            <a:avLst/>
+          </a:prstGeom>
+        </p:spPr>
+        <p:style>
+          <a:lnRef idx="2">
+            <a:schemeClr val="dk1"/>
+          </a:lnRef>
+          <a:fillRef idx="0">
+            <a:schemeClr val="dk1"/>
+          </a:fillRef>
+          <a:effectRef idx="1">
+            <a:schemeClr val="dk1"/>
+          </a:effectRef>
+          <a:fontRef idx="minor">
+            <a:schemeClr val="tx1"/>
+          </a:fontRef>
+        </p:style>
+      </p:cxnSp>
+    </p:spTree>
+    <p:extLst>
+      <p:ext uri="{BB962C8B-B14F-4D97-AF65-F5344CB8AC3E}">
+        <p14:creationId xmlns:p14="http://schemas.microsoft.com/office/powerpoint/2010/main" val="2258326793"/>
+      </p:ext>
+    </p:extLst>
+  </p:cSld>
+  <p:clrMapOvr>
+    <a:masterClrMapping/>
+  </p:clrMapOvr>
+</p:sld>
+</file>
+
+<file path=ppt/slides/slide16.xml><?xml version="1.0" encoding="utf-8"?>
+<p:sld xmlns:a="http://schemas.openxmlformats.org/drawingml/2006/main" xmlns:r="http://schemas.openxmlformats.org/officeDocument/2006/relationships" xmlns:p="http://schemas.openxmlformats.org/presentationml/2006/main">
+  <p:cSld>
+    <p:spTree>
+      <p:nvGrpSpPr>
+        <p:cNvPr id="1" name=""/>
+        <p:cNvGrpSpPr/>
+        <p:nvPr/>
+      </p:nvGrpSpPr>
+      <p:grpSpPr>
+        <a:xfrm>
+          <a:off x="0" y="0"/>
+          <a:ext cx="0" cy="0"/>
+          <a:chOff x="0" y="0"/>
+          <a:chExt cx="0" cy="0"/>
+        </a:xfrm>
+      </p:grpSpPr>
+      <p:sp>
+        <p:nvSpPr>
+          <p:cNvPr id="2" name="Titel 1">
+            <a:extLst>
+              <a:ext uri="{FF2B5EF4-FFF2-40B4-BE49-F238E27FC236}">
+                <a16:creationId xmlns:a16="http://schemas.microsoft.com/office/drawing/2014/main" id="{413D0774-18A2-673D-283B-1C04DB36353E}"/>
+              </a:ext>
+            </a:extLst>
+          </p:cNvPr>
+          <p:cNvSpPr>
+            <a:spLocks noGrp="1"/>
+          </p:cNvSpPr>
+          <p:nvPr>
+            <p:ph type="ctrTitle"/>
+          </p:nvPr>
+        </p:nvSpPr>
+        <p:spPr>
+          <a:xfrm>
+            <a:off x="1524000" y="38100"/>
+            <a:ext cx="9144000" cy="926225"/>
+          </a:xfrm>
+        </p:spPr>
+        <p:txBody>
+          <a:bodyPr>
+            <a:normAutofit/>
+          </a:bodyPr>
+          <a:lstStyle/>
+          <a:p>
+            <a:r>
+              <a:rPr lang="de-DE" dirty="0">
+                <a:latin typeface="Impact" panose="020B0806030902050204" pitchFamily="34" charset="0"/>
+              </a:rPr>
+              <a:t>1. Schritt</a:t>
+            </a:r>
+          </a:p>
+        </p:txBody>
+      </p:sp>
+      <p:sp>
+        <p:nvSpPr>
+          <p:cNvPr id="3" name="Untertitel 2">
+            <a:extLst>
+              <a:ext uri="{FF2B5EF4-FFF2-40B4-BE49-F238E27FC236}">
+                <a16:creationId xmlns:a16="http://schemas.microsoft.com/office/drawing/2014/main" id="{93304FBE-99DF-EE64-5EB2-94852307E71F}"/>
+              </a:ext>
+            </a:extLst>
+          </p:cNvPr>
+          <p:cNvSpPr>
+            <a:spLocks noGrp="1"/>
+          </p:cNvSpPr>
+          <p:nvPr>
+            <p:ph type="subTitle" idx="1"/>
+          </p:nvPr>
+        </p:nvSpPr>
+        <p:spPr>
+          <a:xfrm>
+            <a:off x="1738604" y="2391180"/>
+            <a:ext cx="9926994" cy="1791056"/>
+          </a:xfrm>
+        </p:spPr>
+        <p:txBody>
+          <a:bodyPr>
+            <a:noAutofit/>
+          </a:bodyPr>
+          <a:lstStyle/>
+          <a:p>
+            <a:pPr marL="514350" indent="-514350" algn="l">
+              <a:buAutoNum type="arabicPeriod"/>
+            </a:pPr>
+            <a:r>
+              <a:rPr lang="de-DE" sz="2500" dirty="0">
+                <a:latin typeface="Liberation Sans" panose="020B0604020202020204" pitchFamily="34" charset="0"/>
+                <a:ea typeface="Liberation Sans" panose="020B0604020202020204" pitchFamily="34" charset="0"/>
+                <a:cs typeface="Liberation Sans" panose="020B0604020202020204" pitchFamily="34" charset="0"/>
+              </a:rPr>
+              <a:t>Ziel definiert: Was soll der Roboter können?</a:t>
+            </a:r>
+          </a:p>
+          <a:p>
+            <a:pPr marL="514350" indent="-514350" algn="l">
+              <a:buAutoNum type="arabicPeriod"/>
+            </a:pPr>
+            <a:r>
+              <a:rPr lang="de-DE" sz="2500" dirty="0">
+                <a:latin typeface="Liberation Sans" panose="020B0604020202020204" pitchFamily="34" charset="0"/>
+                <a:ea typeface="Liberation Sans" panose="020B0604020202020204" pitchFamily="34" charset="0"/>
+                <a:cs typeface="Liberation Sans" panose="020B0604020202020204" pitchFamily="34" charset="0"/>
+              </a:rPr>
+              <a:t>KI gefragt (z.B. </a:t>
+            </a:r>
+            <a:r>
+              <a:rPr lang="de-DE" sz="2500" dirty="0" err="1">
+                <a:latin typeface="Liberation Sans" panose="020B0604020202020204" pitchFamily="34" charset="0"/>
+                <a:ea typeface="Liberation Sans" panose="020B0604020202020204" pitchFamily="34" charset="0"/>
+                <a:cs typeface="Liberation Sans" panose="020B0604020202020204" pitchFamily="34" charset="0"/>
+              </a:rPr>
+              <a:t>ChatGPT</a:t>
+            </a:r>
+            <a:r>
+              <a:rPr lang="de-DE" sz="2500" dirty="0">
+                <a:latin typeface="Liberation Sans" panose="020B0604020202020204" pitchFamily="34" charset="0"/>
+                <a:ea typeface="Liberation Sans" panose="020B0604020202020204" pitchFamily="34" charset="0"/>
+                <a:cs typeface="Liberation Sans" panose="020B0604020202020204" pitchFamily="34" charset="0"/>
+              </a:rPr>
+              <a:t>/Claude): </a:t>
+            </a:r>
+            <a:r>
+              <a:rPr lang="de-DE" sz="2500" dirty="0" err="1">
+                <a:latin typeface="Liberation Sans" panose="020B0604020202020204" pitchFamily="34" charset="0"/>
+                <a:ea typeface="Liberation Sans" panose="020B0604020202020204" pitchFamily="34" charset="0"/>
+                <a:cs typeface="Liberation Sans" panose="020B0604020202020204" pitchFamily="34" charset="0"/>
+              </a:rPr>
+              <a:t>Weche</a:t>
+            </a:r>
+            <a:r>
+              <a:rPr lang="de-DE" sz="2500" dirty="0">
+                <a:latin typeface="Liberation Sans" panose="020B0604020202020204" pitchFamily="34" charset="0"/>
+                <a:ea typeface="Liberation Sans" panose="020B0604020202020204" pitchFamily="34" charset="0"/>
+                <a:cs typeface="Liberation Sans" panose="020B0604020202020204" pitchFamily="34" charset="0"/>
+              </a:rPr>
+              <a:t> Komponenten brauche ich? Welche Bibliotheken? Welcher Ansatz?</a:t>
+            </a:r>
+          </a:p>
+          <a:p>
+            <a:pPr marL="514350" indent="-514350" algn="l">
+              <a:buAutoNum type="arabicPeriod"/>
+            </a:pPr>
+            <a:r>
+              <a:rPr lang="de-DE" sz="2500" dirty="0">
+                <a:latin typeface="Liberation Sans" panose="020B0604020202020204" pitchFamily="34" charset="0"/>
+                <a:ea typeface="Liberation Sans" panose="020B0604020202020204" pitchFamily="34" charset="0"/>
+                <a:cs typeface="Liberation Sans" panose="020B0604020202020204" pitchFamily="34" charset="0"/>
+              </a:rPr>
+              <a:t>Grobe Architektur skizziert: ESP32 -&gt; Bluetooth -&gt; PS5 Controller -&gt; Motorsteuerung</a:t>
+            </a:r>
+          </a:p>
+          <a:p>
+            <a:pPr marL="514350" indent="-514350" algn="l">
+              <a:buAutoNum type="arabicPeriod"/>
+            </a:pPr>
+            <a:r>
+              <a:rPr lang="de-DE" sz="2500" dirty="0">
+                <a:latin typeface="Liberation Sans" panose="020B0604020202020204" pitchFamily="34" charset="0"/>
+                <a:ea typeface="Liberation Sans" panose="020B0604020202020204" pitchFamily="34" charset="0"/>
+                <a:cs typeface="Liberation Sans" panose="020B0604020202020204" pitchFamily="34" charset="0"/>
+              </a:rPr>
+              <a:t>Offene Fragen gesammelt: Was muss ich noch recherchieren? </a:t>
+            </a:r>
+          </a:p>
+        </p:txBody>
+      </p:sp>
+      <p:cxnSp>
+        <p:nvCxnSpPr>
+          <p:cNvPr id="5" name="Gerader Verbinder 4">
+            <a:extLst>
+              <a:ext uri="{FF2B5EF4-FFF2-40B4-BE49-F238E27FC236}">
+                <a16:creationId xmlns:a16="http://schemas.microsoft.com/office/drawing/2014/main" id="{2B753068-DCEB-B788-AD32-F324BF9F36F0}"/>
+              </a:ext>
+            </a:extLst>
+          </p:cNvPr>
+          <p:cNvCxnSpPr/>
+          <p:nvPr/>
+        </p:nvCxnSpPr>
+        <p:spPr>
+          <a:xfrm>
+            <a:off x="1738604" y="987263"/>
+            <a:ext cx="8714792" cy="0"/>
+          </a:xfrm>
+          <a:prstGeom prst="line">
+            <a:avLst/>
+          </a:prstGeom>
+        </p:spPr>
+        <p:style>
+          <a:lnRef idx="2">
+            <a:schemeClr val="dk1"/>
+          </a:lnRef>
+          <a:fillRef idx="0">
+            <a:schemeClr val="dk1"/>
+          </a:fillRef>
+          <a:effectRef idx="1">
+            <a:schemeClr val="dk1"/>
+          </a:effectRef>
+          <a:fontRef idx="minor">
+            <a:schemeClr val="tx1"/>
+          </a:fontRef>
+        </p:style>
+      </p:cxnSp>
+    </p:spTree>
+    <p:extLst>
+      <p:ext uri="{BB962C8B-B14F-4D97-AF65-F5344CB8AC3E}">
+        <p14:creationId xmlns:p14="http://schemas.microsoft.com/office/powerpoint/2010/main" val="2271442026"/>
+      </p:ext>
+    </p:extLst>
+  </p:cSld>
+  <p:clrMapOvr>
+    <a:masterClrMapping/>
+  </p:clrMapOvr>
+</p:sld>
+</file>
+
+<file path=ppt/slides/slide17.xml><?xml version="1.0" encoding="utf-8"?>
+<p:sld xmlns:a="http://schemas.openxmlformats.org/drawingml/2006/main" xmlns:r="http://schemas.openxmlformats.org/officeDocument/2006/relationships" xmlns:p="http://schemas.openxmlformats.org/presentationml/2006/main">
+  <p:cSld>
+    <p:spTree>
+      <p:nvGrpSpPr>
+        <p:cNvPr id="1" name=""/>
+        <p:cNvGrpSpPr/>
+        <p:nvPr/>
+      </p:nvGrpSpPr>
+      <p:grpSpPr>
+        <a:xfrm>
+          <a:off x="0" y="0"/>
+          <a:ext cx="0" cy="0"/>
+          <a:chOff x="0" y="0"/>
+          <a:chExt cx="0" cy="0"/>
+        </a:xfrm>
+      </p:grpSpPr>
+      <p:sp>
+        <p:nvSpPr>
+          <p:cNvPr id="2" name="Titel 1">
+            <a:extLst>
+              <a:ext uri="{FF2B5EF4-FFF2-40B4-BE49-F238E27FC236}">
+                <a16:creationId xmlns:a16="http://schemas.microsoft.com/office/drawing/2014/main" id="{413D0774-18A2-673D-283B-1C04DB36353E}"/>
+              </a:ext>
+            </a:extLst>
+          </p:cNvPr>
+          <p:cNvSpPr>
+            <a:spLocks noGrp="1"/>
+          </p:cNvSpPr>
+          <p:nvPr>
+            <p:ph type="ctrTitle"/>
+          </p:nvPr>
+        </p:nvSpPr>
+        <p:spPr>
+          <a:xfrm>
+            <a:off x="1524000" y="38100"/>
+            <a:ext cx="9144000" cy="926225"/>
+          </a:xfrm>
+        </p:spPr>
+        <p:txBody>
+          <a:bodyPr>
+            <a:normAutofit/>
+          </a:bodyPr>
+          <a:lstStyle/>
+          <a:p>
+            <a:r>
+              <a:rPr lang="de-DE" dirty="0">
+                <a:latin typeface="Impact" panose="020B0806030902050204" pitchFamily="34" charset="0"/>
+              </a:rPr>
+              <a:t>2. Schritt</a:t>
+            </a:r>
+          </a:p>
+        </p:txBody>
+      </p:sp>
+      <p:sp>
+        <p:nvSpPr>
+          <p:cNvPr id="3" name="Untertitel 2">
+            <a:extLst>
+              <a:ext uri="{FF2B5EF4-FFF2-40B4-BE49-F238E27FC236}">
+                <a16:creationId xmlns:a16="http://schemas.microsoft.com/office/drawing/2014/main" id="{93304FBE-99DF-EE64-5EB2-94852307E71F}"/>
+              </a:ext>
+            </a:extLst>
+          </p:cNvPr>
+          <p:cNvSpPr>
+            <a:spLocks noGrp="1"/>
+          </p:cNvSpPr>
+          <p:nvPr>
+            <p:ph type="subTitle" idx="1"/>
+          </p:nvPr>
+        </p:nvSpPr>
+        <p:spPr>
+          <a:xfrm>
+            <a:off x="1738604" y="2157914"/>
+            <a:ext cx="9926994" cy="1791056"/>
+          </a:xfrm>
+        </p:spPr>
+        <p:txBody>
+          <a:bodyPr>
+            <a:noAutofit/>
+          </a:bodyPr>
+          <a:lstStyle/>
+          <a:p>
+            <a:pPr marL="514350" indent="-514350" algn="l">
+              <a:buAutoNum type="arabicPeriod"/>
+            </a:pPr>
+            <a:r>
+              <a:rPr lang="de-DE" sz="2500" dirty="0" err="1">
+                <a:latin typeface="Liberation Sans" panose="020B0604020202020204" pitchFamily="34" charset="0"/>
+                <a:ea typeface="Liberation Sans" panose="020B0604020202020204" pitchFamily="34" charset="0"/>
+                <a:cs typeface="Liberation Sans" panose="020B0604020202020204" pitchFamily="34" charset="0"/>
+              </a:rPr>
+              <a:t>Youtube</a:t>
+            </a:r>
+            <a:r>
+              <a:rPr lang="de-DE" sz="2500" dirty="0">
+                <a:latin typeface="Liberation Sans" panose="020B0604020202020204" pitchFamily="34" charset="0"/>
+                <a:ea typeface="Liberation Sans" panose="020B0604020202020204" pitchFamily="34" charset="0"/>
+                <a:cs typeface="Liberation Sans" panose="020B0604020202020204" pitchFamily="34" charset="0"/>
+              </a:rPr>
+              <a:t> &amp; Dokumentation (Bluepad32) als Einstieg</a:t>
+            </a:r>
+          </a:p>
+          <a:p>
+            <a:pPr marL="514350" indent="-514350" algn="l">
+              <a:buAutoNum type="arabicPeriod"/>
+            </a:pPr>
+            <a:r>
+              <a:rPr lang="de-DE" sz="2500" dirty="0">
+                <a:latin typeface="Liberation Sans" panose="020B0604020202020204" pitchFamily="34" charset="0"/>
+                <a:ea typeface="Liberation Sans" panose="020B0604020202020204" pitchFamily="34" charset="0"/>
+                <a:cs typeface="Liberation Sans" panose="020B0604020202020204" pitchFamily="34" charset="0"/>
+              </a:rPr>
+              <a:t>Ersten Prototyp erstellt &amp; getestet</a:t>
+            </a:r>
+          </a:p>
+          <a:p>
+            <a:pPr marL="514350" indent="-514350" algn="l">
+              <a:buAutoNum type="arabicPeriod"/>
+            </a:pPr>
+            <a:r>
+              <a:rPr lang="de-DE" sz="2500" dirty="0">
+                <a:latin typeface="Liberation Sans" panose="020B0604020202020204" pitchFamily="34" charset="0"/>
+                <a:ea typeface="Liberation Sans" panose="020B0604020202020204" pitchFamily="34" charset="0"/>
+                <a:cs typeface="Liberation Sans" panose="020B0604020202020204" pitchFamily="34" charset="0"/>
+              </a:rPr>
+              <a:t>Stabile BT-Verbindung ohne MAC-Adresse</a:t>
+            </a:r>
+          </a:p>
+          <a:p>
+            <a:pPr marL="514350" indent="-514350" algn="l">
+              <a:buAutoNum type="arabicPeriod"/>
+            </a:pPr>
+            <a:r>
+              <a:rPr lang="de-DE" sz="2500" dirty="0">
+                <a:latin typeface="Liberation Sans" panose="020B0604020202020204" pitchFamily="34" charset="0"/>
+                <a:ea typeface="Liberation Sans" panose="020B0604020202020204" pitchFamily="34" charset="0"/>
+                <a:cs typeface="Liberation Sans" panose="020B0604020202020204" pitchFamily="34" charset="0"/>
+              </a:rPr>
+              <a:t>Alle Eingaben live auslesbar (Buttons, Achsen, Trigger)</a:t>
+            </a:r>
+          </a:p>
+          <a:p>
+            <a:pPr marL="514350" indent="-514350" algn="l">
+              <a:buAutoNum type="arabicPeriod"/>
+            </a:pPr>
+            <a:r>
+              <a:rPr lang="de-DE" sz="2500" dirty="0">
+                <a:latin typeface="Liberation Sans" panose="020B0604020202020204" pitchFamily="34" charset="0"/>
+                <a:ea typeface="Liberation Sans" panose="020B0604020202020204" pitchFamily="34" charset="0"/>
+                <a:cs typeface="Liberation Sans" panose="020B0604020202020204" pitchFamily="34" charset="0"/>
+              </a:rPr>
+              <a:t>Problem erkannt: Stick Drift / Rauschen bei Nullstellung</a:t>
+            </a:r>
+          </a:p>
+          <a:p>
+            <a:pPr marL="514350" indent="-514350" algn="l">
+              <a:buAutoNum type="arabicPeriod"/>
+            </a:pPr>
+            <a:r>
+              <a:rPr lang="de-DE" sz="2500" dirty="0">
+                <a:latin typeface="Liberation Sans" panose="020B0604020202020204" pitchFamily="34" charset="0"/>
+                <a:ea typeface="Liberation Sans" panose="020B0604020202020204" pitchFamily="34" charset="0"/>
+                <a:cs typeface="Liberation Sans" panose="020B0604020202020204" pitchFamily="34" charset="0"/>
+              </a:rPr>
+              <a:t>Lösung: </a:t>
+            </a:r>
+            <a:r>
+              <a:rPr lang="de-DE" sz="2500" dirty="0" err="1">
+                <a:latin typeface="Liberation Sans" panose="020B0604020202020204" pitchFamily="34" charset="0"/>
+                <a:ea typeface="Liberation Sans" panose="020B0604020202020204" pitchFamily="34" charset="0"/>
+                <a:cs typeface="Liberation Sans" panose="020B0604020202020204" pitchFamily="34" charset="0"/>
+              </a:rPr>
+              <a:t>Deadzone</a:t>
+            </a:r>
+            <a:r>
+              <a:rPr lang="de-DE" sz="2500" dirty="0">
+                <a:latin typeface="Liberation Sans" panose="020B0604020202020204" pitchFamily="34" charset="0"/>
+                <a:ea typeface="Liberation Sans" panose="020B0604020202020204" pitchFamily="34" charset="0"/>
+                <a:cs typeface="Liberation Sans" panose="020B0604020202020204" pitchFamily="34" charset="0"/>
+              </a:rPr>
+              <a:t> + Komplettauslenkung definiert</a:t>
+            </a:r>
+          </a:p>
+        </p:txBody>
+      </p:sp>
+      <p:cxnSp>
+        <p:nvCxnSpPr>
+          <p:cNvPr id="5" name="Gerader Verbinder 4">
+            <a:extLst>
+              <a:ext uri="{FF2B5EF4-FFF2-40B4-BE49-F238E27FC236}">
+                <a16:creationId xmlns:a16="http://schemas.microsoft.com/office/drawing/2014/main" id="{2B753068-DCEB-B788-AD32-F324BF9F36F0}"/>
+              </a:ext>
+            </a:extLst>
+          </p:cNvPr>
+          <p:cNvCxnSpPr/>
+          <p:nvPr/>
+        </p:nvCxnSpPr>
+        <p:spPr>
+          <a:xfrm>
+            <a:off x="1738604" y="987263"/>
+            <a:ext cx="8714792" cy="0"/>
+          </a:xfrm>
+          <a:prstGeom prst="line">
+            <a:avLst/>
+          </a:prstGeom>
+        </p:spPr>
+        <p:style>
+          <a:lnRef idx="2">
+            <a:schemeClr val="dk1"/>
+          </a:lnRef>
+          <a:fillRef idx="0">
+            <a:schemeClr val="dk1"/>
+          </a:fillRef>
+          <a:effectRef idx="1">
+            <a:schemeClr val="dk1"/>
+          </a:effectRef>
+          <a:fontRef idx="minor">
+            <a:schemeClr val="tx1"/>
+          </a:fontRef>
+        </p:style>
+      </p:cxnSp>
+    </p:spTree>
+    <p:extLst>
+      <p:ext uri="{BB962C8B-B14F-4D97-AF65-F5344CB8AC3E}">
+        <p14:creationId xmlns:p14="http://schemas.microsoft.com/office/powerpoint/2010/main" val="2044256461"/>
+      </p:ext>
+    </p:extLst>
+  </p:cSld>
+  <p:clrMapOvr>
+    <a:masterClrMapping/>
+  </p:clrMapOvr>
+</p:sld>
+</file>
+
+<file path=ppt/slides/slide18.xml><?xml version="1.0" encoding="utf-8"?>
+<p:sld xmlns:a="http://schemas.openxmlformats.org/drawingml/2006/main" xmlns:r="http://schemas.openxmlformats.org/officeDocument/2006/relationships" xmlns:p="http://schemas.openxmlformats.org/presentationml/2006/main">
+  <p:cSld>
+    <p:spTree>
+      <p:nvGrpSpPr>
+        <p:cNvPr id="1" name=""/>
+        <p:cNvGrpSpPr/>
+        <p:nvPr/>
+      </p:nvGrpSpPr>
+      <p:grpSpPr>
+        <a:xfrm>
+          <a:off x="0" y="0"/>
+          <a:ext cx="0" cy="0"/>
+          <a:chOff x="0" y="0"/>
+          <a:chExt cx="0" cy="0"/>
+        </a:xfrm>
+      </p:grpSpPr>
+      <p:sp>
+        <p:nvSpPr>
+          <p:cNvPr id="2" name="Titel 1">
+            <a:extLst>
+              <a:ext uri="{FF2B5EF4-FFF2-40B4-BE49-F238E27FC236}">
+                <a16:creationId xmlns:a16="http://schemas.microsoft.com/office/drawing/2014/main" id="{413D0774-18A2-673D-283B-1C04DB36353E}"/>
+              </a:ext>
+            </a:extLst>
+          </p:cNvPr>
+          <p:cNvSpPr>
+            <a:spLocks noGrp="1"/>
+          </p:cNvSpPr>
+          <p:nvPr>
+            <p:ph type="ctrTitle"/>
+          </p:nvPr>
+        </p:nvSpPr>
+        <p:spPr>
+          <a:xfrm>
+            <a:off x="1524000" y="38100"/>
+            <a:ext cx="9144000" cy="926225"/>
+          </a:xfrm>
+        </p:spPr>
+        <p:txBody>
+          <a:bodyPr>
+            <a:normAutofit/>
+          </a:bodyPr>
+          <a:lstStyle/>
+          <a:p>
+            <a:r>
+              <a:rPr lang="de-DE" dirty="0">
+                <a:latin typeface="Impact" panose="020B0806030902050204" pitchFamily="34" charset="0"/>
+              </a:rPr>
+              <a:t>3. Schritt</a:t>
+            </a:r>
+          </a:p>
+        </p:txBody>
+      </p:sp>
+      <p:sp>
+        <p:nvSpPr>
+          <p:cNvPr id="3" name="Untertitel 2">
+            <a:extLst>
+              <a:ext uri="{FF2B5EF4-FFF2-40B4-BE49-F238E27FC236}">
+                <a16:creationId xmlns:a16="http://schemas.microsoft.com/office/drawing/2014/main" id="{93304FBE-99DF-EE64-5EB2-94852307E71F}"/>
+              </a:ext>
+            </a:extLst>
+          </p:cNvPr>
+          <p:cNvSpPr>
+            <a:spLocks noGrp="1"/>
+          </p:cNvSpPr>
+          <p:nvPr>
+            <p:ph type="subTitle" idx="1"/>
+          </p:nvPr>
+        </p:nvSpPr>
+        <p:spPr>
+          <a:xfrm>
+            <a:off x="1738604" y="2148584"/>
+            <a:ext cx="9926994" cy="1791056"/>
+          </a:xfrm>
+        </p:spPr>
+        <p:txBody>
+          <a:bodyPr>
+            <a:noAutofit/>
+          </a:bodyPr>
+          <a:lstStyle/>
+          <a:p>
+            <a:pPr marL="514350" indent="-514350" algn="l">
+              <a:buAutoNum type="arabicPeriod"/>
+            </a:pPr>
+            <a:r>
+              <a:rPr lang="de-DE" sz="2500" dirty="0">
+                <a:latin typeface="Liberation Sans" panose="020B0604020202020204" pitchFamily="34" charset="0"/>
+                <a:ea typeface="Liberation Sans" panose="020B0604020202020204" pitchFamily="34" charset="0"/>
+                <a:cs typeface="Liberation Sans" panose="020B0604020202020204" pitchFamily="34" charset="0"/>
+              </a:rPr>
+              <a:t>Verbindungs-Code als Basis genommen &amp; erweitert</a:t>
+            </a:r>
+          </a:p>
+          <a:p>
+            <a:pPr marL="514350" indent="-514350" algn="l">
+              <a:buAutoNum type="arabicPeriod"/>
+            </a:pPr>
+            <a:r>
+              <a:rPr lang="de-DE" sz="2500" dirty="0">
+                <a:latin typeface="Liberation Sans" panose="020B0604020202020204" pitchFamily="34" charset="0"/>
+                <a:ea typeface="Liberation Sans" panose="020B0604020202020204" pitchFamily="34" charset="0"/>
+                <a:cs typeface="Liberation Sans" panose="020B0604020202020204" pitchFamily="34" charset="0"/>
+              </a:rPr>
+              <a:t>Achsenwerte auf Motorgeschwindigkeit gemappt</a:t>
+            </a:r>
+          </a:p>
+          <a:p>
+            <a:pPr marL="514350" indent="-514350" algn="l">
+              <a:buAutoNum type="arabicPeriod"/>
+            </a:pPr>
+            <a:r>
+              <a:rPr lang="de-DE" sz="2500" dirty="0" err="1">
+                <a:latin typeface="Liberation Sans" panose="020B0604020202020204" pitchFamily="34" charset="0"/>
+                <a:ea typeface="Liberation Sans" panose="020B0604020202020204" pitchFamily="34" charset="0"/>
+                <a:cs typeface="Liberation Sans" panose="020B0604020202020204" pitchFamily="34" charset="0"/>
+              </a:rPr>
+              <a:t>Deadzone</a:t>
+            </a:r>
+            <a:r>
+              <a:rPr lang="de-DE" sz="2500" dirty="0">
+                <a:latin typeface="Liberation Sans" panose="020B0604020202020204" pitchFamily="34" charset="0"/>
+                <a:ea typeface="Liberation Sans" panose="020B0604020202020204" pitchFamily="34" charset="0"/>
+                <a:cs typeface="Liberation Sans" panose="020B0604020202020204" pitchFamily="34" charset="0"/>
+              </a:rPr>
+              <a:t> -&gt; Motoren stehen still</a:t>
+            </a:r>
+          </a:p>
+          <a:p>
+            <a:pPr marL="514350" indent="-514350" algn="l">
+              <a:buAutoNum type="arabicPeriod"/>
+            </a:pPr>
+            <a:r>
+              <a:rPr lang="de-DE" sz="2500" dirty="0">
+                <a:latin typeface="Liberation Sans" panose="020B0604020202020204" pitchFamily="34" charset="0"/>
+                <a:ea typeface="Liberation Sans" panose="020B0604020202020204" pitchFamily="34" charset="0"/>
+                <a:cs typeface="Liberation Sans" panose="020B0604020202020204" pitchFamily="34" charset="0"/>
+              </a:rPr>
+              <a:t>Komplettauslenkung -&gt; Maximale Motorleistung</a:t>
+            </a:r>
+          </a:p>
+          <a:p>
+            <a:pPr marL="514350" indent="-514350" algn="l">
+              <a:buAutoNum type="arabicPeriod"/>
+            </a:pPr>
+            <a:r>
+              <a:rPr lang="de-DE" sz="2500" dirty="0">
+                <a:latin typeface="Liberation Sans" panose="020B0604020202020204" pitchFamily="34" charset="0"/>
+                <a:ea typeface="Liberation Sans" panose="020B0604020202020204" pitchFamily="34" charset="0"/>
+                <a:cs typeface="Liberation Sans" panose="020B0604020202020204" pitchFamily="34" charset="0"/>
+              </a:rPr>
+              <a:t>Richtungssteuerung implementiert</a:t>
+            </a:r>
+          </a:p>
+          <a:p>
+            <a:pPr marL="514350" indent="-514350" algn="l">
+              <a:buAutoNum type="arabicPeriod"/>
+            </a:pPr>
+            <a:endParaRPr lang="de-DE" sz="2500" dirty="0">
+              <a:latin typeface="Liberation Sans" panose="020B0604020202020204" pitchFamily="34" charset="0"/>
+              <a:ea typeface="Liberation Sans" panose="020B0604020202020204" pitchFamily="34" charset="0"/>
+              <a:cs typeface="Liberation Sans" panose="020B0604020202020204" pitchFamily="34" charset="0"/>
+            </a:endParaRPr>
+          </a:p>
+        </p:txBody>
+      </p:sp>
+      <p:cxnSp>
+        <p:nvCxnSpPr>
+          <p:cNvPr id="5" name="Gerader Verbinder 4">
+            <a:extLst>
+              <a:ext uri="{FF2B5EF4-FFF2-40B4-BE49-F238E27FC236}">
+                <a16:creationId xmlns:a16="http://schemas.microsoft.com/office/drawing/2014/main" id="{2B753068-DCEB-B788-AD32-F324BF9F36F0}"/>
+              </a:ext>
+            </a:extLst>
+          </p:cNvPr>
+          <p:cNvCxnSpPr/>
+          <p:nvPr/>
+        </p:nvCxnSpPr>
+        <p:spPr>
+          <a:xfrm>
+            <a:off x="1738604" y="987263"/>
+            <a:ext cx="8714792" cy="0"/>
+          </a:xfrm>
+          <a:prstGeom prst="line">
+            <a:avLst/>
+          </a:prstGeom>
+        </p:spPr>
+        <p:style>
+          <a:lnRef idx="2">
+            <a:schemeClr val="dk1"/>
+          </a:lnRef>
+          <a:fillRef idx="0">
+            <a:schemeClr val="dk1"/>
+          </a:fillRef>
+          <a:effectRef idx="1">
+            <a:schemeClr val="dk1"/>
+          </a:effectRef>
+          <a:fontRef idx="minor">
+            <a:schemeClr val="tx1"/>
+          </a:fontRef>
+        </p:style>
+      </p:cxnSp>
+    </p:spTree>
+    <p:extLst>
+      <p:ext uri="{BB962C8B-B14F-4D97-AF65-F5344CB8AC3E}">
+        <p14:creationId xmlns:p14="http://schemas.microsoft.com/office/powerpoint/2010/main" val="1062851472"/>
+      </p:ext>
+    </p:extLst>
+  </p:cSld>
+  <p:clrMapOvr>
+    <a:masterClrMapping/>
+  </p:clrMapOvr>
+</p:sld>
+</file>
+
+<file path=ppt/slides/slide19.xml><?xml version="1.0" encoding="utf-8"?>
+<p:sld xmlns:a="http://schemas.openxmlformats.org/drawingml/2006/main" xmlns:r="http://schemas.openxmlformats.org/officeDocument/2006/relationships" xmlns:p="http://schemas.openxmlformats.org/presentationml/2006/main">
+  <p:cSld>
+    <p:spTree>
+      <p:nvGrpSpPr>
+        <p:cNvPr id="1" name=""/>
+        <p:cNvGrpSpPr/>
+        <p:nvPr/>
+      </p:nvGrpSpPr>
+      <p:grpSpPr>
+        <a:xfrm>
+          <a:off x="0" y="0"/>
+          <a:ext cx="0" cy="0"/>
+          <a:chOff x="0" y="0"/>
+          <a:chExt cx="0" cy="0"/>
+        </a:xfrm>
+      </p:grpSpPr>
+      <p:sp>
+        <p:nvSpPr>
+          <p:cNvPr id="2" name="Titel 1">
+            <a:extLst>
+              <a:ext uri="{FF2B5EF4-FFF2-40B4-BE49-F238E27FC236}">
+                <a16:creationId xmlns:a16="http://schemas.microsoft.com/office/drawing/2014/main" id="{413D0774-18A2-673D-283B-1C04DB36353E}"/>
+              </a:ext>
+            </a:extLst>
+          </p:cNvPr>
+          <p:cNvSpPr>
+            <a:spLocks noGrp="1"/>
+          </p:cNvSpPr>
+          <p:nvPr>
+            <p:ph type="ctrTitle"/>
+          </p:nvPr>
+        </p:nvSpPr>
+        <p:spPr>
+          <a:xfrm>
+            <a:off x="1524000" y="38100"/>
+            <a:ext cx="9144000" cy="926225"/>
+          </a:xfrm>
+        </p:spPr>
+        <p:txBody>
+          <a:bodyPr>
+            <a:normAutofit/>
+          </a:bodyPr>
+          <a:lstStyle/>
+          <a:p>
+            <a:r>
+              <a:rPr lang="de-DE" dirty="0">
+                <a:latin typeface="Impact" panose="020B0806030902050204" pitchFamily="34" charset="0"/>
+              </a:rPr>
+              <a:t>Code</a:t>
+            </a:r>
+          </a:p>
+        </p:txBody>
+      </p:sp>
+      <p:sp>
+        <p:nvSpPr>
+          <p:cNvPr id="3" name="Untertitel 2">
+            <a:extLst>
+              <a:ext uri="{FF2B5EF4-FFF2-40B4-BE49-F238E27FC236}">
+                <a16:creationId xmlns:a16="http://schemas.microsoft.com/office/drawing/2014/main" id="{93304FBE-99DF-EE64-5EB2-94852307E71F}"/>
+              </a:ext>
+            </a:extLst>
+          </p:cNvPr>
+          <p:cNvSpPr>
+            <a:spLocks noGrp="1"/>
+          </p:cNvSpPr>
+          <p:nvPr>
+            <p:ph type="subTitle" idx="1"/>
+          </p:nvPr>
+        </p:nvSpPr>
+        <p:spPr>
+          <a:xfrm>
+            <a:off x="1738604" y="1840674"/>
+            <a:ext cx="9926994" cy="1791056"/>
+          </a:xfrm>
+        </p:spPr>
+        <p:txBody>
+          <a:bodyPr>
+            <a:noAutofit/>
+          </a:bodyPr>
+          <a:lstStyle/>
+          <a:p>
+            <a:pPr marL="514350" indent="-514350" algn="l">
+              <a:buAutoNum type="arabicPeriod"/>
+            </a:pPr>
+            <a:r>
+              <a:rPr lang="de-DE" sz="2500" dirty="0">
+                <a:latin typeface="Liberation Sans" panose="020B0604020202020204" pitchFamily="34" charset="0"/>
+                <a:ea typeface="Liberation Sans" panose="020B0604020202020204" pitchFamily="34" charset="0"/>
+                <a:cs typeface="Liberation Sans" panose="020B0604020202020204" pitchFamily="34" charset="0"/>
+              </a:rPr>
+              <a:t>Bibliotheken einbinden</a:t>
+            </a:r>
+          </a:p>
+          <a:p>
+            <a:pPr marL="514350" indent="-514350" algn="l">
+              <a:buAutoNum type="arabicPeriod"/>
+            </a:pPr>
+            <a:r>
+              <a:rPr lang="de-DE" sz="2500" dirty="0">
+                <a:latin typeface="Liberation Sans" panose="020B0604020202020204" pitchFamily="34" charset="0"/>
+                <a:ea typeface="Liberation Sans" panose="020B0604020202020204" pitchFamily="34" charset="0"/>
+                <a:cs typeface="Liberation Sans" panose="020B0604020202020204" pitchFamily="34" charset="0"/>
+              </a:rPr>
+              <a:t>Konstanten definieren</a:t>
+            </a:r>
+          </a:p>
+          <a:p>
+            <a:pPr marL="514350" indent="-514350" algn="l">
+              <a:buAutoNum type="arabicPeriod"/>
+            </a:pPr>
+            <a:r>
+              <a:rPr lang="de-DE" sz="2500" dirty="0">
+                <a:latin typeface="Liberation Sans" panose="020B0604020202020204" pitchFamily="34" charset="0"/>
+                <a:ea typeface="Liberation Sans" panose="020B0604020202020204" pitchFamily="34" charset="0"/>
+                <a:cs typeface="Liberation Sans" panose="020B0604020202020204" pitchFamily="34" charset="0"/>
+              </a:rPr>
+              <a:t>Controller Array</a:t>
+            </a:r>
+          </a:p>
+          <a:p>
+            <a:pPr marL="514350" indent="-514350" algn="l">
+              <a:buAutoNum type="arabicPeriod"/>
+            </a:pPr>
+            <a:r>
+              <a:rPr lang="de-DE" sz="2500" dirty="0">
+                <a:latin typeface="Liberation Sans" panose="020B0604020202020204" pitchFamily="34" charset="0"/>
+                <a:ea typeface="Liberation Sans" panose="020B0604020202020204" pitchFamily="34" charset="0"/>
+                <a:cs typeface="Liberation Sans" panose="020B0604020202020204" pitchFamily="34" charset="0"/>
+              </a:rPr>
+              <a:t>Callback Funktion</a:t>
+            </a:r>
+          </a:p>
+          <a:p>
+            <a:pPr marL="514350" indent="-514350" algn="l">
+              <a:buAutoNum type="arabicPeriod"/>
+            </a:pPr>
+            <a:r>
+              <a:rPr lang="de-DE" sz="2500" dirty="0">
+                <a:latin typeface="Liberation Sans" panose="020B0604020202020204" pitchFamily="34" charset="0"/>
+                <a:ea typeface="Liberation Sans" panose="020B0604020202020204" pitchFamily="34" charset="0"/>
+                <a:cs typeface="Liberation Sans" panose="020B0604020202020204" pitchFamily="34" charset="0"/>
+              </a:rPr>
+              <a:t>Setup()</a:t>
+            </a:r>
+          </a:p>
+          <a:p>
+            <a:pPr marL="514350" indent="-514350" algn="l">
+              <a:buAutoNum type="arabicPeriod"/>
+            </a:pPr>
+            <a:r>
+              <a:rPr lang="de-DE" sz="2500" dirty="0">
+                <a:latin typeface="Liberation Sans" panose="020B0604020202020204" pitchFamily="34" charset="0"/>
+                <a:ea typeface="Liberation Sans" panose="020B0604020202020204" pitchFamily="34" charset="0"/>
+                <a:cs typeface="Liberation Sans" panose="020B0604020202020204" pitchFamily="34" charset="0"/>
+              </a:rPr>
+              <a:t>Loop()</a:t>
+            </a:r>
+          </a:p>
+          <a:p>
+            <a:pPr marL="514350" indent="-514350" algn="l">
+              <a:buAutoNum type="arabicPeriod"/>
+            </a:pPr>
+            <a:endParaRPr lang="de-DE" sz="2500" dirty="0">
+              <a:latin typeface="Liberation Sans" panose="020B0604020202020204" pitchFamily="34" charset="0"/>
+              <a:ea typeface="Liberation Sans" panose="020B0604020202020204" pitchFamily="34" charset="0"/>
+              <a:cs typeface="Liberation Sans" panose="020B0604020202020204" pitchFamily="34" charset="0"/>
+            </a:endParaRPr>
+          </a:p>
+        </p:txBody>
+      </p:sp>
+      <p:cxnSp>
+        <p:nvCxnSpPr>
+          <p:cNvPr id="5" name="Gerader Verbinder 4">
+            <a:extLst>
+              <a:ext uri="{FF2B5EF4-FFF2-40B4-BE49-F238E27FC236}">
+                <a16:creationId xmlns:a16="http://schemas.microsoft.com/office/drawing/2014/main" id="{2B753068-DCEB-B788-AD32-F324BF9F36F0}"/>
+              </a:ext>
+            </a:extLst>
+          </p:cNvPr>
+          <p:cNvCxnSpPr/>
+          <p:nvPr/>
+        </p:nvCxnSpPr>
+        <p:spPr>
+          <a:xfrm>
+            <a:off x="1738604" y="987263"/>
+            <a:ext cx="8714792" cy="0"/>
+          </a:xfrm>
+          <a:prstGeom prst="line">
+            <a:avLst/>
+          </a:prstGeom>
+        </p:spPr>
+        <p:style>
+          <a:lnRef idx="2">
+            <a:schemeClr val="dk1"/>
+          </a:lnRef>
+          <a:fillRef idx="0">
+            <a:schemeClr val="dk1"/>
+          </a:fillRef>
+          <a:effectRef idx="1">
+            <a:schemeClr val="dk1"/>
+          </a:effectRef>
+          <a:fontRef idx="minor">
+            <a:schemeClr val="tx1"/>
+          </a:fontRef>
+        </p:style>
+      </p:cxnSp>
+    </p:spTree>
+    <p:extLst>
+      <p:ext uri="{BB962C8B-B14F-4D97-AF65-F5344CB8AC3E}">
+        <p14:creationId xmlns:p14="http://schemas.microsoft.com/office/powerpoint/2010/main" val="4189265723"/>
+      </p:ext>
+    </p:extLst>
+  </p:cSld>
+  <p:clrMapOvr>
+    <a:masterClrMapping/>
+  </p:clrMapOvr>
+</p:sld>
+</file>
+
+<file path=ppt/slides/slide2.xml><?xml version="1.0" encoding="utf-8"?>
+<p:sld xmlns:a="http://schemas.openxmlformats.org/drawingml/2006/main" xmlns:r="http://schemas.openxmlformats.org/officeDocument/2006/relationships" xmlns:p="http://schemas.openxmlformats.org/presentationml/2006/main">
+  <p:cSld>
+    <p:spTree>
+      <p:nvGrpSpPr>
+        <p:cNvPr id="1" name=""/>
+        <p:cNvGrpSpPr/>
+        <p:nvPr/>
+      </p:nvGrpSpPr>
+      <p:grpSpPr>
+        <a:xfrm>
+          <a:off x="0" y="0"/>
+          <a:ext cx="0" cy="0"/>
+          <a:chOff x="0" y="0"/>
+          <a:chExt cx="0" cy="0"/>
+        </a:xfrm>
+      </p:grpSpPr>
+      <p:sp>
+        <p:nvSpPr>
+          <p:cNvPr id="2" name="Titel 1">
+            <a:extLst>
+              <a:ext uri="{FF2B5EF4-FFF2-40B4-BE49-F238E27FC236}">
+                <a16:creationId xmlns:a16="http://schemas.microsoft.com/office/drawing/2014/main" id="{413D0774-18A2-673D-283B-1C04DB36353E}"/>
+              </a:ext>
+            </a:extLst>
+          </p:cNvPr>
+          <p:cNvSpPr>
+            <a:spLocks noGrp="1"/>
+          </p:cNvSpPr>
+          <p:nvPr>
+            <p:ph type="ctrTitle"/>
+          </p:nvPr>
+        </p:nvSpPr>
+        <p:spPr>
+          <a:xfrm>
+            <a:off x="1524000" y="-181393"/>
+            <a:ext cx="9144000" cy="1241941"/>
+          </a:xfrm>
+        </p:spPr>
+        <p:txBody>
+          <a:bodyPr>
+            <a:normAutofit/>
+          </a:bodyPr>
+          <a:lstStyle/>
+          <a:p>
+            <a:r>
+              <a:rPr lang="de-DE" dirty="0">
+                <a:latin typeface="Impact" panose="020B0806030902050204" pitchFamily="34" charset="0"/>
+              </a:rPr>
+              <a:t>Inhaltsverzeichnis</a:t>
+            </a:r>
+          </a:p>
+        </p:txBody>
+      </p:sp>
+      <p:sp>
+        <p:nvSpPr>
+          <p:cNvPr id="3" name="Untertitel 2">
+            <a:extLst>
+              <a:ext uri="{FF2B5EF4-FFF2-40B4-BE49-F238E27FC236}">
+                <a16:creationId xmlns:a16="http://schemas.microsoft.com/office/drawing/2014/main" id="{93304FBE-99DF-EE64-5EB2-94852307E71F}"/>
+              </a:ext>
+            </a:extLst>
+          </p:cNvPr>
+          <p:cNvSpPr>
+            <a:spLocks noGrp="1"/>
+          </p:cNvSpPr>
+          <p:nvPr>
+            <p:ph type="subTitle" idx="1"/>
+          </p:nvPr>
+        </p:nvSpPr>
+        <p:spPr>
+          <a:xfrm>
+            <a:off x="3497424" y="2533472"/>
+            <a:ext cx="5197151" cy="1791056"/>
+          </a:xfrm>
+        </p:spPr>
+        <p:txBody>
+          <a:bodyPr>
+            <a:noAutofit/>
+          </a:bodyPr>
+          <a:lstStyle/>
+          <a:p>
+            <a:pPr marL="514350" indent="-514350" algn="l">
+              <a:buFont typeface="+mj-lt"/>
+              <a:buAutoNum type="arabicPeriod"/>
+            </a:pPr>
+            <a:r>
+              <a:rPr lang="de-DE" sz="2000" dirty="0">
+                <a:latin typeface="Liberation Sans" panose="020B0604020202020204" pitchFamily="34" charset="0"/>
+                <a:ea typeface="Liberation Sans" panose="020B0604020202020204" pitchFamily="34" charset="0"/>
+                <a:cs typeface="Liberation Sans" panose="020B0604020202020204" pitchFamily="34" charset="0"/>
+              </a:rPr>
+              <a:t>Konstruktion und Planung</a:t>
+            </a:r>
+          </a:p>
+          <a:p>
+            <a:pPr marL="514350" indent="-514350" algn="l">
+              <a:buFont typeface="+mj-lt"/>
+              <a:buAutoNum type="arabicPeriod"/>
+            </a:pPr>
+            <a:r>
+              <a:rPr lang="de-DE" sz="2000" dirty="0">
+                <a:latin typeface="Liberation Sans" panose="020B0604020202020204" pitchFamily="34" charset="0"/>
+                <a:ea typeface="Liberation Sans" panose="020B0604020202020204" pitchFamily="34" charset="0"/>
+                <a:cs typeface="Liberation Sans" panose="020B0604020202020204" pitchFamily="34" charset="0"/>
+              </a:rPr>
+              <a:t>Elektronik und Verkabelung</a:t>
+            </a:r>
+          </a:p>
+          <a:p>
+            <a:pPr marL="514350" indent="-514350" algn="l">
+              <a:buFont typeface="+mj-lt"/>
+              <a:buAutoNum type="arabicPeriod"/>
+            </a:pPr>
+            <a:r>
+              <a:rPr lang="de-DE" sz="2000" dirty="0">
+                <a:latin typeface="Liberation Sans" panose="020B0604020202020204" pitchFamily="34" charset="0"/>
+                <a:ea typeface="Liberation Sans" panose="020B0604020202020204" pitchFamily="34" charset="0"/>
+                <a:cs typeface="Liberation Sans" panose="020B0604020202020204" pitchFamily="34" charset="0"/>
+              </a:rPr>
+              <a:t>Programmierung</a:t>
+            </a:r>
+          </a:p>
+          <a:p>
+            <a:pPr marL="514350" indent="-514350" algn="l">
+              <a:buFont typeface="+mj-lt"/>
+              <a:buAutoNum type="arabicPeriod"/>
+            </a:pPr>
+            <a:r>
+              <a:rPr lang="de-DE" sz="2000" dirty="0">
+                <a:latin typeface="Liberation Sans" panose="020B0604020202020204" pitchFamily="34" charset="0"/>
+                <a:ea typeface="Liberation Sans" panose="020B0604020202020204" pitchFamily="34" charset="0"/>
+                <a:cs typeface="Liberation Sans" panose="020B0604020202020204" pitchFamily="34" charset="0"/>
+              </a:rPr>
+              <a:t>Allgemeines</a:t>
+            </a:r>
+          </a:p>
+        </p:txBody>
+      </p:sp>
+      <p:cxnSp>
+        <p:nvCxnSpPr>
+          <p:cNvPr id="5" name="Gerader Verbinder 4">
+            <a:extLst>
+              <a:ext uri="{FF2B5EF4-FFF2-40B4-BE49-F238E27FC236}">
+                <a16:creationId xmlns:a16="http://schemas.microsoft.com/office/drawing/2014/main" id="{2B753068-DCEB-B788-AD32-F324BF9F36F0}"/>
+              </a:ext>
+            </a:extLst>
+          </p:cNvPr>
+          <p:cNvCxnSpPr/>
+          <p:nvPr/>
+        </p:nvCxnSpPr>
+        <p:spPr>
+          <a:xfrm>
+            <a:off x="1738604" y="1137542"/>
+            <a:ext cx="8714792" cy="0"/>
+          </a:xfrm>
+          <a:prstGeom prst="line">
+            <a:avLst/>
+          </a:prstGeom>
+        </p:spPr>
+        <p:style>
+          <a:lnRef idx="2">
+            <a:schemeClr val="dk1"/>
+          </a:lnRef>
+          <a:fillRef idx="0">
+            <a:schemeClr val="dk1"/>
+          </a:fillRef>
+          <a:effectRef idx="1">
+            <a:schemeClr val="dk1"/>
+          </a:effectRef>
+          <a:fontRef idx="minor">
+            <a:schemeClr val="tx1"/>
+          </a:fontRef>
+        </p:style>
+      </p:cxnSp>
+    </p:spTree>
+    <p:extLst>
+      <p:ext uri="{BB962C8B-B14F-4D97-AF65-F5344CB8AC3E}">
+        <p14:creationId xmlns:p14="http://schemas.microsoft.com/office/powerpoint/2010/main" val="908878147"/>
+      </p:ext>
+    </p:extLst>
+  </p:cSld>
+  <p:clrMapOvr>
+    <a:masterClrMapping/>
+  </p:clrMapOvr>
+</p:sld>
+</file>
+
+<file path=ppt/slides/slide20.xml><?xml version="1.0" encoding="utf-8"?>
+<p:sld xmlns:a="http://schemas.openxmlformats.org/drawingml/2006/main" xmlns:r="http://schemas.openxmlformats.org/officeDocument/2006/relationships" xmlns:p="http://schemas.openxmlformats.org/presentationml/2006/main">
+  <p:cSld>
+    <p:spTree>
+      <p:nvGrpSpPr>
+        <p:cNvPr id="1" name=""/>
+        <p:cNvGrpSpPr/>
+        <p:nvPr/>
+      </p:nvGrpSpPr>
+      <p:grpSpPr>
+        <a:xfrm>
+          <a:off x="0" y="0"/>
+          <a:ext cx="0" cy="0"/>
+          <a:chOff x="0" y="0"/>
+          <a:chExt cx="0" cy="0"/>
+        </a:xfrm>
+      </p:grpSpPr>
+      <p:sp>
+        <p:nvSpPr>
+          <p:cNvPr id="2" name="Titel 1">
+            <a:extLst>
+              <a:ext uri="{FF2B5EF4-FFF2-40B4-BE49-F238E27FC236}">
+                <a16:creationId xmlns:a16="http://schemas.microsoft.com/office/drawing/2014/main" id="{413D0774-18A2-673D-283B-1C04DB36353E}"/>
+              </a:ext>
+            </a:extLst>
+          </p:cNvPr>
+          <p:cNvSpPr>
+            <a:spLocks noGrp="1"/>
+          </p:cNvSpPr>
+          <p:nvPr>
+            <p:ph type="ctrTitle"/>
+          </p:nvPr>
+        </p:nvSpPr>
+        <p:spPr>
+          <a:xfrm>
+            <a:off x="1524000" y="38100"/>
+            <a:ext cx="9144000" cy="926225"/>
+          </a:xfrm>
+        </p:spPr>
+        <p:txBody>
+          <a:bodyPr>
+            <a:normAutofit/>
+          </a:bodyPr>
+          <a:lstStyle/>
+          <a:p>
+            <a:r>
+              <a:rPr lang="de-DE" dirty="0">
+                <a:latin typeface="Impact" panose="020B0806030902050204" pitchFamily="34" charset="0"/>
+              </a:rPr>
+              <a:t>Bibliotheken</a:t>
+            </a:r>
+          </a:p>
+        </p:txBody>
+      </p:sp>
+      <p:sp>
+        <p:nvSpPr>
+          <p:cNvPr id="3" name="Untertitel 2">
+            <a:extLst>
+              <a:ext uri="{FF2B5EF4-FFF2-40B4-BE49-F238E27FC236}">
+                <a16:creationId xmlns:a16="http://schemas.microsoft.com/office/drawing/2014/main" id="{93304FBE-99DF-EE64-5EB2-94852307E71F}"/>
+              </a:ext>
+            </a:extLst>
+          </p:cNvPr>
+          <p:cNvSpPr>
+            <a:spLocks noGrp="1"/>
+          </p:cNvSpPr>
+          <p:nvPr>
+            <p:ph type="subTitle" idx="1"/>
+          </p:nvPr>
+        </p:nvSpPr>
+        <p:spPr>
+          <a:xfrm>
+            <a:off x="947834" y="2321200"/>
+            <a:ext cx="9926994" cy="1791056"/>
+          </a:xfrm>
+        </p:spPr>
+        <p:txBody>
+          <a:bodyPr>
+            <a:noAutofit/>
+          </a:bodyPr>
+          <a:lstStyle/>
+          <a:p>
+            <a:r>
+              <a:rPr lang="de-DE" sz="3000" dirty="0">
+                <a:latin typeface="Liberation Sans" panose="020B0604020202020204" pitchFamily="34" charset="0"/>
+                <a:ea typeface="Liberation Sans" panose="020B0604020202020204" pitchFamily="34" charset="0"/>
+                <a:cs typeface="Liberation Sans" panose="020B0604020202020204" pitchFamily="34" charset="0"/>
+              </a:rPr>
+              <a:t>#include &lt;Bluepad32.h&gt;</a:t>
+            </a:r>
+          </a:p>
+        </p:txBody>
+      </p:sp>
+      <p:cxnSp>
+        <p:nvCxnSpPr>
+          <p:cNvPr id="5" name="Gerader Verbinder 4">
+            <a:extLst>
+              <a:ext uri="{FF2B5EF4-FFF2-40B4-BE49-F238E27FC236}">
+                <a16:creationId xmlns:a16="http://schemas.microsoft.com/office/drawing/2014/main" id="{2B753068-DCEB-B788-AD32-F324BF9F36F0}"/>
+              </a:ext>
+            </a:extLst>
+          </p:cNvPr>
+          <p:cNvCxnSpPr/>
+          <p:nvPr/>
+        </p:nvCxnSpPr>
+        <p:spPr>
+          <a:xfrm>
+            <a:off x="1738604" y="987263"/>
+            <a:ext cx="8714792" cy="0"/>
+          </a:xfrm>
+          <a:prstGeom prst="line">
+            <a:avLst/>
+          </a:prstGeom>
+        </p:spPr>
+        <p:style>
+          <a:lnRef idx="2">
+            <a:schemeClr val="dk1"/>
+          </a:lnRef>
+          <a:fillRef idx="0">
+            <a:schemeClr val="dk1"/>
+          </a:fillRef>
+          <a:effectRef idx="1">
+            <a:schemeClr val="dk1"/>
+          </a:effectRef>
+          <a:fontRef idx="minor">
+            <a:schemeClr val="tx1"/>
+          </a:fontRef>
+        </p:style>
+      </p:cxnSp>
+    </p:spTree>
+    <p:extLst>
+      <p:ext uri="{BB962C8B-B14F-4D97-AF65-F5344CB8AC3E}">
+        <p14:creationId xmlns:p14="http://schemas.microsoft.com/office/powerpoint/2010/main" val="3031837503"/>
+      </p:ext>
+    </p:extLst>
+  </p:cSld>
+  <p:clrMapOvr>
+    <a:masterClrMapping/>
+  </p:clrMapOvr>
+</p:sld>
+</file>
+
+<file path=ppt/slides/slide21.xml><?xml version="1.0" encoding="utf-8"?>
+<p:sld xmlns:a="http://schemas.openxmlformats.org/drawingml/2006/main" xmlns:r="http://schemas.openxmlformats.org/officeDocument/2006/relationships" xmlns:p="http://schemas.openxmlformats.org/presentationml/2006/main">
+  <p:cSld>
+    <p:spTree>
+      <p:nvGrpSpPr>
+        <p:cNvPr id="1" name=""/>
+        <p:cNvGrpSpPr/>
+        <p:nvPr/>
+      </p:nvGrpSpPr>
+      <p:grpSpPr>
+        <a:xfrm>
+          <a:off x="0" y="0"/>
+          <a:ext cx="0" cy="0"/>
+          <a:chOff x="0" y="0"/>
+          <a:chExt cx="0" cy="0"/>
+        </a:xfrm>
+      </p:grpSpPr>
+      <p:sp>
+        <p:nvSpPr>
+          <p:cNvPr id="2" name="Titel 1">
+            <a:extLst>
+              <a:ext uri="{FF2B5EF4-FFF2-40B4-BE49-F238E27FC236}">
+                <a16:creationId xmlns:a16="http://schemas.microsoft.com/office/drawing/2014/main" id="{413D0774-18A2-673D-283B-1C04DB36353E}"/>
+              </a:ext>
+            </a:extLst>
+          </p:cNvPr>
+          <p:cNvSpPr>
+            <a:spLocks noGrp="1"/>
+          </p:cNvSpPr>
+          <p:nvPr>
+            <p:ph type="ctrTitle"/>
+          </p:nvPr>
+        </p:nvSpPr>
+        <p:spPr>
+          <a:xfrm>
+            <a:off x="1524000" y="38100"/>
+            <a:ext cx="9144000" cy="926225"/>
+          </a:xfrm>
+        </p:spPr>
+        <p:txBody>
+          <a:bodyPr>
+            <a:normAutofit/>
+          </a:bodyPr>
+          <a:lstStyle/>
+          <a:p>
+            <a:r>
+              <a:rPr lang="de-DE" dirty="0">
+                <a:latin typeface="Impact" panose="020B0806030902050204" pitchFamily="34" charset="0"/>
+              </a:rPr>
+              <a:t>Konstanten definieren</a:t>
+            </a:r>
+          </a:p>
+        </p:txBody>
+      </p:sp>
+      <p:sp>
+        <p:nvSpPr>
+          <p:cNvPr id="3" name="Untertitel 2">
+            <a:extLst>
+              <a:ext uri="{FF2B5EF4-FFF2-40B4-BE49-F238E27FC236}">
+                <a16:creationId xmlns:a16="http://schemas.microsoft.com/office/drawing/2014/main" id="{93304FBE-99DF-EE64-5EB2-94852307E71F}"/>
+              </a:ext>
+            </a:extLst>
+          </p:cNvPr>
+          <p:cNvSpPr>
+            <a:spLocks noGrp="1"/>
+          </p:cNvSpPr>
+          <p:nvPr>
+            <p:ph type="subTitle" idx="1"/>
+          </p:nvPr>
+        </p:nvSpPr>
+        <p:spPr>
+          <a:xfrm>
+            <a:off x="6618515" y="2117706"/>
+            <a:ext cx="4049485" cy="3753029"/>
+          </a:xfrm>
+        </p:spPr>
+        <p:txBody>
+          <a:bodyPr>
+            <a:noAutofit/>
+          </a:bodyPr>
+          <a:lstStyle/>
+          <a:p>
+            <a:pPr>
+              <a:lnSpc>
+                <a:spcPct val="90000"/>
+              </a:lnSpc>
+              <a:spcBef>
+                <a:spcPts val="1000"/>
+              </a:spcBef>
+            </a:pPr>
+            <a:r>
+              <a:rPr lang="de-DE" sz="2500" dirty="0">
+                <a:latin typeface="Liberation Sans" panose="020B0604020202020204" pitchFamily="34" charset="0"/>
+                <a:ea typeface="Liberation Sans" panose="020B0604020202020204" pitchFamily="34" charset="0"/>
+                <a:cs typeface="Liberation Sans" panose="020B0604020202020204" pitchFamily="34" charset="0"/>
+              </a:rPr>
+              <a:t>#</a:t>
+            </a:r>
+            <a:r>
+              <a:rPr lang="de-DE" sz="2500" dirty="0"/>
+              <a:t>#define R_R_PWM 23</a:t>
+            </a:r>
+          </a:p>
+          <a:p>
+            <a:pPr>
+              <a:lnSpc>
+                <a:spcPct val="90000"/>
+              </a:lnSpc>
+              <a:spcBef>
+                <a:spcPts val="1000"/>
+              </a:spcBef>
+            </a:pPr>
+            <a:r>
+              <a:rPr lang="de-DE" sz="2500" dirty="0"/>
+              <a:t>#define PWM_FREQ 1000 </a:t>
+            </a:r>
+          </a:p>
+          <a:p>
+            <a:pPr>
+              <a:lnSpc>
+                <a:spcPct val="90000"/>
+              </a:lnSpc>
+              <a:spcBef>
+                <a:spcPts val="1000"/>
+              </a:spcBef>
+            </a:pPr>
+            <a:r>
+              <a:rPr lang="de-DE" sz="2500" dirty="0"/>
+              <a:t>#define PWM_RES 8 </a:t>
+            </a:r>
+          </a:p>
+          <a:p>
+            <a:pPr>
+              <a:lnSpc>
+                <a:spcPct val="90000"/>
+              </a:lnSpc>
+              <a:spcBef>
+                <a:spcPts val="1000"/>
+              </a:spcBef>
+            </a:pPr>
+            <a:r>
+              <a:rPr lang="de-DE" sz="2500" dirty="0"/>
+              <a:t>#define CH_L_FWD 0 </a:t>
+            </a:r>
+          </a:p>
+          <a:p>
+            <a:pPr>
+              <a:lnSpc>
+                <a:spcPct val="90000"/>
+              </a:lnSpc>
+              <a:spcBef>
+                <a:spcPts val="1000"/>
+              </a:spcBef>
+            </a:pPr>
+            <a:r>
+              <a:rPr lang="de-DE" sz="2500" dirty="0"/>
+              <a:t>#define CH_L_BWD 1</a:t>
+            </a:r>
+          </a:p>
+          <a:p>
+            <a:pPr>
+              <a:lnSpc>
+                <a:spcPct val="90000"/>
+              </a:lnSpc>
+              <a:spcBef>
+                <a:spcPts val="1000"/>
+              </a:spcBef>
+            </a:pPr>
+            <a:r>
+              <a:rPr lang="de-DE" sz="2500" dirty="0"/>
+              <a:t>#define CH_R_FWD 2</a:t>
+            </a:r>
+          </a:p>
+          <a:p>
+            <a:pPr>
+              <a:lnSpc>
+                <a:spcPct val="90000"/>
+              </a:lnSpc>
+              <a:spcBef>
+                <a:spcPts val="1000"/>
+              </a:spcBef>
+            </a:pPr>
+            <a:r>
+              <a:rPr lang="de-DE" sz="2500" dirty="0"/>
+              <a:t>#define CH_R_BWD 3</a:t>
+            </a:r>
+          </a:p>
+          <a:p>
+            <a:pPr>
+              <a:lnSpc>
+                <a:spcPct val="90000"/>
+              </a:lnSpc>
+              <a:spcBef>
+                <a:spcPts val="1000"/>
+              </a:spcBef>
+            </a:pPr>
+            <a:r>
+              <a:rPr lang="de-DE" sz="2500" dirty="0"/>
+              <a:t>#define DEADZONE 10</a:t>
+            </a:r>
+          </a:p>
+          <a:p>
+            <a:endParaRPr lang="de-DE" sz="2500" dirty="0">
+              <a:latin typeface="Liberation Sans" panose="020B0604020202020204" pitchFamily="34" charset="0"/>
+              <a:ea typeface="Liberation Sans" panose="020B0604020202020204" pitchFamily="34" charset="0"/>
+              <a:cs typeface="Liberation Sans" panose="020B0604020202020204" pitchFamily="34" charset="0"/>
+            </a:endParaRPr>
+          </a:p>
+        </p:txBody>
+      </p:sp>
+      <p:cxnSp>
+        <p:nvCxnSpPr>
+          <p:cNvPr id="5" name="Gerader Verbinder 4">
+            <a:extLst>
+              <a:ext uri="{FF2B5EF4-FFF2-40B4-BE49-F238E27FC236}">
+                <a16:creationId xmlns:a16="http://schemas.microsoft.com/office/drawing/2014/main" id="{2B753068-DCEB-B788-AD32-F324BF9F36F0}"/>
+              </a:ext>
+            </a:extLst>
+          </p:cNvPr>
+          <p:cNvCxnSpPr/>
+          <p:nvPr/>
+        </p:nvCxnSpPr>
+        <p:spPr>
+          <a:xfrm>
+            <a:off x="1738604" y="987263"/>
+            <a:ext cx="8714792" cy="0"/>
+          </a:xfrm>
+          <a:prstGeom prst="line">
+            <a:avLst/>
+          </a:prstGeom>
+        </p:spPr>
+        <p:style>
+          <a:lnRef idx="2">
+            <a:schemeClr val="dk1"/>
+          </a:lnRef>
+          <a:fillRef idx="0">
+            <a:schemeClr val="dk1"/>
+          </a:fillRef>
+          <a:effectRef idx="1">
+            <a:schemeClr val="dk1"/>
+          </a:effectRef>
+          <a:fontRef idx="minor">
+            <a:schemeClr val="tx1"/>
+          </a:fontRef>
+        </p:style>
+      </p:cxnSp>
+      <p:sp>
+        <p:nvSpPr>
+          <p:cNvPr id="4" name="Untertitel 2">
+            <a:extLst>
+              <a:ext uri="{FF2B5EF4-FFF2-40B4-BE49-F238E27FC236}">
+                <a16:creationId xmlns:a16="http://schemas.microsoft.com/office/drawing/2014/main" id="{5BCD6D33-3B0C-F6D2-3CA6-3C3AC3966F90}"/>
               </a:ext>
             </a:extLst>
           </p:cNvPr>
@@ -7130,8 +7066,8 @@
         </p:nvSpPr>
         <p:spPr>
           <a:xfrm>
-            <a:off x="7651630" y="2095322"/>
-            <a:ext cx="2639330" cy="1791056"/>
+            <a:off x="1524001" y="2117705"/>
+            <a:ext cx="4049485" cy="3753029"/>
           </a:xfrm>
           <a:prstGeom prst="rect">
             <a:avLst/>
@@ -7306,36 +7242,361 @@
             </a:lvl9pPr>
           </a:lstStyle>
           <a:p>
-            <a:r>
-              <a:rPr lang="de-DE" sz="2000" b="1" dirty="0">
-                <a:latin typeface="Liberation Sans" panose="020B0604020202020204" pitchFamily="34" charset="0"/>
-                <a:ea typeface="Liberation Sans" panose="020B0604020202020204" pitchFamily="34" charset="0"/>
-                <a:cs typeface="Liberation Sans" panose="020B0604020202020204" pitchFamily="34" charset="0"/>
-              </a:rPr>
-              <a:t>Allgemein</a:t>
-            </a:r>
-          </a:p>
-          <a:p>
             <a:pPr algn="l"/>
-            <a:endParaRPr lang="de-DE" sz="2000" b="1" dirty="0">
+            <a:r>
+              <a:rPr lang="de-DE" sz="2500" dirty="0">
+                <a:ea typeface="+mn-lt"/>
+                <a:cs typeface="+mn-lt"/>
+              </a:rPr>
+              <a:t>#define L_EN 27</a:t>
+            </a:r>
+            <a:endParaRPr lang="en-US" sz="2500" dirty="0"/>
+          </a:p>
+          <a:p>
+            <a:pPr algn="l"/>
+            <a:r>
+              <a:rPr lang="de-DE" sz="2500" dirty="0">
+                <a:ea typeface="+mn-lt"/>
+                <a:cs typeface="+mn-lt"/>
+              </a:rPr>
+              <a:t>#define R_EN 26</a:t>
+            </a:r>
+            <a:endParaRPr lang="de-DE" sz="2500" dirty="0"/>
+          </a:p>
+          <a:p>
+            <a:pPr algn="l"/>
+            <a:r>
+              <a:rPr lang="de-DE" sz="2500" dirty="0">
+                <a:ea typeface="+mn-lt"/>
+                <a:cs typeface="+mn-lt"/>
+              </a:rPr>
+              <a:t>#define L_PWM 33</a:t>
+            </a:r>
+            <a:endParaRPr lang="de-DE" sz="2500" dirty="0"/>
+          </a:p>
+          <a:p>
+            <a:pPr algn="l"/>
+            <a:r>
+              <a:rPr lang="de-DE" sz="2500" dirty="0">
+                <a:ea typeface="+mn-lt"/>
+                <a:cs typeface="+mn-lt"/>
+              </a:rPr>
+              <a:t>#define R_PWM_L 25 </a:t>
+            </a:r>
+            <a:endParaRPr lang="de-DE" sz="2500" dirty="0"/>
+          </a:p>
+          <a:p>
+            <a:pPr algn="l"/>
+            <a:r>
+              <a:rPr lang="de-DE" sz="2500" dirty="0">
+                <a:ea typeface="+mn-lt"/>
+                <a:cs typeface="+mn-lt"/>
+              </a:rPr>
+              <a:t>#define R_L_EN 14</a:t>
+            </a:r>
+            <a:endParaRPr lang="de-DE" sz="2500" dirty="0"/>
+          </a:p>
+          <a:p>
+            <a:pPr algn="l"/>
+            <a:r>
+              <a:rPr lang="de-DE" sz="2500" dirty="0">
+                <a:ea typeface="+mn-lt"/>
+                <a:cs typeface="+mn-lt"/>
+              </a:rPr>
+              <a:t>#define R_R_EN 13</a:t>
+            </a:r>
+            <a:endParaRPr lang="de-DE" sz="2500" dirty="0"/>
+          </a:p>
+          <a:p>
+            <a:pPr algn="l"/>
+            <a:r>
+              <a:rPr lang="de-DE" sz="2500" dirty="0">
+                <a:ea typeface="+mn-lt"/>
+                <a:cs typeface="+mn-lt"/>
+              </a:rPr>
+              <a:t>#define R_L_PWM 32</a:t>
+            </a:r>
+            <a:endParaRPr lang="de-DE" sz="2500" dirty="0"/>
+          </a:p>
+          <a:p>
+            <a:endParaRPr lang="de-DE" sz="2500" dirty="0">
               <a:latin typeface="Liberation Sans" panose="020B0604020202020204" pitchFamily="34" charset="0"/>
               <a:ea typeface="Liberation Sans" panose="020B0604020202020204" pitchFamily="34" charset="0"/>
               <a:cs typeface="Liberation Sans" panose="020B0604020202020204" pitchFamily="34" charset="0"/>
             </a:endParaRPr>
           </a:p>
+        </p:txBody>
+      </p:sp>
+    </p:spTree>
+    <p:extLst>
+      <p:ext uri="{BB962C8B-B14F-4D97-AF65-F5344CB8AC3E}">
+        <p14:creationId xmlns:p14="http://schemas.microsoft.com/office/powerpoint/2010/main" val="515088270"/>
+      </p:ext>
+    </p:extLst>
+  </p:cSld>
+  <p:clrMapOvr>
+    <a:masterClrMapping/>
+  </p:clrMapOvr>
+</p:sld>
+</file>
+
+<file path=ppt/slides/slide22.xml><?xml version="1.0" encoding="utf-8"?>
+<p:sld xmlns:a="http://schemas.openxmlformats.org/drawingml/2006/main" xmlns:r="http://schemas.openxmlformats.org/officeDocument/2006/relationships" xmlns:p="http://schemas.openxmlformats.org/presentationml/2006/main">
+  <p:cSld>
+    <p:spTree>
+      <p:nvGrpSpPr>
+        <p:cNvPr id="1" name=""/>
+        <p:cNvGrpSpPr/>
+        <p:nvPr/>
+      </p:nvGrpSpPr>
+      <p:grpSpPr>
+        <a:xfrm>
+          <a:off x="0" y="0"/>
+          <a:ext cx="0" cy="0"/>
+          <a:chOff x="0" y="0"/>
+          <a:chExt cx="0" cy="0"/>
+        </a:xfrm>
+      </p:grpSpPr>
+      <p:sp>
+        <p:nvSpPr>
+          <p:cNvPr id="2" name="Titel 1">
+            <a:extLst>
+              <a:ext uri="{FF2B5EF4-FFF2-40B4-BE49-F238E27FC236}">
+                <a16:creationId xmlns:a16="http://schemas.microsoft.com/office/drawing/2014/main" id="{413D0774-18A2-673D-283B-1C04DB36353E}"/>
+              </a:ext>
+            </a:extLst>
+          </p:cNvPr>
+          <p:cNvSpPr>
+            <a:spLocks noGrp="1"/>
+          </p:cNvSpPr>
+          <p:nvPr>
+            <p:ph type="ctrTitle"/>
+          </p:nvPr>
+        </p:nvSpPr>
+        <p:spPr>
+          <a:xfrm>
+            <a:off x="1524000" y="38100"/>
+            <a:ext cx="9144000" cy="926225"/>
+          </a:xfrm>
+        </p:spPr>
+        <p:txBody>
+          <a:bodyPr>
+            <a:normAutofit/>
+          </a:bodyPr>
+          <a:lstStyle/>
+          <a:p>
+            <a:r>
+              <a:rPr lang="de-DE" dirty="0">
+                <a:latin typeface="Impact" panose="020B0806030902050204" pitchFamily="34" charset="0"/>
+              </a:rPr>
+              <a:t>Controller Array</a:t>
+            </a:r>
+          </a:p>
+        </p:txBody>
+      </p:sp>
+      <p:sp>
+        <p:nvSpPr>
+          <p:cNvPr id="3" name="Untertitel 2">
+            <a:extLst>
+              <a:ext uri="{FF2B5EF4-FFF2-40B4-BE49-F238E27FC236}">
+                <a16:creationId xmlns:a16="http://schemas.microsoft.com/office/drawing/2014/main" id="{93304FBE-99DF-EE64-5EB2-94852307E71F}"/>
+              </a:ext>
+            </a:extLst>
+          </p:cNvPr>
+          <p:cNvSpPr>
+            <a:spLocks noGrp="1"/>
+          </p:cNvSpPr>
+          <p:nvPr>
+            <p:ph type="subTitle" idx="1"/>
+          </p:nvPr>
+        </p:nvSpPr>
+        <p:spPr>
+          <a:xfrm>
+            <a:off x="947834" y="2843715"/>
+            <a:ext cx="9926994" cy="1791056"/>
+          </a:xfrm>
+        </p:spPr>
+        <p:txBody>
+          <a:bodyPr>
+            <a:noAutofit/>
+          </a:bodyPr>
+          <a:lstStyle/>
+          <a:p>
+            <a:r>
+              <a:rPr lang="de-DE" sz="3000" dirty="0" err="1">
+                <a:ea typeface="+mn-lt"/>
+                <a:cs typeface="+mn-lt"/>
+              </a:rPr>
+              <a:t>GamepadPtr</a:t>
+            </a:r>
+            <a:r>
+              <a:rPr lang="de-DE" sz="3000" dirty="0">
+                <a:ea typeface="+mn-lt"/>
+                <a:cs typeface="+mn-lt"/>
+              </a:rPr>
+              <a:t> </a:t>
+            </a:r>
+            <a:r>
+              <a:rPr lang="de-DE" sz="3000" dirty="0" err="1">
+                <a:ea typeface="+mn-lt"/>
+                <a:cs typeface="+mn-lt"/>
+              </a:rPr>
+              <a:t>myGamepads</a:t>
+            </a:r>
+            <a:r>
+              <a:rPr lang="de-DE" sz="3000" dirty="0">
+                <a:ea typeface="+mn-lt"/>
+                <a:cs typeface="+mn-lt"/>
+              </a:rPr>
+              <a:t>[BP32_MAX_GAMEPADS];</a:t>
+            </a:r>
+            <a:endParaRPr lang="en-US" sz="3200" dirty="0"/>
+          </a:p>
+        </p:txBody>
+      </p:sp>
+      <p:cxnSp>
+        <p:nvCxnSpPr>
+          <p:cNvPr id="5" name="Gerader Verbinder 4">
+            <a:extLst>
+              <a:ext uri="{FF2B5EF4-FFF2-40B4-BE49-F238E27FC236}">
+                <a16:creationId xmlns:a16="http://schemas.microsoft.com/office/drawing/2014/main" id="{2B753068-DCEB-B788-AD32-F324BF9F36F0}"/>
+              </a:ext>
+            </a:extLst>
+          </p:cNvPr>
+          <p:cNvCxnSpPr/>
+          <p:nvPr/>
+        </p:nvCxnSpPr>
+        <p:spPr>
+          <a:xfrm>
+            <a:off x="1738604" y="987263"/>
+            <a:ext cx="8714792" cy="0"/>
+          </a:xfrm>
+          <a:prstGeom prst="line">
+            <a:avLst/>
+          </a:prstGeom>
+        </p:spPr>
+        <p:style>
+          <a:lnRef idx="2">
+            <a:schemeClr val="dk1"/>
+          </a:lnRef>
+          <a:fillRef idx="0">
+            <a:schemeClr val="dk1"/>
+          </a:fillRef>
+          <a:effectRef idx="1">
+            <a:schemeClr val="dk1"/>
+          </a:effectRef>
+          <a:fontRef idx="minor">
+            <a:schemeClr val="tx1"/>
+          </a:fontRef>
+        </p:style>
+      </p:cxnSp>
+    </p:spTree>
+    <p:extLst>
+      <p:ext uri="{BB962C8B-B14F-4D97-AF65-F5344CB8AC3E}">
+        <p14:creationId xmlns:p14="http://schemas.microsoft.com/office/powerpoint/2010/main" val="34591767"/>
+      </p:ext>
+    </p:extLst>
+  </p:cSld>
+  <p:clrMapOvr>
+    <a:masterClrMapping/>
+  </p:clrMapOvr>
+</p:sld>
+</file>
+
+<file path=ppt/slides/slide23.xml><?xml version="1.0" encoding="utf-8"?>
+<p:sld xmlns:a="http://schemas.openxmlformats.org/drawingml/2006/main" xmlns:r="http://schemas.openxmlformats.org/officeDocument/2006/relationships" xmlns:p="http://schemas.openxmlformats.org/presentationml/2006/main">
+  <p:cSld>
+    <p:spTree>
+      <p:nvGrpSpPr>
+        <p:cNvPr id="1" name=""/>
+        <p:cNvGrpSpPr/>
+        <p:nvPr/>
+      </p:nvGrpSpPr>
+      <p:grpSpPr>
+        <a:xfrm>
+          <a:off x="0" y="0"/>
+          <a:ext cx="0" cy="0"/>
+          <a:chOff x="0" y="0"/>
+          <a:chExt cx="0" cy="0"/>
+        </a:xfrm>
+      </p:grpSpPr>
+      <p:sp>
+        <p:nvSpPr>
+          <p:cNvPr id="2" name="Titel 1">
+            <a:extLst>
+              <a:ext uri="{FF2B5EF4-FFF2-40B4-BE49-F238E27FC236}">
+                <a16:creationId xmlns:a16="http://schemas.microsoft.com/office/drawing/2014/main" id="{413D0774-18A2-673D-283B-1C04DB36353E}"/>
+              </a:ext>
+            </a:extLst>
+          </p:cNvPr>
+          <p:cNvSpPr>
+            <a:spLocks noGrp="1"/>
+          </p:cNvSpPr>
+          <p:nvPr>
+            <p:ph type="ctrTitle"/>
+          </p:nvPr>
+        </p:nvSpPr>
+        <p:spPr>
+          <a:xfrm>
+            <a:off x="1524000" y="38100"/>
+            <a:ext cx="9144000" cy="926225"/>
+          </a:xfrm>
+        </p:spPr>
+        <p:txBody>
+          <a:bodyPr>
+            <a:normAutofit/>
+          </a:bodyPr>
+          <a:lstStyle/>
+          <a:p>
+            <a:r>
+              <a:rPr lang="de-DE" dirty="0">
+                <a:latin typeface="Impact" panose="020B0806030902050204" pitchFamily="34" charset="0"/>
+              </a:rPr>
+              <a:t>Callback Funktion</a:t>
+            </a:r>
+          </a:p>
+        </p:txBody>
+      </p:sp>
+      <p:sp>
+        <p:nvSpPr>
+          <p:cNvPr id="3" name="Untertitel 2">
+            <a:extLst>
+              <a:ext uri="{FF2B5EF4-FFF2-40B4-BE49-F238E27FC236}">
+                <a16:creationId xmlns:a16="http://schemas.microsoft.com/office/drawing/2014/main" id="{93304FBE-99DF-EE64-5EB2-94852307E71F}"/>
+              </a:ext>
+            </a:extLst>
+          </p:cNvPr>
+          <p:cNvSpPr>
+            <a:spLocks noGrp="1"/>
+          </p:cNvSpPr>
+          <p:nvPr>
+            <p:ph type="subTitle" idx="1"/>
+          </p:nvPr>
+        </p:nvSpPr>
+        <p:spPr>
+          <a:xfrm>
+            <a:off x="1524000" y="2330532"/>
+            <a:ext cx="9926994" cy="1791056"/>
+          </a:xfrm>
+        </p:spPr>
+        <p:txBody>
+          <a:bodyPr>
+            <a:noAutofit/>
+          </a:bodyPr>
+          <a:lstStyle/>
           <a:p>
             <a:pPr marL="457200" indent="-457200" algn="l">
               <a:buFont typeface="Wingdings" panose="05000000000000000000" pitchFamily="2" charset="2"/>
               <a:buChar char="v"/>
             </a:pPr>
             <a:r>
-              <a:rPr lang="de-DE" sz="2000" dirty="0">
-                <a:latin typeface="Liberation Sans" panose="020B0604020202020204" pitchFamily="34" charset="0"/>
-                <a:ea typeface="Liberation Sans" panose="020B0604020202020204" pitchFamily="34" charset="0"/>
-                <a:cs typeface="Liberation Sans" panose="020B0604020202020204" pitchFamily="34" charset="0"/>
-              </a:rPr>
-              <a:t>Frühe durchdachte Planung lohnt sich</a:t>
-            </a:r>
+              <a:rPr lang="de-DE" sz="2500" dirty="0">
+                <a:ea typeface="+mn-lt"/>
+                <a:cs typeface="+mn-lt"/>
+              </a:rPr>
+              <a:t>Alle 4 Slots im Array durchsuchen</a:t>
+            </a:r>
+            <a:endParaRPr lang="en-US" sz="2500" dirty="0"/>
           </a:p>
           <a:p>
             <a:pPr marL="457200" indent="-457200" algn="l">
@@ -7343,13 +7604,26 @@
               <a:buChar char="v"/>
             </a:pPr>
             <a:r>
-              <a:rPr lang="de-DE" sz="2000" dirty="0">
-                <a:latin typeface="Liberation Sans" panose="020B0604020202020204" pitchFamily="34" charset="0"/>
-                <a:ea typeface="Liberation Sans" panose="020B0604020202020204" pitchFamily="34" charset="0"/>
-                <a:cs typeface="Liberation Sans" panose="020B0604020202020204" pitchFamily="34" charset="0"/>
-              </a:rPr>
-              <a:t>3D-Druck-Ungenauigkeiten antizipieren</a:t>
-            </a:r>
+              <a:rPr lang="de-DE" sz="2500" dirty="0">
+                <a:ea typeface="+mn-lt"/>
+                <a:cs typeface="+mn-lt"/>
+              </a:rPr>
+              <a:t>Ersten leeren Slot (</a:t>
+            </a:r>
+            <a:r>
+              <a:rPr lang="de-DE" sz="2500" dirty="0" err="1">
+                <a:latin typeface="Aptos"/>
+              </a:rPr>
+              <a:t>nullptr</a:t>
+            </a:r>
+            <a:r>
+              <a:rPr lang="de-DE" sz="2500" dirty="0">
+                <a:ea typeface="+mn-lt"/>
+                <a:cs typeface="+mn-lt"/>
+              </a:rPr>
+              <a:t>) suchen</a:t>
+            </a:r>
+            <a:endParaRPr lang="de-DE" sz="2500" dirty="0"/>
           </a:p>
           <a:p>
             <a:pPr marL="457200" indent="-457200" algn="l">
@@ -7357,20 +7631,2196 @@
               <a:buChar char="v"/>
             </a:pPr>
             <a:r>
-              <a:rPr lang="de-DE" sz="2000" dirty="0">
+              <a:rPr lang="de-DE" sz="2500" dirty="0">
+                <a:ea typeface="+mn-lt"/>
+                <a:cs typeface="+mn-lt"/>
+              </a:rPr>
+              <a:t>Controller-Pointer in den freien Slot eintragen</a:t>
+            </a:r>
+            <a:endParaRPr lang="de-DE" sz="2500" dirty="0"/>
+          </a:p>
+          <a:p>
+            <a:pPr marL="457200" indent="-457200" algn="l">
+              <a:buFont typeface="Wingdings" panose="05000000000000000000" pitchFamily="2" charset="2"/>
+              <a:buChar char="v"/>
+            </a:pPr>
+            <a:r>
+              <a:rPr lang="de-DE" sz="2500" dirty="0">
+                <a:ea typeface="+mn-lt"/>
+                <a:cs typeface="+mn-lt"/>
+              </a:rPr>
+              <a:t>Falls kein freier Slot → Fehlermeldung im Serial Monitor ausgeben</a:t>
+            </a:r>
+            <a:endParaRPr lang="de-DE" sz="2500" dirty="0"/>
+          </a:p>
+        </p:txBody>
+      </p:sp>
+      <p:cxnSp>
+        <p:nvCxnSpPr>
+          <p:cNvPr id="5" name="Gerader Verbinder 4">
+            <a:extLst>
+              <a:ext uri="{FF2B5EF4-FFF2-40B4-BE49-F238E27FC236}">
+                <a16:creationId xmlns:a16="http://schemas.microsoft.com/office/drawing/2014/main" id="{2B753068-DCEB-B788-AD32-F324BF9F36F0}"/>
+              </a:ext>
+            </a:extLst>
+          </p:cNvPr>
+          <p:cNvCxnSpPr/>
+          <p:nvPr/>
+        </p:nvCxnSpPr>
+        <p:spPr>
+          <a:xfrm>
+            <a:off x="1738604" y="987263"/>
+            <a:ext cx="8714792" cy="0"/>
+          </a:xfrm>
+          <a:prstGeom prst="line">
+            <a:avLst/>
+          </a:prstGeom>
+        </p:spPr>
+        <p:style>
+          <a:lnRef idx="2">
+            <a:schemeClr val="dk1"/>
+          </a:lnRef>
+          <a:fillRef idx="0">
+            <a:schemeClr val="dk1"/>
+          </a:fillRef>
+          <a:effectRef idx="1">
+            <a:schemeClr val="dk1"/>
+          </a:effectRef>
+          <a:fontRef idx="minor">
+            <a:schemeClr val="tx1"/>
+          </a:fontRef>
+        </p:style>
+      </p:cxnSp>
+    </p:spTree>
+    <p:extLst>
+      <p:ext uri="{BB962C8B-B14F-4D97-AF65-F5344CB8AC3E}">
+        <p14:creationId xmlns:p14="http://schemas.microsoft.com/office/powerpoint/2010/main" val="130127029"/>
+      </p:ext>
+    </p:extLst>
+  </p:cSld>
+  <p:clrMapOvr>
+    <a:masterClrMapping/>
+  </p:clrMapOvr>
+</p:sld>
+</file>
+
+<file path=ppt/slides/slide24.xml><?xml version="1.0" encoding="utf-8"?>
+<p:sld xmlns:a="http://schemas.openxmlformats.org/drawingml/2006/main" xmlns:r="http://schemas.openxmlformats.org/officeDocument/2006/relationships" xmlns:p="http://schemas.openxmlformats.org/presentationml/2006/main">
+  <p:cSld>
+    <p:spTree>
+      <p:nvGrpSpPr>
+        <p:cNvPr id="1" name=""/>
+        <p:cNvGrpSpPr/>
+        <p:nvPr/>
+      </p:nvGrpSpPr>
+      <p:grpSpPr>
+        <a:xfrm>
+          <a:off x="0" y="0"/>
+          <a:ext cx="0" cy="0"/>
+          <a:chOff x="0" y="0"/>
+          <a:chExt cx="0" cy="0"/>
+        </a:xfrm>
+      </p:grpSpPr>
+      <p:sp>
+        <p:nvSpPr>
+          <p:cNvPr id="2" name="Titel 1">
+            <a:extLst>
+              <a:ext uri="{FF2B5EF4-FFF2-40B4-BE49-F238E27FC236}">
+                <a16:creationId xmlns:a16="http://schemas.microsoft.com/office/drawing/2014/main" id="{413D0774-18A2-673D-283B-1C04DB36353E}"/>
+              </a:ext>
+            </a:extLst>
+          </p:cNvPr>
+          <p:cNvSpPr>
+            <a:spLocks noGrp="1"/>
+          </p:cNvSpPr>
+          <p:nvPr>
+            <p:ph type="ctrTitle"/>
+          </p:nvPr>
+        </p:nvSpPr>
+        <p:spPr>
+          <a:xfrm>
+            <a:off x="1524000" y="38100"/>
+            <a:ext cx="9144000" cy="926225"/>
+          </a:xfrm>
+        </p:spPr>
+        <p:txBody>
+          <a:bodyPr>
+            <a:normAutofit/>
+          </a:bodyPr>
+          <a:lstStyle/>
+          <a:p>
+            <a:r>
+              <a:rPr lang="de-DE" dirty="0">
+                <a:latin typeface="Impact" panose="020B0806030902050204" pitchFamily="34" charset="0"/>
+              </a:rPr>
+              <a:t>Setup()</a:t>
+            </a:r>
+          </a:p>
+        </p:txBody>
+      </p:sp>
+      <p:sp>
+        <p:nvSpPr>
+          <p:cNvPr id="3" name="Untertitel 2">
+            <a:extLst>
+              <a:ext uri="{FF2B5EF4-FFF2-40B4-BE49-F238E27FC236}">
+                <a16:creationId xmlns:a16="http://schemas.microsoft.com/office/drawing/2014/main" id="{93304FBE-99DF-EE64-5EB2-94852307E71F}"/>
+              </a:ext>
+            </a:extLst>
+          </p:cNvPr>
+          <p:cNvSpPr>
+            <a:spLocks noGrp="1"/>
+          </p:cNvSpPr>
+          <p:nvPr>
+            <p:ph type="subTitle" idx="1"/>
+          </p:nvPr>
+        </p:nvSpPr>
+        <p:spPr>
+          <a:xfrm>
+            <a:off x="1524000" y="2132466"/>
+            <a:ext cx="9926994" cy="1791056"/>
+          </a:xfrm>
+        </p:spPr>
+        <p:txBody>
+          <a:bodyPr>
+            <a:noAutofit/>
+          </a:bodyPr>
+          <a:lstStyle/>
+          <a:p>
+            <a:pPr marL="457200" indent="-457200" algn="l">
+              <a:buFont typeface="Wingdings" panose="05000000000000000000" pitchFamily="2" charset="2"/>
+              <a:buChar char="v"/>
+            </a:pPr>
+            <a:r>
+              <a:rPr lang="de-DE" sz="2500" dirty="0">
+                <a:ea typeface="+mn-lt"/>
+                <a:cs typeface="+mn-lt"/>
+              </a:rPr>
+              <a:t>Serielle Kommunikation starten (Serial Monitor)</a:t>
+            </a:r>
+            <a:endParaRPr lang="en-US" sz="2500" dirty="0"/>
+          </a:p>
+          <a:p>
+            <a:pPr marL="457200" indent="-457200" algn="l">
+              <a:buFont typeface="Wingdings" panose="05000000000000000000" pitchFamily="2" charset="2"/>
+              <a:buChar char="v"/>
+            </a:pPr>
+            <a:r>
+              <a:rPr lang="de-DE" sz="2500" dirty="0">
+                <a:ea typeface="+mn-lt"/>
+                <a:cs typeface="+mn-lt"/>
+              </a:rPr>
+              <a:t>Firmware-Version und Bluetooth-Adresse des ESP32 ausgeben</a:t>
+            </a:r>
+            <a:endParaRPr lang="de-DE" sz="2500" dirty="0"/>
+          </a:p>
+          <a:p>
+            <a:pPr marL="457200" indent="-457200" algn="l">
+              <a:buFont typeface="Wingdings" panose="05000000000000000000" pitchFamily="2" charset="2"/>
+              <a:buChar char="v"/>
+            </a:pPr>
+            <a:r>
+              <a:rPr lang="de-DE" sz="2500" dirty="0">
+                <a:ea typeface="+mn-lt"/>
+                <a:cs typeface="+mn-lt"/>
+              </a:rPr>
+              <a:t>Bluetooth-</a:t>
+            </a:r>
+            <a:r>
+              <a:rPr lang="de-DE" sz="2500" dirty="0" err="1">
+                <a:ea typeface="+mn-lt"/>
+                <a:cs typeface="+mn-lt"/>
+              </a:rPr>
+              <a:t>Callbacks</a:t>
+            </a:r>
+            <a:r>
+              <a:rPr lang="de-DE" sz="2500" dirty="0">
+                <a:ea typeface="+mn-lt"/>
+                <a:cs typeface="+mn-lt"/>
+              </a:rPr>
+              <a:t> bei Bluepad32 registrieren</a:t>
+            </a:r>
+            <a:endParaRPr lang="de-DE" sz="2500" dirty="0"/>
+          </a:p>
+          <a:p>
+            <a:pPr marL="457200" indent="-457200" algn="l">
+              <a:buFont typeface="Wingdings" panose="05000000000000000000" pitchFamily="2" charset="2"/>
+              <a:buChar char="v"/>
+            </a:pPr>
+            <a:r>
+              <a:rPr lang="de-DE" sz="2500" dirty="0">
+                <a:ea typeface="+mn-lt"/>
+                <a:cs typeface="+mn-lt"/>
+              </a:rPr>
+              <a:t>Alte Bluetooth-Paarungsschlüssel löschen</a:t>
+            </a:r>
+            <a:endParaRPr lang="de-DE" sz="2500" dirty="0"/>
+          </a:p>
+          <a:p>
+            <a:pPr marL="457200" indent="-457200" algn="l">
+              <a:buFont typeface="Wingdings" panose="05000000000000000000" pitchFamily="2" charset="2"/>
+              <a:buChar char="v"/>
+            </a:pPr>
+            <a:r>
+              <a:rPr lang="de-DE" sz="2500" dirty="0" err="1">
+                <a:ea typeface="+mn-lt"/>
+                <a:cs typeface="+mn-lt"/>
+              </a:rPr>
+              <a:t>Enable</a:t>
+            </a:r>
+            <a:r>
+              <a:rPr lang="de-DE" sz="2500" dirty="0">
+                <a:ea typeface="+mn-lt"/>
+                <a:cs typeface="+mn-lt"/>
+              </a:rPr>
+              <a:t>-Pins der beiden BTS7960 auf OUTPUT setzen und dauerhaft HIGH schalten</a:t>
+            </a:r>
+            <a:endParaRPr lang="de-DE" sz="2500" dirty="0"/>
+          </a:p>
+          <a:p>
+            <a:pPr marL="457200" indent="-457200" algn="l">
+              <a:buFont typeface="Wingdings" panose="05000000000000000000" pitchFamily="2" charset="2"/>
+              <a:buChar char="v"/>
+            </a:pPr>
+            <a:r>
+              <a:rPr lang="de-DE" sz="2500" dirty="0">
+                <a:ea typeface="+mn-lt"/>
+                <a:cs typeface="+mn-lt"/>
+              </a:rPr>
+              <a:t>LEDC-Kanäle konfigurieren (Frequenz + Auflösung)</a:t>
+            </a:r>
+            <a:endParaRPr lang="de-DE" sz="2500" dirty="0"/>
+          </a:p>
+          <a:p>
+            <a:pPr marL="457200" indent="-457200" algn="l">
+              <a:buFont typeface="Wingdings" panose="05000000000000000000" pitchFamily="2" charset="2"/>
+              <a:buChar char="v"/>
+            </a:pPr>
+            <a:r>
+              <a:rPr lang="de-DE" sz="2500" dirty="0">
+                <a:ea typeface="+mn-lt"/>
+                <a:cs typeface="+mn-lt"/>
+              </a:rPr>
+              <a:t>LEDC-Kanäle mit den physischen Pins verbinden</a:t>
+            </a:r>
+            <a:endParaRPr lang="de-DE" sz="2500" dirty="0"/>
+          </a:p>
+          <a:p>
+            <a:pPr algn="l"/>
+            <a:endParaRPr lang="de-DE" sz="2500" dirty="0">
+              <a:latin typeface="Liberation Sans"/>
+              <a:ea typeface="Liberation Sans" panose="020B0604020202020204" pitchFamily="34" charset="0"/>
+              <a:cs typeface="Liberation Sans" panose="020B0604020202020204" pitchFamily="34" charset="0"/>
+            </a:endParaRPr>
+          </a:p>
+        </p:txBody>
+      </p:sp>
+      <p:cxnSp>
+        <p:nvCxnSpPr>
+          <p:cNvPr id="5" name="Gerader Verbinder 4">
+            <a:extLst>
+              <a:ext uri="{FF2B5EF4-FFF2-40B4-BE49-F238E27FC236}">
+                <a16:creationId xmlns:a16="http://schemas.microsoft.com/office/drawing/2014/main" id="{2B753068-DCEB-B788-AD32-F324BF9F36F0}"/>
+              </a:ext>
+            </a:extLst>
+          </p:cNvPr>
+          <p:cNvCxnSpPr/>
+          <p:nvPr/>
+        </p:nvCxnSpPr>
+        <p:spPr>
+          <a:xfrm>
+            <a:off x="1738604" y="987263"/>
+            <a:ext cx="8714792" cy="0"/>
+          </a:xfrm>
+          <a:prstGeom prst="line">
+            <a:avLst/>
+          </a:prstGeom>
+        </p:spPr>
+        <p:style>
+          <a:lnRef idx="2">
+            <a:schemeClr val="dk1"/>
+          </a:lnRef>
+          <a:fillRef idx="0">
+            <a:schemeClr val="dk1"/>
+          </a:fillRef>
+          <a:effectRef idx="1">
+            <a:schemeClr val="dk1"/>
+          </a:effectRef>
+          <a:fontRef idx="minor">
+            <a:schemeClr val="tx1"/>
+          </a:fontRef>
+        </p:style>
+      </p:cxnSp>
+    </p:spTree>
+    <p:extLst>
+      <p:ext uri="{BB962C8B-B14F-4D97-AF65-F5344CB8AC3E}">
+        <p14:creationId xmlns:p14="http://schemas.microsoft.com/office/powerpoint/2010/main" val="2141472120"/>
+      </p:ext>
+    </p:extLst>
+  </p:cSld>
+  <p:clrMapOvr>
+    <a:masterClrMapping/>
+  </p:clrMapOvr>
+</p:sld>
+</file>
+
+<file path=ppt/slides/slide25.xml><?xml version="1.0" encoding="utf-8"?>
+<p:sld xmlns:a="http://schemas.openxmlformats.org/drawingml/2006/main" xmlns:r="http://schemas.openxmlformats.org/officeDocument/2006/relationships" xmlns:p="http://schemas.openxmlformats.org/presentationml/2006/main">
+  <p:cSld>
+    <p:spTree>
+      <p:nvGrpSpPr>
+        <p:cNvPr id="1" name=""/>
+        <p:cNvGrpSpPr/>
+        <p:nvPr/>
+      </p:nvGrpSpPr>
+      <p:grpSpPr>
+        <a:xfrm>
+          <a:off x="0" y="0"/>
+          <a:ext cx="0" cy="0"/>
+          <a:chOff x="0" y="0"/>
+          <a:chExt cx="0" cy="0"/>
+        </a:xfrm>
+      </p:grpSpPr>
+      <p:sp>
+        <p:nvSpPr>
+          <p:cNvPr id="2" name="Titel 1">
+            <a:extLst>
+              <a:ext uri="{FF2B5EF4-FFF2-40B4-BE49-F238E27FC236}">
+                <a16:creationId xmlns:a16="http://schemas.microsoft.com/office/drawing/2014/main" id="{413D0774-18A2-673D-283B-1C04DB36353E}"/>
+              </a:ext>
+            </a:extLst>
+          </p:cNvPr>
+          <p:cNvSpPr>
+            <a:spLocks noGrp="1"/>
+          </p:cNvSpPr>
+          <p:nvPr>
+            <p:ph type="ctrTitle"/>
+          </p:nvPr>
+        </p:nvSpPr>
+        <p:spPr>
+          <a:xfrm>
+            <a:off x="1524000" y="38100"/>
+            <a:ext cx="9144000" cy="926225"/>
+          </a:xfrm>
+        </p:spPr>
+        <p:txBody>
+          <a:bodyPr>
+            <a:normAutofit/>
+          </a:bodyPr>
+          <a:lstStyle/>
+          <a:p>
+            <a:r>
+              <a:rPr lang="de-DE" dirty="0">
+                <a:latin typeface="Impact" panose="020B0806030902050204" pitchFamily="34" charset="0"/>
+              </a:rPr>
+              <a:t>Loop()</a:t>
+            </a:r>
+          </a:p>
+        </p:txBody>
+      </p:sp>
+      <p:sp>
+        <p:nvSpPr>
+          <p:cNvPr id="3" name="Untertitel 2">
+            <a:extLst>
+              <a:ext uri="{FF2B5EF4-FFF2-40B4-BE49-F238E27FC236}">
+                <a16:creationId xmlns:a16="http://schemas.microsoft.com/office/drawing/2014/main" id="{93304FBE-99DF-EE64-5EB2-94852307E71F}"/>
+              </a:ext>
+            </a:extLst>
+          </p:cNvPr>
+          <p:cNvSpPr>
+            <a:spLocks noGrp="1"/>
+          </p:cNvSpPr>
+          <p:nvPr>
+            <p:ph type="subTitle" idx="1"/>
+          </p:nvPr>
+        </p:nvSpPr>
+        <p:spPr>
+          <a:xfrm>
+            <a:off x="1738604" y="2431047"/>
+            <a:ext cx="9926994" cy="1791056"/>
+          </a:xfrm>
+        </p:spPr>
+        <p:txBody>
+          <a:bodyPr>
+            <a:noAutofit/>
+          </a:bodyPr>
+          <a:lstStyle/>
+          <a:p>
+            <a:pPr marL="457200" indent="-457200" algn="l">
+              <a:buFont typeface="Wingdings" panose="05000000000000000000" pitchFamily="2" charset="2"/>
+              <a:buChar char="v"/>
+            </a:pPr>
+            <a:r>
+              <a:rPr lang="de-DE" sz="2500" dirty="0"/>
+              <a:t>Joystick-Werte des linken und rechten Sticks auslesen</a:t>
+            </a:r>
+            <a:endParaRPr lang="en-US" sz="2500" dirty="0"/>
+          </a:p>
+          <a:p>
+            <a:pPr marL="457200" indent="-457200" algn="l">
+              <a:buFont typeface="Wingdings" panose="05000000000000000000" pitchFamily="2" charset="2"/>
+              <a:buChar char="v"/>
+            </a:pPr>
+            <a:r>
+              <a:rPr lang="de-DE" sz="2500" dirty="0" err="1"/>
+              <a:t>Deadzone</a:t>
+            </a:r>
+            <a:r>
+              <a:rPr lang="de-DE" sz="2500" dirty="0"/>
+              <a:t> prüfen — wenn Stick in der Mitte → Motor </a:t>
+            </a:r>
+            <a:r>
+              <a:rPr lang="de-DE" sz="2500" dirty="0" err="1"/>
+              <a:t>stop</a:t>
+            </a:r>
+            <a:endParaRPr lang="de-DE" sz="2500" dirty="0"/>
+          </a:p>
+          <a:p>
+            <a:pPr marL="457200" indent="-457200" algn="l">
+              <a:buFont typeface="Wingdings" panose="05000000000000000000" pitchFamily="2" charset="2"/>
+              <a:buChar char="v"/>
+            </a:pPr>
+            <a:r>
+              <a:rPr lang="de-DE" sz="2500" dirty="0"/>
+              <a:t>Richtung bestimmen — negativ = vorwärts, positiv = rückwärts</a:t>
+            </a:r>
+          </a:p>
+          <a:p>
+            <a:pPr marL="457200" indent="-457200" algn="l">
+              <a:buFont typeface="Wingdings" panose="05000000000000000000" pitchFamily="2" charset="2"/>
+              <a:buChar char="v"/>
+            </a:pPr>
+            <a:r>
+              <a:rPr lang="de-DE" sz="2500" dirty="0"/>
+              <a:t>Joystick-Wert mit </a:t>
+            </a:r>
+            <a:r>
+              <a:rPr lang="de-DE" sz="2500" dirty="0" err="1"/>
+              <a:t>map</a:t>
+            </a:r>
+            <a:r>
+              <a:rPr lang="de-DE" sz="2500" dirty="0"/>
+              <a:t>() auf PWM-Bereich 0–255 skalieren</a:t>
+            </a:r>
+          </a:p>
+          <a:p>
+            <a:pPr marL="457200" indent="-457200" algn="l">
+              <a:buFont typeface="Wingdings" panose="05000000000000000000" pitchFamily="2" charset="2"/>
+              <a:buChar char="v"/>
+            </a:pPr>
+            <a:r>
+              <a:rPr lang="de-DE" sz="2500" dirty="0"/>
+              <a:t>PWM-Wert mit </a:t>
+            </a:r>
+            <a:r>
+              <a:rPr lang="de-DE" sz="2500" dirty="0" err="1"/>
+              <a:t>constrain</a:t>
+            </a:r>
+            <a:r>
+              <a:rPr lang="de-DE" sz="2500" dirty="0"/>
+              <a:t>() absichern</a:t>
+            </a:r>
+          </a:p>
+          <a:p>
+            <a:pPr marL="457200" indent="-457200" algn="l">
+              <a:buFont typeface="Wingdings" panose="05000000000000000000" pitchFamily="2" charset="2"/>
+              <a:buChar char="v"/>
+            </a:pPr>
+            <a:r>
+              <a:rPr lang="de-DE" sz="2500" dirty="0"/>
+              <a:t>PWM-Signal per </a:t>
+            </a:r>
+            <a:r>
+              <a:rPr lang="de-DE" sz="2500" dirty="0" err="1"/>
+              <a:t>ledcWrite</a:t>
+            </a:r>
+            <a:r>
+              <a:rPr lang="de-DE" sz="2500" dirty="0"/>
+              <a:t>() auf den Motor schreiben</a:t>
+            </a:r>
+          </a:p>
+          <a:p>
+            <a:pPr algn="l"/>
+            <a:endParaRPr lang="de-DE" sz="2500" dirty="0">
+              <a:latin typeface="Liberation Sans"/>
+              <a:ea typeface="Liberation Sans" panose="020B0604020202020204" pitchFamily="34" charset="0"/>
+              <a:cs typeface="Liberation Sans" panose="020B0604020202020204" pitchFamily="34" charset="0"/>
+            </a:endParaRPr>
+          </a:p>
+        </p:txBody>
+      </p:sp>
+      <p:cxnSp>
+        <p:nvCxnSpPr>
+          <p:cNvPr id="5" name="Gerader Verbinder 4">
+            <a:extLst>
+              <a:ext uri="{FF2B5EF4-FFF2-40B4-BE49-F238E27FC236}">
+                <a16:creationId xmlns:a16="http://schemas.microsoft.com/office/drawing/2014/main" id="{2B753068-DCEB-B788-AD32-F324BF9F36F0}"/>
+              </a:ext>
+            </a:extLst>
+          </p:cNvPr>
+          <p:cNvCxnSpPr/>
+          <p:nvPr/>
+        </p:nvCxnSpPr>
+        <p:spPr>
+          <a:xfrm>
+            <a:off x="1738604" y="987263"/>
+            <a:ext cx="8714792" cy="0"/>
+          </a:xfrm>
+          <a:prstGeom prst="line">
+            <a:avLst/>
+          </a:prstGeom>
+        </p:spPr>
+        <p:style>
+          <a:lnRef idx="2">
+            <a:schemeClr val="dk1"/>
+          </a:lnRef>
+          <a:fillRef idx="0">
+            <a:schemeClr val="dk1"/>
+          </a:fillRef>
+          <a:effectRef idx="1">
+            <a:schemeClr val="dk1"/>
+          </a:effectRef>
+          <a:fontRef idx="minor">
+            <a:schemeClr val="tx1"/>
+          </a:fontRef>
+        </p:style>
+      </p:cxnSp>
+    </p:spTree>
+    <p:extLst>
+      <p:ext uri="{BB962C8B-B14F-4D97-AF65-F5344CB8AC3E}">
+        <p14:creationId xmlns:p14="http://schemas.microsoft.com/office/powerpoint/2010/main" val="3755157944"/>
+      </p:ext>
+    </p:extLst>
+  </p:cSld>
+  <p:clrMapOvr>
+    <a:masterClrMapping/>
+  </p:clrMapOvr>
+</p:sld>
+</file>
+
+<file path=ppt/slides/slide26.xml><?xml version="1.0" encoding="utf-8"?>
+<p:sld xmlns:a="http://schemas.openxmlformats.org/drawingml/2006/main" xmlns:r="http://schemas.openxmlformats.org/officeDocument/2006/relationships" xmlns:p="http://schemas.openxmlformats.org/presentationml/2006/main">
+  <p:cSld>
+    <p:spTree>
+      <p:nvGrpSpPr>
+        <p:cNvPr id="1" name=""/>
+        <p:cNvGrpSpPr/>
+        <p:nvPr/>
+      </p:nvGrpSpPr>
+      <p:grpSpPr>
+        <a:xfrm>
+          <a:off x="0" y="0"/>
+          <a:ext cx="0" cy="0"/>
+          <a:chOff x="0" y="0"/>
+          <a:chExt cx="0" cy="0"/>
+        </a:xfrm>
+      </p:grpSpPr>
+      <p:sp>
+        <p:nvSpPr>
+          <p:cNvPr id="2" name="Titel 1">
+            <a:extLst>
+              <a:ext uri="{FF2B5EF4-FFF2-40B4-BE49-F238E27FC236}">
+                <a16:creationId xmlns:a16="http://schemas.microsoft.com/office/drawing/2014/main" id="{413D0774-18A2-673D-283B-1C04DB36353E}"/>
+              </a:ext>
+            </a:extLst>
+          </p:cNvPr>
+          <p:cNvSpPr>
+            <a:spLocks noGrp="1"/>
+          </p:cNvSpPr>
+          <p:nvPr>
+            <p:ph type="ctrTitle"/>
+          </p:nvPr>
+        </p:nvSpPr>
+        <p:spPr>
+          <a:xfrm>
+            <a:off x="1524000" y="1269579"/>
+            <a:ext cx="9144000" cy="2387600"/>
+          </a:xfrm>
+        </p:spPr>
+        <p:txBody>
+          <a:bodyPr>
+            <a:normAutofit fontScale="90000"/>
+          </a:bodyPr>
+          <a:lstStyle/>
+          <a:p>
+            <a:br>
+              <a:rPr lang="de-DE" sz="10000" dirty="0">
+                <a:latin typeface="Impact" panose="020B0806030902050204" pitchFamily="34" charset="0"/>
+              </a:rPr>
+            </a:br>
+            <a:r>
+              <a:rPr lang="de-DE" sz="10000" dirty="0">
+                <a:latin typeface="Impact" panose="020B0806030902050204" pitchFamily="34" charset="0"/>
+              </a:rPr>
+              <a:t>Allgemeines</a:t>
+            </a:r>
+          </a:p>
+        </p:txBody>
+      </p:sp>
+      <p:cxnSp>
+        <p:nvCxnSpPr>
+          <p:cNvPr id="5" name="Gerader Verbinder 4">
+            <a:extLst>
+              <a:ext uri="{FF2B5EF4-FFF2-40B4-BE49-F238E27FC236}">
+                <a16:creationId xmlns:a16="http://schemas.microsoft.com/office/drawing/2014/main" id="{2B753068-DCEB-B788-AD32-F324BF9F36F0}"/>
+              </a:ext>
+            </a:extLst>
+          </p:cNvPr>
+          <p:cNvCxnSpPr/>
+          <p:nvPr/>
+        </p:nvCxnSpPr>
+        <p:spPr>
+          <a:xfrm>
+            <a:off x="1698171" y="3830217"/>
+            <a:ext cx="8714792" cy="0"/>
+          </a:xfrm>
+          <a:prstGeom prst="line">
+            <a:avLst/>
+          </a:prstGeom>
+        </p:spPr>
+        <p:style>
+          <a:lnRef idx="2">
+            <a:schemeClr val="dk1"/>
+          </a:lnRef>
+          <a:fillRef idx="0">
+            <a:schemeClr val="dk1"/>
+          </a:fillRef>
+          <a:effectRef idx="1">
+            <a:schemeClr val="dk1"/>
+          </a:effectRef>
+          <a:fontRef idx="minor">
+            <a:schemeClr val="tx1"/>
+          </a:fontRef>
+        </p:style>
+      </p:cxnSp>
+    </p:spTree>
+    <p:extLst>
+      <p:ext uri="{BB962C8B-B14F-4D97-AF65-F5344CB8AC3E}">
+        <p14:creationId xmlns:p14="http://schemas.microsoft.com/office/powerpoint/2010/main" val="3495136108"/>
+      </p:ext>
+    </p:extLst>
+  </p:cSld>
+  <p:clrMapOvr>
+    <a:masterClrMapping/>
+  </p:clrMapOvr>
+</p:sld>
+</file>
+
+<file path=ppt/slides/slide27.xml><?xml version="1.0" encoding="utf-8"?>
+<p:sld xmlns:a="http://schemas.openxmlformats.org/drawingml/2006/main" xmlns:r="http://schemas.openxmlformats.org/officeDocument/2006/relationships" xmlns:p="http://schemas.openxmlformats.org/presentationml/2006/main">
+  <p:cSld>
+    <p:spTree>
+      <p:nvGrpSpPr>
+        <p:cNvPr id="1" name=""/>
+        <p:cNvGrpSpPr/>
+        <p:nvPr/>
+      </p:nvGrpSpPr>
+      <p:grpSpPr>
+        <a:xfrm>
+          <a:off x="0" y="0"/>
+          <a:ext cx="0" cy="0"/>
+          <a:chOff x="0" y="0"/>
+          <a:chExt cx="0" cy="0"/>
+        </a:xfrm>
+      </p:grpSpPr>
+      <p:sp>
+        <p:nvSpPr>
+          <p:cNvPr id="2" name="Titel 1">
+            <a:extLst>
+              <a:ext uri="{FF2B5EF4-FFF2-40B4-BE49-F238E27FC236}">
+                <a16:creationId xmlns:a16="http://schemas.microsoft.com/office/drawing/2014/main" id="{413D0774-18A2-673D-283B-1C04DB36353E}"/>
+              </a:ext>
+            </a:extLst>
+          </p:cNvPr>
+          <p:cNvSpPr>
+            <a:spLocks noGrp="1"/>
+          </p:cNvSpPr>
+          <p:nvPr>
+            <p:ph type="ctrTitle"/>
+          </p:nvPr>
+        </p:nvSpPr>
+        <p:spPr>
+          <a:xfrm>
+            <a:off x="1524000" y="38100"/>
+            <a:ext cx="9144000" cy="926225"/>
+          </a:xfrm>
+        </p:spPr>
+        <p:txBody>
+          <a:bodyPr>
+            <a:normAutofit/>
+          </a:bodyPr>
+          <a:lstStyle/>
+          <a:p>
+            <a:r>
+              <a:rPr lang="de-DE" dirty="0">
+                <a:latin typeface="Impact" panose="020B0806030902050204" pitchFamily="34" charset="0"/>
+              </a:rPr>
+              <a:t>Allgemeines</a:t>
+            </a:r>
+          </a:p>
+        </p:txBody>
+      </p:sp>
+      <p:cxnSp>
+        <p:nvCxnSpPr>
+          <p:cNvPr id="5" name="Gerader Verbinder 4">
+            <a:extLst>
+              <a:ext uri="{FF2B5EF4-FFF2-40B4-BE49-F238E27FC236}">
+                <a16:creationId xmlns:a16="http://schemas.microsoft.com/office/drawing/2014/main" id="{2B753068-DCEB-B788-AD32-F324BF9F36F0}"/>
+              </a:ext>
+            </a:extLst>
+          </p:cNvPr>
+          <p:cNvCxnSpPr/>
+          <p:nvPr/>
+        </p:nvCxnSpPr>
+        <p:spPr>
+          <a:xfrm>
+            <a:off x="1738604" y="987263"/>
+            <a:ext cx="8714792" cy="0"/>
+          </a:xfrm>
+          <a:prstGeom prst="line">
+            <a:avLst/>
+          </a:prstGeom>
+        </p:spPr>
+        <p:style>
+          <a:lnRef idx="2">
+            <a:schemeClr val="dk1"/>
+          </a:lnRef>
+          <a:fillRef idx="0">
+            <a:schemeClr val="dk1"/>
+          </a:fillRef>
+          <a:effectRef idx="1">
+            <a:schemeClr val="dk1"/>
+          </a:effectRef>
+          <a:fontRef idx="minor">
+            <a:schemeClr val="tx1"/>
+          </a:fontRef>
+        </p:style>
+      </p:cxnSp>
+      <p:sp>
+        <p:nvSpPr>
+          <p:cNvPr id="3" name="Textfeld 2">
+            <a:extLst>
+              <a:ext uri="{FF2B5EF4-FFF2-40B4-BE49-F238E27FC236}">
+                <a16:creationId xmlns:a16="http://schemas.microsoft.com/office/drawing/2014/main" id="{6C315D31-345E-FA34-807F-3462BB6049B9}"/>
+              </a:ext>
+            </a:extLst>
+          </p:cNvPr>
+          <p:cNvSpPr txBox="1"/>
+          <p:nvPr/>
+        </p:nvSpPr>
+        <p:spPr>
+          <a:xfrm>
+            <a:off x="1861457" y="2644170"/>
+            <a:ext cx="8469086" cy="1246495"/>
+          </a:xfrm>
+          <a:prstGeom prst="rect">
+            <a:avLst/>
+          </a:prstGeom>
+          <a:noFill/>
+        </p:spPr>
+        <p:txBody>
+          <a:bodyPr wrap="square" rtlCol="0">
+            <a:spAutoFit/>
+          </a:bodyPr>
+          <a:lstStyle/>
+          <a:p>
+            <a:pPr marL="285750" indent="-285750">
+              <a:buFont typeface="Wingdings" panose="05000000000000000000" pitchFamily="2" charset="2"/>
+              <a:buChar char="v"/>
+            </a:pPr>
+            <a:r>
+              <a:rPr lang="de-DE" sz="2500" dirty="0" err="1"/>
+              <a:t>Github</a:t>
+            </a:r>
+            <a:r>
+              <a:rPr lang="de-DE" sz="2500" dirty="0"/>
+              <a:t> als Kommunikationsplattform</a:t>
+            </a:r>
+          </a:p>
+          <a:p>
+            <a:pPr marL="285750" indent="-285750">
+              <a:buFont typeface="Wingdings" panose="05000000000000000000" pitchFamily="2" charset="2"/>
+              <a:buChar char="v"/>
+            </a:pPr>
+            <a:r>
+              <a:rPr lang="de-DE" sz="2500" dirty="0"/>
+              <a:t>Ungelöste Probleme</a:t>
+            </a:r>
+          </a:p>
+          <a:p>
+            <a:pPr marL="285750" indent="-285750">
+              <a:buFont typeface="Wingdings" panose="05000000000000000000" pitchFamily="2" charset="2"/>
+              <a:buChar char="v"/>
+            </a:pPr>
+            <a:r>
+              <a:rPr lang="de-DE" sz="2500" dirty="0"/>
+              <a:t>Arbeitsteilung</a:t>
+            </a:r>
+          </a:p>
+        </p:txBody>
+      </p:sp>
+    </p:spTree>
+    <p:extLst>
+      <p:ext uri="{BB962C8B-B14F-4D97-AF65-F5344CB8AC3E}">
+        <p14:creationId xmlns:p14="http://schemas.microsoft.com/office/powerpoint/2010/main" val="2401350442"/>
+      </p:ext>
+    </p:extLst>
+  </p:cSld>
+  <p:clrMapOvr>
+    <a:masterClrMapping/>
+  </p:clrMapOvr>
+</p:sld>
+</file>
+
+<file path=ppt/slides/slide28.xml><?xml version="1.0" encoding="utf-8"?>
+<p:sld xmlns:a="http://schemas.openxmlformats.org/drawingml/2006/main" xmlns:r="http://schemas.openxmlformats.org/officeDocument/2006/relationships" xmlns:p="http://schemas.openxmlformats.org/presentationml/2006/main">
+  <p:cSld>
+    <p:spTree>
+      <p:nvGrpSpPr>
+        <p:cNvPr id="1" name=""/>
+        <p:cNvGrpSpPr/>
+        <p:nvPr/>
+      </p:nvGrpSpPr>
+      <p:grpSpPr>
+        <a:xfrm>
+          <a:off x="0" y="0"/>
+          <a:ext cx="0" cy="0"/>
+          <a:chOff x="0" y="0"/>
+          <a:chExt cx="0" cy="0"/>
+        </a:xfrm>
+      </p:grpSpPr>
+      <p:sp>
+        <p:nvSpPr>
+          <p:cNvPr id="2" name="Titel 1">
+            <a:extLst>
+              <a:ext uri="{FF2B5EF4-FFF2-40B4-BE49-F238E27FC236}">
+                <a16:creationId xmlns:a16="http://schemas.microsoft.com/office/drawing/2014/main" id="{413D0774-18A2-673D-283B-1C04DB36353E}"/>
+              </a:ext>
+            </a:extLst>
+          </p:cNvPr>
+          <p:cNvSpPr>
+            <a:spLocks noGrp="1"/>
+          </p:cNvSpPr>
+          <p:nvPr>
+            <p:ph type="ctrTitle"/>
+          </p:nvPr>
+        </p:nvSpPr>
+        <p:spPr>
+          <a:xfrm>
+            <a:off x="1524000" y="19053"/>
+            <a:ext cx="9144000" cy="945272"/>
+          </a:xfrm>
+        </p:spPr>
+        <p:txBody>
+          <a:bodyPr>
+            <a:normAutofit/>
+          </a:bodyPr>
+          <a:lstStyle/>
+          <a:p>
+            <a:r>
+              <a:rPr lang="de-DE" dirty="0">
+                <a:latin typeface="Impact" panose="020B0806030902050204" pitchFamily="34" charset="0"/>
+              </a:rPr>
+              <a:t>Quellen</a:t>
+            </a:r>
+          </a:p>
+        </p:txBody>
+      </p:sp>
+      <p:sp>
+        <p:nvSpPr>
+          <p:cNvPr id="3" name="Untertitel 2">
+            <a:extLst>
+              <a:ext uri="{FF2B5EF4-FFF2-40B4-BE49-F238E27FC236}">
+                <a16:creationId xmlns:a16="http://schemas.microsoft.com/office/drawing/2014/main" id="{93304FBE-99DF-EE64-5EB2-94852307E71F}"/>
+              </a:ext>
+            </a:extLst>
+          </p:cNvPr>
+          <p:cNvSpPr>
+            <a:spLocks noGrp="1"/>
+          </p:cNvSpPr>
+          <p:nvPr>
+            <p:ph type="subTitle" idx="1"/>
+          </p:nvPr>
+        </p:nvSpPr>
+        <p:spPr>
+          <a:xfrm>
+            <a:off x="1173713" y="1637944"/>
+            <a:ext cx="9144000" cy="1791056"/>
+          </a:xfrm>
+        </p:spPr>
+        <p:txBody>
+          <a:bodyPr>
+            <a:noAutofit/>
+          </a:bodyPr>
+          <a:lstStyle/>
+          <a:p>
+            <a:pPr algn="l"/>
+            <a:r>
+              <a:rPr lang="de-DE" sz="3000" dirty="0">
                 <a:latin typeface="Liberation Sans" panose="020B0604020202020204" pitchFamily="34" charset="0"/>
                 <a:ea typeface="Liberation Sans" panose="020B0604020202020204" pitchFamily="34" charset="0"/>
                 <a:cs typeface="Liberation Sans" panose="020B0604020202020204" pitchFamily="34" charset="0"/>
               </a:rPr>
-              <a:t>Improvisation ist oft notwendig</a:t>
-            </a:r>
-          </a:p>
-        </p:txBody>
-      </p:sp>
+              <a:t>Code Dokumentation:</a:t>
+            </a:r>
+          </a:p>
+          <a:p>
+            <a:pPr algn="l"/>
+            <a:r>
+              <a:rPr lang="de-DE" sz="2500" dirty="0">
+                <a:ea typeface="+mn-lt"/>
+                <a:cs typeface="+mn-lt"/>
+                <a:hlinkClick r:id="rId2"/>
+              </a:rPr>
+              <a:t>https://bluepad32.readthedocs.io/en/latest/plat_arduino/</a:t>
+            </a:r>
+            <a:endParaRPr lang="de-DE" sz="2500" dirty="0">
+              <a:ea typeface="+mn-lt"/>
+              <a:cs typeface="+mn-lt"/>
+            </a:endParaRPr>
+          </a:p>
+          <a:p>
+            <a:pPr algn="l"/>
+            <a:r>
+              <a:rPr lang="de-DE" sz="3000" dirty="0">
+                <a:latin typeface="Liberation Sans" panose="020B0604020202020204" pitchFamily="34" charset="0"/>
+                <a:ea typeface="Liberation Sans" panose="020B0604020202020204" pitchFamily="34" charset="0"/>
+                <a:cs typeface="Liberation Sans" panose="020B0604020202020204" pitchFamily="34" charset="0"/>
+              </a:rPr>
+              <a:t>Zusätzliche Board </a:t>
+            </a:r>
+            <a:r>
+              <a:rPr lang="de-DE" sz="3000" dirty="0" err="1">
+                <a:latin typeface="Liberation Sans" panose="020B0604020202020204" pitchFamily="34" charset="0"/>
+                <a:ea typeface="Liberation Sans" panose="020B0604020202020204" pitchFamily="34" charset="0"/>
+                <a:cs typeface="Liberation Sans" panose="020B0604020202020204" pitchFamily="34" charset="0"/>
+              </a:rPr>
+              <a:t>URL‘s</a:t>
+            </a:r>
+            <a:r>
+              <a:rPr lang="de-DE" sz="3000" dirty="0">
+                <a:latin typeface="Liberation Sans" panose="020B0604020202020204" pitchFamily="34" charset="0"/>
+                <a:ea typeface="Liberation Sans" panose="020B0604020202020204" pitchFamily="34" charset="0"/>
+                <a:cs typeface="Liberation Sans" panose="020B0604020202020204" pitchFamily="34" charset="0"/>
+              </a:rPr>
+              <a:t>:</a:t>
+            </a:r>
+          </a:p>
+          <a:p>
+            <a:pPr algn="l"/>
+            <a:r>
+              <a:rPr lang="de-DE" sz="2500" dirty="0">
+                <a:ea typeface="+mn-lt"/>
+                <a:cs typeface="+mn-lt"/>
+                <a:hlinkClick r:id="rId3"/>
+              </a:rPr>
+              <a:t>https://raw.githubusercontent.com/espressif/arduino-esp32/gh-pages/package_esp32_index.json</a:t>
+            </a:r>
+            <a:endParaRPr lang="de-DE" sz="2500" dirty="0">
+              <a:ea typeface="+mn-lt"/>
+              <a:cs typeface="+mn-lt"/>
+            </a:endParaRPr>
+          </a:p>
+          <a:p>
+            <a:pPr algn="l"/>
+            <a:r>
+              <a:rPr lang="de-DE" sz="2500" dirty="0">
+                <a:ea typeface="+mn-lt"/>
+                <a:cs typeface="+mn-lt"/>
+                <a:hlinkClick r:id="rId4"/>
+              </a:rPr>
+              <a:t>https://raw.githubusercontent.com/ricardoquesada/esp32-arduino-lib-builder/master/bluepad32_files/package_esp32_bluepad32_index.json</a:t>
+            </a:r>
+            <a:endParaRPr lang="de-DE" sz="2500" dirty="0">
+              <a:ea typeface="+mn-lt"/>
+              <a:cs typeface="+mn-lt"/>
+            </a:endParaRPr>
+          </a:p>
+          <a:p>
+            <a:pPr algn="l"/>
+            <a:endParaRPr lang="de-DE" sz="3000" dirty="0">
+              <a:latin typeface="Liberation Sans" panose="020B0604020202020204" pitchFamily="34" charset="0"/>
+              <a:ea typeface="Liberation Sans" panose="020B0604020202020204" pitchFamily="34" charset="0"/>
+              <a:cs typeface="Liberation Sans" panose="020B0604020202020204" pitchFamily="34" charset="0"/>
+            </a:endParaRPr>
+          </a:p>
+          <a:p>
+            <a:pPr algn="l"/>
+            <a:endParaRPr lang="de-DE" sz="3000" dirty="0">
+              <a:latin typeface="Liberation Sans" panose="020B0604020202020204" pitchFamily="34" charset="0"/>
+              <a:ea typeface="Liberation Sans" panose="020B0604020202020204" pitchFamily="34" charset="0"/>
+              <a:cs typeface="Liberation Sans" panose="020B0604020202020204" pitchFamily="34" charset="0"/>
+            </a:endParaRPr>
+          </a:p>
+        </p:txBody>
+      </p:sp>
+      <p:cxnSp>
+        <p:nvCxnSpPr>
+          <p:cNvPr id="5" name="Gerader Verbinder 4">
+            <a:extLst>
+              <a:ext uri="{FF2B5EF4-FFF2-40B4-BE49-F238E27FC236}">
+                <a16:creationId xmlns:a16="http://schemas.microsoft.com/office/drawing/2014/main" id="{2B753068-DCEB-B788-AD32-F324BF9F36F0}"/>
+              </a:ext>
+            </a:extLst>
+          </p:cNvPr>
+          <p:cNvCxnSpPr/>
+          <p:nvPr/>
+        </p:nvCxnSpPr>
+        <p:spPr>
+          <a:xfrm>
+            <a:off x="1602921" y="1034888"/>
+            <a:ext cx="8714792" cy="0"/>
+          </a:xfrm>
+          <a:prstGeom prst="line">
+            <a:avLst/>
+          </a:prstGeom>
+        </p:spPr>
+        <p:style>
+          <a:lnRef idx="2">
+            <a:schemeClr val="dk1"/>
+          </a:lnRef>
+          <a:fillRef idx="0">
+            <a:schemeClr val="dk1"/>
+          </a:fillRef>
+          <a:effectRef idx="1">
+            <a:schemeClr val="dk1"/>
+          </a:effectRef>
+          <a:fontRef idx="minor">
+            <a:schemeClr val="tx1"/>
+          </a:fontRef>
+        </p:style>
+      </p:cxnSp>
     </p:spTree>
     <p:extLst>
       <p:ext uri="{BB962C8B-B14F-4D97-AF65-F5344CB8AC3E}">
-        <p14:creationId xmlns:p14="http://schemas.microsoft.com/office/powerpoint/2010/main" val="1779069297"/>
+        <p14:creationId xmlns:p14="http://schemas.microsoft.com/office/powerpoint/2010/main" val="3499731097"/>
+      </p:ext>
+    </p:extLst>
+  </p:cSld>
+  <p:clrMapOvr>
+    <a:masterClrMapping/>
+  </p:clrMapOvr>
+</p:sld>
+</file>
+
+<file path=ppt/slides/slide3.xml><?xml version="1.0" encoding="utf-8"?>
+<p:sld xmlns:a="http://schemas.openxmlformats.org/drawingml/2006/main" xmlns:r="http://schemas.openxmlformats.org/officeDocument/2006/relationships" xmlns:p="http://schemas.openxmlformats.org/presentationml/2006/main">
+  <p:cSld>
+    <p:spTree>
+      <p:nvGrpSpPr>
+        <p:cNvPr id="1" name=""/>
+        <p:cNvGrpSpPr/>
+        <p:nvPr/>
+      </p:nvGrpSpPr>
+      <p:grpSpPr>
+        <a:xfrm>
+          <a:off x="0" y="0"/>
+          <a:ext cx="0" cy="0"/>
+          <a:chOff x="0" y="0"/>
+          <a:chExt cx="0" cy="0"/>
+        </a:xfrm>
+      </p:grpSpPr>
+      <p:sp>
+        <p:nvSpPr>
+          <p:cNvPr id="2" name="Titel 1">
+            <a:extLst>
+              <a:ext uri="{FF2B5EF4-FFF2-40B4-BE49-F238E27FC236}">
+                <a16:creationId xmlns:a16="http://schemas.microsoft.com/office/drawing/2014/main" id="{413D0774-18A2-673D-283B-1C04DB36353E}"/>
+              </a:ext>
+            </a:extLst>
+          </p:cNvPr>
+          <p:cNvSpPr>
+            <a:spLocks noGrp="1"/>
+          </p:cNvSpPr>
+          <p:nvPr>
+            <p:ph type="ctrTitle"/>
+          </p:nvPr>
+        </p:nvSpPr>
+        <p:spPr>
+          <a:xfrm>
+            <a:off x="1524000" y="1269579"/>
+            <a:ext cx="9144000" cy="2387600"/>
+          </a:xfrm>
+        </p:spPr>
+        <p:txBody>
+          <a:bodyPr>
+            <a:normAutofit/>
+          </a:bodyPr>
+          <a:lstStyle/>
+          <a:p>
+            <a:r>
+              <a:rPr lang="de-DE" sz="10000" dirty="0">
+                <a:latin typeface="Impact" panose="020B0806030902050204" pitchFamily="34" charset="0"/>
+              </a:rPr>
+              <a:t>Konstruktion</a:t>
+            </a:r>
+          </a:p>
+        </p:txBody>
+      </p:sp>
+      <p:sp>
+        <p:nvSpPr>
+          <p:cNvPr id="3" name="Untertitel 2">
+            <a:extLst>
+              <a:ext uri="{FF2B5EF4-FFF2-40B4-BE49-F238E27FC236}">
+                <a16:creationId xmlns:a16="http://schemas.microsoft.com/office/drawing/2014/main" id="{93304FBE-99DF-EE64-5EB2-94852307E71F}"/>
+              </a:ext>
+            </a:extLst>
+          </p:cNvPr>
+          <p:cNvSpPr>
+            <a:spLocks noGrp="1"/>
+          </p:cNvSpPr>
+          <p:nvPr>
+            <p:ph type="subTitle" idx="1"/>
+          </p:nvPr>
+        </p:nvSpPr>
+        <p:spPr>
+          <a:xfrm>
+            <a:off x="1524000" y="4259635"/>
+            <a:ext cx="9144000" cy="1791056"/>
+          </a:xfrm>
+        </p:spPr>
+        <p:txBody>
+          <a:bodyPr>
+            <a:noAutofit/>
+          </a:bodyPr>
+          <a:lstStyle/>
+          <a:p>
+            <a:r>
+              <a:rPr lang="de-DE" sz="3000" dirty="0">
+                <a:latin typeface="Liberation Sans" panose="020B0604020202020204" pitchFamily="34" charset="0"/>
+                <a:ea typeface="Liberation Sans" panose="020B0604020202020204" pitchFamily="34" charset="0"/>
+                <a:cs typeface="Liberation Sans" panose="020B0604020202020204" pitchFamily="34" charset="0"/>
+              </a:rPr>
+              <a:t>Lasse</a:t>
+            </a:r>
+          </a:p>
+        </p:txBody>
+      </p:sp>
+      <p:cxnSp>
+        <p:nvCxnSpPr>
+          <p:cNvPr id="5" name="Gerader Verbinder 4">
+            <a:extLst>
+              <a:ext uri="{FF2B5EF4-FFF2-40B4-BE49-F238E27FC236}">
+                <a16:creationId xmlns:a16="http://schemas.microsoft.com/office/drawing/2014/main" id="{2B753068-DCEB-B788-AD32-F324BF9F36F0}"/>
+              </a:ext>
+            </a:extLst>
+          </p:cNvPr>
+          <p:cNvCxnSpPr/>
+          <p:nvPr/>
+        </p:nvCxnSpPr>
+        <p:spPr>
+          <a:xfrm>
+            <a:off x="1698171" y="3830217"/>
+            <a:ext cx="8714792" cy="0"/>
+          </a:xfrm>
+          <a:prstGeom prst="line">
+            <a:avLst/>
+          </a:prstGeom>
+        </p:spPr>
+        <p:style>
+          <a:lnRef idx="2">
+            <a:schemeClr val="dk1"/>
+          </a:lnRef>
+          <a:fillRef idx="0">
+            <a:schemeClr val="dk1"/>
+          </a:fillRef>
+          <a:effectRef idx="1">
+            <a:schemeClr val="dk1"/>
+          </a:effectRef>
+          <a:fontRef idx="minor">
+            <a:schemeClr val="tx1"/>
+          </a:fontRef>
+        </p:style>
+      </p:cxnSp>
+    </p:spTree>
+    <p:extLst>
+      <p:ext uri="{BB962C8B-B14F-4D97-AF65-F5344CB8AC3E}">
+        <p14:creationId xmlns:p14="http://schemas.microsoft.com/office/powerpoint/2010/main" val="606463830"/>
+      </p:ext>
+    </p:extLst>
+  </p:cSld>
+  <p:clrMapOvr>
+    <a:masterClrMapping/>
+  </p:clrMapOvr>
+</p:sld>
+</file>
+
+<file path=ppt/slides/slide4.xml><?xml version="1.0" encoding="utf-8"?>
+<p:sld xmlns:a="http://schemas.openxmlformats.org/drawingml/2006/main" xmlns:r="http://schemas.openxmlformats.org/officeDocument/2006/relationships" xmlns:p="http://schemas.openxmlformats.org/presentationml/2006/main">
+  <p:cSld>
+    <p:spTree>
+      <p:nvGrpSpPr>
+        <p:cNvPr id="1" name=""/>
+        <p:cNvGrpSpPr/>
+        <p:nvPr/>
+      </p:nvGrpSpPr>
+      <p:grpSpPr>
+        <a:xfrm>
+          <a:off x="0" y="0"/>
+          <a:ext cx="0" cy="0"/>
+          <a:chOff x="0" y="0"/>
+          <a:chExt cx="0" cy="0"/>
+        </a:xfrm>
+      </p:grpSpPr>
+      <p:sp>
+        <p:nvSpPr>
+          <p:cNvPr id="4" name="Titel 1">
+            <a:extLst>
+              <a:ext uri="{FF2B5EF4-FFF2-40B4-BE49-F238E27FC236}">
+                <a16:creationId xmlns:a16="http://schemas.microsoft.com/office/drawing/2014/main" id="{BE92422F-6CFB-6703-F428-2208AF7C4F27}"/>
+              </a:ext>
+            </a:extLst>
+          </p:cNvPr>
+          <p:cNvSpPr txBox="1">
+            <a:spLocks/>
+          </p:cNvSpPr>
+          <p:nvPr/>
+        </p:nvSpPr>
+        <p:spPr>
+          <a:xfrm>
+            <a:off x="3405187" y="0"/>
+            <a:ext cx="5381625" cy="1019204"/>
+          </a:xfrm>
+          <a:prstGeom prst="rect">
+            <a:avLst/>
+          </a:prstGeom>
+        </p:spPr>
+        <p:txBody>
+          <a:bodyPr vert="horz" lIns="91440" tIns="45720" rIns="91440" bIns="45720" rtlCol="0" anchor="b">
+            <a:normAutofit/>
+          </a:bodyPr>
+          <a:lstStyle>
+            <a:lvl1pPr algn="ctr" defTabSz="914400" rtl="0" eaLnBrk="1" latinLnBrk="0" hangingPunct="1">
+              <a:lnSpc>
+                <a:spcPct val="90000"/>
+              </a:lnSpc>
+              <a:spcBef>
+                <a:spcPct val="0"/>
+              </a:spcBef>
+              <a:buNone/>
+              <a:defRPr sz="6000" kern="1200">
+                <a:solidFill>
+                  <a:schemeClr val="tx1"/>
+                </a:solidFill>
+                <a:latin typeface="+mj-lt"/>
+                <a:ea typeface="+mj-ea"/>
+                <a:cs typeface="+mj-cs"/>
+              </a:defRPr>
+            </a:lvl1pPr>
+          </a:lstStyle>
+          <a:p>
+            <a:r>
+              <a:rPr lang="de-DE" dirty="0">
+                <a:latin typeface="Impact" panose="020B0806030902050204" pitchFamily="34" charset="0"/>
+              </a:rPr>
+              <a:t>Rahmen</a:t>
+            </a:r>
+          </a:p>
+        </p:txBody>
+      </p:sp>
+      <p:cxnSp>
+        <p:nvCxnSpPr>
+          <p:cNvPr id="6" name="Gerader Verbinder 5">
+            <a:extLst>
+              <a:ext uri="{FF2B5EF4-FFF2-40B4-BE49-F238E27FC236}">
+                <a16:creationId xmlns:a16="http://schemas.microsoft.com/office/drawing/2014/main" id="{86D8AB01-C043-70CC-51BD-6A6967F3BAD5}"/>
+              </a:ext>
+            </a:extLst>
+          </p:cNvPr>
+          <p:cNvCxnSpPr/>
+          <p:nvPr/>
+        </p:nvCxnSpPr>
+        <p:spPr>
+          <a:xfrm>
+            <a:off x="1576168" y="1118956"/>
+            <a:ext cx="8714792" cy="0"/>
+          </a:xfrm>
+          <a:prstGeom prst="line">
+            <a:avLst/>
+          </a:prstGeom>
+        </p:spPr>
+        <p:style>
+          <a:lnRef idx="2">
+            <a:schemeClr val="dk1"/>
+          </a:lnRef>
+          <a:fillRef idx="0">
+            <a:schemeClr val="dk1"/>
+          </a:fillRef>
+          <a:effectRef idx="1">
+            <a:schemeClr val="dk1"/>
+          </a:effectRef>
+          <a:fontRef idx="minor">
+            <a:schemeClr val="tx1"/>
+          </a:fontRef>
+        </p:style>
+      </p:cxnSp>
+      <p:pic>
+        <p:nvPicPr>
+          <p:cNvPr id="5" name="Grafik 4">
+            <a:extLst>
+              <a:ext uri="{FF2B5EF4-FFF2-40B4-BE49-F238E27FC236}">
+                <a16:creationId xmlns:a16="http://schemas.microsoft.com/office/drawing/2014/main" id="{F7506FDB-45FA-1744-3418-9C5A4750199B}"/>
+              </a:ext>
+            </a:extLst>
+          </p:cNvPr>
+          <p:cNvPicPr>
+            <a:picLocks noChangeAspect="1"/>
+          </p:cNvPicPr>
+          <p:nvPr/>
+        </p:nvPicPr>
+        <p:blipFill>
+          <a:blip r:embed="rId2"/>
+          <a:stretch>
+            <a:fillRect/>
+          </a:stretch>
+        </p:blipFill>
+        <p:spPr>
+          <a:xfrm>
+            <a:off x="1576165" y="1508851"/>
+            <a:ext cx="8714793" cy="4872787"/>
+          </a:xfrm>
+          <a:prstGeom prst="rect">
+            <a:avLst/>
+          </a:prstGeom>
+        </p:spPr>
+      </p:pic>
+    </p:spTree>
+    <p:extLst>
+      <p:ext uri="{BB962C8B-B14F-4D97-AF65-F5344CB8AC3E}">
+        <p14:creationId xmlns:p14="http://schemas.microsoft.com/office/powerpoint/2010/main" val="3219921335"/>
+      </p:ext>
+    </p:extLst>
+  </p:cSld>
+  <p:clrMapOvr>
+    <a:masterClrMapping/>
+  </p:clrMapOvr>
+</p:sld>
+</file>
+
+<file path=ppt/slides/slide5.xml><?xml version="1.0" encoding="utf-8"?>
+<p:sld xmlns:a="http://schemas.openxmlformats.org/drawingml/2006/main" xmlns:r="http://schemas.openxmlformats.org/officeDocument/2006/relationships" xmlns:p="http://schemas.openxmlformats.org/presentationml/2006/main">
+  <p:cSld>
+    <p:spTree>
+      <p:nvGrpSpPr>
+        <p:cNvPr id="1" name=""/>
+        <p:cNvGrpSpPr/>
+        <p:nvPr/>
+      </p:nvGrpSpPr>
+      <p:grpSpPr>
+        <a:xfrm>
+          <a:off x="0" y="0"/>
+          <a:ext cx="0" cy="0"/>
+          <a:chOff x="0" y="0"/>
+          <a:chExt cx="0" cy="0"/>
+        </a:xfrm>
+      </p:grpSpPr>
+      <p:sp>
+        <p:nvSpPr>
+          <p:cNvPr id="4" name="Titel 1">
+            <a:extLst>
+              <a:ext uri="{FF2B5EF4-FFF2-40B4-BE49-F238E27FC236}">
+                <a16:creationId xmlns:a16="http://schemas.microsoft.com/office/drawing/2014/main" id="{BE92422F-6CFB-6703-F428-2208AF7C4F27}"/>
+              </a:ext>
+            </a:extLst>
+          </p:cNvPr>
+          <p:cNvSpPr txBox="1">
+            <a:spLocks/>
+          </p:cNvSpPr>
+          <p:nvPr/>
+        </p:nvSpPr>
+        <p:spPr>
+          <a:xfrm>
+            <a:off x="3405187" y="0"/>
+            <a:ext cx="5381625" cy="1019204"/>
+          </a:xfrm>
+          <a:prstGeom prst="rect">
+            <a:avLst/>
+          </a:prstGeom>
+        </p:spPr>
+        <p:txBody>
+          <a:bodyPr vert="horz" lIns="91440" tIns="45720" rIns="91440" bIns="45720" rtlCol="0" anchor="b">
+            <a:normAutofit/>
+          </a:bodyPr>
+          <a:lstStyle>
+            <a:lvl1pPr algn="ctr" defTabSz="914400" rtl="0" eaLnBrk="1" latinLnBrk="0" hangingPunct="1">
+              <a:lnSpc>
+                <a:spcPct val="90000"/>
+              </a:lnSpc>
+              <a:spcBef>
+                <a:spcPct val="0"/>
+              </a:spcBef>
+              <a:buNone/>
+              <a:defRPr sz="6000" kern="1200">
+                <a:solidFill>
+                  <a:schemeClr val="tx1"/>
+                </a:solidFill>
+                <a:latin typeface="+mj-lt"/>
+                <a:ea typeface="+mj-ea"/>
+                <a:cs typeface="+mj-cs"/>
+              </a:defRPr>
+            </a:lvl1pPr>
+          </a:lstStyle>
+          <a:p>
+            <a:r>
+              <a:rPr lang="de-DE" dirty="0">
+                <a:latin typeface="Impact" panose="020B0806030902050204" pitchFamily="34" charset="0"/>
+              </a:rPr>
+              <a:t>Weitere Teile</a:t>
+            </a:r>
+          </a:p>
+        </p:txBody>
+      </p:sp>
+      <p:cxnSp>
+        <p:nvCxnSpPr>
+          <p:cNvPr id="6" name="Gerader Verbinder 5">
+            <a:extLst>
+              <a:ext uri="{FF2B5EF4-FFF2-40B4-BE49-F238E27FC236}">
+                <a16:creationId xmlns:a16="http://schemas.microsoft.com/office/drawing/2014/main" id="{86D8AB01-C043-70CC-51BD-6A6967F3BAD5}"/>
+              </a:ext>
+            </a:extLst>
+          </p:cNvPr>
+          <p:cNvCxnSpPr/>
+          <p:nvPr/>
+        </p:nvCxnSpPr>
+        <p:spPr>
+          <a:xfrm>
+            <a:off x="1576168" y="1118956"/>
+            <a:ext cx="8714792" cy="0"/>
+          </a:xfrm>
+          <a:prstGeom prst="line">
+            <a:avLst/>
+          </a:prstGeom>
+        </p:spPr>
+        <p:style>
+          <a:lnRef idx="2">
+            <a:schemeClr val="dk1"/>
+          </a:lnRef>
+          <a:fillRef idx="0">
+            <a:schemeClr val="dk1"/>
+          </a:fillRef>
+          <a:effectRef idx="1">
+            <a:schemeClr val="dk1"/>
+          </a:effectRef>
+          <a:fontRef idx="minor">
+            <a:schemeClr val="tx1"/>
+          </a:fontRef>
+        </p:style>
+      </p:cxnSp>
+      <p:pic>
+        <p:nvPicPr>
+          <p:cNvPr id="3" name="Grafik 2">
+            <a:extLst>
+              <a:ext uri="{FF2B5EF4-FFF2-40B4-BE49-F238E27FC236}">
+                <a16:creationId xmlns:a16="http://schemas.microsoft.com/office/drawing/2014/main" id="{EA13F5A4-757A-5D19-E1BF-CE2BF15D55FB}"/>
+              </a:ext>
+            </a:extLst>
+          </p:cNvPr>
+          <p:cNvPicPr>
+            <a:picLocks noChangeAspect="1"/>
+          </p:cNvPicPr>
+          <p:nvPr/>
+        </p:nvPicPr>
+        <p:blipFill>
+          <a:blip r:embed="rId2"/>
+          <a:srcRect r="10317"/>
+          <a:stretch/>
+        </p:blipFill>
+        <p:spPr>
+          <a:xfrm>
+            <a:off x="1576168" y="1780971"/>
+            <a:ext cx="2650106" cy="3958073"/>
+          </a:xfrm>
+          <a:prstGeom prst="rect">
+            <a:avLst/>
+          </a:prstGeom>
+        </p:spPr>
+      </p:pic>
+      <p:pic>
+        <p:nvPicPr>
+          <p:cNvPr id="8" name="Grafik 7">
+            <a:extLst>
+              <a:ext uri="{FF2B5EF4-FFF2-40B4-BE49-F238E27FC236}">
+                <a16:creationId xmlns:a16="http://schemas.microsoft.com/office/drawing/2014/main" id="{A3B4D3C1-839B-CE86-0FA3-E04E8B52245C}"/>
+              </a:ext>
+            </a:extLst>
+          </p:cNvPr>
+          <p:cNvPicPr>
+            <a:picLocks noChangeAspect="1"/>
+          </p:cNvPicPr>
+          <p:nvPr/>
+        </p:nvPicPr>
+        <p:blipFill>
+          <a:blip r:embed="rId3"/>
+          <a:srcRect r="19006"/>
+          <a:stretch/>
+        </p:blipFill>
+        <p:spPr>
+          <a:xfrm>
+            <a:off x="4770947" y="1780972"/>
+            <a:ext cx="2650106" cy="3958072"/>
+          </a:xfrm>
+          <a:prstGeom prst="rect">
+            <a:avLst/>
+          </a:prstGeom>
+        </p:spPr>
+      </p:pic>
+      <p:pic>
+        <p:nvPicPr>
+          <p:cNvPr id="10" name="Grafik 9">
+            <a:extLst>
+              <a:ext uri="{FF2B5EF4-FFF2-40B4-BE49-F238E27FC236}">
+                <a16:creationId xmlns:a16="http://schemas.microsoft.com/office/drawing/2014/main" id="{1C5CCE42-FBEE-5BF3-B4C4-86B7174B0B4F}"/>
+              </a:ext>
+            </a:extLst>
+          </p:cNvPr>
+          <p:cNvPicPr>
+            <a:picLocks noChangeAspect="1"/>
+          </p:cNvPicPr>
+          <p:nvPr/>
+        </p:nvPicPr>
+        <p:blipFill>
+          <a:blip r:embed="rId4"/>
+          <a:srcRect r="25958"/>
+          <a:stretch/>
+        </p:blipFill>
+        <p:spPr>
+          <a:xfrm>
+            <a:off x="7965727" y="1780972"/>
+            <a:ext cx="2325233" cy="3956934"/>
+          </a:xfrm>
+          <a:prstGeom prst="rect">
+            <a:avLst/>
+          </a:prstGeom>
+        </p:spPr>
+      </p:pic>
+    </p:spTree>
+    <p:extLst>
+      <p:ext uri="{BB962C8B-B14F-4D97-AF65-F5344CB8AC3E}">
+        <p14:creationId xmlns:p14="http://schemas.microsoft.com/office/powerpoint/2010/main" val="1652724053"/>
+      </p:ext>
+    </p:extLst>
+  </p:cSld>
+  <p:clrMapOvr>
+    <a:masterClrMapping/>
+  </p:clrMapOvr>
+</p:sld>
+</file>
+
+<file path=ppt/slides/slide6.xml><?xml version="1.0" encoding="utf-8"?>
+<p:sld xmlns:a="http://schemas.openxmlformats.org/drawingml/2006/main" xmlns:r="http://schemas.openxmlformats.org/officeDocument/2006/relationships" xmlns:p="http://schemas.openxmlformats.org/presentationml/2006/main">
+  <p:cSld>
+    <p:spTree>
+      <p:nvGrpSpPr>
+        <p:cNvPr id="1" name=""/>
+        <p:cNvGrpSpPr/>
+        <p:nvPr/>
+      </p:nvGrpSpPr>
+      <p:grpSpPr>
+        <a:xfrm>
+          <a:off x="0" y="0"/>
+          <a:ext cx="0" cy="0"/>
+          <a:chOff x="0" y="0"/>
+          <a:chExt cx="0" cy="0"/>
+        </a:xfrm>
+      </p:grpSpPr>
+      <p:sp>
+        <p:nvSpPr>
+          <p:cNvPr id="4" name="Titel 1">
+            <a:extLst>
+              <a:ext uri="{FF2B5EF4-FFF2-40B4-BE49-F238E27FC236}">
+                <a16:creationId xmlns:a16="http://schemas.microsoft.com/office/drawing/2014/main" id="{BE92422F-6CFB-6703-F428-2208AF7C4F27}"/>
+              </a:ext>
+            </a:extLst>
+          </p:cNvPr>
+          <p:cNvSpPr txBox="1">
+            <a:spLocks/>
+          </p:cNvSpPr>
+          <p:nvPr/>
+        </p:nvSpPr>
+        <p:spPr>
+          <a:xfrm>
+            <a:off x="2524664" y="0"/>
+            <a:ext cx="7142672" cy="1019204"/>
+          </a:xfrm>
+          <a:prstGeom prst="rect">
+            <a:avLst/>
+          </a:prstGeom>
+        </p:spPr>
+        <p:txBody>
+          <a:bodyPr vert="horz" lIns="91440" tIns="45720" rIns="91440" bIns="45720" rtlCol="0" anchor="b">
+            <a:normAutofit/>
+          </a:bodyPr>
+          <a:lstStyle>
+            <a:lvl1pPr algn="ctr" defTabSz="914400" rtl="0" eaLnBrk="1" latinLnBrk="0" hangingPunct="1">
+              <a:lnSpc>
+                <a:spcPct val="90000"/>
+              </a:lnSpc>
+              <a:spcBef>
+                <a:spcPct val="0"/>
+              </a:spcBef>
+              <a:buNone/>
+              <a:defRPr sz="6000" kern="1200">
+                <a:solidFill>
+                  <a:schemeClr val="tx1"/>
+                </a:solidFill>
+                <a:latin typeface="+mj-lt"/>
+                <a:ea typeface="+mj-ea"/>
+                <a:cs typeface="+mj-cs"/>
+              </a:defRPr>
+            </a:lvl1pPr>
+          </a:lstStyle>
+          <a:p>
+            <a:r>
+              <a:rPr lang="de-DE" dirty="0">
+                <a:latin typeface="Impact" panose="020B0806030902050204" pitchFamily="34" charset="0"/>
+              </a:rPr>
+              <a:t>Kabelmanagement</a:t>
+            </a:r>
+          </a:p>
+        </p:txBody>
+      </p:sp>
+      <p:cxnSp>
+        <p:nvCxnSpPr>
+          <p:cNvPr id="6" name="Gerader Verbinder 5">
+            <a:extLst>
+              <a:ext uri="{FF2B5EF4-FFF2-40B4-BE49-F238E27FC236}">
+                <a16:creationId xmlns:a16="http://schemas.microsoft.com/office/drawing/2014/main" id="{86D8AB01-C043-70CC-51BD-6A6967F3BAD5}"/>
+              </a:ext>
+            </a:extLst>
+          </p:cNvPr>
+          <p:cNvCxnSpPr/>
+          <p:nvPr/>
+        </p:nvCxnSpPr>
+        <p:spPr>
+          <a:xfrm>
+            <a:off x="1576168" y="1118956"/>
+            <a:ext cx="8714792" cy="0"/>
+          </a:xfrm>
+          <a:prstGeom prst="line">
+            <a:avLst/>
+          </a:prstGeom>
+        </p:spPr>
+        <p:style>
+          <a:lnRef idx="2">
+            <a:schemeClr val="dk1"/>
+          </a:lnRef>
+          <a:fillRef idx="0">
+            <a:schemeClr val="dk1"/>
+          </a:fillRef>
+          <a:effectRef idx="1">
+            <a:schemeClr val="dk1"/>
+          </a:effectRef>
+          <a:fontRef idx="minor">
+            <a:schemeClr val="tx1"/>
+          </a:fontRef>
+        </p:style>
+      </p:cxnSp>
+      <p:pic>
+        <p:nvPicPr>
+          <p:cNvPr id="7" name="Grafik 6" descr="Ein Bild, das Elektrische Leitungen, Elektronik, Kabel, Maschine enthält.&#10;&#10;KI-generierte Inhalte können fehlerhaft sein.">
+            <a:extLst>
+              <a:ext uri="{FF2B5EF4-FFF2-40B4-BE49-F238E27FC236}">
+                <a16:creationId xmlns:a16="http://schemas.microsoft.com/office/drawing/2014/main" id="{F28C137B-6883-43F6-7B6F-4E369A70B85E}"/>
+              </a:ext>
+            </a:extLst>
+          </p:cNvPr>
+          <p:cNvPicPr>
+            <a:picLocks noChangeAspect="1"/>
+          </p:cNvPicPr>
+          <p:nvPr/>
+        </p:nvPicPr>
+        <p:blipFill>
+          <a:blip r:embed="rId2">
+            <a:extLst>
+              <a:ext uri="{28A0092B-C50C-407E-A947-70E740481C1C}">
+                <a14:useLocalDpi xmlns:a14="http://schemas.microsoft.com/office/drawing/2010/main" val="0"/>
+              </a:ext>
+            </a:extLst>
+          </a:blip>
+          <a:stretch>
+            <a:fillRect/>
+          </a:stretch>
+        </p:blipFill>
+        <p:spPr>
+          <a:xfrm>
+            <a:off x="1581157" y="1822184"/>
+            <a:ext cx="8709803" cy="3916860"/>
+          </a:xfrm>
+          <a:prstGeom prst="rect">
+            <a:avLst/>
+          </a:prstGeom>
+        </p:spPr>
+      </p:pic>
+    </p:spTree>
+    <p:extLst>
+      <p:ext uri="{BB962C8B-B14F-4D97-AF65-F5344CB8AC3E}">
+        <p14:creationId xmlns:p14="http://schemas.microsoft.com/office/powerpoint/2010/main" val="240659321"/>
+      </p:ext>
+    </p:extLst>
+  </p:cSld>
+  <p:clrMapOvr>
+    <a:masterClrMapping/>
+  </p:clrMapOvr>
+</p:sld>
+</file>
+
+<file path=ppt/slides/slide7.xml><?xml version="1.0" encoding="utf-8"?>
+<p:sld xmlns:a="http://schemas.openxmlformats.org/drawingml/2006/main" xmlns:r="http://schemas.openxmlformats.org/officeDocument/2006/relationships" xmlns:p="http://schemas.openxmlformats.org/presentationml/2006/main">
+  <p:cSld>
+    <p:spTree>
+      <p:nvGrpSpPr>
+        <p:cNvPr id="1" name=""/>
+        <p:cNvGrpSpPr/>
+        <p:nvPr/>
+      </p:nvGrpSpPr>
+      <p:grpSpPr>
+        <a:xfrm>
+          <a:off x="0" y="0"/>
+          <a:ext cx="0" cy="0"/>
+          <a:chOff x="0" y="0"/>
+          <a:chExt cx="0" cy="0"/>
+        </a:xfrm>
+      </p:grpSpPr>
+      <p:sp>
+        <p:nvSpPr>
+          <p:cNvPr id="4" name="Titel 1">
+            <a:extLst>
+              <a:ext uri="{FF2B5EF4-FFF2-40B4-BE49-F238E27FC236}">
+                <a16:creationId xmlns:a16="http://schemas.microsoft.com/office/drawing/2014/main" id="{BE92422F-6CFB-6703-F428-2208AF7C4F27}"/>
+              </a:ext>
+            </a:extLst>
+          </p:cNvPr>
+          <p:cNvSpPr txBox="1">
+            <a:spLocks/>
+          </p:cNvSpPr>
+          <p:nvPr/>
+        </p:nvSpPr>
+        <p:spPr>
+          <a:xfrm>
+            <a:off x="2524664" y="0"/>
+            <a:ext cx="7142672" cy="1019204"/>
+          </a:xfrm>
+          <a:prstGeom prst="rect">
+            <a:avLst/>
+          </a:prstGeom>
+        </p:spPr>
+        <p:txBody>
+          <a:bodyPr vert="horz" lIns="91440" tIns="45720" rIns="91440" bIns="45720" rtlCol="0" anchor="b">
+            <a:normAutofit/>
+          </a:bodyPr>
+          <a:lstStyle>
+            <a:lvl1pPr algn="ctr" defTabSz="914400" rtl="0" eaLnBrk="1" latinLnBrk="0" hangingPunct="1">
+              <a:lnSpc>
+                <a:spcPct val="90000"/>
+              </a:lnSpc>
+              <a:spcBef>
+                <a:spcPct val="0"/>
+              </a:spcBef>
+              <a:buNone/>
+              <a:defRPr sz="6000" kern="1200">
+                <a:solidFill>
+                  <a:schemeClr val="tx1"/>
+                </a:solidFill>
+                <a:latin typeface="+mj-lt"/>
+                <a:ea typeface="+mj-ea"/>
+                <a:cs typeface="+mj-cs"/>
+              </a:defRPr>
+            </a:lvl1pPr>
+          </a:lstStyle>
+          <a:p>
+            <a:r>
+              <a:rPr lang="de-DE" dirty="0">
+                <a:latin typeface="Impact" panose="020B0806030902050204" pitchFamily="34" charset="0"/>
+              </a:rPr>
+              <a:t>Kabelmanagement</a:t>
+            </a:r>
+          </a:p>
+        </p:txBody>
+      </p:sp>
+      <p:cxnSp>
+        <p:nvCxnSpPr>
+          <p:cNvPr id="6" name="Gerader Verbinder 5">
+            <a:extLst>
+              <a:ext uri="{FF2B5EF4-FFF2-40B4-BE49-F238E27FC236}">
+                <a16:creationId xmlns:a16="http://schemas.microsoft.com/office/drawing/2014/main" id="{86D8AB01-C043-70CC-51BD-6A6967F3BAD5}"/>
+              </a:ext>
+            </a:extLst>
+          </p:cNvPr>
+          <p:cNvCxnSpPr/>
+          <p:nvPr/>
+        </p:nvCxnSpPr>
+        <p:spPr>
+          <a:xfrm>
+            <a:off x="1576168" y="1118956"/>
+            <a:ext cx="8714792" cy="0"/>
+          </a:xfrm>
+          <a:prstGeom prst="line">
+            <a:avLst/>
+          </a:prstGeom>
+        </p:spPr>
+        <p:style>
+          <a:lnRef idx="2">
+            <a:schemeClr val="dk1"/>
+          </a:lnRef>
+          <a:fillRef idx="0">
+            <a:schemeClr val="dk1"/>
+          </a:fillRef>
+          <a:effectRef idx="1">
+            <a:schemeClr val="dk1"/>
+          </a:effectRef>
+          <a:fontRef idx="minor">
+            <a:schemeClr val="tx1"/>
+          </a:fontRef>
+        </p:style>
+      </p:cxnSp>
+      <p:pic>
+        <p:nvPicPr>
+          <p:cNvPr id="3" name="Grafik 2">
+            <a:extLst>
+              <a:ext uri="{FF2B5EF4-FFF2-40B4-BE49-F238E27FC236}">
+                <a16:creationId xmlns:a16="http://schemas.microsoft.com/office/drawing/2014/main" id="{732B8105-3980-367C-3866-F5279BCDA6DC}"/>
+              </a:ext>
+            </a:extLst>
+          </p:cNvPr>
+          <p:cNvPicPr>
+            <a:picLocks noChangeAspect="1"/>
+          </p:cNvPicPr>
+          <p:nvPr/>
+        </p:nvPicPr>
+        <p:blipFill>
+          <a:blip r:embed="rId2">
+            <a:extLst>
+              <a:ext uri="{28A0092B-C50C-407E-A947-70E740481C1C}">
+                <a14:useLocalDpi xmlns:a14="http://schemas.microsoft.com/office/drawing/2010/main" val="0"/>
+              </a:ext>
+            </a:extLst>
+          </a:blip>
+          <a:srcRect b="7596"/>
+          <a:stretch/>
+        </p:blipFill>
+        <p:spPr>
+          <a:xfrm rot="16200000">
+            <a:off x="3818879" y="-756249"/>
+            <a:ext cx="4252582" cy="8738004"/>
+          </a:xfrm>
+          <a:prstGeom prst="rect">
+            <a:avLst/>
+          </a:prstGeom>
+        </p:spPr>
+      </p:pic>
+    </p:spTree>
+    <p:extLst>
+      <p:ext uri="{BB962C8B-B14F-4D97-AF65-F5344CB8AC3E}">
+        <p14:creationId xmlns:p14="http://schemas.microsoft.com/office/powerpoint/2010/main" val="3930126382"/>
+      </p:ext>
+    </p:extLst>
+  </p:cSld>
+  <p:clrMapOvr>
+    <a:masterClrMapping/>
+  </p:clrMapOvr>
+</p:sld>
+</file>
+
+<file path=ppt/slides/slide8.xml><?xml version="1.0" encoding="utf-8"?>
+<p:sld xmlns:a="http://schemas.openxmlformats.org/drawingml/2006/main" xmlns:r="http://schemas.openxmlformats.org/officeDocument/2006/relationships" xmlns:p="http://schemas.openxmlformats.org/presentationml/2006/main">
+  <p:cSld>
+    <p:spTree>
+      <p:nvGrpSpPr>
+        <p:cNvPr id="1" name=""/>
+        <p:cNvGrpSpPr/>
+        <p:nvPr/>
+      </p:nvGrpSpPr>
+      <p:grpSpPr>
+        <a:xfrm>
+          <a:off x="0" y="0"/>
+          <a:ext cx="0" cy="0"/>
+          <a:chOff x="0" y="0"/>
+          <a:chExt cx="0" cy="0"/>
+        </a:xfrm>
+      </p:grpSpPr>
+      <p:sp>
+        <p:nvSpPr>
+          <p:cNvPr id="4" name="Titel 1">
+            <a:extLst>
+              <a:ext uri="{FF2B5EF4-FFF2-40B4-BE49-F238E27FC236}">
+                <a16:creationId xmlns:a16="http://schemas.microsoft.com/office/drawing/2014/main" id="{BE92422F-6CFB-6703-F428-2208AF7C4F27}"/>
+              </a:ext>
+            </a:extLst>
+          </p:cNvPr>
+          <p:cNvSpPr txBox="1">
+            <a:spLocks/>
+          </p:cNvSpPr>
+          <p:nvPr/>
+        </p:nvSpPr>
+        <p:spPr>
+          <a:xfrm>
+            <a:off x="3405186" y="0"/>
+            <a:ext cx="5381625" cy="1019204"/>
+          </a:xfrm>
+          <a:prstGeom prst="rect">
+            <a:avLst/>
+          </a:prstGeom>
+        </p:spPr>
+        <p:txBody>
+          <a:bodyPr vert="horz" lIns="91440" tIns="45720" rIns="91440" bIns="45720" rtlCol="0" anchor="b">
+            <a:normAutofit/>
+          </a:bodyPr>
+          <a:lstStyle>
+            <a:lvl1pPr algn="ctr" defTabSz="914400" rtl="0" eaLnBrk="1" latinLnBrk="0" hangingPunct="1">
+              <a:lnSpc>
+                <a:spcPct val="90000"/>
+              </a:lnSpc>
+              <a:spcBef>
+                <a:spcPct val="0"/>
+              </a:spcBef>
+              <a:buNone/>
+              <a:defRPr sz="6000" kern="1200">
+                <a:solidFill>
+                  <a:schemeClr val="tx1"/>
+                </a:solidFill>
+                <a:latin typeface="+mj-lt"/>
+                <a:ea typeface="+mj-ea"/>
+                <a:cs typeface="+mj-cs"/>
+              </a:defRPr>
+            </a:lvl1pPr>
+          </a:lstStyle>
+          <a:p>
+            <a:r>
+              <a:rPr lang="de-DE" dirty="0">
+                <a:latin typeface="Impact" panose="020B0806030902050204" pitchFamily="34" charset="0"/>
+              </a:rPr>
+              <a:t>Fahrgestell</a:t>
+            </a:r>
+          </a:p>
+        </p:txBody>
+      </p:sp>
+      <p:cxnSp>
+        <p:nvCxnSpPr>
+          <p:cNvPr id="6" name="Gerader Verbinder 5">
+            <a:extLst>
+              <a:ext uri="{FF2B5EF4-FFF2-40B4-BE49-F238E27FC236}">
+                <a16:creationId xmlns:a16="http://schemas.microsoft.com/office/drawing/2014/main" id="{86D8AB01-C043-70CC-51BD-6A6967F3BAD5}"/>
+              </a:ext>
+            </a:extLst>
+          </p:cNvPr>
+          <p:cNvCxnSpPr/>
+          <p:nvPr/>
+        </p:nvCxnSpPr>
+        <p:spPr>
+          <a:xfrm>
+            <a:off x="1738604" y="1110800"/>
+            <a:ext cx="8714792" cy="0"/>
+          </a:xfrm>
+          <a:prstGeom prst="line">
+            <a:avLst/>
+          </a:prstGeom>
+        </p:spPr>
+        <p:style>
+          <a:lnRef idx="2">
+            <a:schemeClr val="dk1"/>
+          </a:lnRef>
+          <a:fillRef idx="0">
+            <a:schemeClr val="dk1"/>
+          </a:fillRef>
+          <a:effectRef idx="1">
+            <a:schemeClr val="dk1"/>
+          </a:effectRef>
+          <a:fontRef idx="minor">
+            <a:schemeClr val="tx1"/>
+          </a:fontRef>
+        </p:style>
+      </p:cxnSp>
+      <p:pic>
+        <p:nvPicPr>
+          <p:cNvPr id="8" name="Grafik 7">
+            <a:extLst>
+              <a:ext uri="{FF2B5EF4-FFF2-40B4-BE49-F238E27FC236}">
+                <a16:creationId xmlns:a16="http://schemas.microsoft.com/office/drawing/2014/main" id="{A8F6D6A0-ECC8-EB46-7E96-C6A52450381B}"/>
+              </a:ext>
+            </a:extLst>
+          </p:cNvPr>
+          <p:cNvPicPr>
+            <a:picLocks noChangeAspect="1"/>
+          </p:cNvPicPr>
+          <p:nvPr/>
+        </p:nvPicPr>
+        <p:blipFill>
+          <a:blip r:embed="rId2"/>
+          <a:stretch>
+            <a:fillRect/>
+          </a:stretch>
+        </p:blipFill>
+        <p:spPr>
+          <a:xfrm>
+            <a:off x="1738603" y="1712150"/>
+            <a:ext cx="8714792" cy="4086808"/>
+          </a:xfrm>
+          <a:prstGeom prst="rect">
+            <a:avLst/>
+          </a:prstGeom>
+        </p:spPr>
+      </p:pic>
+    </p:spTree>
+    <p:extLst>
+      <p:ext uri="{BB962C8B-B14F-4D97-AF65-F5344CB8AC3E}">
+        <p14:creationId xmlns:p14="http://schemas.microsoft.com/office/powerpoint/2010/main" val="995308410"/>
+      </p:ext>
+    </p:extLst>
+  </p:cSld>
+  <p:clrMapOvr>
+    <a:masterClrMapping/>
+  </p:clrMapOvr>
+</p:sld>
+</file>
+
+<file path=ppt/slides/slide9.xml><?xml version="1.0" encoding="utf-8"?>
+<p:sld xmlns:a="http://schemas.openxmlformats.org/drawingml/2006/main" xmlns:r="http://schemas.openxmlformats.org/officeDocument/2006/relationships" xmlns:p="http://schemas.openxmlformats.org/presentationml/2006/main">
+  <p:cSld>
+    <p:spTree>
+      <p:nvGrpSpPr>
+        <p:cNvPr id="1" name=""/>
+        <p:cNvGrpSpPr/>
+        <p:nvPr/>
+      </p:nvGrpSpPr>
+      <p:grpSpPr>
+        <a:xfrm>
+          <a:off x="0" y="0"/>
+          <a:ext cx="0" cy="0"/>
+          <a:chOff x="0" y="0"/>
+          <a:chExt cx="0" cy="0"/>
+        </a:xfrm>
+      </p:grpSpPr>
+      <p:sp>
+        <p:nvSpPr>
+          <p:cNvPr id="4" name="Titel 1">
+            <a:extLst>
+              <a:ext uri="{FF2B5EF4-FFF2-40B4-BE49-F238E27FC236}">
+                <a16:creationId xmlns:a16="http://schemas.microsoft.com/office/drawing/2014/main" id="{BE92422F-6CFB-6703-F428-2208AF7C4F27}"/>
+              </a:ext>
+            </a:extLst>
+          </p:cNvPr>
+          <p:cNvSpPr txBox="1">
+            <a:spLocks/>
+          </p:cNvSpPr>
+          <p:nvPr/>
+        </p:nvSpPr>
+        <p:spPr>
+          <a:xfrm>
+            <a:off x="3405186" y="0"/>
+            <a:ext cx="5381625" cy="1019204"/>
+          </a:xfrm>
+          <a:prstGeom prst="rect">
+            <a:avLst/>
+          </a:prstGeom>
+        </p:spPr>
+        <p:txBody>
+          <a:bodyPr vert="horz" lIns="91440" tIns="45720" rIns="91440" bIns="45720" rtlCol="0" anchor="b">
+            <a:normAutofit/>
+          </a:bodyPr>
+          <a:lstStyle>
+            <a:lvl1pPr algn="ctr" defTabSz="914400" rtl="0" eaLnBrk="1" latinLnBrk="0" hangingPunct="1">
+              <a:lnSpc>
+                <a:spcPct val="90000"/>
+              </a:lnSpc>
+              <a:spcBef>
+                <a:spcPct val="0"/>
+              </a:spcBef>
+              <a:buNone/>
+              <a:defRPr sz="6000" kern="1200">
+                <a:solidFill>
+                  <a:schemeClr val="tx1"/>
+                </a:solidFill>
+                <a:latin typeface="+mj-lt"/>
+                <a:ea typeface="+mj-ea"/>
+                <a:cs typeface="+mj-cs"/>
+              </a:defRPr>
+            </a:lvl1pPr>
+          </a:lstStyle>
+          <a:p>
+            <a:r>
+              <a:rPr lang="de-DE" dirty="0">
+                <a:latin typeface="Impact" panose="020B0806030902050204" pitchFamily="34" charset="0"/>
+              </a:rPr>
+              <a:t>Fahrgestell</a:t>
+            </a:r>
+          </a:p>
+        </p:txBody>
+      </p:sp>
+      <p:cxnSp>
+        <p:nvCxnSpPr>
+          <p:cNvPr id="6" name="Gerader Verbinder 5">
+            <a:extLst>
+              <a:ext uri="{FF2B5EF4-FFF2-40B4-BE49-F238E27FC236}">
+                <a16:creationId xmlns:a16="http://schemas.microsoft.com/office/drawing/2014/main" id="{86D8AB01-C043-70CC-51BD-6A6967F3BAD5}"/>
+              </a:ext>
+            </a:extLst>
+          </p:cNvPr>
+          <p:cNvCxnSpPr/>
+          <p:nvPr/>
+        </p:nvCxnSpPr>
+        <p:spPr>
+          <a:xfrm>
+            <a:off x="1738604" y="1110800"/>
+            <a:ext cx="8714792" cy="0"/>
+          </a:xfrm>
+          <a:prstGeom prst="line">
+            <a:avLst/>
+          </a:prstGeom>
+        </p:spPr>
+        <p:style>
+          <a:lnRef idx="2">
+            <a:schemeClr val="dk1"/>
+          </a:lnRef>
+          <a:fillRef idx="0">
+            <a:schemeClr val="dk1"/>
+          </a:fillRef>
+          <a:effectRef idx="1">
+            <a:schemeClr val="dk1"/>
+          </a:effectRef>
+          <a:fontRef idx="minor">
+            <a:schemeClr val="tx1"/>
+          </a:fontRef>
+        </p:style>
+      </p:cxnSp>
+      <p:pic>
+        <p:nvPicPr>
+          <p:cNvPr id="8" name="Grafik 7" descr="Ein Bild, das Rad, Autoteile, Reifen, Spielzeug enthält.&#10;&#10;KI-generierte Inhalte können fehlerhaft sein.">
+            <a:extLst>
+              <a:ext uri="{FF2B5EF4-FFF2-40B4-BE49-F238E27FC236}">
+                <a16:creationId xmlns:a16="http://schemas.microsoft.com/office/drawing/2014/main" id="{FCF7DE57-E8F5-57E6-6CAD-66BA149D5C67}"/>
+              </a:ext>
+            </a:extLst>
+          </p:cNvPr>
+          <p:cNvPicPr>
+            <a:picLocks noChangeAspect="1"/>
+          </p:cNvPicPr>
+          <p:nvPr/>
+        </p:nvPicPr>
+        <p:blipFill>
+          <a:blip r:embed="rId2">
+            <a:extLst>
+              <a:ext uri="{28A0092B-C50C-407E-A947-70E740481C1C}">
+                <a14:useLocalDpi xmlns:a14="http://schemas.microsoft.com/office/drawing/2010/main" val="0"/>
+              </a:ext>
+            </a:extLst>
+          </a:blip>
+          <a:stretch>
+            <a:fillRect/>
+          </a:stretch>
+        </p:blipFill>
+        <p:spPr>
+          <a:xfrm>
+            <a:off x="1738604" y="2005834"/>
+            <a:ext cx="8714792" cy="3919103"/>
+          </a:xfrm>
+          <a:prstGeom prst="rect">
+            <a:avLst/>
+          </a:prstGeom>
+        </p:spPr>
+      </p:pic>
+    </p:spTree>
+    <p:extLst>
+      <p:ext uri="{BB962C8B-B14F-4D97-AF65-F5344CB8AC3E}">
+        <p14:creationId xmlns:p14="http://schemas.microsoft.com/office/powerpoint/2010/main" val="2227412484"/>
       </p:ext>
     </p:extLst>
   </p:cSld>
